--- a/sunumlar/5-sinif-unite4-etik-guvenlik-DETAYLI.pptx
+++ b/sunumlar/5-sinif-unite4-etik-guvenlik-DETAYLI.pptx
@@ -520,6 +520,98 @@
               <a:t>Video: 'Dijital Vatandaşlık Nedir?' ile başlayın</a:t>
             </a:r>
           </a:p>
+          <a:p/>
+          <a:p>
+            <a:r>
+              <a:t>🎨 GÖRSELLEŞTİRME ÖNERİLERİ:</a:t>
+            </a:r>
+          </a:p>
+          <a:p/>
+          <a:p>
+            <a:r>
+              <a:t>📸 Görsel: Güçlü şifre örnekleri vs zayıf şifre</a:t>
+            </a:r>
+          </a:p>
+          <a:p>
+            <a:r>
+              <a:t>🎬 Video: Şifre güvenliği önemi (1-2 dk)</a:t>
+            </a:r>
+          </a:p>
+          <a:p>
+            <a:r>
+              <a:t>💡 İnfografik: Güçlü şifre oluşturma kuralları</a:t>
+            </a:r>
+          </a:p>
+          <a:p>
+            <a:r>
+              <a:t>📸 Görsel: Farklı zararlı yazılım türleri ikonları</a:t>
+            </a:r>
+          </a:p>
+          <a:p>
+            <a:r>
+              <a:t>🎬 Video: Virüslerden korunma yolları</a:t>
+            </a:r>
+          </a:p>
+          <a:p>
+            <a:r>
+              <a:t>📸 Görsel: Phishing e-posta örnekleri (gerçek vakalar)</a:t>
+            </a:r>
+          </a:p>
+          <a:p>
+            <a:r>
+              <a:t>🎬 Video: Kimlik avı saldırılarından korunma</a:t>
+            </a:r>
+          </a:p>
+          <a:p>
+            <a:r>
+              <a:t>💡 Ekran görüntüsü: Sahte web sitesi tespiti</a:t>
+            </a:r>
+          </a:p>
+          <a:p>
+            <a:r>
+              <a:t>📸 Görsel: KVKK logosu ve temel ilkeler</a:t>
+            </a:r>
+          </a:p>
+          <a:p>
+            <a:r>
+              <a:t>🎬 Video: Kişisel veri nedir? Animasyon</a:t>
+            </a:r>
+          </a:p>
+          <a:p>
+            <a:r>
+              <a:t>📸 Görsel: Koşullu yapılar akış diyagramı</a:t>
+            </a:r>
+          </a:p>
+          <a:p>
+            <a:r>
+              <a:t>🎬 Video: Koşullu ifadeler Scratch'te</a:t>
+            </a:r>
+          </a:p>
+          <a:p>
+            <a:r>
+              <a:t>📸 Görsel: Farklı grafik türleri örnekleri</a:t>
+            </a:r>
+          </a:p>
+          <a:p>
+            <a:r>
+              <a:t>🎬 Video: Veri görselleştirme önemi</a:t>
+            </a:r>
+          </a:p>
+          <a:p>
+            <a:r>
+              <a:t>💡 İnfografik: Grafik türleri ve kullanım alanları</a:t>
+            </a:r>
+          </a:p>
+          <a:p>
+            <a:r>
+              <a:t>📸 Görsel: Dijital çağ görselleri ve teknoloji örnekleri</a:t>
+            </a:r>
+          </a:p>
+          <a:p>
+            <a:r>
+              <a:t>🎬 Video: Bilişim teknolojilerinin tarihçesi</a:t>
+            </a:r>
+          </a:p>
         </p:txBody>
       </p:sp>
       <p:sp>
@@ -590,6 +682,63 @@
               <a:t>Rol yapma aktivitesi: Sosyal mühendislik senaryoları canlandırın</a:t>
             </a:r>
           </a:p>
+          <a:p/>
+          <a:p>
+            <a:r>
+              <a:t>🎨 GÖRSELLEŞTİRME ÖNERİLERİ:</a:t>
+            </a:r>
+          </a:p>
+          <a:p/>
+          <a:p>
+            <a:r>
+              <a:t>📸 Görsel: LAN ve WAN ağ topolojileri şeması</a:t>
+            </a:r>
+          </a:p>
+          <a:p>
+            <a:r>
+              <a:t>🎬 Video: İnternet nasıl çalışır? Animasyonlu anlatım</a:t>
+            </a:r>
+          </a:p>
+          <a:p>
+            <a:r>
+              <a:t>💡 İnfografik: Ev ağı kurulumu diyagramı</a:t>
+            </a:r>
+          </a:p>
+          <a:p>
+            <a:r>
+              <a:t>📸 Görsel: Güçlü şifre örnekleri vs zayıf şifre</a:t>
+            </a:r>
+          </a:p>
+          <a:p>
+            <a:r>
+              <a:t>🎬 Video: Şifre güvenliği önemi (1-2 dk)</a:t>
+            </a:r>
+          </a:p>
+          <a:p>
+            <a:r>
+              <a:t>💡 İnfografik: Güçlü şifre oluşturma kuralları</a:t>
+            </a:r>
+          </a:p>
+          <a:p>
+            <a:r>
+              <a:t>📸 Görsel: Farklı zararlı yazılım türleri ikonları</a:t>
+            </a:r>
+          </a:p>
+          <a:p>
+            <a:r>
+              <a:t>🎬 Video: Virüslerden korunma yolları</a:t>
+            </a:r>
+          </a:p>
+          <a:p>
+            <a:r>
+              <a:t>📸 Görsel: Koşullu yapılar akış diyagramı</a:t>
+            </a:r>
+          </a:p>
+          <a:p>
+            <a:r>
+              <a:t>🎬 Video: Koşullu ifadeler Scratch'te</a:t>
+            </a:r>
+          </a:p>
         </p:txBody>
       </p:sp>
       <p:sp>
@@ -660,6 +809,93 @@
               <a:t>Etkinlik: Sınıfta 'Dijital Vatandaşlık Sertifikası' tasarlayın ve imzalatın</a:t>
             </a:r>
           </a:p>
+          <a:p/>
+          <a:p>
+            <a:r>
+              <a:t>🎨 GÖRSELLEŞTİRME ÖNERİLERİ:</a:t>
+            </a:r>
+          </a:p>
+          <a:p/>
+          <a:p>
+            <a:r>
+              <a:t>📸 Görsel: LAN ve WAN ağ topolojileri şeması</a:t>
+            </a:r>
+          </a:p>
+          <a:p>
+            <a:r>
+              <a:t>🎬 Video: İnternet nasıl çalışır? Animasyonlu anlatım</a:t>
+            </a:r>
+          </a:p>
+          <a:p>
+            <a:r>
+              <a:t>💡 İnfografik: Ev ağı kurulumu diyagramı</a:t>
+            </a:r>
+          </a:p>
+          <a:p>
+            <a:r>
+              <a:t>📸 Görsel: Güçlü şifre örnekleri vs zayıf şifre</a:t>
+            </a:r>
+          </a:p>
+          <a:p>
+            <a:r>
+              <a:t>🎬 Video: Şifre güvenliği önemi (1-2 dk)</a:t>
+            </a:r>
+          </a:p>
+          <a:p>
+            <a:r>
+              <a:t>💡 İnfografik: Güçlü şifre oluşturma kuralları</a:t>
+            </a:r>
+          </a:p>
+          <a:p>
+            <a:r>
+              <a:t>📸 Görsel: Telif hakları sembolleri (©, ®, ™)</a:t>
+            </a:r>
+          </a:p>
+          <a:p>
+            <a:r>
+              <a:t>🎬 Video: Dijital etik ve telif hakları</a:t>
+            </a:r>
+          </a:p>
+          <a:p>
+            <a:r>
+              <a:t>💡 İnfografik: Lisans türleri karşılaştırması</a:t>
+            </a:r>
+          </a:p>
+          <a:p>
+            <a:r>
+              <a:t>📸 Görsel: Koşullu yapılar akış diyagramı</a:t>
+            </a:r>
+          </a:p>
+          <a:p>
+            <a:r>
+              <a:t>🎬 Video: Koşullu ifadeler Scratch'te</a:t>
+            </a:r>
+          </a:p>
+          <a:p>
+            <a:r>
+              <a:t>📸 Görsel: Farklı grafik türleri örnekleri</a:t>
+            </a:r>
+          </a:p>
+          <a:p>
+            <a:r>
+              <a:t>🎬 Video: Veri görselleştirme önemi</a:t>
+            </a:r>
+          </a:p>
+          <a:p>
+            <a:r>
+              <a:t>💡 İnfografik: Grafik türleri ve kullanım alanları</a:t>
+            </a:r>
+          </a:p>
+          <a:p>
+            <a:r>
+              <a:t>📸 Görsel: Dijital çağ görselleri ve teknoloji örnekleri</a:t>
+            </a:r>
+          </a:p>
+          <a:p>
+            <a:r>
+              <a:t>🎬 Video: Bilişim teknolojilerinin tarihçesi</a:t>
+            </a:r>
+          </a:p>
         </p:txBody>
       </p:sp>
       <p:sp>
@@ -730,6 +966,113 @@
               <a:t>Gösterim: Bir hesapta 2FA nasıl açılır?</a:t>
             </a:r>
           </a:p>
+          <a:p/>
+          <a:p>
+            <a:r>
+              <a:t>🎨 GÖRSELLEŞTİRME ÖNERİLERİ:</a:t>
+            </a:r>
+          </a:p>
+          <a:p/>
+          <a:p>
+            <a:r>
+              <a:t>📸 Görsel: CPU, RAM ve anakart fotoğrafları</a:t>
+            </a:r>
+          </a:p>
+          <a:p>
+            <a:r>
+              <a:t>🎬 Video: Bilgisayar donanımı tanıtım videosu (1-2 dk)</a:t>
+            </a:r>
+          </a:p>
+          <a:p>
+            <a:r>
+              <a:t>💡 İnfografik: Bilgisayar bileşenleri şeması</a:t>
+            </a:r>
+          </a:p>
+          <a:p>
+            <a:r>
+              <a:t>📸 Görsel: LAN ve WAN ağ topolojileri şeması</a:t>
+            </a:r>
+          </a:p>
+          <a:p>
+            <a:r>
+              <a:t>🎬 Video: İnternet nasıl çalışır? Animasyonlu anlatım</a:t>
+            </a:r>
+          </a:p>
+          <a:p>
+            <a:r>
+              <a:t>💡 İnfografik: Ev ağı kurulumu diyagramı</a:t>
+            </a:r>
+          </a:p>
+          <a:p>
+            <a:r>
+              <a:t>📸 Görsel: Güçlü şifre örnekleri vs zayıf şifre</a:t>
+            </a:r>
+          </a:p>
+          <a:p>
+            <a:r>
+              <a:t>🎬 Video: Şifre güvenliği önemi (1-2 dk)</a:t>
+            </a:r>
+          </a:p>
+          <a:p>
+            <a:r>
+              <a:t>💡 İnfografik: Güçlü şifre oluşturma kuralları</a:t>
+            </a:r>
+          </a:p>
+          <a:p>
+            <a:r>
+              <a:t>📸 Görsel: Yapay zeka uygulama örnekleri (Siri, Alexa, ChatGPT)</a:t>
+            </a:r>
+          </a:p>
+          <a:p>
+            <a:r>
+              <a:t>🎬 Video: Yapay zeka nedir? Çocuklar için anlatım</a:t>
+            </a:r>
+          </a:p>
+          <a:p>
+            <a:r>
+              <a:t>💡 İnfografik: AI kullanım alanları</a:t>
+            </a:r>
+          </a:p>
+          <a:p>
+            <a:r>
+              <a:t>📸 Görsel: Scratch arayüzü ekran görüntüsü</a:t>
+            </a:r>
+          </a:p>
+          <a:p>
+            <a:r>
+              <a:t>🎬 Video: Scratch ile basit oyun yapımı (3-5 dk)</a:t>
+            </a:r>
+          </a:p>
+          <a:p>
+            <a:r>
+              <a:t>💡 Ekran kaydı: Adım adım Scratch projesi</a:t>
+            </a:r>
+          </a:p>
+          <a:p>
+            <a:r>
+              <a:t>📸 Görsel: Akış şeması örnekleri</a:t>
+            </a:r>
+          </a:p>
+          <a:p>
+            <a:r>
+              <a:t>🎬 Video: Algoritma nedir? Günlük hayattan örnekler</a:t>
+            </a:r>
+          </a:p>
+          <a:p>
+            <a:r>
+              <a:t>💡 İnfografik: Akış şeması sembolleri</a:t>
+            </a:r>
+          </a:p>
+          <a:p>
+            <a:r>
+              <a:t>📸 Görsel: Koşullu yapılar akış diyagramı</a:t>
+            </a:r>
+          </a:p>
+          <a:p>
+            <a:r>
+              <a:t>🎬 Video: Koşullu ifadeler Scratch'te</a:t>
+            </a:r>
+          </a:p>
         </p:txBody>
       </p:sp>
       <p:sp>
@@ -800,6 +1143,98 @@
               <a:t>Quiz yapın ve öğrendiklerini pekiştirin</a:t>
             </a:r>
           </a:p>
+          <a:p/>
+          <a:p>
+            <a:r>
+              <a:t>🎨 GÖRSELLEŞTİRME ÖNERİLERİ:</a:t>
+            </a:r>
+          </a:p>
+          <a:p/>
+          <a:p>
+            <a:r>
+              <a:t>📸 Görsel: Güçlü şifre örnekleri vs zayıf şifre</a:t>
+            </a:r>
+          </a:p>
+          <a:p>
+            <a:r>
+              <a:t>🎬 Video: Şifre güvenliği önemi (1-2 dk)</a:t>
+            </a:r>
+          </a:p>
+          <a:p>
+            <a:r>
+              <a:t>💡 İnfografik: Güçlü şifre oluşturma kuralları</a:t>
+            </a:r>
+          </a:p>
+          <a:p>
+            <a:r>
+              <a:t>📸 Görsel: Farklı zararlı yazılım türleri ikonları</a:t>
+            </a:r>
+          </a:p>
+          <a:p>
+            <a:r>
+              <a:t>🎬 Video: Virüslerden korunma yolları</a:t>
+            </a:r>
+          </a:p>
+          <a:p>
+            <a:r>
+              <a:t>📸 Görsel: Phishing e-posta örnekleri (gerçek vakalar)</a:t>
+            </a:r>
+          </a:p>
+          <a:p>
+            <a:r>
+              <a:t>🎬 Video: Kimlik avı saldırılarından korunma</a:t>
+            </a:r>
+          </a:p>
+          <a:p>
+            <a:r>
+              <a:t>💡 Ekran görüntüsü: Sahte web sitesi tespiti</a:t>
+            </a:r>
+          </a:p>
+          <a:p>
+            <a:r>
+              <a:t>📸 Görsel: KVKK logosu ve temel ilkeler</a:t>
+            </a:r>
+          </a:p>
+          <a:p>
+            <a:r>
+              <a:t>🎬 Video: Kişisel veri nedir? Animasyon</a:t>
+            </a:r>
+          </a:p>
+          <a:p>
+            <a:r>
+              <a:t>📸 Görsel: Koşullu yapılar akış diyagramı</a:t>
+            </a:r>
+          </a:p>
+          <a:p>
+            <a:r>
+              <a:t>🎬 Video: Koşullu ifadeler Scratch'te</a:t>
+            </a:r>
+          </a:p>
+          <a:p>
+            <a:r>
+              <a:t>📸 Görsel: Farklı grafik türleri örnekleri</a:t>
+            </a:r>
+          </a:p>
+          <a:p>
+            <a:r>
+              <a:t>🎬 Video: Veri görselleştirme önemi</a:t>
+            </a:r>
+          </a:p>
+          <a:p>
+            <a:r>
+              <a:t>💡 İnfografik: Grafik türleri ve kullanım alanları</a:t>
+            </a:r>
+          </a:p>
+          <a:p>
+            <a:r>
+              <a:t>📸 Görsel: Dijital çağ görselleri ve teknoloji örnekleri</a:t>
+            </a:r>
+          </a:p>
+          <a:p>
+            <a:r>
+              <a:t>🎬 Video: Bilişim teknolojilerinin tarihçesi</a:t>
+            </a:r>
+          </a:p>
         </p:txBody>
       </p:sp>
       <p:sp>
@@ -870,6 +1305,260 @@
               <a:t>Tüm kaynakları önceden inceleyin</a:t>
             </a:r>
           </a:p>
+          <a:p/>
+          <a:p>
+            <a:r>
+              <a:t>🎨 GÖRSELLEŞTİRME ÖNERİLERİ:</a:t>
+            </a:r>
+          </a:p>
+          <a:p/>
+          <a:p>
+            <a:r>
+              <a:t>📸 Görsel: CPU, RAM ve anakart fotoğrafları</a:t>
+            </a:r>
+          </a:p>
+          <a:p>
+            <a:r>
+              <a:t>🎬 Video: Bilgisayar donanımı tanıtım videosu (1-2 dk)</a:t>
+            </a:r>
+          </a:p>
+          <a:p>
+            <a:r>
+              <a:t>💡 İnfografik: Bilgisayar bileşenleri şeması</a:t>
+            </a:r>
+          </a:p>
+          <a:p>
+            <a:r>
+              <a:t>📸 Görsel: LAN ve WAN ağ topolojileri şeması</a:t>
+            </a:r>
+          </a:p>
+          <a:p>
+            <a:r>
+              <a:t>🎬 Video: İnternet nasıl çalışır? Animasyonlu anlatım</a:t>
+            </a:r>
+          </a:p>
+          <a:p>
+            <a:r>
+              <a:t>💡 İnfografik: Ev ağı kurulumu diyagramı</a:t>
+            </a:r>
+          </a:p>
+          <a:p>
+            <a:r>
+              <a:t>📸 Görsel: Güçlü şifre örnekleri vs zayıf şifre</a:t>
+            </a:r>
+          </a:p>
+          <a:p>
+            <a:r>
+              <a:t>🎬 Video: Şifre güvenliği önemi (1-2 dk)</a:t>
+            </a:r>
+          </a:p>
+          <a:p>
+            <a:r>
+              <a:t>💡 İnfografik: Güçlü şifre oluşturma kuralları</a:t>
+            </a:r>
+          </a:p>
+          <a:p>
+            <a:r>
+              <a:t>📸 Görsel: Phishing e-posta örnekleri (gerçek vakalar)</a:t>
+            </a:r>
+          </a:p>
+          <a:p>
+            <a:r>
+              <a:t>🎬 Video: Kimlik avı saldırılarından korunma</a:t>
+            </a:r>
+          </a:p>
+          <a:p>
+            <a:r>
+              <a:t>💡 Ekran görüntüsü: Sahte web sitesi tespiti</a:t>
+            </a:r>
+          </a:p>
+          <a:p>
+            <a:r>
+              <a:t>📸 Görsel: Koşullu yapılar akış diyagramı</a:t>
+            </a:r>
+          </a:p>
+          <a:p>
+            <a:r>
+              <a:t>🎬 Video: Koşullu ifadeler Scratch'te</a:t>
+            </a:r>
+          </a:p>
+          <a:p>
+            <a:r>
+              <a:t>📸 Görsel: Dijital çağ görselleri ve teknoloji örnekleri</a:t>
+            </a:r>
+          </a:p>
+          <a:p>
+            <a:r>
+              <a:t>🎬 Video: Bilişim teknolojilerinin tarihçesi</a:t>
+            </a:r>
+          </a:p>
+        </p:txBody>
+      </p:sp>
+      <p:sp>
+        <p:nvSpPr>
+          <p:cNvPr id="4" name="Slide Number Placeholder 3"/>
+          <p:cNvSpPr>
+            <a:spLocks noGrp="1"/>
+          </p:cNvSpPr>
+          <p:nvPr>
+            <p:ph type="sldNum" idx="5" sz="quarter"/>
+          </p:nvPr>
+        </p:nvSpPr>
+        <p:spPr/>
+      </p:sp>
+    </p:spTree>
+  </p:cSld>
+  <p:clrMapOvr>
+    <a:masterClrMapping/>
+  </p:clrMapOvr>
+</p:notes>
+</file>
+
+<file path=ppt/notesSlides/notesSlide15.xml><?xml version="1.0" encoding="utf-8"?>
+<p:notes xmlns:a="http://schemas.openxmlformats.org/drawingml/2006/main" xmlns:p="http://schemas.openxmlformats.org/presentationml/2006/main" xmlns:r="http://schemas.openxmlformats.org/officeDocument/2006/relationships">
+  <p:cSld>
+    <p:spTree>
+      <p:nvGrpSpPr>
+        <p:cNvPr id="1" name=""/>
+        <p:cNvGrpSpPr/>
+        <p:nvPr/>
+      </p:nvGrpSpPr>
+      <p:grpSpPr>
+        <a:xfrm>
+          <a:off x="0" y="0"/>
+          <a:ext cx="0" cy="0"/>
+          <a:chOff x="0" y="0"/>
+          <a:chExt cx="0" cy="0"/>
+        </a:xfrm>
+      </p:grpSpPr>
+      <p:sp>
+        <p:nvSpPr>
+          <p:cNvPr id="2" name="Slide Image Placeholder 1"/>
+          <p:cNvSpPr>
+            <a:spLocks noGrp="1"/>
+          </p:cNvSpPr>
+          <p:nvPr>
+            <p:ph type="sldImg" idx="2"/>
+          </p:nvPr>
+        </p:nvSpPr>
+        <p:spPr/>
+      </p:sp>
+      <p:sp>
+        <p:nvSpPr>
+          <p:cNvPr id="3" name="Notes Placeholder 2"/>
+          <p:cNvSpPr>
+            <a:spLocks noGrp="1"/>
+          </p:cNvSpPr>
+          <p:nvPr>
+            <p:ph type="body" idx="3" sz="quarter"/>
+          </p:nvPr>
+        </p:nvSpPr>
+        <p:spPr/>
+        <p:txBody>
+          <a:bodyPr/>
+          <a:lstStyle/>
+          <a:p>
+            <a:r>
+              <a:t>🎨 GÖRSELLEŞTİRME ÖNERİLERİ:</a:t>
+            </a:r>
+          </a:p>
+          <a:p/>
+          <a:p>
+            <a:r>
+              <a:t>📸 Görsel: Güçlü şifre örnekleri vs zayıf şifre</a:t>
+            </a:r>
+          </a:p>
+          <a:p>
+            <a:r>
+              <a:t>🎬 Video: Şifre güvenliği önemi (1-2 dk)</a:t>
+            </a:r>
+          </a:p>
+          <a:p>
+            <a:r>
+              <a:t>💡 İnfografik: Güçlü şifre oluşturma kuralları</a:t>
+            </a:r>
+          </a:p>
+        </p:txBody>
+      </p:sp>
+      <p:sp>
+        <p:nvSpPr>
+          <p:cNvPr id="4" name="Slide Number Placeholder 3"/>
+          <p:cNvSpPr>
+            <a:spLocks noGrp="1"/>
+          </p:cNvSpPr>
+          <p:nvPr>
+            <p:ph type="sldNum" idx="5" sz="quarter"/>
+          </p:nvPr>
+        </p:nvSpPr>
+        <p:spPr/>
+      </p:sp>
+    </p:spTree>
+  </p:cSld>
+  <p:clrMapOvr>
+    <a:masterClrMapping/>
+  </p:clrMapOvr>
+</p:notes>
+</file>
+
+<file path=ppt/notesSlides/notesSlide16.xml><?xml version="1.0" encoding="utf-8"?>
+<p:notes xmlns:a="http://schemas.openxmlformats.org/drawingml/2006/main" xmlns:p="http://schemas.openxmlformats.org/presentationml/2006/main" xmlns:r="http://schemas.openxmlformats.org/officeDocument/2006/relationships">
+  <p:cSld>
+    <p:spTree>
+      <p:nvGrpSpPr>
+        <p:cNvPr id="1" name=""/>
+        <p:cNvGrpSpPr/>
+        <p:nvPr/>
+      </p:nvGrpSpPr>
+      <p:grpSpPr>
+        <a:xfrm>
+          <a:off x="0" y="0"/>
+          <a:ext cx="0" cy="0"/>
+          <a:chOff x="0" y="0"/>
+          <a:chExt cx="0" cy="0"/>
+        </a:xfrm>
+      </p:grpSpPr>
+      <p:sp>
+        <p:nvSpPr>
+          <p:cNvPr id="2" name="Slide Image Placeholder 1"/>
+          <p:cNvSpPr>
+            <a:spLocks noGrp="1"/>
+          </p:cNvSpPr>
+          <p:nvPr>
+            <p:ph type="sldImg" idx="2"/>
+          </p:nvPr>
+        </p:nvSpPr>
+        <p:spPr/>
+      </p:sp>
+      <p:sp>
+        <p:nvSpPr>
+          <p:cNvPr id="3" name="Notes Placeholder 2"/>
+          <p:cNvSpPr>
+            <a:spLocks noGrp="1"/>
+          </p:cNvSpPr>
+          <p:nvPr>
+            <p:ph type="body" idx="3" sz="quarter"/>
+          </p:nvPr>
+        </p:nvSpPr>
+        <p:spPr/>
+        <p:txBody>
+          <a:bodyPr/>
+          <a:lstStyle/>
+          <a:p>
+            <a:r>
+              <a:t>🎨 GÖRSELLEŞTİRME ÖNERİLERİ:</a:t>
+            </a:r>
+          </a:p>
+          <a:p/>
+          <a:p>
+            <a:r>
+              <a:t>📸 Görsel: Dijital çağ görselleri ve teknoloji örnekleri</a:t>
+            </a:r>
+          </a:p>
+          <a:p>
+            <a:r>
+              <a:t>🎬 Video: Bilişim teknolojilerinin tarihçesi</a:t>
+            </a:r>
+          </a:p>
         </p:txBody>
       </p:sp>
       <p:sp>
@@ -940,6 +1629,48 @@
               <a:t>Tartışma: Dijital dünyada gördüğünüz etik dışı davranışlar neler? Örnekler verin.</a:t>
             </a:r>
           </a:p>
+          <a:p/>
+          <a:p>
+            <a:r>
+              <a:t>🎨 GÖRSELLEŞTİRME ÖNERİLERİ:</a:t>
+            </a:r>
+          </a:p>
+          <a:p/>
+          <a:p>
+            <a:r>
+              <a:t>📸 Görsel: LAN ve WAN ağ topolojileri şeması</a:t>
+            </a:r>
+          </a:p>
+          <a:p>
+            <a:r>
+              <a:t>🎬 Video: İnternet nasıl çalışır? Animasyonlu anlatım</a:t>
+            </a:r>
+          </a:p>
+          <a:p>
+            <a:r>
+              <a:t>💡 İnfografik: Ev ağı kurulumu diyagramı</a:t>
+            </a:r>
+          </a:p>
+          <a:p>
+            <a:r>
+              <a:t>📸 Görsel: KVKK logosu ve temel ilkeler</a:t>
+            </a:r>
+          </a:p>
+          <a:p>
+            <a:r>
+              <a:t>🎬 Video: Kişisel veri nedir? Animasyon</a:t>
+            </a:r>
+          </a:p>
+          <a:p>
+            <a:r>
+              <a:t>📸 Görsel: Dijital çağ görselleri ve teknoloji örnekleri</a:t>
+            </a:r>
+          </a:p>
+          <a:p>
+            <a:r>
+              <a:t>🎬 Video: Bilişim teknolojilerinin tarihçesi</a:t>
+            </a:r>
+          </a:p>
         </p:txBody>
       </p:sp>
       <p:sp>
@@ -1010,6 +1741,48 @@
               <a:t>Etkinlik: Öğrencilere kendi dijital ayak izlerini düşündürün. Ne paylaştılar?</a:t>
             </a:r>
           </a:p>
+          <a:p/>
+          <a:p>
+            <a:r>
+              <a:t>🎨 GÖRSELLEŞTİRME ÖNERİLERİ:</a:t>
+            </a:r>
+          </a:p>
+          <a:p/>
+          <a:p>
+            <a:r>
+              <a:t>📸 Görsel: CPU, RAM ve anakart fotoğrafları</a:t>
+            </a:r>
+          </a:p>
+          <a:p>
+            <a:r>
+              <a:t>🎬 Video: Bilgisayar donanımı tanıtım videosu (1-2 dk)</a:t>
+            </a:r>
+          </a:p>
+          <a:p>
+            <a:r>
+              <a:t>💡 İnfografik: Bilgisayar bileşenleri şeması</a:t>
+            </a:r>
+          </a:p>
+          <a:p>
+            <a:r>
+              <a:t>📸 Görsel: Koşullu yapılar akış diyagramı</a:t>
+            </a:r>
+          </a:p>
+          <a:p>
+            <a:r>
+              <a:t>🎬 Video: Koşullu ifadeler Scratch'te</a:t>
+            </a:r>
+          </a:p>
+          <a:p>
+            <a:r>
+              <a:t>📸 Görsel: Dijital çağ görselleri ve teknoloji örnekleri</a:t>
+            </a:r>
+          </a:p>
+          <a:p>
+            <a:r>
+              <a:t>🎬 Video: Bilişim teknolojilerinin tarihçesi</a:t>
+            </a:r>
+          </a:p>
         </p:txBody>
       </p:sp>
       <p:sp>
@@ -1080,6 +1853,38 @@
               <a:t>Etkinlik: Öğrencilere gizlilik ayarlarını kontrol ettirin (ebeveyn gözetiminde)</a:t>
             </a:r>
           </a:p>
+          <a:p/>
+          <a:p>
+            <a:r>
+              <a:t>🎨 GÖRSELLEŞTİRME ÖNERİLERİ:</a:t>
+            </a:r>
+          </a:p>
+          <a:p/>
+          <a:p>
+            <a:r>
+              <a:t>📸 Görsel: LAN ve WAN ağ topolojileri şeması</a:t>
+            </a:r>
+          </a:p>
+          <a:p>
+            <a:r>
+              <a:t>🎬 Video: İnternet nasıl çalışır? Animasyonlu anlatım</a:t>
+            </a:r>
+          </a:p>
+          <a:p>
+            <a:r>
+              <a:t>💡 İnfografik: Ev ağı kurulumu diyagramı</a:t>
+            </a:r>
+          </a:p>
+          <a:p>
+            <a:r>
+              <a:t>📸 Görsel: KVKK logosu ve temel ilkeler</a:t>
+            </a:r>
+          </a:p>
+          <a:p>
+            <a:r>
+              <a:t>🎬 Video: Kişisel veri nedir? Animasyon</a:t>
+            </a:r>
+          </a:p>
         </p:txBody>
       </p:sp>
       <p:sp>
@@ -1150,6 +1955,63 @@
               <a:t>Etkinlik: Öğrencilere güçlü şifre oluşturma yarışması düzenleyin</a:t>
             </a:r>
           </a:p>
+          <a:p/>
+          <a:p>
+            <a:r>
+              <a:t>🎨 GÖRSELLEŞTİRME ÖNERİLERİ:</a:t>
+            </a:r>
+          </a:p>
+          <a:p/>
+          <a:p>
+            <a:r>
+              <a:t>📸 Görsel: LAN ve WAN ağ topolojileri şeması</a:t>
+            </a:r>
+          </a:p>
+          <a:p>
+            <a:r>
+              <a:t>🎬 Video: İnternet nasıl çalışır? Animasyonlu anlatım</a:t>
+            </a:r>
+          </a:p>
+          <a:p>
+            <a:r>
+              <a:t>💡 İnfografik: Ev ağı kurulumu diyagramı</a:t>
+            </a:r>
+          </a:p>
+          <a:p>
+            <a:r>
+              <a:t>📸 Görsel: Güçlü şifre örnekleri vs zayıf şifre</a:t>
+            </a:r>
+          </a:p>
+          <a:p>
+            <a:r>
+              <a:t>🎬 Video: Şifre güvenliği önemi (1-2 dk)</a:t>
+            </a:r>
+          </a:p>
+          <a:p>
+            <a:r>
+              <a:t>💡 İnfografik: Güçlü şifre oluşturma kuralları</a:t>
+            </a:r>
+          </a:p>
+          <a:p>
+            <a:r>
+              <a:t>📸 Görsel: Koşullu yapılar akış diyagramı</a:t>
+            </a:r>
+          </a:p>
+          <a:p>
+            <a:r>
+              <a:t>🎬 Video: Koşullu ifadeler Scratch'te</a:t>
+            </a:r>
+          </a:p>
+          <a:p>
+            <a:r>
+              <a:t>📸 Görsel: Dijital çağ görselleri ve teknoloji örnekleri</a:t>
+            </a:r>
+          </a:p>
+          <a:p>
+            <a:r>
+              <a:t>🎬 Video: Bilişim teknolojilerinin tarihçesi</a:t>
+            </a:r>
+          </a:p>
         </p:txBody>
       </p:sp>
       <p:sp>
@@ -1220,6 +2082,53 @@
               <a:t>Gösterim: Şifre yöneticisi (password manager) nedir, nasıl kullanılır?</a:t>
             </a:r>
           </a:p>
+          <a:p/>
+          <a:p>
+            <a:r>
+              <a:t>🎨 GÖRSELLEŞTİRME ÖNERİLERİ:</a:t>
+            </a:r>
+          </a:p>
+          <a:p/>
+          <a:p>
+            <a:r>
+              <a:t>📸 Görsel: LAN ve WAN ağ topolojileri şeması</a:t>
+            </a:r>
+          </a:p>
+          <a:p>
+            <a:r>
+              <a:t>🎬 Video: İnternet nasıl çalışır? Animasyonlu anlatım</a:t>
+            </a:r>
+          </a:p>
+          <a:p>
+            <a:r>
+              <a:t>💡 İnfografik: Ev ağı kurulumu diyagramı</a:t>
+            </a:r>
+          </a:p>
+          <a:p>
+            <a:r>
+              <a:t>📸 Görsel: Güçlü şifre örnekleri vs zayıf şifre</a:t>
+            </a:r>
+          </a:p>
+          <a:p>
+            <a:r>
+              <a:t>🎬 Video: Şifre güvenliği önemi (1-2 dk)</a:t>
+            </a:r>
+          </a:p>
+          <a:p>
+            <a:r>
+              <a:t>💡 İnfografik: Güçlü şifre oluşturma kuralları</a:t>
+            </a:r>
+          </a:p>
+          <a:p>
+            <a:r>
+              <a:t>📸 Görsel: Koşullu yapılar akış diyagramı</a:t>
+            </a:r>
+          </a:p>
+          <a:p>
+            <a:r>
+              <a:t>🎬 Video: Koşullu ifadeler Scratch'te</a:t>
+            </a:r>
+          </a:p>
         </p:txBody>
       </p:sp>
       <p:sp>
@@ -1290,6 +2199,78 @@
               <a:t>Video: 'Phishing Saldırısı Nasıl Anlaşılır?' - Örnek senaryolar</a:t>
             </a:r>
           </a:p>
+          <a:p/>
+          <a:p>
+            <a:r>
+              <a:t>🎨 GÖRSELLEŞTİRME ÖNERİLERİ:</a:t>
+            </a:r>
+          </a:p>
+          <a:p/>
+          <a:p>
+            <a:r>
+              <a:t>📸 Görsel: LAN ve WAN ağ topolojileri şeması</a:t>
+            </a:r>
+          </a:p>
+          <a:p>
+            <a:r>
+              <a:t>🎬 Video: İnternet nasıl çalışır? Animasyonlu anlatım</a:t>
+            </a:r>
+          </a:p>
+          <a:p>
+            <a:r>
+              <a:t>💡 İnfografik: Ev ağı kurulumu diyagramı</a:t>
+            </a:r>
+          </a:p>
+          <a:p>
+            <a:r>
+              <a:t>📸 Görsel: Güçlü şifre örnekleri vs zayıf şifre</a:t>
+            </a:r>
+          </a:p>
+          <a:p>
+            <a:r>
+              <a:t>🎬 Video: Şifre güvenliği önemi (1-2 dk)</a:t>
+            </a:r>
+          </a:p>
+          <a:p>
+            <a:r>
+              <a:t>💡 İnfografik: Güçlü şifre oluşturma kuralları</a:t>
+            </a:r>
+          </a:p>
+          <a:p>
+            <a:r>
+              <a:t>📸 Görsel: Phishing e-posta örnekleri (gerçek vakalar)</a:t>
+            </a:r>
+          </a:p>
+          <a:p>
+            <a:r>
+              <a:t>🎬 Video: Kimlik avı saldırılarından korunma</a:t>
+            </a:r>
+          </a:p>
+          <a:p>
+            <a:r>
+              <a:t>💡 Ekran görüntüsü: Sahte web sitesi tespiti</a:t>
+            </a:r>
+          </a:p>
+          <a:p>
+            <a:r>
+              <a:t>📸 Görsel: Koşullu yapılar akış diyagramı</a:t>
+            </a:r>
+          </a:p>
+          <a:p>
+            <a:r>
+              <a:t>🎬 Video: Koşullu ifadeler Scratch'te</a:t>
+            </a:r>
+          </a:p>
+          <a:p>
+            <a:r>
+              <a:t>📸 Görsel: Dijital çağ görselleri ve teknoloji örnekleri</a:t>
+            </a:r>
+          </a:p>
+          <a:p>
+            <a:r>
+              <a:t>🎬 Video: Bilişim teknolojilerinin tarihçesi</a:t>
+            </a:r>
+          </a:p>
         </p:txBody>
       </p:sp>
       <p:sp>
@@ -1360,6 +2341,93 @@
               <a:t>Görsel: Farklı zararlı yazılım türlerinin ikonları ve etkileri</a:t>
             </a:r>
           </a:p>
+          <a:p/>
+          <a:p>
+            <a:r>
+              <a:t>🎨 GÖRSELLEŞTİRME ÖNERİLERİ:</a:t>
+            </a:r>
+          </a:p>
+          <a:p/>
+          <a:p>
+            <a:r>
+              <a:t>📸 Görsel: CPU, RAM ve anakart fotoğrafları</a:t>
+            </a:r>
+          </a:p>
+          <a:p>
+            <a:r>
+              <a:t>🎬 Video: Bilgisayar donanımı tanıtım videosu (1-2 dk)</a:t>
+            </a:r>
+          </a:p>
+          <a:p>
+            <a:r>
+              <a:t>💡 İnfografik: Bilgisayar bileşenleri şeması</a:t>
+            </a:r>
+          </a:p>
+          <a:p>
+            <a:r>
+              <a:t>📸 Görsel: HDD vs SSD karşılaştırması</a:t>
+            </a:r>
+          </a:p>
+          <a:p>
+            <a:r>
+              <a:t>🎬 Video: Depolama birimleri animasyonu</a:t>
+            </a:r>
+          </a:p>
+          <a:p>
+            <a:r>
+              <a:t>💡 İnfografik: Depolama kapasiteleri karşılaştırma tablosu</a:t>
+            </a:r>
+          </a:p>
+          <a:p>
+            <a:r>
+              <a:t>📸 Görsel: LAN ve WAN ağ topolojileri şeması</a:t>
+            </a:r>
+          </a:p>
+          <a:p>
+            <a:r>
+              <a:t>🎬 Video: İnternet nasıl çalışır? Animasyonlu anlatım</a:t>
+            </a:r>
+          </a:p>
+          <a:p>
+            <a:r>
+              <a:t>💡 İnfografik: Ev ağı kurulumu diyagramı</a:t>
+            </a:r>
+          </a:p>
+          <a:p>
+            <a:r>
+              <a:t>📸 Görsel: Farklı zararlı yazılım türleri ikonları</a:t>
+            </a:r>
+          </a:p>
+          <a:p>
+            <a:r>
+              <a:t>🎬 Video: Virüslerden korunma yolları</a:t>
+            </a:r>
+          </a:p>
+          <a:p>
+            <a:r>
+              <a:t>📸 Görsel: Firewall çalışma prensibi şeması</a:t>
+            </a:r>
+          </a:p>
+          <a:p>
+            <a:r>
+              <a:t>🎬 Video: Antivirüs programı nasıl çalışır?</a:t>
+            </a:r>
+          </a:p>
+          <a:p>
+            <a:r>
+              <a:t>📸 Görsel: Scratch arayüzü ekran görüntüsü</a:t>
+            </a:r>
+          </a:p>
+          <a:p>
+            <a:r>
+              <a:t>🎬 Video: Scratch ile basit oyun yapımı (3-5 dk)</a:t>
+            </a:r>
+          </a:p>
+          <a:p>
+            <a:r>
+              <a:t>💡 Ekran kaydı: Adım adım Scratch projesi</a:t>
+            </a:r>
+          </a:p>
         </p:txBody>
       </p:sp>
       <p:sp>
@@ -1428,6 +2496,118 @@
           <a:p>
             <a:r>
               <a:t>Gösterim: Windows Defender nasıl açılır ve tarama yapılır?</a:t>
+            </a:r>
+          </a:p>
+          <a:p/>
+          <a:p>
+            <a:r>
+              <a:t>🎨 GÖRSELLEŞTİRME ÖNERİLERİ:</a:t>
+            </a:r>
+          </a:p>
+          <a:p/>
+          <a:p>
+            <a:r>
+              <a:t>📸 Görsel: CPU, RAM ve anakart fotoğrafları</a:t>
+            </a:r>
+          </a:p>
+          <a:p>
+            <a:r>
+              <a:t>🎬 Video: Bilgisayar donanımı tanıtım videosu (1-2 dk)</a:t>
+            </a:r>
+          </a:p>
+          <a:p>
+            <a:r>
+              <a:t>💡 İnfografik: Bilgisayar bileşenleri şeması</a:t>
+            </a:r>
+          </a:p>
+          <a:p>
+            <a:r>
+              <a:t>📸 Görsel: HDD vs SSD karşılaştırması</a:t>
+            </a:r>
+          </a:p>
+          <a:p>
+            <a:r>
+              <a:t>🎬 Video: Depolama birimleri animasyonu</a:t>
+            </a:r>
+          </a:p>
+          <a:p>
+            <a:r>
+              <a:t>💡 İnfografik: Depolama kapasiteleri karşılaştırma tablosu</a:t>
+            </a:r>
+          </a:p>
+          <a:p>
+            <a:r>
+              <a:t>📸 Görsel: Farklı işletim sistemleri logoları ve ekran görüntüleri</a:t>
+            </a:r>
+          </a:p>
+          <a:p>
+            <a:r>
+              <a:t>🎬 Video: İşletim sistemi nedir? Animasyonlu anlatım</a:t>
+            </a:r>
+          </a:p>
+          <a:p>
+            <a:r>
+              <a:t>📸 Görsel: LAN ve WAN ağ topolojileri şeması</a:t>
+            </a:r>
+          </a:p>
+          <a:p>
+            <a:r>
+              <a:t>🎬 Video: İnternet nasıl çalışır? Animasyonlu anlatım</a:t>
+            </a:r>
+          </a:p>
+          <a:p>
+            <a:r>
+              <a:t>💡 İnfografik: Ev ağı kurulumu diyagramı</a:t>
+            </a:r>
+          </a:p>
+          <a:p>
+            <a:r>
+              <a:t>📸 Görsel: Güçlü şifre örnekleri vs zayıf şifre</a:t>
+            </a:r>
+          </a:p>
+          <a:p>
+            <a:r>
+              <a:t>🎬 Video: Şifre güvenliği önemi (1-2 dk)</a:t>
+            </a:r>
+          </a:p>
+          <a:p>
+            <a:r>
+              <a:t>💡 İnfografik: Güçlü şifre oluşturma kuralları</a:t>
+            </a:r>
+          </a:p>
+          <a:p>
+            <a:r>
+              <a:t>📸 Görsel: Farklı zararlı yazılım türleri ikonları</a:t>
+            </a:r>
+          </a:p>
+          <a:p>
+            <a:r>
+              <a:t>🎬 Video: Virüslerden korunma yolları</a:t>
+            </a:r>
+          </a:p>
+          <a:p>
+            <a:r>
+              <a:t>📸 Görsel: Firewall çalışma prensibi şeması</a:t>
+            </a:r>
+          </a:p>
+          <a:p>
+            <a:r>
+              <a:t>🎬 Video: Antivirüs programı nasıl çalışır?</a:t>
+            </a:r>
+          </a:p>
+          <a:p>
+            <a:r>
+              <a:t>📸 Görsel: Scratch arayüzü ekran görüntüsü</a:t>
+            </a:r>
+          </a:p>
+          <a:p>
+            <a:r>
+              <a:t>🎬 Video: Scratch ile basit oyun yapımı (3-5 dk)</a:t>
+            </a:r>
+          </a:p>
+          <a:p>
+            <a:r>
+              <a:t>💡 Ekran kaydı: Adım adım Scratch projesi</a:t>
             </a:r>
           </a:p>
         </p:txBody>
@@ -4604,6 +5784,7 @@
               <a:defRPr sz="2000"/>
             </a:pPr>
             <a:r>
+              <a:rPr sz="1400"/>
               <a:t>Nasıl korunuruz?</a:t>
             </a:r>
           </a:p>
@@ -4623,6 +5804,7 @@
               <a:defRPr sz="2000" b="1"/>
             </a:pPr>
             <a:r>
+              <a:rPr sz="1400"/>
               <a:t>✅ Korunma Yöntemleri:</a:t>
             </a:r>
           </a:p>
@@ -4642,6 +5824,7 @@
               <a:defRPr sz="2000"/>
             </a:pPr>
             <a:r>
+              <a:rPr sz="1400"/>
               <a:t>🛡️ Antivirüs Programı:</a:t>
             </a:r>
           </a:p>
@@ -4653,6 +5836,7 @@
               <a:defRPr sz="1800"/>
             </a:pPr>
             <a:r>
+              <a:rPr sz="1400"/>
               <a:t>    • Windows Defender (yerleşik)</a:t>
             </a:r>
           </a:p>
@@ -4664,6 +5848,7 @@
               <a:defRPr sz="1800"/>
             </a:pPr>
             <a:r>
+              <a:rPr sz="1400"/>
               <a:t>    • Avast, AVG, Kaspersky</a:t>
             </a:r>
           </a:p>
@@ -4675,6 +5860,7 @@
               <a:defRPr sz="1800"/>
             </a:pPr>
             <a:r>
+              <a:rPr sz="1400"/>
               <a:t>    • Düzenli tara</a:t>
             </a:r>
           </a:p>
@@ -4694,6 +5880,7 @@
               <a:defRPr sz="2000"/>
             </a:pPr>
             <a:r>
+              <a:rPr sz="1400"/>
               <a:t>🔄 Güncellemeleri Yap:</a:t>
             </a:r>
           </a:p>
@@ -4705,6 +5892,7 @@
               <a:defRPr sz="1800"/>
             </a:pPr>
             <a:r>
+              <a:rPr sz="1400"/>
               <a:t>    • İşletim sistemini güncelle</a:t>
             </a:r>
           </a:p>
@@ -4716,6 +5904,7 @@
               <a:defRPr sz="1800"/>
             </a:pPr>
             <a:r>
+              <a:rPr sz="1400"/>
               <a:t>    • Programları güncelle</a:t>
             </a:r>
           </a:p>
@@ -4727,6 +5916,7 @@
               <a:defRPr sz="1800"/>
             </a:pPr>
             <a:r>
+              <a:rPr sz="1400"/>
               <a:t>    • Güvenlik yamaları önemli</a:t>
             </a:r>
           </a:p>
@@ -4746,6 +5936,7 @@
               <a:defRPr sz="2000"/>
             </a:pPr>
             <a:r>
+              <a:rPr sz="1400"/>
               <a:t>⬇️ Dikkatli İndir:</a:t>
             </a:r>
           </a:p>
@@ -4757,6 +5948,7 @@
               <a:defRPr sz="1800"/>
             </a:pPr>
             <a:r>
+              <a:rPr sz="1400"/>
               <a:t>    • Sadece güvenilir sitelerden</a:t>
             </a:r>
           </a:p>
@@ -4768,6 +5960,7 @@
               <a:defRPr sz="1800"/>
             </a:pPr>
             <a:r>
+              <a:rPr sz="1400"/>
               <a:t>    • Korsan program kullanma</a:t>
             </a:r>
           </a:p>
@@ -4779,6 +5972,7 @@
               <a:defRPr sz="1800"/>
             </a:pPr>
             <a:r>
+              <a:rPr sz="1400"/>
               <a:t>    • İndirmeden önce tara</a:t>
             </a:r>
           </a:p>
@@ -4798,6 +5992,7 @@
               <a:defRPr sz="2000"/>
             </a:pPr>
             <a:r>
+              <a:rPr sz="1400"/>
               <a:t>📎 E-posta Ekleri:</a:t>
             </a:r>
           </a:p>
@@ -4809,6 +6004,7 @@
               <a:defRPr sz="1800"/>
             </a:pPr>
             <a:r>
+              <a:rPr sz="1400"/>
               <a:t>    • Tanımadığın kişiden ek açma</a:t>
             </a:r>
           </a:p>
@@ -4820,6 +6016,7 @@
               <a:defRPr sz="1800"/>
             </a:pPr>
             <a:r>
+              <a:rPr sz="1400"/>
               <a:t>    • Şüpheli ekleri tara</a:t>
             </a:r>
           </a:p>
@@ -4839,6 +6036,7 @@
               <a:defRPr sz="2000"/>
             </a:pPr>
             <a:r>
+              <a:rPr sz="1400"/>
               <a:t>💾 Yedekleme Yap:</a:t>
             </a:r>
           </a:p>
@@ -4850,6 +6048,7 @@
               <a:defRPr sz="1800"/>
             </a:pPr>
             <a:r>
+              <a:rPr sz="1400"/>
               <a:t>    • Önemli dosyaları yedekle</a:t>
             </a:r>
           </a:p>
@@ -4861,6 +6060,7 @@
               <a:defRPr sz="1800"/>
             </a:pPr>
             <a:r>
+              <a:rPr sz="1400"/>
               <a:t>    • Cloud (bulut) veya USB'ye</a:t>
             </a:r>
           </a:p>
@@ -4880,6 +6080,7 @@
               <a:defRPr sz="2000" b="1"/>
             </a:pPr>
             <a:r>
+              <a:rPr sz="1400"/>
               <a:t>💡 En iyi koruma = Dikkatli olmak!</a:t>
             </a:r>
           </a:p>
@@ -4978,6 +6179,7 @@
               <a:defRPr sz="2000"/>
             </a:pPr>
             <a:r>
+              <a:rPr sz="1400"/>
               <a:t>Sosyal mühendislik = İnsanları kandırma sanatı</a:t>
             </a:r>
           </a:p>
@@ -4989,6 +6191,7 @@
               <a:defRPr sz="2000"/>
             </a:pPr>
             <a:r>
+              <a:rPr sz="1400"/>
               <a:t>Teknik değil, psikolojik saldırı!</a:t>
             </a:r>
           </a:p>
@@ -5008,6 +6211,7 @@
               <a:defRPr sz="2000" b="1"/>
             </a:pPr>
             <a:r>
+              <a:rPr sz="1400"/>
               <a:t>✅ Sosyal Mühendislik Örnekleri:</a:t>
             </a:r>
           </a:p>
@@ -5027,6 +6231,7 @@
               <a:defRPr sz="2000"/>
             </a:pPr>
             <a:r>
+              <a:rPr sz="1400"/>
               <a:t>📞 Telefon Dolandırıcılığı:</a:t>
             </a:r>
           </a:p>
@@ -5038,6 +6243,7 @@
               <a:defRPr sz="1800"/>
             </a:pPr>
             <a:r>
+              <a:rPr sz="1400"/>
               <a:t>    • 'Bankadan arıyorum' yalanı</a:t>
             </a:r>
           </a:p>
@@ -5049,6 +6255,7 @@
               <a:defRPr sz="1800"/>
             </a:pPr>
             <a:r>
+              <a:rPr sz="1400"/>
               <a:t>    • 'Kart bilgilerinizi söyleyin'</a:t>
             </a:r>
           </a:p>
@@ -5068,6 +6275,7 @@
               <a:defRPr sz="2000"/>
             </a:pPr>
             <a:r>
+              <a:rPr sz="1400"/>
               <a:t>🎁 Sahte Hediye:</a:t>
             </a:r>
           </a:p>
@@ -5079,6 +6287,7 @@
               <a:defRPr sz="1800"/>
             </a:pPr>
             <a:r>
+              <a:rPr sz="1400"/>
               <a:t>    • 'Bedava telefon kazandın!'</a:t>
             </a:r>
           </a:p>
@@ -5090,6 +6299,7 @@
               <a:defRPr sz="1800"/>
             </a:pPr>
             <a:r>
+              <a:rPr sz="1400"/>
               <a:t>    • 'Bu anketi doldur, ödül kazan'</a:t>
             </a:r>
           </a:p>
@@ -5109,6 +6319,7 @@
               <a:defRPr sz="2000"/>
             </a:pPr>
             <a:r>
+              <a:rPr sz="1400"/>
               <a:t>👤 Kimliğe Bürünme:</a:t>
             </a:r>
           </a:p>
@@ -5120,6 +6331,7 @@
               <a:defRPr sz="1800"/>
             </a:pPr>
             <a:r>
+              <a:rPr sz="1400"/>
               <a:t>    • Arkadaşın gibi davranma</a:t>
             </a:r>
           </a:p>
@@ -5131,6 +6343,7 @@
               <a:defRPr sz="1800"/>
             </a:pPr>
             <a:r>
+              <a:rPr sz="1400"/>
               <a:t>    • 'Ben öğretmenim, şifreni ver'</a:t>
             </a:r>
           </a:p>
@@ -5150,6 +6363,7 @@
               <a:defRPr sz="2000"/>
             </a:pPr>
             <a:r>
+              <a:rPr sz="1400"/>
               <a:t>😱 Korku:</a:t>
             </a:r>
           </a:p>
@@ -5161,6 +6375,7 @@
               <a:defRPr sz="1800"/>
             </a:pPr>
             <a:r>
+              <a:rPr sz="1400"/>
               <a:t>    • 'Hesabın kapatılacak!'</a:t>
             </a:r>
           </a:p>
@@ -5172,6 +6387,7 @@
               <a:defRPr sz="1800"/>
             </a:pPr>
             <a:r>
+              <a:rPr sz="1400"/>
               <a:t>    • 'Virüs var, hemen tıkla!'</a:t>
             </a:r>
           </a:p>
@@ -5191,6 +6407,7 @@
               <a:defRPr sz="2000" b="1"/>
             </a:pPr>
             <a:r>
+              <a:rPr sz="1400"/>
               <a:t>📌 Korunma:</a:t>
             </a:r>
           </a:p>
@@ -5202,6 +6419,7 @@
               <a:defRPr sz="1800"/>
             </a:pPr>
             <a:r>
+              <a:rPr sz="1400"/>
               <a:t>    • Acele kararlar alma</a:t>
             </a:r>
           </a:p>
@@ -5213,6 +6431,7 @@
               <a:defRPr sz="1800"/>
             </a:pPr>
             <a:r>
+              <a:rPr sz="1400"/>
               <a:t>    • Doğrula (arayıp sor)</a:t>
             </a:r>
           </a:p>
@@ -5224,6 +6443,7 @@
               <a:defRPr sz="1800"/>
             </a:pPr>
             <a:r>
+              <a:rPr sz="1400"/>
               <a:t>    • Şüphe duy</a:t>
             </a:r>
           </a:p>
@@ -5235,6 +6455,7 @@
               <a:defRPr sz="1800"/>
             </a:pPr>
             <a:r>
+              <a:rPr sz="1400"/>
               <a:t>    • 'Hayır' deme hakkın var</a:t>
             </a:r>
           </a:p>
@@ -5254,6 +6475,7 @@
               <a:defRPr sz="2000" b="1"/>
             </a:pPr>
             <a:r>
+              <a:rPr sz="1400"/>
               <a:t>💡 İyi niyetli görünen kötü niyetli olabilir!</a:t>
             </a:r>
           </a:p>
@@ -5352,6 +6574,7 @@
               <a:defRPr sz="2000"/>
             </a:pPr>
             <a:r>
+              <a:rPr sz="1400"/>
               <a:t>Dijital vatandaşlık = Dijital dünyada sorumlu davranmak</a:t>
             </a:r>
           </a:p>
@@ -5371,6 +6594,7 @@
               <a:defRPr sz="2000" b="1"/>
             </a:pPr>
             <a:r>
+              <a:rPr sz="1400"/>
               <a:t>✅ Güvenli Dijital Vatandaş:</a:t>
             </a:r>
           </a:p>
@@ -5390,6 +6614,7 @@
               <a:defRPr sz="2000"/>
             </a:pPr>
             <a:r>
+              <a:rPr sz="1400"/>
               <a:t>🤝 Saygılı:</a:t>
             </a:r>
           </a:p>
@@ -5401,6 +6626,7 @@
               <a:defRPr sz="1800"/>
             </a:pPr>
             <a:r>
+              <a:rPr sz="1400"/>
               <a:t>    • Başkalarına saygı göster</a:t>
             </a:r>
           </a:p>
@@ -5412,6 +6638,7 @@
               <a:defRPr sz="1800"/>
             </a:pPr>
             <a:r>
+              <a:rPr sz="1400"/>
               <a:t>    • Zorbalık yapma</a:t>
             </a:r>
           </a:p>
@@ -5431,6 +6658,7 @@
               <a:defRPr sz="2000"/>
             </a:pPr>
             <a:r>
+              <a:rPr sz="1400"/>
               <a:t>📝 Dürüst:</a:t>
             </a:r>
           </a:p>
@@ -5442,6 +6670,7 @@
               <a:defRPr sz="1800"/>
             </a:pPr>
             <a:r>
+              <a:rPr sz="1400"/>
               <a:t>    • Telif haklarına uy</a:t>
             </a:r>
           </a:p>
@@ -5453,6 +6682,7 @@
               <a:defRPr sz="1800"/>
             </a:pPr>
             <a:r>
+              <a:rPr sz="1400"/>
               <a:t>    • Doğru bilgi paylaş</a:t>
             </a:r>
           </a:p>
@@ -5472,6 +6702,7 @@
               <a:defRPr sz="2000"/>
             </a:pPr>
             <a:r>
+              <a:rPr sz="1400"/>
               <a:t>🔒 Güvenli:</a:t>
             </a:r>
           </a:p>
@@ -5483,6 +6714,7 @@
               <a:defRPr sz="1800"/>
             </a:pPr>
             <a:r>
+              <a:rPr sz="1400"/>
               <a:t>    • Kişisel bilgilerini koru</a:t>
             </a:r>
           </a:p>
@@ -5494,6 +6726,7 @@
               <a:defRPr sz="1800"/>
             </a:pPr>
             <a:r>
+              <a:rPr sz="1400"/>
               <a:t>    • Güçlü şifre kullan</a:t>
             </a:r>
           </a:p>
@@ -5513,6 +6746,7 @@
               <a:defRPr sz="2000"/>
             </a:pPr>
             <a:r>
+              <a:rPr sz="1400"/>
               <a:t>📚 Bilinçli:</a:t>
             </a:r>
           </a:p>
@@ -5524,6 +6758,7 @@
               <a:defRPr sz="1800"/>
             </a:pPr>
             <a:r>
+              <a:rPr sz="1400"/>
               <a:t>    • Eleştirel düşün</a:t>
             </a:r>
           </a:p>
@@ -5535,6 +6770,7 @@
               <a:defRPr sz="1800"/>
             </a:pPr>
             <a:r>
+              <a:rPr sz="1400"/>
               <a:t>    • Doğrula, araştır</a:t>
             </a:r>
           </a:p>
@@ -5554,6 +6790,7 @@
               <a:defRPr sz="2000"/>
             </a:pPr>
             <a:r>
+              <a:rPr sz="1400"/>
               <a:t>⚖️ Sorumlu:</a:t>
             </a:r>
           </a:p>
@@ -5565,6 +6802,7 @@
               <a:defRPr sz="1800"/>
             </a:pPr>
             <a:r>
+              <a:rPr sz="1400"/>
               <a:t>    • Paylaştıklarından sorumlu ol</a:t>
             </a:r>
           </a:p>
@@ -5576,6 +6814,7 @@
               <a:defRPr sz="1800"/>
             </a:pPr>
             <a:r>
+              <a:rPr sz="1400"/>
               <a:t>    • Dengeli kullan</a:t>
             </a:r>
           </a:p>
@@ -5595,6 +6834,7 @@
               <a:defRPr sz="2000" b="1"/>
             </a:pPr>
             <a:r>
+              <a:rPr sz="1400"/>
               <a:t>💡 Dijital Vatandaşlık Yemini:</a:t>
             </a:r>
           </a:p>
@@ -5606,6 +6846,7 @@
               <a:defRPr sz="2000"/>
             </a:pPr>
             <a:r>
+              <a:rPr sz="1400"/>
               <a:t>'Ben dijital dünyada saygılı, dürüst, güvenli,</a:t>
             </a:r>
           </a:p>
@@ -5617,6 +6858,7 @@
               <a:defRPr sz="2000"/>
             </a:pPr>
             <a:r>
+              <a:rPr sz="1400"/>
               <a:t>bilinçli ve sorumlu davranacağıma söz veriyorum!'</a:t>
             </a:r>
           </a:p>
@@ -5636,6 +6878,7 @@
               <a:defRPr sz="2000" b="1"/>
             </a:pPr>
             <a:r>
+              <a:rPr sz="1400"/>
               <a:t>🎯 İmzala ve uygula!</a:t>
             </a:r>
           </a:p>
@@ -5734,6 +6977,7 @@
               <a:defRPr sz="2000"/>
             </a:pPr>
             <a:r>
+              <a:rPr sz="1400"/>
               <a:t>2FA = İki kademeli güvenlik sistemi</a:t>
             </a:r>
           </a:p>
@@ -5753,6 +6997,7 @@
               <a:defRPr sz="2000" b="1"/>
             </a:pPr>
             <a:r>
+              <a:rPr sz="1400"/>
               <a:t>✅ Nasıl Çalışır?</a:t>
             </a:r>
           </a:p>
@@ -5772,6 +7017,7 @@
               <a:defRPr sz="2000"/>
             </a:pPr>
             <a:r>
+              <a:rPr sz="1400"/>
               <a:t>1️⃣ Adım 1: Şifre gir</a:t>
             </a:r>
           </a:p>
@@ -5783,6 +7029,7 @@
               <a:defRPr sz="2000"/>
             </a:pPr>
             <a:r>
+              <a:rPr sz="1400"/>
               <a:t>2️⃣ Adım 2: Kod gir (SMS veya uygulama)</a:t>
             </a:r>
           </a:p>
@@ -5802,6 +7049,7 @@
               <a:defRPr sz="2000" b="1"/>
             </a:pPr>
             <a:r>
+              <a:rPr sz="1400"/>
               <a:t>📌 Örnek:</a:t>
             </a:r>
           </a:p>
@@ -5813,6 +7061,7 @@
               <a:defRPr sz="1800"/>
             </a:pPr>
             <a:r>
+              <a:rPr sz="1400"/>
               <a:t>    • Gmail'e giriş yap</a:t>
             </a:r>
           </a:p>
@@ -5824,6 +7073,7 @@
               <a:defRPr sz="1800"/>
             </a:pPr>
             <a:r>
+              <a:rPr sz="1400"/>
               <a:t>    • Şifreni gir</a:t>
             </a:r>
           </a:p>
@@ -5835,6 +7085,7 @@
               <a:defRPr sz="1800"/>
             </a:pPr>
             <a:r>
+              <a:rPr sz="1400"/>
               <a:t>    • Telefonuna kod gelir (örn: 123456)</a:t>
             </a:r>
           </a:p>
@@ -5846,6 +7097,7 @@
               <a:defRPr sz="1800"/>
             </a:pPr>
             <a:r>
+              <a:rPr sz="1400"/>
               <a:t>    • Kodu gir → Giriş başarılı</a:t>
             </a:r>
           </a:p>
@@ -5865,6 +7117,7 @@
               <a:defRPr sz="2000" b="1"/>
             </a:pPr>
             <a:r>
+              <a:rPr sz="1400"/>
               <a:t>✅ Neden Kullanmalısın?</a:t>
             </a:r>
           </a:p>
@@ -5876,6 +7129,7 @@
               <a:defRPr sz="1800"/>
             </a:pPr>
             <a:r>
+              <a:rPr sz="1400"/>
               <a:t>    • Şifren çalınsa bile girişi engelliyor</a:t>
             </a:r>
           </a:p>
@@ -5887,6 +7141,7 @@
               <a:defRPr sz="1800"/>
             </a:pPr>
             <a:r>
+              <a:rPr sz="1400"/>
               <a:t>    • Çok daha güvenli</a:t>
             </a:r>
           </a:p>
@@ -5898,6 +7153,7 @@
               <a:defRPr sz="1800"/>
             </a:pPr>
             <a:r>
+              <a:rPr sz="1400"/>
               <a:t>    • Bildirim alırsın (biri girmeye çalışırsa)</a:t>
             </a:r>
           </a:p>
@@ -5917,6 +7173,7 @@
               <a:defRPr sz="2000" b="1"/>
             </a:pPr>
             <a:r>
+              <a:rPr sz="1400"/>
               <a:t>📌 2FA Nereden Açılır?</a:t>
             </a:r>
           </a:p>
@@ -5928,6 +7185,7 @@
               <a:defRPr sz="1800"/>
             </a:pPr>
             <a:r>
+              <a:rPr sz="1400"/>
               <a:t>    • Google hesabı → Güvenlik</a:t>
             </a:r>
           </a:p>
@@ -5939,6 +7197,7 @@
               <a:defRPr sz="1800"/>
             </a:pPr>
             <a:r>
+              <a:rPr sz="1400"/>
               <a:t>    • Instagram → Ayarlar → Güvenlik</a:t>
             </a:r>
           </a:p>
@@ -5950,6 +7209,7 @@
               <a:defRPr sz="1800"/>
             </a:pPr>
             <a:r>
+              <a:rPr sz="1400"/>
               <a:t>    • Çoğu uygulamada 'Güvenlik' bölümünde</a:t>
             </a:r>
           </a:p>
@@ -5969,6 +7229,7 @@
               <a:defRPr sz="2000" b="1"/>
             </a:pPr>
             <a:r>
+              <a:rPr sz="1400"/>
               <a:t>💡 Mutlaka 2FA'yı aç!</a:t>
             </a:r>
           </a:p>
@@ -5980,6 +7241,7 @@
               <a:defRPr sz="2000"/>
             </a:pPr>
             <a:r>
+              <a:rPr sz="1400"/>
               <a:t>Şifren = Kilit, 2FA = Alarm sistemi</a:t>
             </a:r>
           </a:p>
@@ -6078,6 +7340,7 @@
               <a:defRPr sz="2000"/>
             </a:pPr>
             <a:r>
+              <a:rPr sz="1600"/>
               <a:t>Bu ünitede neler öğrendik?</a:t>
             </a:r>
           </a:p>
@@ -6097,6 +7360,7 @@
               <a:defRPr sz="2000" b="1"/>
             </a:pPr>
             <a:r>
+              <a:rPr sz="1600"/>
               <a:t>✅ Dijital etik ve dijital ayak izi</a:t>
             </a:r>
           </a:p>
@@ -6108,6 +7372,7 @@
               <a:defRPr sz="2000" b="1"/>
             </a:pPr>
             <a:r>
+              <a:rPr sz="1600"/>
               <a:t>✅ Gizlilik ve mahremiyet</a:t>
             </a:r>
           </a:p>
@@ -6119,6 +7384,7 @@
               <a:defRPr sz="2000" b="1"/>
             </a:pPr>
             <a:r>
+              <a:rPr sz="1600"/>
               <a:t>✅ Kişisel veri güvenliği</a:t>
             </a:r>
           </a:p>
@@ -6130,6 +7396,7 @@
               <a:defRPr sz="2000" b="1"/>
             </a:pPr>
             <a:r>
+              <a:rPr sz="1600"/>
               <a:t>✅ Güçlü şifre oluşturma ve koruma</a:t>
             </a:r>
           </a:p>
@@ -6141,6 +7408,7 @@
               <a:defRPr sz="2000" b="1"/>
             </a:pPr>
             <a:r>
+              <a:rPr sz="1600"/>
               <a:t>✅ Phishing (oltalama) saldırıları</a:t>
             </a:r>
           </a:p>
@@ -6152,6 +7420,7 @@
               <a:defRPr sz="2000" b="1"/>
             </a:pPr>
             <a:r>
+              <a:rPr sz="1600"/>
               <a:t>✅ Zararlı yazılımlar ve korunma yöntemleri</a:t>
             </a:r>
           </a:p>
@@ -6163,6 +7432,7 @@
               <a:defRPr sz="2000" b="1"/>
             </a:pPr>
             <a:r>
+              <a:rPr sz="1600"/>
               <a:t>✅ Sosyal mühendislik</a:t>
             </a:r>
           </a:p>
@@ -6174,6 +7444,7 @@
               <a:defRPr sz="2000" b="1"/>
             </a:pPr>
             <a:r>
+              <a:rPr sz="1600"/>
               <a:t>✅ Güvenli dijital vatandaşlık</a:t>
             </a:r>
           </a:p>
@@ -6185,6 +7456,7 @@
               <a:defRPr sz="2000" b="1"/>
             </a:pPr>
             <a:r>
+              <a:rPr sz="1600"/>
               <a:t>✅ İki faktörlü doğrulama (2FA)</a:t>
             </a:r>
           </a:p>
@@ -6204,6 +7476,7 @@
               <a:defRPr sz="2000" b="1"/>
             </a:pPr>
             <a:r>
+              <a:rPr sz="1600"/>
               <a:t>💡 Anahtar Mesaj:</a:t>
             </a:r>
           </a:p>
@@ -6215,6 +7488,7 @@
               <a:defRPr sz="2000"/>
             </a:pPr>
             <a:r>
+              <a:rPr sz="1600"/>
               <a:t>Dijital dünyada da gerçek hayat gibi etik,</a:t>
             </a:r>
           </a:p>
@@ -6226,6 +7500,7 @@
               <a:defRPr sz="2000"/>
             </a:pPr>
             <a:r>
+              <a:rPr sz="1600"/>
               <a:t>güvenli ve sorumlu davranmalısın!</a:t>
             </a:r>
           </a:p>
@@ -6245,6 +7520,7 @@
               <a:defRPr sz="2000" b="1"/>
             </a:pPr>
             <a:r>
+              <a:rPr sz="1600"/>
               <a:t>🎯 Artık güvenli bir dijital vatandaşsın!</a:t>
             </a:r>
           </a:p>
@@ -6264,6 +7540,7 @@
               <a:defRPr sz="2000"/>
             </a:pPr>
             <a:r>
+              <a:rPr sz="1600"/>
               <a:t>🔐 Kendini ve başkalarını koru!</a:t>
             </a:r>
           </a:p>
@@ -6362,6 +7639,7 @@
               <a:defRPr sz="2000"/>
             </a:pPr>
             <a:r>
+              <a:rPr sz="1400"/>
               <a:t>🎥 İzlenecek Videolar:</a:t>
             </a:r>
           </a:p>
@@ -6373,6 +7651,7 @@
               <a:defRPr sz="1800"/>
             </a:pPr>
             <a:r>
+              <a:rPr sz="1400"/>
               <a:t>    • 'Dijital Vatandaşlık' - MEB</a:t>
             </a:r>
           </a:p>
@@ -6384,6 +7663,7 @@
               <a:defRPr sz="1800"/>
             </a:pPr>
             <a:r>
+              <a:rPr sz="1400"/>
               <a:t>    • 'Güçlü Şifre Nasıl Oluşturulur?'</a:t>
             </a:r>
           </a:p>
@@ -6395,6 +7675,7 @@
               <a:defRPr sz="1800"/>
             </a:pPr>
             <a:r>
+              <a:rPr sz="1400"/>
               <a:t>    • 'Phishing Saldırıları' - Animasyon</a:t>
             </a:r>
           </a:p>
@@ -6406,6 +7687,7 @@
               <a:defRPr sz="1800"/>
             </a:pPr>
             <a:r>
+              <a:rPr sz="1400"/>
               <a:t>    • 'Siber Güvenlik İpuçları'</a:t>
             </a:r>
           </a:p>
@@ -6425,6 +7707,7 @@
               <a:defRPr sz="2000"/>
             </a:pPr>
             <a:r>
+              <a:rPr sz="1400"/>
               <a:t>🌐 Keşfedilecek Siteler:</a:t>
             </a:r>
           </a:p>
@@ -6436,6 +7719,7 @@
               <a:defRPr sz="1800"/>
             </a:pPr>
             <a:r>
+              <a:rPr sz="1400"/>
               <a:t>    • https://guvenliweb.org.tr</a:t>
             </a:r>
           </a:p>
@@ -6447,6 +7731,7 @@
               <a:defRPr sz="1800"/>
             </a:pPr>
             <a:r>
+              <a:rPr sz="1400"/>
               <a:t>    • https://internetguvenlik.org</a:t>
             </a:r>
           </a:p>
@@ -6458,6 +7743,7 @@
               <a:defRPr sz="1800"/>
             </a:pPr>
             <a:r>
+              <a:rPr sz="1400"/>
               <a:t>    • https://guvenliinternet.meb.gov.tr</a:t>
             </a:r>
           </a:p>
@@ -6477,6 +7763,7 @@
               <a:defRPr sz="2000"/>
             </a:pPr>
             <a:r>
+              <a:rPr sz="1400"/>
               <a:t>🎮 Oyunlar:</a:t>
             </a:r>
           </a:p>
@@ -6488,6 +7775,7 @@
               <a:defRPr sz="1800"/>
             </a:pPr>
             <a:r>
+              <a:rPr sz="1400"/>
               <a:t>    • 'Siber Güvenlik Kahramanları'</a:t>
             </a:r>
           </a:p>
@@ -6499,6 +7787,7 @@
               <a:defRPr sz="1800"/>
             </a:pPr>
             <a:r>
+              <a:rPr sz="1400"/>
               <a:t>    • 'Şifre Gücü Test Oyunu'</a:t>
             </a:r>
           </a:p>
@@ -6518,6 +7807,7 @@
               <a:defRPr sz="2000"/>
             </a:pPr>
             <a:r>
+              <a:rPr sz="1400"/>
               <a:t>📖 Aktiviteler:</a:t>
             </a:r>
           </a:p>
@@ -6529,6 +7819,7 @@
               <a:defRPr sz="1800"/>
             </a:pPr>
             <a:r>
+              <a:rPr sz="1400"/>
               <a:t>    • Güçlü şifre yarışması</a:t>
             </a:r>
           </a:p>
@@ -6540,6 +7831,7 @@
               <a:defRPr sz="1800"/>
             </a:pPr>
             <a:r>
+              <a:rPr sz="1400"/>
               <a:t>    • Phishing e-postası tanıma</a:t>
             </a:r>
           </a:p>
@@ -6551,6 +7843,7 @@
               <a:defRPr sz="1800"/>
             </a:pPr>
             <a:r>
+              <a:rPr sz="1400"/>
               <a:t>    • Dijital vatandaşlık posteri hazırlama</a:t>
             </a:r>
           </a:p>
@@ -6570,6 +7863,7 @@
               <a:defRPr sz="2000" b="1"/>
             </a:pPr>
             <a:r>
+              <a:rPr sz="1400"/>
               <a:t>💡 Güvenli dijital dünyada buluşalım!</a:t>
             </a:r>
           </a:p>
@@ -7010,6 +8304,7 @@
               <a:defRPr sz="2000"/>
             </a:pPr>
             <a:r>
+              <a:rPr sz="1400"/>
               <a:t>Etik = Doğru ve yanlış davranışlar</a:t>
             </a:r>
           </a:p>
@@ -7021,6 +8316,7 @@
               <a:defRPr sz="2000"/>
             </a:pPr>
             <a:r>
+              <a:rPr sz="1400"/>
               <a:t>Dijital Etik = Dijital dünyada doğru davranışlar</a:t>
             </a:r>
           </a:p>
@@ -7040,6 +8336,7 @@
               <a:defRPr sz="2000" b="1"/>
             </a:pPr>
             <a:r>
+              <a:rPr sz="1400"/>
               <a:t>✅ Dijital Etik Kuralları:</a:t>
             </a:r>
           </a:p>
@@ -7059,6 +8356,7 @@
               <a:defRPr sz="2000"/>
             </a:pPr>
             <a:r>
+              <a:rPr sz="1400"/>
               <a:t>🤝 Saygı:</a:t>
             </a:r>
           </a:p>
@@ -7070,6 +8368,7 @@
               <a:defRPr sz="1800"/>
             </a:pPr>
             <a:r>
+              <a:rPr sz="1400"/>
               <a:t>    • Başkalarına saygılı ol</a:t>
             </a:r>
           </a:p>
@@ -7081,6 +8380,7 @@
               <a:defRPr sz="1800"/>
             </a:pPr>
             <a:r>
+              <a:rPr sz="1400"/>
               <a:t>    • Kötü yorum yapma</a:t>
             </a:r>
           </a:p>
@@ -7092,6 +8392,7 @@
               <a:defRPr sz="1800"/>
             </a:pPr>
             <a:r>
+              <a:rPr sz="1400"/>
               <a:t>    • Nefret söylemi kullanma</a:t>
             </a:r>
           </a:p>
@@ -7111,6 +8412,7 @@
               <a:defRPr sz="2000"/>
             </a:pPr>
             <a:r>
+              <a:rPr sz="1400"/>
               <a:t>📝 Dürüstlük:</a:t>
             </a:r>
           </a:p>
@@ -7122,6 +8424,7 @@
               <a:defRPr sz="1800"/>
             </a:pPr>
             <a:r>
+              <a:rPr sz="1400"/>
               <a:t>    • Yalan bilgi paylaşma</a:t>
             </a:r>
           </a:p>
@@ -7133,6 +8436,7 @@
               <a:defRPr sz="1800"/>
             </a:pPr>
             <a:r>
+              <a:rPr sz="1400"/>
               <a:t>    • Başkasının eserini çalma</a:t>
             </a:r>
           </a:p>
@@ -7144,6 +8448,7 @@
               <a:defRPr sz="1800"/>
             </a:pPr>
             <a:r>
+              <a:rPr sz="1400"/>
               <a:t>    • Kaynak göster</a:t>
             </a:r>
           </a:p>
@@ -7163,6 +8468,7 @@
               <a:defRPr sz="2000"/>
             </a:pPr>
             <a:r>
+              <a:rPr sz="1400"/>
               <a:t>🔒 Gizlilik:</a:t>
             </a:r>
           </a:p>
@@ -7174,6 +8480,7 @@
               <a:defRPr sz="1800"/>
             </a:pPr>
             <a:r>
+              <a:rPr sz="1400"/>
               <a:t>    • Başkasının özel bilgilerini paylaşma</a:t>
             </a:r>
           </a:p>
@@ -7185,6 +8492,7 @@
               <a:defRPr sz="1800"/>
             </a:pPr>
             <a:r>
+              <a:rPr sz="1400"/>
               <a:t>    • İzinsiz fotoğraf yayınlama</a:t>
             </a:r>
           </a:p>
@@ -7204,6 +8512,7 @@
               <a:defRPr sz="2000"/>
             </a:pPr>
             <a:r>
+              <a:rPr sz="1400"/>
               <a:t>⚖️ Sorumluluk:</a:t>
             </a:r>
           </a:p>
@@ -7215,6 +8524,7 @@
               <a:defRPr sz="1800"/>
             </a:pPr>
             <a:r>
+              <a:rPr sz="1400"/>
               <a:t>    • Paylaştıklarından sorumlusun</a:t>
             </a:r>
           </a:p>
@@ -7226,6 +8536,7 @@
               <a:defRPr sz="1800"/>
             </a:pPr>
             <a:r>
+              <a:rPr sz="1400"/>
               <a:t>    • 'İnternet'te dedim' mazeret değil!</a:t>
             </a:r>
           </a:p>
@@ -7245,6 +8556,7 @@
               <a:defRPr sz="2000" b="1"/>
             </a:pPr>
             <a:r>
+              <a:rPr sz="1400"/>
               <a:t>💡 Gerçek hayatta nasıl davranıyorsan, dijital dünyada da öyle davran!</a:t>
             </a:r>
           </a:p>
@@ -7343,6 +8655,7 @@
               <a:defRPr sz="2000"/>
             </a:pPr>
             <a:r>
+              <a:rPr sz="1400"/>
               <a:t>Dijital ayak izi = İnternet'te bıraktığın izler</a:t>
             </a:r>
           </a:p>
@@ -7362,6 +8675,7 @@
               <a:defRPr sz="2000" b="1"/>
             </a:pPr>
             <a:r>
+              <a:rPr sz="1400"/>
               <a:t>✅ Dijital Ayak İzi Örnekleri:</a:t>
             </a:r>
           </a:p>
@@ -7373,6 +8687,7 @@
               <a:defRPr sz="1800"/>
             </a:pPr>
             <a:r>
+              <a:rPr sz="1400"/>
               <a:t>    • Sosyal medya paylaşımları</a:t>
             </a:r>
           </a:p>
@@ -7384,6 +8699,7 @@
               <a:defRPr sz="1800"/>
             </a:pPr>
             <a:r>
+              <a:rPr sz="1400"/>
               <a:t>    • Yorum yaptığın siteler</a:t>
             </a:r>
           </a:p>
@@ -7395,6 +8711,7 @@
               <a:defRPr sz="1800"/>
             </a:pPr>
             <a:r>
+              <a:rPr sz="1400"/>
               <a:t>    • Beğendiğin videolar</a:t>
             </a:r>
           </a:p>
@@ -7406,6 +8723,7 @@
               <a:defRPr sz="1800"/>
             </a:pPr>
             <a:r>
+              <a:rPr sz="1400"/>
               <a:t>    • Arama geçmişin</a:t>
             </a:r>
           </a:p>
@@ -7417,6 +8735,7 @@
               <a:defRPr sz="1800"/>
             </a:pPr>
             <a:r>
+              <a:rPr sz="1400"/>
               <a:t>    • Online oyunlardaki mesajların</a:t>
             </a:r>
           </a:p>
@@ -7436,6 +8755,7 @@
               <a:defRPr sz="2000" b="1"/>
             </a:pPr>
             <a:r>
+              <a:rPr sz="1400"/>
               <a:t>📌 İki Tür Dijital Ayak İzi:</a:t>
             </a:r>
           </a:p>
@@ -7455,6 +8775,7 @@
               <a:defRPr sz="2000"/>
             </a:pPr>
             <a:r>
+              <a:rPr sz="1400"/>
               <a:t>1️⃣ Aktif (Bilinçli):</a:t>
             </a:r>
           </a:p>
@@ -7466,6 +8787,7 @@
               <a:defRPr sz="1800"/>
             </a:pPr>
             <a:r>
+              <a:rPr sz="1400"/>
               <a:t>    • Sen paylaşıyorsun (fotoğraf, yorum)</a:t>
             </a:r>
           </a:p>
@@ -7485,6 +8807,7 @@
               <a:defRPr sz="2000"/>
             </a:pPr>
             <a:r>
+              <a:rPr sz="1400"/>
               <a:t>2️⃣ Pasif (Otomatik):</a:t>
             </a:r>
           </a:p>
@@ -7496,6 +8819,7 @@
               <a:defRPr sz="1800"/>
             </a:pPr>
             <a:r>
+              <a:rPr sz="1400"/>
               <a:t>    • Web siteleri kaydediyor (çerezler, IP)</a:t>
             </a:r>
           </a:p>
@@ -7515,6 +8839,7 @@
               <a:defRPr sz="2000"/>
             </a:pPr>
             <a:r>
+              <a:rPr sz="1400"/>
               <a:t>⚠️ Tehlikeler:</a:t>
             </a:r>
           </a:p>
@@ -7526,6 +8851,7 @@
               <a:defRPr sz="1800"/>
             </a:pPr>
             <a:r>
+              <a:rPr sz="1400"/>
               <a:t>    • Dijital ayak izin silinmez!</a:t>
             </a:r>
           </a:p>
@@ -7537,6 +8863,7 @@
               <a:defRPr sz="1800"/>
             </a:pPr>
             <a:r>
+              <a:rPr sz="1400"/>
               <a:t>    • Gelecekte sana zarar verebilir</a:t>
             </a:r>
           </a:p>
@@ -7548,6 +8875,7 @@
               <a:defRPr sz="1800"/>
             </a:pPr>
             <a:r>
+              <a:rPr sz="1400"/>
               <a:t>    • Üniversite, iş başvurusu yapınca bakabilirler</a:t>
             </a:r>
           </a:p>
@@ -7567,6 +8895,7 @@
               <a:defRPr sz="2000" b="1"/>
             </a:pPr>
             <a:r>
+              <a:rPr sz="1400"/>
               <a:t>💡 Paylaşmadan önce düşün: 'Bunu 10 yıl sonra görmek ister miyim?'</a:t>
             </a:r>
           </a:p>
@@ -7665,6 +8994,7 @@
               <a:defRPr sz="2000"/>
             </a:pPr>
             <a:r>
+              <a:rPr sz="1400"/>
               <a:t>Gizlilik = Kişisel bilgilerini koruma hakkın</a:t>
             </a:r>
           </a:p>
@@ -7684,6 +9014,7 @@
               <a:defRPr sz="2000" b="1"/>
             </a:pPr>
             <a:r>
+              <a:rPr sz="1400"/>
               <a:t>✅ Kişisel Bilgiler (ASLA Paylaşma!):</a:t>
             </a:r>
           </a:p>
@@ -7695,6 +9026,7 @@
               <a:defRPr sz="1800"/>
             </a:pPr>
             <a:r>
+              <a:rPr sz="1400"/>
               <a:t>    • Tam adın, soyadın</a:t>
             </a:r>
           </a:p>
@@ -7706,6 +9038,7 @@
               <a:defRPr sz="1800"/>
             </a:pPr>
             <a:r>
+              <a:rPr sz="1400"/>
               <a:t>    • Doğum tarihin</a:t>
             </a:r>
           </a:p>
@@ -7717,6 +9050,7 @@
               <a:defRPr sz="1800"/>
             </a:pPr>
             <a:r>
+              <a:rPr sz="1400"/>
               <a:t>    • Adresin</a:t>
             </a:r>
           </a:p>
@@ -7728,6 +9062,7 @@
               <a:defRPr sz="1800"/>
             </a:pPr>
             <a:r>
+              <a:rPr sz="1400"/>
               <a:t>    • Telefon numaran</a:t>
             </a:r>
           </a:p>
@@ -7739,6 +9074,7 @@
               <a:defRPr sz="1800"/>
             </a:pPr>
             <a:r>
+              <a:rPr sz="1400"/>
               <a:t>    • Okul adın</a:t>
             </a:r>
           </a:p>
@@ -7750,6 +9086,7 @@
               <a:defRPr sz="1800"/>
             </a:pPr>
             <a:r>
+              <a:rPr sz="1400"/>
               <a:t>    • Fotoğraflarında konum bilgisi</a:t>
             </a:r>
           </a:p>
@@ -7769,6 +9106,7 @@
               <a:defRPr sz="2000" b="1"/>
             </a:pPr>
             <a:r>
+              <a:rPr sz="1400"/>
               <a:t>📌 Gizlilik Ayarları:</a:t>
             </a:r>
           </a:p>
@@ -7788,6 +9126,7 @@
               <a:defRPr sz="2000"/>
             </a:pPr>
             <a:r>
+              <a:rPr sz="1400"/>
               <a:t>🔒 Sosyal Medya:</a:t>
             </a:r>
           </a:p>
@@ -7799,6 +9138,7 @@
               <a:defRPr sz="1800"/>
             </a:pPr>
             <a:r>
+              <a:rPr sz="1400"/>
               <a:t>    • Hesabını 'gizli' yap</a:t>
             </a:r>
           </a:p>
@@ -7810,6 +9150,7 @@
               <a:defRPr sz="1800"/>
             </a:pPr>
             <a:r>
+              <a:rPr sz="1400"/>
               <a:t>    • Sadece arkadaşların görsün</a:t>
             </a:r>
           </a:p>
@@ -7821,6 +9162,7 @@
               <a:defRPr sz="1800"/>
             </a:pPr>
             <a:r>
+              <a:rPr sz="1400"/>
               <a:t>    • Konum paylaşma</a:t>
             </a:r>
           </a:p>
@@ -7840,6 +9182,7 @@
               <a:defRPr sz="2000"/>
             </a:pPr>
             <a:r>
+              <a:rPr sz="1400"/>
               <a:t>📱 Telefon/Tablet:</a:t>
             </a:r>
           </a:p>
@@ -7851,6 +9194,7 @@
               <a:defRPr sz="1800"/>
             </a:pPr>
             <a:r>
+              <a:rPr sz="1400"/>
               <a:t>    • Kilit ekranı koy</a:t>
             </a:r>
           </a:p>
@@ -7862,6 +9206,7 @@
               <a:defRPr sz="1800"/>
             </a:pPr>
             <a:r>
+              <a:rPr sz="1400"/>
               <a:t>    • Parmak izi/yüz tanıma kullan</a:t>
             </a:r>
           </a:p>
@@ -7881,6 +9226,7 @@
               <a:defRPr sz="2000" b="1"/>
             </a:pPr>
             <a:r>
+              <a:rPr sz="1400"/>
               <a:t>💡 Unutma:</a:t>
             </a:r>
           </a:p>
@@ -7892,6 +9238,7 @@
               <a:defRPr sz="1800"/>
             </a:pPr>
             <a:r>
+              <a:rPr sz="1400"/>
               <a:t>    • Kişisel bilgiler sana özeldir</a:t>
             </a:r>
           </a:p>
@@ -7903,6 +9250,7 @@
               <a:defRPr sz="1800"/>
             </a:pPr>
             <a:r>
+              <a:rPr sz="1400"/>
               <a:t>    • Başkaları sormaya hakkı yoktur</a:t>
             </a:r>
           </a:p>
@@ -7914,6 +9262,7 @@
               <a:defRPr sz="1800"/>
             </a:pPr>
             <a:r>
+              <a:rPr sz="1400"/>
               <a:t>    • 'Bilmiyorum' deme hakkın var</a:t>
             </a:r>
           </a:p>
@@ -8012,6 +9361,7 @@
               <a:defRPr sz="2000"/>
             </a:pPr>
             <a:r>
+              <a:rPr sz="1600"/>
               <a:t>Şifre = Dijital kapının anahtarı</a:t>
             </a:r>
           </a:p>
@@ -8031,6 +9381,7 @@
               <a:defRPr sz="2000" b="1"/>
             </a:pPr>
             <a:r>
+              <a:rPr sz="1600"/>
               <a:t>✅ Güçlü Şifre Özellikleri:</a:t>
             </a:r>
           </a:p>
@@ -8050,6 +9401,7 @@
               <a:defRPr sz="2000"/>
             </a:pPr>
             <a:r>
+              <a:rPr sz="1600"/>
               <a:t>📏 Uzunluk:</a:t>
             </a:r>
           </a:p>
@@ -8061,6 +9413,7 @@
               <a:defRPr sz="1800"/>
             </a:pPr>
             <a:r>
+              <a:rPr sz="1600"/>
               <a:t>    • En az 8 karakter (12+ daha iyi)</a:t>
             </a:r>
           </a:p>
@@ -8080,6 +9433,7 @@
               <a:defRPr sz="2000"/>
             </a:pPr>
             <a:r>
+              <a:rPr sz="1600"/>
               <a:t>🔤 Çeşitlilik:</a:t>
             </a:r>
           </a:p>
@@ -8091,6 +9445,7 @@
               <a:defRPr sz="1800"/>
             </a:pPr>
             <a:r>
+              <a:rPr sz="1600"/>
               <a:t>    • Büyük harf: A, B, C</a:t>
             </a:r>
           </a:p>
@@ -8102,6 +9457,7 @@
               <a:defRPr sz="1800"/>
             </a:pPr>
             <a:r>
+              <a:rPr sz="1600"/>
               <a:t>    • Küçük harf: a, b, c</a:t>
             </a:r>
           </a:p>
@@ -8113,6 +9469,7 @@
               <a:defRPr sz="1800"/>
             </a:pPr>
             <a:r>
+              <a:rPr sz="1600"/>
               <a:t>    • Rakam: 1, 2, 3</a:t>
             </a:r>
           </a:p>
@@ -8124,6 +9481,7 @@
               <a:defRPr sz="1800"/>
             </a:pPr>
             <a:r>
+              <a:rPr sz="1600"/>
               <a:t>    • Sembol: !, @, #, $, %</a:t>
             </a:r>
           </a:p>
@@ -8143,6 +9501,7 @@
               <a:defRPr sz="2000" b="1"/>
             </a:pPr>
             <a:r>
+              <a:rPr sz="1600"/>
               <a:t>📌 Örnek Güçlü Şifre:</a:t>
             </a:r>
           </a:p>
@@ -8154,6 +9513,7 @@
               <a:defRPr sz="1800"/>
             </a:pPr>
             <a:r>
+              <a:rPr sz="1600"/>
               <a:t>    • K1rm1z1Elma!2024</a:t>
             </a:r>
           </a:p>
@@ -8165,6 +9525,7 @@
               <a:defRPr sz="1800"/>
             </a:pPr>
             <a:r>
+              <a:rPr sz="1600"/>
               <a:t>    • Ben5Y@s1ndayim</a:t>
             </a:r>
           </a:p>
@@ -8184,6 +9545,7 @@
               <a:defRPr sz="2000"/>
             </a:pPr>
             <a:r>
+              <a:rPr sz="1600"/>
               <a:t>❌ Zayıf Şifre Örnekleri (KULLANMA!):</a:t>
             </a:r>
           </a:p>
@@ -8195,6 +9557,7 @@
               <a:defRPr sz="1800"/>
             </a:pPr>
             <a:r>
+              <a:rPr sz="1600"/>
               <a:t>    • 12345678</a:t>
             </a:r>
           </a:p>
@@ -8206,6 +9569,7 @@
               <a:defRPr sz="1800"/>
             </a:pPr>
             <a:r>
+              <a:rPr sz="1600"/>
               <a:t>    • adınsoyadın</a:t>
             </a:r>
           </a:p>
@@ -8217,6 +9581,7 @@
               <a:defRPr sz="1800"/>
             </a:pPr>
             <a:r>
+              <a:rPr sz="1600"/>
               <a:t>    • dogumtarihin</a:t>
             </a:r>
           </a:p>
@@ -8228,6 +9593,7 @@
               <a:defRPr sz="1800"/>
             </a:pPr>
             <a:r>
+              <a:rPr sz="1600"/>
               <a:t>    • sifre123</a:t>
             </a:r>
           </a:p>
@@ -8247,6 +9613,7 @@
               <a:defRPr sz="2000" b="1"/>
             </a:pPr>
             <a:r>
+              <a:rPr sz="1600"/>
               <a:t>💡 Şifre Oluşturma Yöntemi:</a:t>
             </a:r>
           </a:p>
@@ -8258,6 +9625,7 @@
               <a:defRPr sz="2000"/>
             </a:pPr>
             <a:r>
+              <a:rPr sz="1600"/>
               <a:t>Cümle yap → İlk harflerini al → Rakam/sembol ekle</a:t>
             </a:r>
           </a:p>
@@ -8269,6 +9637,7 @@
               <a:defRPr sz="2000"/>
             </a:pPr>
             <a:r>
+              <a:rPr sz="1600"/>
               <a:t>'Benim 2 tane kedim var' → B2tkv! → B2tkv!2024</a:t>
             </a:r>
           </a:p>
@@ -8367,6 +9736,7 @@
               <a:defRPr sz="2000"/>
             </a:pPr>
             <a:r>
+              <a:rPr sz="1400"/>
               <a:t>Güçlü şifre oluşturdun, şimdi onu koru!</a:t>
             </a:r>
           </a:p>
@@ -8386,6 +9756,7 @@
               <a:defRPr sz="2000" b="1"/>
             </a:pPr>
             <a:r>
+              <a:rPr sz="1400"/>
               <a:t>✅ Şifre Güvenliği Kuralları:</a:t>
             </a:r>
           </a:p>
@@ -8405,6 +9776,7 @@
               <a:defRPr sz="2000"/>
             </a:pPr>
             <a:r>
+              <a:rPr sz="1400"/>
               <a:t>❌ ASLA Paylaşma:</a:t>
             </a:r>
           </a:p>
@@ -8416,6 +9788,7 @@
               <a:defRPr sz="1800"/>
             </a:pPr>
             <a:r>
+              <a:rPr sz="1400"/>
               <a:t>    • Arkadaşınla bile paylaşma</a:t>
             </a:r>
           </a:p>
@@ -8427,6 +9800,7 @@
               <a:defRPr sz="1800"/>
             </a:pPr>
             <a:r>
+              <a:rPr sz="1400"/>
               <a:t>    • Öğretmen asla şifreni sormaz</a:t>
             </a:r>
           </a:p>
@@ -8438,6 +9812,7 @@
               <a:defRPr sz="1800"/>
             </a:pPr>
             <a:r>
+              <a:rPr sz="1400"/>
               <a:t>    • Telefonda/mesajda şifre gönderme</a:t>
             </a:r>
           </a:p>
@@ -8457,6 +9832,7 @@
               <a:defRPr sz="2000"/>
             </a:pPr>
             <a:r>
+              <a:rPr sz="1400"/>
               <a:t>🔄 Farklı Şifreler Kullan:</a:t>
             </a:r>
           </a:p>
@@ -8468,6 +9844,7 @@
               <a:defRPr sz="1800"/>
             </a:pPr>
             <a:r>
+              <a:rPr sz="1400"/>
               <a:t>    • Her hesap için farklı şifre</a:t>
             </a:r>
           </a:p>
@@ -8479,6 +9856,7 @@
               <a:defRPr sz="1800"/>
             </a:pPr>
             <a:r>
+              <a:rPr sz="1400"/>
               <a:t>    • Bir şifre çalınırsa diğerleri güvende</a:t>
             </a:r>
           </a:p>
@@ -8498,6 +9876,7 @@
               <a:defRPr sz="2000"/>
             </a:pPr>
             <a:r>
+              <a:rPr sz="1400"/>
               <a:t>📝 Şifreyi Kaydet:</a:t>
             </a:r>
           </a:p>
@@ -8509,6 +9888,7 @@
               <a:defRPr sz="1800"/>
             </a:pPr>
             <a:r>
+              <a:rPr sz="1400"/>
               <a:t>    • Unutacaksan güvenli yere yaz</a:t>
             </a:r>
           </a:p>
@@ -8520,6 +9900,7 @@
               <a:defRPr sz="1800"/>
             </a:pPr>
             <a:r>
+              <a:rPr sz="1400"/>
               <a:t>    • Ebeveynin bilsin</a:t>
             </a:r>
           </a:p>
@@ -8539,6 +9920,7 @@
               <a:defRPr sz="2000"/>
             </a:pPr>
             <a:r>
+              <a:rPr sz="1400"/>
               <a:t>🔄 Düzenli Değiştir:</a:t>
             </a:r>
           </a:p>
@@ -8550,6 +9932,7 @@
               <a:defRPr sz="1800"/>
             </a:pPr>
             <a:r>
+              <a:rPr sz="1400"/>
               <a:t>    • 3-6 ayda bir değiştir</a:t>
             </a:r>
           </a:p>
@@ -8569,6 +9952,7 @@
               <a:defRPr sz="2000"/>
             </a:pPr>
             <a:r>
+              <a:rPr sz="1400"/>
               <a:t>⚠️ Şüphe Duyarsan:</a:t>
             </a:r>
           </a:p>
@@ -8580,6 +9964,7 @@
               <a:defRPr sz="1800"/>
             </a:pPr>
             <a:r>
+              <a:rPr sz="1400"/>
               <a:t>    • Hemen değiştir</a:t>
             </a:r>
           </a:p>
@@ -8591,6 +9976,7 @@
               <a:defRPr sz="1800"/>
             </a:pPr>
             <a:r>
+              <a:rPr sz="1400"/>
               <a:t>    • Hesabını kontrol et</a:t>
             </a:r>
           </a:p>
@@ -8610,6 +9996,7 @@
               <a:defRPr sz="2000" b="1"/>
             </a:pPr>
             <a:r>
+              <a:rPr sz="1400"/>
               <a:t>💡 Şifre = Ev anahtarın</a:t>
             </a:r>
           </a:p>
@@ -8621,6 +10008,7 @@
               <a:defRPr sz="2000"/>
             </a:pPr>
             <a:r>
+              <a:rPr sz="1400"/>
               <a:t>Kimseye vermezsin, değil mi?</a:t>
             </a:r>
           </a:p>
@@ -8719,6 +10107,7 @@
               <a:defRPr sz="2000"/>
             </a:pPr>
             <a:r>
+              <a:rPr sz="1400"/>
               <a:t>Phishing = Dijital dolandırıcılık</a:t>
             </a:r>
           </a:p>
@@ -8730,6 +10119,7 @@
               <a:defRPr sz="2000"/>
             </a:pPr>
             <a:r>
+              <a:rPr sz="1400"/>
               <a:t>Seni kandırıp bilgilerini çalmaya çalışırlar</a:t>
             </a:r>
           </a:p>
@@ -8749,6 +10139,7 @@
               <a:defRPr sz="2000" b="1"/>
             </a:pPr>
             <a:r>
+              <a:rPr sz="1400"/>
               <a:t>✅ Phishing Türleri:</a:t>
             </a:r>
           </a:p>
@@ -8768,6 +10159,7 @@
               <a:defRPr sz="2000"/>
             </a:pPr>
             <a:r>
+              <a:rPr sz="1400"/>
               <a:t>📧 E-posta Phishing:</a:t>
             </a:r>
           </a:p>
@@ -8779,6 +10171,7 @@
               <a:defRPr sz="1800"/>
             </a:pPr>
             <a:r>
+              <a:rPr sz="1400"/>
               <a:t>    • 'Hesabın kapatılacak, şifreni gir!' mesajları</a:t>
             </a:r>
           </a:p>
@@ -8790,6 +10183,7 @@
               <a:defRPr sz="1800"/>
             </a:pPr>
             <a:r>
+              <a:rPr sz="1400"/>
               <a:t>    • 'Hediye kazandın!' yalanları</a:t>
             </a:r>
           </a:p>
@@ -8809,6 +10203,7 @@
               <a:defRPr sz="2000"/>
             </a:pPr>
             <a:r>
+              <a:rPr sz="1400"/>
               <a:t>💬 SMS Phishing (Smishing):</a:t>
             </a:r>
           </a:p>
@@ -8820,6 +10215,7 @@
               <a:defRPr sz="1800"/>
             </a:pPr>
             <a:r>
+              <a:rPr sz="1400"/>
               <a:t>    • 'Banka hesabın kilitlendi' SMS'i</a:t>
             </a:r>
           </a:p>
@@ -8839,6 +10235,7 @@
               <a:defRPr sz="2000"/>
             </a:pPr>
             <a:r>
+              <a:rPr sz="1400"/>
               <a:t>📱 Sosyal Medya:</a:t>
             </a:r>
           </a:p>
@@ -8850,6 +10247,7 @@
               <a:defRPr sz="1800"/>
             </a:pPr>
             <a:r>
+              <a:rPr sz="1400"/>
               <a:t>    • Sahte hesaplar</a:t>
             </a:r>
           </a:p>
@@ -8861,6 +10259,7 @@
               <a:defRPr sz="1800"/>
             </a:pPr>
             <a:r>
+              <a:rPr sz="1400"/>
               <a:t>    • 'Arkadaşından mesaj' gibi görünme</a:t>
             </a:r>
           </a:p>
@@ -8880,6 +10279,7 @@
               <a:defRPr sz="2000" b="1"/>
             </a:pPr>
             <a:r>
+              <a:rPr sz="1400"/>
               <a:t>📌 Phishing Nasıl Anlaşılır?</a:t>
             </a:r>
           </a:p>
@@ -8891,6 +10291,7 @@
               <a:defRPr sz="1800"/>
             </a:pPr>
             <a:r>
+              <a:rPr sz="1400"/>
               <a:t>    • Acele ettiriyor ('Hemen tıkla!')</a:t>
             </a:r>
           </a:p>
@@ -8902,6 +10303,7 @@
               <a:defRPr sz="1800"/>
             </a:pPr>
             <a:r>
+              <a:rPr sz="1400"/>
               <a:t>    • Kişisel bilgi istiyor</a:t>
             </a:r>
           </a:p>
@@ -8913,6 +10315,7 @@
               <a:defRPr sz="1800"/>
             </a:pPr>
             <a:r>
+              <a:rPr sz="1400"/>
               <a:t>    • E-posta adresi garip (goog1e.com gibi)</a:t>
             </a:r>
           </a:p>
@@ -8924,6 +10327,7 @@
               <a:defRPr sz="1800"/>
             </a:pPr>
             <a:r>
+              <a:rPr sz="1400"/>
               <a:t>    • Yazım hataları çok</a:t>
             </a:r>
           </a:p>
@@ -8935,6 +10339,7 @@
               <a:defRPr sz="1800"/>
             </a:pPr>
             <a:r>
+              <a:rPr sz="1400"/>
               <a:t>    • Link tıklandığında farklı site açılıyor</a:t>
             </a:r>
           </a:p>
@@ -8954,6 +10359,7 @@
               <a:defRPr sz="2000" b="1"/>
             </a:pPr>
             <a:r>
+              <a:rPr sz="1400"/>
               <a:t>💡 Şüphe duyarsan:</a:t>
             </a:r>
           </a:p>
@@ -8965,6 +10371,7 @@
               <a:defRPr sz="1800"/>
             </a:pPr>
             <a:r>
+              <a:rPr sz="1400"/>
               <a:t>    • Tıklama!</a:t>
             </a:r>
           </a:p>
@@ -8976,6 +10383,7 @@
               <a:defRPr sz="1800"/>
             </a:pPr>
             <a:r>
+              <a:rPr sz="1400"/>
               <a:t>    • Ebeveynine göster</a:t>
             </a:r>
           </a:p>
@@ -8987,6 +10395,7 @@
               <a:defRPr sz="1800"/>
             </a:pPr>
             <a:r>
+              <a:rPr sz="1400"/>
               <a:t>    • Direkt sil</a:t>
             </a:r>
           </a:p>
@@ -9085,6 +10494,7 @@
               <a:defRPr sz="2000"/>
             </a:pPr>
             <a:r>
+              <a:rPr sz="1400"/>
               <a:t>Zararlı yazılım = Bilgisayara/telefona zarar veren programlar</a:t>
             </a:r>
           </a:p>
@@ -9104,6 +10514,7 @@
               <a:defRPr sz="2000" b="1"/>
             </a:pPr>
             <a:r>
+              <a:rPr sz="1400"/>
               <a:t>✅ Zararlı Yazılım Türleri:</a:t>
             </a:r>
           </a:p>
@@ -9123,6 +10534,7 @@
               <a:defRPr sz="2000"/>
             </a:pPr>
             <a:r>
+              <a:rPr sz="1400"/>
               <a:t>🦠 Virüs:</a:t>
             </a:r>
           </a:p>
@@ -9134,6 +10546,7 @@
               <a:defRPr sz="1800"/>
             </a:pPr>
             <a:r>
+              <a:rPr sz="1400"/>
               <a:t>    • Kendini kopyalar</a:t>
             </a:r>
           </a:p>
@@ -9145,6 +10558,7 @@
               <a:defRPr sz="1800"/>
             </a:pPr>
             <a:r>
+              <a:rPr sz="1400"/>
               <a:t>    • Dosyalara bulaşır</a:t>
             </a:r>
           </a:p>
@@ -9156,6 +10570,7 @@
               <a:defRPr sz="1800"/>
             </a:pPr>
             <a:r>
+              <a:rPr sz="1400"/>
               <a:t>    • Sistem yavaşlar</a:t>
             </a:r>
           </a:p>
@@ -9175,6 +10590,7 @@
               <a:defRPr sz="2000"/>
             </a:pPr>
             <a:r>
+              <a:rPr sz="1400"/>
               <a:t>🐴 Truva Atı (Trojan):</a:t>
             </a:r>
           </a:p>
@@ -9186,6 +10602,7 @@
               <a:defRPr sz="1800"/>
             </a:pPr>
             <a:r>
+              <a:rPr sz="1400"/>
               <a:t>    • Masum görünür (oyun, program)</a:t>
             </a:r>
           </a:p>
@@ -9197,6 +10614,7 @@
               <a:defRPr sz="1800"/>
             </a:pPr>
             <a:r>
+              <a:rPr sz="1400"/>
               <a:t>    • Aslında zararlı</a:t>
             </a:r>
           </a:p>
@@ -9216,6 +10634,7 @@
               <a:defRPr sz="2000"/>
             </a:pPr>
             <a:r>
+              <a:rPr sz="1400"/>
               <a:t>🔒 Fidye Yazılımı (Ransomware):</a:t>
             </a:r>
           </a:p>
@@ -9227,6 +10646,7 @@
               <a:defRPr sz="1800"/>
             </a:pPr>
             <a:r>
+              <a:rPr sz="1400"/>
               <a:t>    • Dosyalarını kilitler</a:t>
             </a:r>
           </a:p>
@@ -9238,6 +10658,7 @@
               <a:defRPr sz="1800"/>
             </a:pPr>
             <a:r>
+              <a:rPr sz="1400"/>
               <a:t>    • Para ister</a:t>
             </a:r>
           </a:p>
@@ -9257,6 +10678,7 @@
               <a:defRPr sz="2000"/>
             </a:pPr>
             <a:r>
+              <a:rPr sz="1400"/>
               <a:t>🕵️ Casus Yazılım (Spyware):</a:t>
             </a:r>
           </a:p>
@@ -9268,6 +10690,7 @@
               <a:defRPr sz="1800"/>
             </a:pPr>
             <a:r>
+              <a:rPr sz="1400"/>
               <a:t>    • Yaptıklarını izler</a:t>
             </a:r>
           </a:p>
@@ -9279,6 +10702,7 @@
               <a:defRPr sz="1800"/>
             </a:pPr>
             <a:r>
+              <a:rPr sz="1400"/>
               <a:t>    • Bilgi çalar</a:t>
             </a:r>
           </a:p>
@@ -9298,6 +10722,7 @@
               <a:defRPr sz="2000" b="1"/>
             </a:pPr>
             <a:r>
+              <a:rPr sz="1400"/>
               <a:t>📌 Bulaşma Yolları:</a:t>
             </a:r>
           </a:p>
@@ -9309,6 +10734,7 @@
               <a:defRPr sz="1800"/>
             </a:pPr>
             <a:r>
+              <a:rPr sz="1400"/>
               <a:t>    • Bilinmeyen sitelerdeki indirmeler</a:t>
             </a:r>
           </a:p>
@@ -9320,6 +10746,7 @@
               <a:defRPr sz="1800"/>
             </a:pPr>
             <a:r>
+              <a:rPr sz="1400"/>
               <a:t>    • E-posta ekleri</a:t>
             </a:r>
           </a:p>
@@ -9331,6 +10758,7 @@
               <a:defRPr sz="1800"/>
             </a:pPr>
             <a:r>
+              <a:rPr sz="1400"/>
               <a:t>    • Korsan programlar</a:t>
             </a:r>
           </a:p>
@@ -9342,6 +10770,7 @@
               <a:defRPr sz="1800"/>
             </a:pPr>
             <a:r>
+              <a:rPr sz="1400"/>
               <a:t>    • USB bellekler</a:t>
             </a:r>
           </a:p>
@@ -9361,6 +10790,7 @@
               <a:defRPr sz="2000" b="1"/>
             </a:pPr>
             <a:r>
+              <a:rPr sz="1400"/>
               <a:t>💡 Korunma: Antivirüs programı kullan!</a:t>
             </a:r>
           </a:p>

--- a/sunumlar/5-sinif-unite4-etik-guvenlik-DETAYLI.pptx
+++ b/sunumlar/5-sinif-unite4-etik-guvenlik-DETAYLI.pptx
@@ -5638,7 +5638,7 @@
           <a:noFill/>
         </p:spPr>
         <p:txBody>
-          <a:bodyPr wrap="none">
+          <a:bodyPr wrap="square">
             <a:spAutoFit/>
           </a:bodyPr>
           <a:lstStyle/>
@@ -5673,7 +5673,7 @@
           <a:noFill/>
         </p:spPr>
         <p:txBody>
-          <a:bodyPr wrap="none">
+          <a:bodyPr wrap="square">
             <a:spAutoFit/>
           </a:bodyPr>
           <a:lstStyle/>
@@ -5721,7 +5721,7 @@
         </p:nvSpPr>
         <p:spPr/>
         <p:txBody>
-          <a:bodyPr/>
+          <a:bodyPr wrap="square"/>
           <a:lstStyle/>
           <a:p>
             <a:pPr>
@@ -5775,312 +5775,405 @@
             <a:spAutoFit/>
           </a:bodyPr>
           <a:lstStyle/>
-          <a:p/>
-          <a:p>
-            <a:pPr>
-              <a:spcAft>
-                <a:spcPts val="1200"/>
-              </a:spcAft>
-              <a:defRPr sz="2000"/>
-            </a:pPr>
-            <a:r>
-              <a:rPr sz="1400"/>
+          <a:p>
+            <a:pPr>
+              <a:lnSpc>
+                <a:spcPct val="90000"/>
+              </a:lnSpc>
+              <a:spcAft>
+                <a:spcPts val="300"/>
+              </a:spcAft>
+            </a:pPr>
+          </a:p>
+          <a:p>
+            <a:pPr>
+              <a:lnSpc>
+                <a:spcPct val="90000"/>
+              </a:lnSpc>
+              <a:spcAft>
+                <a:spcPts val="300"/>
+              </a:spcAft>
+              <a:defRPr sz="2000"/>
+            </a:pPr>
+            <a:r>
+              <a:rPr sz="1300"/>
               <a:t>Nasıl korunuruz?</a:t>
             </a:r>
           </a:p>
           <a:p>
             <a:pPr>
-              <a:spcAft>
-                <a:spcPts val="1200"/>
-              </a:spcAft>
-              <a:defRPr sz="2000"/>
-            </a:pPr>
-          </a:p>
-          <a:p>
-            <a:pPr>
-              <a:spcAft>
-                <a:spcPts val="1200"/>
+              <a:lnSpc>
+                <a:spcPct val="90000"/>
+              </a:lnSpc>
+              <a:spcAft>
+                <a:spcPts val="300"/>
+              </a:spcAft>
+              <a:defRPr sz="2000"/>
+            </a:pPr>
+          </a:p>
+          <a:p>
+            <a:pPr>
+              <a:lnSpc>
+                <a:spcPct val="90000"/>
+              </a:lnSpc>
+              <a:spcAft>
+                <a:spcPts val="300"/>
               </a:spcAft>
               <a:defRPr sz="2000" b="1"/>
             </a:pPr>
             <a:r>
-              <a:rPr sz="1400"/>
+              <a:rPr sz="1300"/>
               <a:t>✅ Korunma Yöntemleri:</a:t>
             </a:r>
           </a:p>
           <a:p>
             <a:pPr>
-              <a:spcAft>
-                <a:spcPts val="1200"/>
-              </a:spcAft>
-              <a:defRPr sz="2000"/>
-            </a:pPr>
-          </a:p>
-          <a:p>
-            <a:pPr>
-              <a:spcAft>
-                <a:spcPts val="1200"/>
-              </a:spcAft>
-              <a:defRPr sz="2000"/>
-            </a:pPr>
-            <a:r>
-              <a:rPr sz="1400"/>
+              <a:lnSpc>
+                <a:spcPct val="90000"/>
+              </a:lnSpc>
+              <a:spcAft>
+                <a:spcPts val="300"/>
+              </a:spcAft>
+              <a:defRPr sz="2000"/>
+            </a:pPr>
+          </a:p>
+          <a:p>
+            <a:pPr>
+              <a:lnSpc>
+                <a:spcPct val="90000"/>
+              </a:lnSpc>
+              <a:spcAft>
+                <a:spcPts val="300"/>
+              </a:spcAft>
+              <a:defRPr sz="2000"/>
+            </a:pPr>
+            <a:r>
+              <a:rPr sz="1300"/>
               <a:t>🛡️ Antivirüs Programı:</a:t>
             </a:r>
           </a:p>
           <a:p>
             <a:pPr lvl="1">
-              <a:spcAft>
-                <a:spcPts val="1200"/>
-              </a:spcAft>
-              <a:defRPr sz="1800"/>
-            </a:pPr>
-            <a:r>
-              <a:rPr sz="1400"/>
+              <a:lnSpc>
+                <a:spcPct val="90000"/>
+              </a:lnSpc>
+              <a:spcAft>
+                <a:spcPts val="300"/>
+              </a:spcAft>
+              <a:defRPr sz="1800"/>
+            </a:pPr>
+            <a:r>
+              <a:rPr sz="1300"/>
               <a:t>    • Windows Defender (yerleşik)</a:t>
             </a:r>
           </a:p>
           <a:p>
             <a:pPr lvl="1">
-              <a:spcAft>
-                <a:spcPts val="1200"/>
-              </a:spcAft>
-              <a:defRPr sz="1800"/>
-            </a:pPr>
-            <a:r>
-              <a:rPr sz="1400"/>
+              <a:lnSpc>
+                <a:spcPct val="90000"/>
+              </a:lnSpc>
+              <a:spcAft>
+                <a:spcPts val="300"/>
+              </a:spcAft>
+              <a:defRPr sz="1800"/>
+            </a:pPr>
+            <a:r>
+              <a:rPr sz="1300"/>
               <a:t>    • Avast, AVG, Kaspersky</a:t>
             </a:r>
           </a:p>
           <a:p>
             <a:pPr lvl="1">
-              <a:spcAft>
-                <a:spcPts val="1200"/>
-              </a:spcAft>
-              <a:defRPr sz="1800"/>
-            </a:pPr>
-            <a:r>
-              <a:rPr sz="1400"/>
+              <a:lnSpc>
+                <a:spcPct val="90000"/>
+              </a:lnSpc>
+              <a:spcAft>
+                <a:spcPts val="300"/>
+              </a:spcAft>
+              <a:defRPr sz="1800"/>
+            </a:pPr>
+            <a:r>
+              <a:rPr sz="1300"/>
               <a:t>    • Düzenli tara</a:t>
             </a:r>
           </a:p>
           <a:p>
             <a:pPr>
-              <a:spcAft>
-                <a:spcPts val="1200"/>
-              </a:spcAft>
-              <a:defRPr sz="2000"/>
-            </a:pPr>
-          </a:p>
-          <a:p>
-            <a:pPr>
-              <a:spcAft>
-                <a:spcPts val="1200"/>
-              </a:spcAft>
-              <a:defRPr sz="2000"/>
-            </a:pPr>
-            <a:r>
-              <a:rPr sz="1400"/>
+              <a:lnSpc>
+                <a:spcPct val="90000"/>
+              </a:lnSpc>
+              <a:spcAft>
+                <a:spcPts val="300"/>
+              </a:spcAft>
+              <a:defRPr sz="2000"/>
+            </a:pPr>
+          </a:p>
+          <a:p>
+            <a:pPr>
+              <a:lnSpc>
+                <a:spcPct val="90000"/>
+              </a:lnSpc>
+              <a:spcAft>
+                <a:spcPts val="300"/>
+              </a:spcAft>
+              <a:defRPr sz="2000"/>
+            </a:pPr>
+            <a:r>
+              <a:rPr sz="1300"/>
               <a:t>🔄 Güncellemeleri Yap:</a:t>
             </a:r>
           </a:p>
           <a:p>
             <a:pPr lvl="1">
-              <a:spcAft>
-                <a:spcPts val="1200"/>
-              </a:spcAft>
-              <a:defRPr sz="1800"/>
-            </a:pPr>
-            <a:r>
-              <a:rPr sz="1400"/>
+              <a:lnSpc>
+                <a:spcPct val="90000"/>
+              </a:lnSpc>
+              <a:spcAft>
+                <a:spcPts val="300"/>
+              </a:spcAft>
+              <a:defRPr sz="1800"/>
+            </a:pPr>
+            <a:r>
+              <a:rPr sz="1300"/>
               <a:t>    • İşletim sistemini güncelle</a:t>
             </a:r>
           </a:p>
           <a:p>
             <a:pPr lvl="1">
-              <a:spcAft>
-                <a:spcPts val="1200"/>
-              </a:spcAft>
-              <a:defRPr sz="1800"/>
-            </a:pPr>
-            <a:r>
-              <a:rPr sz="1400"/>
+              <a:lnSpc>
+                <a:spcPct val="90000"/>
+              </a:lnSpc>
+              <a:spcAft>
+                <a:spcPts val="300"/>
+              </a:spcAft>
+              <a:defRPr sz="1800"/>
+            </a:pPr>
+            <a:r>
+              <a:rPr sz="1300"/>
               <a:t>    • Programları güncelle</a:t>
             </a:r>
           </a:p>
           <a:p>
             <a:pPr lvl="1">
-              <a:spcAft>
-                <a:spcPts val="1200"/>
-              </a:spcAft>
-              <a:defRPr sz="1800"/>
-            </a:pPr>
-            <a:r>
-              <a:rPr sz="1400"/>
+              <a:lnSpc>
+                <a:spcPct val="90000"/>
+              </a:lnSpc>
+              <a:spcAft>
+                <a:spcPts val="300"/>
+              </a:spcAft>
+              <a:defRPr sz="1800"/>
+            </a:pPr>
+            <a:r>
+              <a:rPr sz="1300"/>
               <a:t>    • Güvenlik yamaları önemli</a:t>
             </a:r>
           </a:p>
           <a:p>
             <a:pPr>
-              <a:spcAft>
-                <a:spcPts val="1200"/>
-              </a:spcAft>
-              <a:defRPr sz="2000"/>
-            </a:pPr>
-          </a:p>
-          <a:p>
-            <a:pPr>
-              <a:spcAft>
-                <a:spcPts val="1200"/>
-              </a:spcAft>
-              <a:defRPr sz="2000"/>
-            </a:pPr>
-            <a:r>
-              <a:rPr sz="1400"/>
+              <a:lnSpc>
+                <a:spcPct val="90000"/>
+              </a:lnSpc>
+              <a:spcAft>
+                <a:spcPts val="300"/>
+              </a:spcAft>
+              <a:defRPr sz="2000"/>
+            </a:pPr>
+          </a:p>
+          <a:p>
+            <a:pPr>
+              <a:lnSpc>
+                <a:spcPct val="90000"/>
+              </a:lnSpc>
+              <a:spcAft>
+                <a:spcPts val="300"/>
+              </a:spcAft>
+              <a:defRPr sz="2000"/>
+            </a:pPr>
+            <a:r>
+              <a:rPr sz="1300"/>
               <a:t>⬇️ Dikkatli İndir:</a:t>
             </a:r>
           </a:p>
           <a:p>
             <a:pPr lvl="1">
-              <a:spcAft>
-                <a:spcPts val="1200"/>
-              </a:spcAft>
-              <a:defRPr sz="1800"/>
-            </a:pPr>
-            <a:r>
-              <a:rPr sz="1400"/>
+              <a:lnSpc>
+                <a:spcPct val="90000"/>
+              </a:lnSpc>
+              <a:spcAft>
+                <a:spcPts val="300"/>
+              </a:spcAft>
+              <a:defRPr sz="1800"/>
+            </a:pPr>
+            <a:r>
+              <a:rPr sz="1300"/>
               <a:t>    • Sadece güvenilir sitelerden</a:t>
             </a:r>
           </a:p>
           <a:p>
             <a:pPr lvl="1">
-              <a:spcAft>
-                <a:spcPts val="1200"/>
-              </a:spcAft>
-              <a:defRPr sz="1800"/>
-            </a:pPr>
-            <a:r>
-              <a:rPr sz="1400"/>
+              <a:lnSpc>
+                <a:spcPct val="90000"/>
+              </a:lnSpc>
+              <a:spcAft>
+                <a:spcPts val="300"/>
+              </a:spcAft>
+              <a:defRPr sz="1800"/>
+            </a:pPr>
+            <a:r>
+              <a:rPr sz="1300"/>
               <a:t>    • Korsan program kullanma</a:t>
             </a:r>
           </a:p>
           <a:p>
             <a:pPr lvl="1">
-              <a:spcAft>
-                <a:spcPts val="1200"/>
-              </a:spcAft>
-              <a:defRPr sz="1800"/>
-            </a:pPr>
-            <a:r>
-              <a:rPr sz="1400"/>
+              <a:lnSpc>
+                <a:spcPct val="90000"/>
+              </a:lnSpc>
+              <a:spcAft>
+                <a:spcPts val="300"/>
+              </a:spcAft>
+              <a:defRPr sz="1800"/>
+            </a:pPr>
+            <a:r>
+              <a:rPr sz="1300"/>
               <a:t>    • İndirmeden önce tara</a:t>
             </a:r>
           </a:p>
           <a:p>
             <a:pPr>
-              <a:spcAft>
-                <a:spcPts val="1200"/>
-              </a:spcAft>
-              <a:defRPr sz="2000"/>
-            </a:pPr>
-          </a:p>
-          <a:p>
-            <a:pPr>
-              <a:spcAft>
-                <a:spcPts val="1200"/>
-              </a:spcAft>
-              <a:defRPr sz="2000"/>
-            </a:pPr>
-            <a:r>
-              <a:rPr sz="1400"/>
+              <a:lnSpc>
+                <a:spcPct val="90000"/>
+              </a:lnSpc>
+              <a:spcAft>
+                <a:spcPts val="300"/>
+              </a:spcAft>
+              <a:defRPr sz="2000"/>
+            </a:pPr>
+          </a:p>
+          <a:p>
+            <a:pPr>
+              <a:lnSpc>
+                <a:spcPct val="90000"/>
+              </a:lnSpc>
+              <a:spcAft>
+                <a:spcPts val="300"/>
+              </a:spcAft>
+              <a:defRPr sz="2000"/>
+            </a:pPr>
+            <a:r>
+              <a:rPr sz="1300"/>
               <a:t>📎 E-posta Ekleri:</a:t>
             </a:r>
           </a:p>
           <a:p>
             <a:pPr lvl="1">
-              <a:spcAft>
-                <a:spcPts val="1200"/>
-              </a:spcAft>
-              <a:defRPr sz="1800"/>
-            </a:pPr>
-            <a:r>
-              <a:rPr sz="1400"/>
+              <a:lnSpc>
+                <a:spcPct val="90000"/>
+              </a:lnSpc>
+              <a:spcAft>
+                <a:spcPts val="300"/>
+              </a:spcAft>
+              <a:defRPr sz="1800"/>
+            </a:pPr>
+            <a:r>
+              <a:rPr sz="1300"/>
               <a:t>    • Tanımadığın kişiden ek açma</a:t>
             </a:r>
           </a:p>
           <a:p>
             <a:pPr lvl="1">
-              <a:spcAft>
-                <a:spcPts val="1200"/>
-              </a:spcAft>
-              <a:defRPr sz="1800"/>
-            </a:pPr>
-            <a:r>
-              <a:rPr sz="1400"/>
+              <a:lnSpc>
+                <a:spcPct val="90000"/>
+              </a:lnSpc>
+              <a:spcAft>
+                <a:spcPts val="300"/>
+              </a:spcAft>
+              <a:defRPr sz="1800"/>
+            </a:pPr>
+            <a:r>
+              <a:rPr sz="1300"/>
               <a:t>    • Şüpheli ekleri tara</a:t>
             </a:r>
           </a:p>
           <a:p>
             <a:pPr>
-              <a:spcAft>
-                <a:spcPts val="1200"/>
-              </a:spcAft>
-              <a:defRPr sz="2000"/>
-            </a:pPr>
-          </a:p>
-          <a:p>
-            <a:pPr>
-              <a:spcAft>
-                <a:spcPts val="1200"/>
-              </a:spcAft>
-              <a:defRPr sz="2000"/>
-            </a:pPr>
-            <a:r>
-              <a:rPr sz="1400"/>
+              <a:lnSpc>
+                <a:spcPct val="90000"/>
+              </a:lnSpc>
+              <a:spcAft>
+                <a:spcPts val="300"/>
+              </a:spcAft>
+              <a:defRPr sz="2000"/>
+            </a:pPr>
+          </a:p>
+          <a:p>
+            <a:pPr>
+              <a:lnSpc>
+                <a:spcPct val="90000"/>
+              </a:lnSpc>
+              <a:spcAft>
+                <a:spcPts val="300"/>
+              </a:spcAft>
+              <a:defRPr sz="2000"/>
+            </a:pPr>
+            <a:r>
+              <a:rPr sz="1300"/>
               <a:t>💾 Yedekleme Yap:</a:t>
             </a:r>
           </a:p>
           <a:p>
             <a:pPr lvl="1">
-              <a:spcAft>
-                <a:spcPts val="1200"/>
-              </a:spcAft>
-              <a:defRPr sz="1800"/>
-            </a:pPr>
-            <a:r>
-              <a:rPr sz="1400"/>
+              <a:lnSpc>
+                <a:spcPct val="90000"/>
+              </a:lnSpc>
+              <a:spcAft>
+                <a:spcPts val="300"/>
+              </a:spcAft>
+              <a:defRPr sz="1800"/>
+            </a:pPr>
+            <a:r>
+              <a:rPr sz="1300"/>
               <a:t>    • Önemli dosyaları yedekle</a:t>
             </a:r>
           </a:p>
           <a:p>
             <a:pPr lvl="1">
-              <a:spcAft>
-                <a:spcPts val="1200"/>
-              </a:spcAft>
-              <a:defRPr sz="1800"/>
-            </a:pPr>
-            <a:r>
-              <a:rPr sz="1400"/>
+              <a:lnSpc>
+                <a:spcPct val="90000"/>
+              </a:lnSpc>
+              <a:spcAft>
+                <a:spcPts val="300"/>
+              </a:spcAft>
+              <a:defRPr sz="1800"/>
+            </a:pPr>
+            <a:r>
+              <a:rPr sz="1300"/>
               <a:t>    • Cloud (bulut) veya USB'ye</a:t>
             </a:r>
           </a:p>
           <a:p>
             <a:pPr>
-              <a:spcAft>
-                <a:spcPts val="1200"/>
-              </a:spcAft>
-              <a:defRPr sz="2000"/>
-            </a:pPr>
-          </a:p>
-          <a:p>
-            <a:pPr>
-              <a:spcAft>
-                <a:spcPts val="1200"/>
+              <a:lnSpc>
+                <a:spcPct val="90000"/>
+              </a:lnSpc>
+              <a:spcAft>
+                <a:spcPts val="300"/>
+              </a:spcAft>
+              <a:defRPr sz="2000"/>
+            </a:pPr>
+          </a:p>
+          <a:p>
+            <a:pPr>
+              <a:lnSpc>
+                <a:spcPct val="90000"/>
+              </a:lnSpc>
+              <a:spcAft>
+                <a:spcPts val="300"/>
               </a:spcAft>
               <a:defRPr sz="2000" b="1"/>
             </a:pPr>
             <a:r>
-              <a:rPr sz="1400"/>
+              <a:rPr sz="1300"/>
               <a:t>💡 En iyi koruma = Dikkatli olmak!</a:t>
             </a:r>
           </a:p>
@@ -6116,7 +6209,7 @@
         </p:nvSpPr>
         <p:spPr/>
         <p:txBody>
-          <a:bodyPr/>
+          <a:bodyPr wrap="square"/>
           <a:lstStyle/>
           <a:p>
             <a:pPr>
@@ -6170,312 +6263,405 @@
             <a:spAutoFit/>
           </a:bodyPr>
           <a:lstStyle/>
-          <a:p/>
-          <a:p>
-            <a:pPr>
-              <a:spcAft>
-                <a:spcPts val="1200"/>
-              </a:spcAft>
-              <a:defRPr sz="2000"/>
-            </a:pPr>
-            <a:r>
-              <a:rPr sz="1400"/>
+          <a:p>
+            <a:pPr>
+              <a:lnSpc>
+                <a:spcPct val="90000"/>
+              </a:lnSpc>
+              <a:spcAft>
+                <a:spcPts val="300"/>
+              </a:spcAft>
+            </a:pPr>
+          </a:p>
+          <a:p>
+            <a:pPr>
+              <a:lnSpc>
+                <a:spcPct val="90000"/>
+              </a:lnSpc>
+              <a:spcAft>
+                <a:spcPts val="300"/>
+              </a:spcAft>
+              <a:defRPr sz="2000"/>
+            </a:pPr>
+            <a:r>
+              <a:rPr sz="1300"/>
               <a:t>Sosyal mühendislik = İnsanları kandırma sanatı</a:t>
             </a:r>
           </a:p>
           <a:p>
             <a:pPr>
-              <a:spcAft>
-                <a:spcPts val="1200"/>
-              </a:spcAft>
-              <a:defRPr sz="2000"/>
-            </a:pPr>
-            <a:r>
-              <a:rPr sz="1400"/>
+              <a:lnSpc>
+                <a:spcPct val="90000"/>
+              </a:lnSpc>
+              <a:spcAft>
+                <a:spcPts val="300"/>
+              </a:spcAft>
+              <a:defRPr sz="2000"/>
+            </a:pPr>
+            <a:r>
+              <a:rPr sz="1300"/>
               <a:t>Teknik değil, psikolojik saldırı!</a:t>
             </a:r>
           </a:p>
           <a:p>
             <a:pPr>
-              <a:spcAft>
-                <a:spcPts val="1200"/>
-              </a:spcAft>
-              <a:defRPr sz="2000"/>
-            </a:pPr>
-          </a:p>
-          <a:p>
-            <a:pPr>
-              <a:spcAft>
-                <a:spcPts val="1200"/>
+              <a:lnSpc>
+                <a:spcPct val="90000"/>
+              </a:lnSpc>
+              <a:spcAft>
+                <a:spcPts val="300"/>
+              </a:spcAft>
+              <a:defRPr sz="2000"/>
+            </a:pPr>
+          </a:p>
+          <a:p>
+            <a:pPr>
+              <a:lnSpc>
+                <a:spcPct val="90000"/>
+              </a:lnSpc>
+              <a:spcAft>
+                <a:spcPts val="300"/>
               </a:spcAft>
               <a:defRPr sz="2000" b="1"/>
             </a:pPr>
             <a:r>
-              <a:rPr sz="1400"/>
+              <a:rPr sz="1300"/>
               <a:t>✅ Sosyal Mühendislik Örnekleri:</a:t>
             </a:r>
           </a:p>
           <a:p>
             <a:pPr>
-              <a:spcAft>
-                <a:spcPts val="1200"/>
-              </a:spcAft>
-              <a:defRPr sz="2000"/>
-            </a:pPr>
-          </a:p>
-          <a:p>
-            <a:pPr>
-              <a:spcAft>
-                <a:spcPts val="1200"/>
-              </a:spcAft>
-              <a:defRPr sz="2000"/>
-            </a:pPr>
-            <a:r>
-              <a:rPr sz="1400"/>
+              <a:lnSpc>
+                <a:spcPct val="90000"/>
+              </a:lnSpc>
+              <a:spcAft>
+                <a:spcPts val="300"/>
+              </a:spcAft>
+              <a:defRPr sz="2000"/>
+            </a:pPr>
+          </a:p>
+          <a:p>
+            <a:pPr>
+              <a:lnSpc>
+                <a:spcPct val="90000"/>
+              </a:lnSpc>
+              <a:spcAft>
+                <a:spcPts val="300"/>
+              </a:spcAft>
+              <a:defRPr sz="2000"/>
+            </a:pPr>
+            <a:r>
+              <a:rPr sz="1300"/>
               <a:t>📞 Telefon Dolandırıcılığı:</a:t>
             </a:r>
           </a:p>
           <a:p>
             <a:pPr lvl="1">
-              <a:spcAft>
-                <a:spcPts val="1200"/>
-              </a:spcAft>
-              <a:defRPr sz="1800"/>
-            </a:pPr>
-            <a:r>
-              <a:rPr sz="1400"/>
+              <a:lnSpc>
+                <a:spcPct val="90000"/>
+              </a:lnSpc>
+              <a:spcAft>
+                <a:spcPts val="300"/>
+              </a:spcAft>
+              <a:defRPr sz="1800"/>
+            </a:pPr>
+            <a:r>
+              <a:rPr sz="1300"/>
               <a:t>    • 'Bankadan arıyorum' yalanı</a:t>
             </a:r>
           </a:p>
           <a:p>
             <a:pPr lvl="1">
-              <a:spcAft>
-                <a:spcPts val="1200"/>
-              </a:spcAft>
-              <a:defRPr sz="1800"/>
-            </a:pPr>
-            <a:r>
-              <a:rPr sz="1400"/>
+              <a:lnSpc>
+                <a:spcPct val="90000"/>
+              </a:lnSpc>
+              <a:spcAft>
+                <a:spcPts val="300"/>
+              </a:spcAft>
+              <a:defRPr sz="1800"/>
+            </a:pPr>
+            <a:r>
+              <a:rPr sz="1300"/>
               <a:t>    • 'Kart bilgilerinizi söyleyin'</a:t>
             </a:r>
           </a:p>
           <a:p>
             <a:pPr>
-              <a:spcAft>
-                <a:spcPts val="1200"/>
-              </a:spcAft>
-              <a:defRPr sz="2000"/>
-            </a:pPr>
-          </a:p>
-          <a:p>
-            <a:pPr>
-              <a:spcAft>
-                <a:spcPts val="1200"/>
-              </a:spcAft>
-              <a:defRPr sz="2000"/>
-            </a:pPr>
-            <a:r>
-              <a:rPr sz="1400"/>
+              <a:lnSpc>
+                <a:spcPct val="90000"/>
+              </a:lnSpc>
+              <a:spcAft>
+                <a:spcPts val="300"/>
+              </a:spcAft>
+              <a:defRPr sz="2000"/>
+            </a:pPr>
+          </a:p>
+          <a:p>
+            <a:pPr>
+              <a:lnSpc>
+                <a:spcPct val="90000"/>
+              </a:lnSpc>
+              <a:spcAft>
+                <a:spcPts val="300"/>
+              </a:spcAft>
+              <a:defRPr sz="2000"/>
+            </a:pPr>
+            <a:r>
+              <a:rPr sz="1300"/>
               <a:t>🎁 Sahte Hediye:</a:t>
             </a:r>
           </a:p>
           <a:p>
             <a:pPr lvl="1">
-              <a:spcAft>
-                <a:spcPts val="1200"/>
-              </a:spcAft>
-              <a:defRPr sz="1800"/>
-            </a:pPr>
-            <a:r>
-              <a:rPr sz="1400"/>
+              <a:lnSpc>
+                <a:spcPct val="90000"/>
+              </a:lnSpc>
+              <a:spcAft>
+                <a:spcPts val="300"/>
+              </a:spcAft>
+              <a:defRPr sz="1800"/>
+            </a:pPr>
+            <a:r>
+              <a:rPr sz="1300"/>
               <a:t>    • 'Bedava telefon kazandın!'</a:t>
             </a:r>
           </a:p>
           <a:p>
             <a:pPr lvl="1">
-              <a:spcAft>
-                <a:spcPts val="1200"/>
-              </a:spcAft>
-              <a:defRPr sz="1800"/>
-            </a:pPr>
-            <a:r>
-              <a:rPr sz="1400"/>
+              <a:lnSpc>
+                <a:spcPct val="90000"/>
+              </a:lnSpc>
+              <a:spcAft>
+                <a:spcPts val="300"/>
+              </a:spcAft>
+              <a:defRPr sz="1800"/>
+            </a:pPr>
+            <a:r>
+              <a:rPr sz="1300"/>
               <a:t>    • 'Bu anketi doldur, ödül kazan'</a:t>
             </a:r>
           </a:p>
           <a:p>
             <a:pPr>
-              <a:spcAft>
-                <a:spcPts val="1200"/>
-              </a:spcAft>
-              <a:defRPr sz="2000"/>
-            </a:pPr>
-          </a:p>
-          <a:p>
-            <a:pPr>
-              <a:spcAft>
-                <a:spcPts val="1200"/>
-              </a:spcAft>
-              <a:defRPr sz="2000"/>
-            </a:pPr>
-            <a:r>
-              <a:rPr sz="1400"/>
+              <a:lnSpc>
+                <a:spcPct val="90000"/>
+              </a:lnSpc>
+              <a:spcAft>
+                <a:spcPts val="300"/>
+              </a:spcAft>
+              <a:defRPr sz="2000"/>
+            </a:pPr>
+          </a:p>
+          <a:p>
+            <a:pPr>
+              <a:lnSpc>
+                <a:spcPct val="90000"/>
+              </a:lnSpc>
+              <a:spcAft>
+                <a:spcPts val="300"/>
+              </a:spcAft>
+              <a:defRPr sz="2000"/>
+            </a:pPr>
+            <a:r>
+              <a:rPr sz="1300"/>
               <a:t>👤 Kimliğe Bürünme:</a:t>
             </a:r>
           </a:p>
           <a:p>
             <a:pPr lvl="1">
-              <a:spcAft>
-                <a:spcPts val="1200"/>
-              </a:spcAft>
-              <a:defRPr sz="1800"/>
-            </a:pPr>
-            <a:r>
-              <a:rPr sz="1400"/>
+              <a:lnSpc>
+                <a:spcPct val="90000"/>
+              </a:lnSpc>
+              <a:spcAft>
+                <a:spcPts val="300"/>
+              </a:spcAft>
+              <a:defRPr sz="1800"/>
+            </a:pPr>
+            <a:r>
+              <a:rPr sz="1300"/>
               <a:t>    • Arkadaşın gibi davranma</a:t>
             </a:r>
           </a:p>
           <a:p>
             <a:pPr lvl="1">
-              <a:spcAft>
-                <a:spcPts val="1200"/>
-              </a:spcAft>
-              <a:defRPr sz="1800"/>
-            </a:pPr>
-            <a:r>
-              <a:rPr sz="1400"/>
+              <a:lnSpc>
+                <a:spcPct val="90000"/>
+              </a:lnSpc>
+              <a:spcAft>
+                <a:spcPts val="300"/>
+              </a:spcAft>
+              <a:defRPr sz="1800"/>
+            </a:pPr>
+            <a:r>
+              <a:rPr sz="1300"/>
               <a:t>    • 'Ben öğretmenim, şifreni ver'</a:t>
             </a:r>
           </a:p>
           <a:p>
             <a:pPr>
-              <a:spcAft>
-                <a:spcPts val="1200"/>
-              </a:spcAft>
-              <a:defRPr sz="2000"/>
-            </a:pPr>
-          </a:p>
-          <a:p>
-            <a:pPr>
-              <a:spcAft>
-                <a:spcPts val="1200"/>
-              </a:spcAft>
-              <a:defRPr sz="2000"/>
-            </a:pPr>
-            <a:r>
-              <a:rPr sz="1400"/>
+              <a:lnSpc>
+                <a:spcPct val="90000"/>
+              </a:lnSpc>
+              <a:spcAft>
+                <a:spcPts val="300"/>
+              </a:spcAft>
+              <a:defRPr sz="2000"/>
+            </a:pPr>
+          </a:p>
+          <a:p>
+            <a:pPr>
+              <a:lnSpc>
+                <a:spcPct val="90000"/>
+              </a:lnSpc>
+              <a:spcAft>
+                <a:spcPts val="300"/>
+              </a:spcAft>
+              <a:defRPr sz="2000"/>
+            </a:pPr>
+            <a:r>
+              <a:rPr sz="1300"/>
               <a:t>😱 Korku:</a:t>
             </a:r>
           </a:p>
           <a:p>
             <a:pPr lvl="1">
-              <a:spcAft>
-                <a:spcPts val="1200"/>
-              </a:spcAft>
-              <a:defRPr sz="1800"/>
-            </a:pPr>
-            <a:r>
-              <a:rPr sz="1400"/>
+              <a:lnSpc>
+                <a:spcPct val="90000"/>
+              </a:lnSpc>
+              <a:spcAft>
+                <a:spcPts val="300"/>
+              </a:spcAft>
+              <a:defRPr sz="1800"/>
+            </a:pPr>
+            <a:r>
+              <a:rPr sz="1300"/>
               <a:t>    • 'Hesabın kapatılacak!'</a:t>
             </a:r>
           </a:p>
           <a:p>
             <a:pPr lvl="1">
-              <a:spcAft>
-                <a:spcPts val="1200"/>
-              </a:spcAft>
-              <a:defRPr sz="1800"/>
-            </a:pPr>
-            <a:r>
-              <a:rPr sz="1400"/>
+              <a:lnSpc>
+                <a:spcPct val="90000"/>
+              </a:lnSpc>
+              <a:spcAft>
+                <a:spcPts val="300"/>
+              </a:spcAft>
+              <a:defRPr sz="1800"/>
+            </a:pPr>
+            <a:r>
+              <a:rPr sz="1300"/>
               <a:t>    • 'Virüs var, hemen tıkla!'</a:t>
             </a:r>
           </a:p>
           <a:p>
             <a:pPr>
-              <a:spcAft>
-                <a:spcPts val="1200"/>
-              </a:spcAft>
-              <a:defRPr sz="2000"/>
-            </a:pPr>
-          </a:p>
-          <a:p>
-            <a:pPr>
-              <a:spcAft>
-                <a:spcPts val="1200"/>
+              <a:lnSpc>
+                <a:spcPct val="90000"/>
+              </a:lnSpc>
+              <a:spcAft>
+                <a:spcPts val="300"/>
+              </a:spcAft>
+              <a:defRPr sz="2000"/>
+            </a:pPr>
+          </a:p>
+          <a:p>
+            <a:pPr>
+              <a:lnSpc>
+                <a:spcPct val="90000"/>
+              </a:lnSpc>
+              <a:spcAft>
+                <a:spcPts val="300"/>
               </a:spcAft>
               <a:defRPr sz="2000" b="1"/>
             </a:pPr>
             <a:r>
-              <a:rPr sz="1400"/>
+              <a:rPr sz="1300"/>
               <a:t>📌 Korunma:</a:t>
             </a:r>
           </a:p>
           <a:p>
             <a:pPr lvl="1">
-              <a:spcAft>
-                <a:spcPts val="1200"/>
-              </a:spcAft>
-              <a:defRPr sz="1800"/>
-            </a:pPr>
-            <a:r>
-              <a:rPr sz="1400"/>
+              <a:lnSpc>
+                <a:spcPct val="90000"/>
+              </a:lnSpc>
+              <a:spcAft>
+                <a:spcPts val="300"/>
+              </a:spcAft>
+              <a:defRPr sz="1800"/>
+            </a:pPr>
+            <a:r>
+              <a:rPr sz="1300"/>
               <a:t>    • Acele kararlar alma</a:t>
             </a:r>
           </a:p>
           <a:p>
             <a:pPr lvl="1">
-              <a:spcAft>
-                <a:spcPts val="1200"/>
-              </a:spcAft>
-              <a:defRPr sz="1800"/>
-            </a:pPr>
-            <a:r>
-              <a:rPr sz="1400"/>
+              <a:lnSpc>
+                <a:spcPct val="90000"/>
+              </a:lnSpc>
+              <a:spcAft>
+                <a:spcPts val="300"/>
+              </a:spcAft>
+              <a:defRPr sz="1800"/>
+            </a:pPr>
+            <a:r>
+              <a:rPr sz="1300"/>
               <a:t>    • Doğrula (arayıp sor)</a:t>
             </a:r>
           </a:p>
           <a:p>
             <a:pPr lvl="1">
-              <a:spcAft>
-                <a:spcPts val="1200"/>
-              </a:spcAft>
-              <a:defRPr sz="1800"/>
-            </a:pPr>
-            <a:r>
-              <a:rPr sz="1400"/>
+              <a:lnSpc>
+                <a:spcPct val="90000"/>
+              </a:lnSpc>
+              <a:spcAft>
+                <a:spcPts val="300"/>
+              </a:spcAft>
+              <a:defRPr sz="1800"/>
+            </a:pPr>
+            <a:r>
+              <a:rPr sz="1300"/>
               <a:t>    • Şüphe duy</a:t>
             </a:r>
           </a:p>
           <a:p>
             <a:pPr lvl="1">
-              <a:spcAft>
-                <a:spcPts val="1200"/>
-              </a:spcAft>
-              <a:defRPr sz="1800"/>
-            </a:pPr>
-            <a:r>
-              <a:rPr sz="1400"/>
+              <a:lnSpc>
+                <a:spcPct val="90000"/>
+              </a:lnSpc>
+              <a:spcAft>
+                <a:spcPts val="300"/>
+              </a:spcAft>
+              <a:defRPr sz="1800"/>
+            </a:pPr>
+            <a:r>
+              <a:rPr sz="1300"/>
               <a:t>    • 'Hayır' deme hakkın var</a:t>
             </a:r>
           </a:p>
           <a:p>
             <a:pPr>
-              <a:spcAft>
-                <a:spcPts val="1200"/>
-              </a:spcAft>
-              <a:defRPr sz="2000"/>
-            </a:pPr>
-          </a:p>
-          <a:p>
-            <a:pPr>
-              <a:spcAft>
-                <a:spcPts val="1200"/>
+              <a:lnSpc>
+                <a:spcPct val="90000"/>
+              </a:lnSpc>
+              <a:spcAft>
+                <a:spcPts val="300"/>
+              </a:spcAft>
+              <a:defRPr sz="2000"/>
+            </a:pPr>
+          </a:p>
+          <a:p>
+            <a:pPr>
+              <a:lnSpc>
+                <a:spcPct val="90000"/>
+              </a:lnSpc>
+              <a:spcAft>
+                <a:spcPts val="300"/>
               </a:spcAft>
               <a:defRPr sz="2000" b="1"/>
             </a:pPr>
             <a:r>
-              <a:rPr sz="1400"/>
+              <a:rPr sz="1300"/>
               <a:t>💡 İyi niyetli görünen kötü niyetli olabilir!</a:t>
             </a:r>
           </a:p>
@@ -6511,7 +6697,7 @@
         </p:nvSpPr>
         <p:spPr/>
         <p:txBody>
-          <a:bodyPr/>
+          <a:bodyPr wrap="square"/>
           <a:lstStyle/>
           <a:p>
             <a:pPr>
@@ -6565,320 +6751,416 @@
             <a:spAutoFit/>
           </a:bodyPr>
           <a:lstStyle/>
-          <a:p/>
-          <a:p>
-            <a:pPr>
-              <a:spcAft>
-                <a:spcPts val="1200"/>
-              </a:spcAft>
-              <a:defRPr sz="2000"/>
-            </a:pPr>
-            <a:r>
-              <a:rPr sz="1400"/>
+          <a:p>
+            <a:pPr>
+              <a:lnSpc>
+                <a:spcPct val="90000"/>
+              </a:lnSpc>
+              <a:spcAft>
+                <a:spcPts val="300"/>
+              </a:spcAft>
+            </a:pPr>
+          </a:p>
+          <a:p>
+            <a:pPr>
+              <a:lnSpc>
+                <a:spcPct val="90000"/>
+              </a:lnSpc>
+              <a:spcAft>
+                <a:spcPts val="300"/>
+              </a:spcAft>
+              <a:defRPr sz="2000"/>
+            </a:pPr>
+            <a:r>
+              <a:rPr sz="1300"/>
               <a:t>Dijital vatandaşlık = Dijital dünyada sorumlu davranmak</a:t>
             </a:r>
           </a:p>
           <a:p>
             <a:pPr>
-              <a:spcAft>
-                <a:spcPts val="1200"/>
-              </a:spcAft>
-              <a:defRPr sz="2000"/>
-            </a:pPr>
-          </a:p>
-          <a:p>
-            <a:pPr>
-              <a:spcAft>
-                <a:spcPts val="1200"/>
+              <a:lnSpc>
+                <a:spcPct val="90000"/>
+              </a:lnSpc>
+              <a:spcAft>
+                <a:spcPts val="300"/>
+              </a:spcAft>
+              <a:defRPr sz="2000"/>
+            </a:pPr>
+          </a:p>
+          <a:p>
+            <a:pPr>
+              <a:lnSpc>
+                <a:spcPct val="90000"/>
+              </a:lnSpc>
+              <a:spcAft>
+                <a:spcPts val="300"/>
               </a:spcAft>
               <a:defRPr sz="2000" b="1"/>
             </a:pPr>
             <a:r>
-              <a:rPr sz="1400"/>
+              <a:rPr sz="1300"/>
               <a:t>✅ Güvenli Dijital Vatandaş:</a:t>
             </a:r>
           </a:p>
           <a:p>
             <a:pPr>
-              <a:spcAft>
-                <a:spcPts val="1200"/>
-              </a:spcAft>
-              <a:defRPr sz="2000"/>
-            </a:pPr>
-          </a:p>
-          <a:p>
-            <a:pPr>
-              <a:spcAft>
-                <a:spcPts val="1200"/>
-              </a:spcAft>
-              <a:defRPr sz="2000"/>
-            </a:pPr>
-            <a:r>
-              <a:rPr sz="1400"/>
+              <a:lnSpc>
+                <a:spcPct val="90000"/>
+              </a:lnSpc>
+              <a:spcAft>
+                <a:spcPts val="300"/>
+              </a:spcAft>
+              <a:defRPr sz="2000"/>
+            </a:pPr>
+          </a:p>
+          <a:p>
+            <a:pPr>
+              <a:lnSpc>
+                <a:spcPct val="90000"/>
+              </a:lnSpc>
+              <a:spcAft>
+                <a:spcPts val="300"/>
+              </a:spcAft>
+              <a:defRPr sz="2000"/>
+            </a:pPr>
+            <a:r>
+              <a:rPr sz="1300"/>
               <a:t>🤝 Saygılı:</a:t>
             </a:r>
           </a:p>
           <a:p>
             <a:pPr lvl="1">
-              <a:spcAft>
-                <a:spcPts val="1200"/>
-              </a:spcAft>
-              <a:defRPr sz="1800"/>
-            </a:pPr>
-            <a:r>
-              <a:rPr sz="1400"/>
+              <a:lnSpc>
+                <a:spcPct val="90000"/>
+              </a:lnSpc>
+              <a:spcAft>
+                <a:spcPts val="300"/>
+              </a:spcAft>
+              <a:defRPr sz="1800"/>
+            </a:pPr>
+            <a:r>
+              <a:rPr sz="1300"/>
               <a:t>    • Başkalarına saygı göster</a:t>
             </a:r>
           </a:p>
           <a:p>
             <a:pPr lvl="1">
-              <a:spcAft>
-                <a:spcPts val="1200"/>
-              </a:spcAft>
-              <a:defRPr sz="1800"/>
-            </a:pPr>
-            <a:r>
-              <a:rPr sz="1400"/>
+              <a:lnSpc>
+                <a:spcPct val="90000"/>
+              </a:lnSpc>
+              <a:spcAft>
+                <a:spcPts val="300"/>
+              </a:spcAft>
+              <a:defRPr sz="1800"/>
+            </a:pPr>
+            <a:r>
+              <a:rPr sz="1300"/>
               <a:t>    • Zorbalık yapma</a:t>
             </a:r>
           </a:p>
           <a:p>
             <a:pPr>
-              <a:spcAft>
-                <a:spcPts val="1200"/>
-              </a:spcAft>
-              <a:defRPr sz="2000"/>
-            </a:pPr>
-          </a:p>
-          <a:p>
-            <a:pPr>
-              <a:spcAft>
-                <a:spcPts val="1200"/>
-              </a:spcAft>
-              <a:defRPr sz="2000"/>
-            </a:pPr>
-            <a:r>
-              <a:rPr sz="1400"/>
+              <a:lnSpc>
+                <a:spcPct val="90000"/>
+              </a:lnSpc>
+              <a:spcAft>
+                <a:spcPts val="300"/>
+              </a:spcAft>
+              <a:defRPr sz="2000"/>
+            </a:pPr>
+          </a:p>
+          <a:p>
+            <a:pPr>
+              <a:lnSpc>
+                <a:spcPct val="90000"/>
+              </a:lnSpc>
+              <a:spcAft>
+                <a:spcPts val="300"/>
+              </a:spcAft>
+              <a:defRPr sz="2000"/>
+            </a:pPr>
+            <a:r>
+              <a:rPr sz="1300"/>
               <a:t>📝 Dürüst:</a:t>
             </a:r>
           </a:p>
           <a:p>
             <a:pPr lvl="1">
-              <a:spcAft>
-                <a:spcPts val="1200"/>
-              </a:spcAft>
-              <a:defRPr sz="1800"/>
-            </a:pPr>
-            <a:r>
-              <a:rPr sz="1400"/>
+              <a:lnSpc>
+                <a:spcPct val="90000"/>
+              </a:lnSpc>
+              <a:spcAft>
+                <a:spcPts val="300"/>
+              </a:spcAft>
+              <a:defRPr sz="1800"/>
+            </a:pPr>
+            <a:r>
+              <a:rPr sz="1300"/>
               <a:t>    • Telif haklarına uy</a:t>
             </a:r>
           </a:p>
           <a:p>
             <a:pPr lvl="1">
-              <a:spcAft>
-                <a:spcPts val="1200"/>
-              </a:spcAft>
-              <a:defRPr sz="1800"/>
-            </a:pPr>
-            <a:r>
-              <a:rPr sz="1400"/>
+              <a:lnSpc>
+                <a:spcPct val="90000"/>
+              </a:lnSpc>
+              <a:spcAft>
+                <a:spcPts val="300"/>
+              </a:spcAft>
+              <a:defRPr sz="1800"/>
+            </a:pPr>
+            <a:r>
+              <a:rPr sz="1300"/>
               <a:t>    • Doğru bilgi paylaş</a:t>
             </a:r>
           </a:p>
           <a:p>
             <a:pPr>
-              <a:spcAft>
-                <a:spcPts val="1200"/>
-              </a:spcAft>
-              <a:defRPr sz="2000"/>
-            </a:pPr>
-          </a:p>
-          <a:p>
-            <a:pPr>
-              <a:spcAft>
-                <a:spcPts val="1200"/>
-              </a:spcAft>
-              <a:defRPr sz="2000"/>
-            </a:pPr>
-            <a:r>
-              <a:rPr sz="1400"/>
+              <a:lnSpc>
+                <a:spcPct val="90000"/>
+              </a:lnSpc>
+              <a:spcAft>
+                <a:spcPts val="300"/>
+              </a:spcAft>
+              <a:defRPr sz="2000"/>
+            </a:pPr>
+          </a:p>
+          <a:p>
+            <a:pPr>
+              <a:lnSpc>
+                <a:spcPct val="90000"/>
+              </a:lnSpc>
+              <a:spcAft>
+                <a:spcPts val="300"/>
+              </a:spcAft>
+              <a:defRPr sz="2000"/>
+            </a:pPr>
+            <a:r>
+              <a:rPr sz="1300"/>
               <a:t>🔒 Güvenli:</a:t>
             </a:r>
           </a:p>
           <a:p>
             <a:pPr lvl="1">
-              <a:spcAft>
-                <a:spcPts val="1200"/>
-              </a:spcAft>
-              <a:defRPr sz="1800"/>
-            </a:pPr>
-            <a:r>
-              <a:rPr sz="1400"/>
+              <a:lnSpc>
+                <a:spcPct val="90000"/>
+              </a:lnSpc>
+              <a:spcAft>
+                <a:spcPts val="300"/>
+              </a:spcAft>
+              <a:defRPr sz="1800"/>
+            </a:pPr>
+            <a:r>
+              <a:rPr sz="1300"/>
               <a:t>    • Kişisel bilgilerini koru</a:t>
             </a:r>
           </a:p>
           <a:p>
             <a:pPr lvl="1">
-              <a:spcAft>
-                <a:spcPts val="1200"/>
-              </a:spcAft>
-              <a:defRPr sz="1800"/>
-            </a:pPr>
-            <a:r>
-              <a:rPr sz="1400"/>
+              <a:lnSpc>
+                <a:spcPct val="90000"/>
+              </a:lnSpc>
+              <a:spcAft>
+                <a:spcPts val="300"/>
+              </a:spcAft>
+              <a:defRPr sz="1800"/>
+            </a:pPr>
+            <a:r>
+              <a:rPr sz="1300"/>
               <a:t>    • Güçlü şifre kullan</a:t>
             </a:r>
           </a:p>
           <a:p>
             <a:pPr>
-              <a:spcAft>
-                <a:spcPts val="1200"/>
-              </a:spcAft>
-              <a:defRPr sz="2000"/>
-            </a:pPr>
-          </a:p>
-          <a:p>
-            <a:pPr>
-              <a:spcAft>
-                <a:spcPts val="1200"/>
-              </a:spcAft>
-              <a:defRPr sz="2000"/>
-            </a:pPr>
-            <a:r>
-              <a:rPr sz="1400"/>
+              <a:lnSpc>
+                <a:spcPct val="90000"/>
+              </a:lnSpc>
+              <a:spcAft>
+                <a:spcPts val="300"/>
+              </a:spcAft>
+              <a:defRPr sz="2000"/>
+            </a:pPr>
+          </a:p>
+          <a:p>
+            <a:pPr>
+              <a:lnSpc>
+                <a:spcPct val="90000"/>
+              </a:lnSpc>
+              <a:spcAft>
+                <a:spcPts val="300"/>
+              </a:spcAft>
+              <a:defRPr sz="2000"/>
+            </a:pPr>
+            <a:r>
+              <a:rPr sz="1300"/>
               <a:t>📚 Bilinçli:</a:t>
             </a:r>
           </a:p>
           <a:p>
             <a:pPr lvl="1">
-              <a:spcAft>
-                <a:spcPts val="1200"/>
-              </a:spcAft>
-              <a:defRPr sz="1800"/>
-            </a:pPr>
-            <a:r>
-              <a:rPr sz="1400"/>
+              <a:lnSpc>
+                <a:spcPct val="90000"/>
+              </a:lnSpc>
+              <a:spcAft>
+                <a:spcPts val="300"/>
+              </a:spcAft>
+              <a:defRPr sz="1800"/>
+            </a:pPr>
+            <a:r>
+              <a:rPr sz="1300"/>
               <a:t>    • Eleştirel düşün</a:t>
             </a:r>
           </a:p>
           <a:p>
             <a:pPr lvl="1">
-              <a:spcAft>
-                <a:spcPts val="1200"/>
-              </a:spcAft>
-              <a:defRPr sz="1800"/>
-            </a:pPr>
-            <a:r>
-              <a:rPr sz="1400"/>
+              <a:lnSpc>
+                <a:spcPct val="90000"/>
+              </a:lnSpc>
+              <a:spcAft>
+                <a:spcPts val="300"/>
+              </a:spcAft>
+              <a:defRPr sz="1800"/>
+            </a:pPr>
+            <a:r>
+              <a:rPr sz="1300"/>
               <a:t>    • Doğrula, araştır</a:t>
             </a:r>
           </a:p>
           <a:p>
             <a:pPr>
-              <a:spcAft>
-                <a:spcPts val="1200"/>
-              </a:spcAft>
-              <a:defRPr sz="2000"/>
-            </a:pPr>
-          </a:p>
-          <a:p>
-            <a:pPr>
-              <a:spcAft>
-                <a:spcPts val="1200"/>
-              </a:spcAft>
-              <a:defRPr sz="2000"/>
-            </a:pPr>
-            <a:r>
-              <a:rPr sz="1400"/>
+              <a:lnSpc>
+                <a:spcPct val="90000"/>
+              </a:lnSpc>
+              <a:spcAft>
+                <a:spcPts val="300"/>
+              </a:spcAft>
+              <a:defRPr sz="2000"/>
+            </a:pPr>
+          </a:p>
+          <a:p>
+            <a:pPr>
+              <a:lnSpc>
+                <a:spcPct val="90000"/>
+              </a:lnSpc>
+              <a:spcAft>
+                <a:spcPts val="300"/>
+              </a:spcAft>
+              <a:defRPr sz="2000"/>
+            </a:pPr>
+            <a:r>
+              <a:rPr sz="1300"/>
               <a:t>⚖️ Sorumlu:</a:t>
             </a:r>
           </a:p>
           <a:p>
             <a:pPr lvl="1">
-              <a:spcAft>
-                <a:spcPts val="1200"/>
-              </a:spcAft>
-              <a:defRPr sz="1800"/>
-            </a:pPr>
-            <a:r>
-              <a:rPr sz="1400"/>
+              <a:lnSpc>
+                <a:spcPct val="90000"/>
+              </a:lnSpc>
+              <a:spcAft>
+                <a:spcPts val="300"/>
+              </a:spcAft>
+              <a:defRPr sz="1800"/>
+            </a:pPr>
+            <a:r>
+              <a:rPr sz="1300"/>
               <a:t>    • Paylaştıklarından sorumlu ol</a:t>
             </a:r>
           </a:p>
           <a:p>
             <a:pPr lvl="1">
-              <a:spcAft>
-                <a:spcPts val="1200"/>
-              </a:spcAft>
-              <a:defRPr sz="1800"/>
-            </a:pPr>
-            <a:r>
-              <a:rPr sz="1400"/>
+              <a:lnSpc>
+                <a:spcPct val="90000"/>
+              </a:lnSpc>
+              <a:spcAft>
+                <a:spcPts val="300"/>
+              </a:spcAft>
+              <a:defRPr sz="1800"/>
+            </a:pPr>
+            <a:r>
+              <a:rPr sz="1300"/>
               <a:t>    • Dengeli kullan</a:t>
             </a:r>
           </a:p>
           <a:p>
             <a:pPr>
-              <a:spcAft>
-                <a:spcPts val="1200"/>
-              </a:spcAft>
-              <a:defRPr sz="2000"/>
-            </a:pPr>
-          </a:p>
-          <a:p>
-            <a:pPr>
-              <a:spcAft>
-                <a:spcPts val="1200"/>
+              <a:lnSpc>
+                <a:spcPct val="90000"/>
+              </a:lnSpc>
+              <a:spcAft>
+                <a:spcPts val="300"/>
+              </a:spcAft>
+              <a:defRPr sz="2000"/>
+            </a:pPr>
+          </a:p>
+          <a:p>
+            <a:pPr>
+              <a:lnSpc>
+                <a:spcPct val="90000"/>
+              </a:lnSpc>
+              <a:spcAft>
+                <a:spcPts val="300"/>
               </a:spcAft>
               <a:defRPr sz="2000" b="1"/>
             </a:pPr>
             <a:r>
-              <a:rPr sz="1400"/>
+              <a:rPr sz="1300"/>
               <a:t>💡 Dijital Vatandaşlık Yemini:</a:t>
             </a:r>
           </a:p>
           <a:p>
             <a:pPr>
-              <a:spcAft>
-                <a:spcPts val="1200"/>
-              </a:spcAft>
-              <a:defRPr sz="2000"/>
-            </a:pPr>
-            <a:r>
-              <a:rPr sz="1400"/>
+              <a:lnSpc>
+                <a:spcPct val="90000"/>
+              </a:lnSpc>
+              <a:spcAft>
+                <a:spcPts val="300"/>
+              </a:spcAft>
+              <a:defRPr sz="2000"/>
+            </a:pPr>
+            <a:r>
+              <a:rPr sz="1300"/>
               <a:t>'Ben dijital dünyada saygılı, dürüst, güvenli,</a:t>
             </a:r>
           </a:p>
           <a:p>
             <a:pPr>
-              <a:spcAft>
-                <a:spcPts val="1200"/>
-              </a:spcAft>
-              <a:defRPr sz="2000"/>
-            </a:pPr>
-            <a:r>
-              <a:rPr sz="1400"/>
+              <a:lnSpc>
+                <a:spcPct val="90000"/>
+              </a:lnSpc>
+              <a:spcAft>
+                <a:spcPts val="300"/>
+              </a:spcAft>
+              <a:defRPr sz="2000"/>
+            </a:pPr>
+            <a:r>
+              <a:rPr sz="1300"/>
               <a:t>bilinçli ve sorumlu davranacağıma söz veriyorum!'</a:t>
             </a:r>
           </a:p>
           <a:p>
             <a:pPr>
-              <a:spcAft>
-                <a:spcPts val="1200"/>
-              </a:spcAft>
-              <a:defRPr sz="2000"/>
-            </a:pPr>
-          </a:p>
-          <a:p>
-            <a:pPr>
-              <a:spcAft>
-                <a:spcPts val="1200"/>
+              <a:lnSpc>
+                <a:spcPct val="90000"/>
+              </a:lnSpc>
+              <a:spcAft>
+                <a:spcPts val="300"/>
+              </a:spcAft>
+              <a:defRPr sz="2000"/>
+            </a:pPr>
+          </a:p>
+          <a:p>
+            <a:pPr>
+              <a:lnSpc>
+                <a:spcPct val="90000"/>
+              </a:lnSpc>
+              <a:spcAft>
+                <a:spcPts val="300"/>
               </a:spcAft>
               <a:defRPr sz="2000" b="1"/>
             </a:pPr>
             <a:r>
-              <a:rPr sz="1400"/>
+              <a:rPr sz="1300"/>
               <a:t>🎯 İmzala ve uygula!</a:t>
             </a:r>
           </a:p>
@@ -6914,7 +7196,7 @@
         </p:nvSpPr>
         <p:spPr/>
         <p:txBody>
-          <a:bodyPr/>
+          <a:bodyPr wrap="square"/>
           <a:lstStyle/>
           <a:p>
             <a:pPr>
@@ -6968,280 +7250,364 @@
             <a:spAutoFit/>
           </a:bodyPr>
           <a:lstStyle/>
-          <a:p/>
-          <a:p>
-            <a:pPr>
-              <a:spcAft>
-                <a:spcPts val="1200"/>
-              </a:spcAft>
-              <a:defRPr sz="2000"/>
-            </a:pPr>
-            <a:r>
-              <a:rPr sz="1400"/>
+          <a:p>
+            <a:pPr>
+              <a:lnSpc>
+                <a:spcPct val="90000"/>
+              </a:lnSpc>
+              <a:spcAft>
+                <a:spcPts val="300"/>
+              </a:spcAft>
+            </a:pPr>
+          </a:p>
+          <a:p>
+            <a:pPr>
+              <a:lnSpc>
+                <a:spcPct val="90000"/>
+              </a:lnSpc>
+              <a:spcAft>
+                <a:spcPts val="300"/>
+              </a:spcAft>
+              <a:defRPr sz="2000"/>
+            </a:pPr>
+            <a:r>
+              <a:rPr sz="1300"/>
               <a:t>2FA = İki kademeli güvenlik sistemi</a:t>
             </a:r>
           </a:p>
           <a:p>
             <a:pPr>
-              <a:spcAft>
-                <a:spcPts val="1200"/>
-              </a:spcAft>
-              <a:defRPr sz="2000"/>
-            </a:pPr>
-          </a:p>
-          <a:p>
-            <a:pPr>
-              <a:spcAft>
-                <a:spcPts val="1200"/>
+              <a:lnSpc>
+                <a:spcPct val="90000"/>
+              </a:lnSpc>
+              <a:spcAft>
+                <a:spcPts val="300"/>
+              </a:spcAft>
+              <a:defRPr sz="2000"/>
+            </a:pPr>
+          </a:p>
+          <a:p>
+            <a:pPr>
+              <a:lnSpc>
+                <a:spcPct val="90000"/>
+              </a:lnSpc>
+              <a:spcAft>
+                <a:spcPts val="300"/>
               </a:spcAft>
               <a:defRPr sz="2000" b="1"/>
             </a:pPr>
             <a:r>
-              <a:rPr sz="1400"/>
+              <a:rPr sz="1300"/>
               <a:t>✅ Nasıl Çalışır?</a:t>
             </a:r>
           </a:p>
           <a:p>
             <a:pPr>
-              <a:spcAft>
-                <a:spcPts val="1200"/>
-              </a:spcAft>
-              <a:defRPr sz="2000"/>
-            </a:pPr>
-          </a:p>
-          <a:p>
-            <a:pPr>
-              <a:spcAft>
-                <a:spcPts val="1200"/>
-              </a:spcAft>
-              <a:defRPr sz="2000"/>
-            </a:pPr>
-            <a:r>
-              <a:rPr sz="1400"/>
+              <a:lnSpc>
+                <a:spcPct val="90000"/>
+              </a:lnSpc>
+              <a:spcAft>
+                <a:spcPts val="300"/>
+              </a:spcAft>
+              <a:defRPr sz="2000"/>
+            </a:pPr>
+          </a:p>
+          <a:p>
+            <a:pPr>
+              <a:lnSpc>
+                <a:spcPct val="90000"/>
+              </a:lnSpc>
+              <a:spcAft>
+                <a:spcPts val="300"/>
+              </a:spcAft>
+              <a:defRPr sz="2000"/>
+            </a:pPr>
+            <a:r>
+              <a:rPr sz="1300"/>
               <a:t>1️⃣ Adım 1: Şifre gir</a:t>
             </a:r>
           </a:p>
           <a:p>
             <a:pPr>
-              <a:spcAft>
-                <a:spcPts val="1200"/>
-              </a:spcAft>
-              <a:defRPr sz="2000"/>
-            </a:pPr>
-            <a:r>
-              <a:rPr sz="1400"/>
+              <a:lnSpc>
+                <a:spcPct val="90000"/>
+              </a:lnSpc>
+              <a:spcAft>
+                <a:spcPts val="300"/>
+              </a:spcAft>
+              <a:defRPr sz="2000"/>
+            </a:pPr>
+            <a:r>
+              <a:rPr sz="1300"/>
               <a:t>2️⃣ Adım 2: Kod gir (SMS veya uygulama)</a:t>
             </a:r>
           </a:p>
           <a:p>
             <a:pPr>
-              <a:spcAft>
-                <a:spcPts val="1200"/>
-              </a:spcAft>
-              <a:defRPr sz="2000"/>
-            </a:pPr>
-          </a:p>
-          <a:p>
-            <a:pPr>
-              <a:spcAft>
-                <a:spcPts val="1200"/>
+              <a:lnSpc>
+                <a:spcPct val="90000"/>
+              </a:lnSpc>
+              <a:spcAft>
+                <a:spcPts val="300"/>
+              </a:spcAft>
+              <a:defRPr sz="2000"/>
+            </a:pPr>
+          </a:p>
+          <a:p>
+            <a:pPr>
+              <a:lnSpc>
+                <a:spcPct val="90000"/>
+              </a:lnSpc>
+              <a:spcAft>
+                <a:spcPts val="300"/>
               </a:spcAft>
               <a:defRPr sz="2000" b="1"/>
             </a:pPr>
             <a:r>
-              <a:rPr sz="1400"/>
+              <a:rPr sz="1300"/>
               <a:t>📌 Örnek:</a:t>
             </a:r>
           </a:p>
           <a:p>
             <a:pPr lvl="1">
-              <a:spcAft>
-                <a:spcPts val="1200"/>
-              </a:spcAft>
-              <a:defRPr sz="1800"/>
-            </a:pPr>
-            <a:r>
-              <a:rPr sz="1400"/>
+              <a:lnSpc>
+                <a:spcPct val="90000"/>
+              </a:lnSpc>
+              <a:spcAft>
+                <a:spcPts val="300"/>
+              </a:spcAft>
+              <a:defRPr sz="1800"/>
+            </a:pPr>
+            <a:r>
+              <a:rPr sz="1300"/>
               <a:t>    • Gmail'e giriş yap</a:t>
             </a:r>
           </a:p>
           <a:p>
             <a:pPr lvl="1">
-              <a:spcAft>
-                <a:spcPts val="1200"/>
-              </a:spcAft>
-              <a:defRPr sz="1800"/>
-            </a:pPr>
-            <a:r>
-              <a:rPr sz="1400"/>
+              <a:lnSpc>
+                <a:spcPct val="90000"/>
+              </a:lnSpc>
+              <a:spcAft>
+                <a:spcPts val="300"/>
+              </a:spcAft>
+              <a:defRPr sz="1800"/>
+            </a:pPr>
+            <a:r>
+              <a:rPr sz="1300"/>
               <a:t>    • Şifreni gir</a:t>
             </a:r>
           </a:p>
           <a:p>
             <a:pPr lvl="1">
-              <a:spcAft>
-                <a:spcPts val="1200"/>
-              </a:spcAft>
-              <a:defRPr sz="1800"/>
-            </a:pPr>
-            <a:r>
-              <a:rPr sz="1400"/>
+              <a:lnSpc>
+                <a:spcPct val="90000"/>
+              </a:lnSpc>
+              <a:spcAft>
+                <a:spcPts val="300"/>
+              </a:spcAft>
+              <a:defRPr sz="1800"/>
+            </a:pPr>
+            <a:r>
+              <a:rPr sz="1300"/>
               <a:t>    • Telefonuna kod gelir (örn: 123456)</a:t>
             </a:r>
           </a:p>
           <a:p>
             <a:pPr lvl="1">
-              <a:spcAft>
-                <a:spcPts val="1200"/>
-              </a:spcAft>
-              <a:defRPr sz="1800"/>
-            </a:pPr>
-            <a:r>
-              <a:rPr sz="1400"/>
+              <a:lnSpc>
+                <a:spcPct val="90000"/>
+              </a:lnSpc>
+              <a:spcAft>
+                <a:spcPts val="300"/>
+              </a:spcAft>
+              <a:defRPr sz="1800"/>
+            </a:pPr>
+            <a:r>
+              <a:rPr sz="1300"/>
               <a:t>    • Kodu gir → Giriş başarılı</a:t>
             </a:r>
           </a:p>
           <a:p>
             <a:pPr>
-              <a:spcAft>
-                <a:spcPts val="1200"/>
-              </a:spcAft>
-              <a:defRPr sz="2000"/>
-            </a:pPr>
-          </a:p>
-          <a:p>
-            <a:pPr>
-              <a:spcAft>
-                <a:spcPts val="1200"/>
+              <a:lnSpc>
+                <a:spcPct val="90000"/>
+              </a:lnSpc>
+              <a:spcAft>
+                <a:spcPts val="300"/>
+              </a:spcAft>
+              <a:defRPr sz="2000"/>
+            </a:pPr>
+          </a:p>
+          <a:p>
+            <a:pPr>
+              <a:lnSpc>
+                <a:spcPct val="90000"/>
+              </a:lnSpc>
+              <a:spcAft>
+                <a:spcPts val="300"/>
               </a:spcAft>
               <a:defRPr sz="2000" b="1"/>
             </a:pPr>
             <a:r>
-              <a:rPr sz="1400"/>
+              <a:rPr sz="1300"/>
               <a:t>✅ Neden Kullanmalısın?</a:t>
             </a:r>
           </a:p>
           <a:p>
             <a:pPr lvl="1">
-              <a:spcAft>
-                <a:spcPts val="1200"/>
-              </a:spcAft>
-              <a:defRPr sz="1800"/>
-            </a:pPr>
-            <a:r>
-              <a:rPr sz="1400"/>
+              <a:lnSpc>
+                <a:spcPct val="90000"/>
+              </a:lnSpc>
+              <a:spcAft>
+                <a:spcPts val="300"/>
+              </a:spcAft>
+              <a:defRPr sz="1800"/>
+            </a:pPr>
+            <a:r>
+              <a:rPr sz="1300"/>
               <a:t>    • Şifren çalınsa bile girişi engelliyor</a:t>
             </a:r>
           </a:p>
           <a:p>
             <a:pPr lvl="1">
-              <a:spcAft>
-                <a:spcPts val="1200"/>
-              </a:spcAft>
-              <a:defRPr sz="1800"/>
-            </a:pPr>
-            <a:r>
-              <a:rPr sz="1400"/>
+              <a:lnSpc>
+                <a:spcPct val="90000"/>
+              </a:lnSpc>
+              <a:spcAft>
+                <a:spcPts val="300"/>
+              </a:spcAft>
+              <a:defRPr sz="1800"/>
+            </a:pPr>
+            <a:r>
+              <a:rPr sz="1300"/>
               <a:t>    • Çok daha güvenli</a:t>
             </a:r>
           </a:p>
           <a:p>
             <a:pPr lvl="1">
-              <a:spcAft>
-                <a:spcPts val="1200"/>
-              </a:spcAft>
-              <a:defRPr sz="1800"/>
-            </a:pPr>
-            <a:r>
-              <a:rPr sz="1400"/>
+              <a:lnSpc>
+                <a:spcPct val="90000"/>
+              </a:lnSpc>
+              <a:spcAft>
+                <a:spcPts val="300"/>
+              </a:spcAft>
+              <a:defRPr sz="1800"/>
+            </a:pPr>
+            <a:r>
+              <a:rPr sz="1300"/>
               <a:t>    • Bildirim alırsın (biri girmeye çalışırsa)</a:t>
             </a:r>
           </a:p>
           <a:p>
             <a:pPr>
-              <a:spcAft>
-                <a:spcPts val="1200"/>
-              </a:spcAft>
-              <a:defRPr sz="2000"/>
-            </a:pPr>
-          </a:p>
-          <a:p>
-            <a:pPr>
-              <a:spcAft>
-                <a:spcPts val="1200"/>
+              <a:lnSpc>
+                <a:spcPct val="90000"/>
+              </a:lnSpc>
+              <a:spcAft>
+                <a:spcPts val="300"/>
+              </a:spcAft>
+              <a:defRPr sz="2000"/>
+            </a:pPr>
+          </a:p>
+          <a:p>
+            <a:pPr>
+              <a:lnSpc>
+                <a:spcPct val="90000"/>
+              </a:lnSpc>
+              <a:spcAft>
+                <a:spcPts val="300"/>
               </a:spcAft>
               <a:defRPr sz="2000" b="1"/>
             </a:pPr>
             <a:r>
-              <a:rPr sz="1400"/>
+              <a:rPr sz="1300"/>
               <a:t>📌 2FA Nereden Açılır?</a:t>
             </a:r>
           </a:p>
           <a:p>
             <a:pPr lvl="1">
-              <a:spcAft>
-                <a:spcPts val="1200"/>
-              </a:spcAft>
-              <a:defRPr sz="1800"/>
-            </a:pPr>
-            <a:r>
-              <a:rPr sz="1400"/>
+              <a:lnSpc>
+                <a:spcPct val="90000"/>
+              </a:lnSpc>
+              <a:spcAft>
+                <a:spcPts val="300"/>
+              </a:spcAft>
+              <a:defRPr sz="1800"/>
+            </a:pPr>
+            <a:r>
+              <a:rPr sz="1300"/>
               <a:t>    • Google hesabı → Güvenlik</a:t>
             </a:r>
           </a:p>
           <a:p>
             <a:pPr lvl="1">
-              <a:spcAft>
-                <a:spcPts val="1200"/>
-              </a:spcAft>
-              <a:defRPr sz="1800"/>
-            </a:pPr>
-            <a:r>
-              <a:rPr sz="1400"/>
+              <a:lnSpc>
+                <a:spcPct val="90000"/>
+              </a:lnSpc>
+              <a:spcAft>
+                <a:spcPts val="300"/>
+              </a:spcAft>
+              <a:defRPr sz="1800"/>
+            </a:pPr>
+            <a:r>
+              <a:rPr sz="1300"/>
               <a:t>    • Instagram → Ayarlar → Güvenlik</a:t>
             </a:r>
           </a:p>
           <a:p>
             <a:pPr lvl="1">
-              <a:spcAft>
-                <a:spcPts val="1200"/>
-              </a:spcAft>
-              <a:defRPr sz="1800"/>
-            </a:pPr>
-            <a:r>
-              <a:rPr sz="1400"/>
+              <a:lnSpc>
+                <a:spcPct val="90000"/>
+              </a:lnSpc>
+              <a:spcAft>
+                <a:spcPts val="300"/>
+              </a:spcAft>
+              <a:defRPr sz="1800"/>
+            </a:pPr>
+            <a:r>
+              <a:rPr sz="1300"/>
               <a:t>    • Çoğu uygulamada 'Güvenlik' bölümünde</a:t>
             </a:r>
           </a:p>
           <a:p>
             <a:pPr>
-              <a:spcAft>
-                <a:spcPts val="1200"/>
-              </a:spcAft>
-              <a:defRPr sz="2000"/>
-            </a:pPr>
-          </a:p>
-          <a:p>
-            <a:pPr>
-              <a:spcAft>
-                <a:spcPts val="1200"/>
+              <a:lnSpc>
+                <a:spcPct val="90000"/>
+              </a:lnSpc>
+              <a:spcAft>
+                <a:spcPts val="300"/>
+              </a:spcAft>
+              <a:defRPr sz="2000"/>
+            </a:pPr>
+          </a:p>
+          <a:p>
+            <a:pPr>
+              <a:lnSpc>
+                <a:spcPct val="90000"/>
+              </a:lnSpc>
+              <a:spcAft>
+                <a:spcPts val="300"/>
               </a:spcAft>
               <a:defRPr sz="2000" b="1"/>
             </a:pPr>
             <a:r>
-              <a:rPr sz="1400"/>
+              <a:rPr sz="1300"/>
               <a:t>💡 Mutlaka 2FA'yı aç!</a:t>
             </a:r>
           </a:p>
           <a:p>
             <a:pPr>
-              <a:spcAft>
-                <a:spcPts val="1200"/>
-              </a:spcAft>
-              <a:defRPr sz="2000"/>
-            </a:pPr>
-            <a:r>
-              <a:rPr sz="1400"/>
+              <a:lnSpc>
+                <a:spcPct val="90000"/>
+              </a:lnSpc>
+              <a:spcAft>
+                <a:spcPts val="300"/>
+              </a:spcAft>
+              <a:defRPr sz="2000"/>
+            </a:pPr>
+            <a:r>
+              <a:rPr sz="1300"/>
               <a:t>Şifren = Kilit, 2FA = Alarm sistemi</a:t>
             </a:r>
           </a:p>
@@ -7277,7 +7643,7 @@
         </p:nvSpPr>
         <p:spPr/>
         <p:txBody>
-          <a:bodyPr/>
+          <a:bodyPr wrap="square"/>
           <a:lstStyle/>
           <a:p>
             <a:pPr>
@@ -7331,216 +7697,282 @@
             <a:spAutoFit/>
           </a:bodyPr>
           <a:lstStyle/>
-          <a:p/>
-          <a:p>
-            <a:pPr>
-              <a:spcAft>
-                <a:spcPts val="1200"/>
-              </a:spcAft>
-              <a:defRPr sz="2000"/>
-            </a:pPr>
-            <a:r>
-              <a:rPr sz="1600"/>
+          <a:p>
+            <a:pPr>
+              <a:lnSpc>
+                <a:spcPct val="90000"/>
+              </a:lnSpc>
+              <a:spcAft>
+                <a:spcPts val="300"/>
+              </a:spcAft>
+            </a:pPr>
+          </a:p>
+          <a:p>
+            <a:pPr>
+              <a:lnSpc>
+                <a:spcPct val="90000"/>
+              </a:lnSpc>
+              <a:spcAft>
+                <a:spcPts val="300"/>
+              </a:spcAft>
+              <a:defRPr sz="2000"/>
+            </a:pPr>
+            <a:r>
+              <a:rPr sz="1400"/>
               <a:t>Bu ünitede neler öğrendik?</a:t>
             </a:r>
           </a:p>
           <a:p>
             <a:pPr>
-              <a:spcAft>
-                <a:spcPts val="1200"/>
-              </a:spcAft>
-              <a:defRPr sz="2000"/>
-            </a:pPr>
-          </a:p>
-          <a:p>
-            <a:pPr>
-              <a:spcAft>
-                <a:spcPts val="1200"/>
+              <a:lnSpc>
+                <a:spcPct val="90000"/>
+              </a:lnSpc>
+              <a:spcAft>
+                <a:spcPts val="300"/>
+              </a:spcAft>
+              <a:defRPr sz="2000"/>
+            </a:pPr>
+          </a:p>
+          <a:p>
+            <a:pPr>
+              <a:lnSpc>
+                <a:spcPct val="90000"/>
+              </a:lnSpc>
+              <a:spcAft>
+                <a:spcPts val="300"/>
               </a:spcAft>
               <a:defRPr sz="2000" b="1"/>
             </a:pPr>
             <a:r>
-              <a:rPr sz="1600"/>
+              <a:rPr sz="1400"/>
               <a:t>✅ Dijital etik ve dijital ayak izi</a:t>
             </a:r>
           </a:p>
           <a:p>
             <a:pPr>
-              <a:spcAft>
-                <a:spcPts val="1200"/>
+              <a:lnSpc>
+                <a:spcPct val="90000"/>
+              </a:lnSpc>
+              <a:spcAft>
+                <a:spcPts val="300"/>
               </a:spcAft>
               <a:defRPr sz="2000" b="1"/>
             </a:pPr>
             <a:r>
-              <a:rPr sz="1600"/>
+              <a:rPr sz="1400"/>
               <a:t>✅ Gizlilik ve mahremiyet</a:t>
             </a:r>
           </a:p>
           <a:p>
             <a:pPr>
-              <a:spcAft>
-                <a:spcPts val="1200"/>
+              <a:lnSpc>
+                <a:spcPct val="90000"/>
+              </a:lnSpc>
+              <a:spcAft>
+                <a:spcPts val="300"/>
               </a:spcAft>
               <a:defRPr sz="2000" b="1"/>
             </a:pPr>
             <a:r>
-              <a:rPr sz="1600"/>
+              <a:rPr sz="1400"/>
               <a:t>✅ Kişisel veri güvenliği</a:t>
             </a:r>
           </a:p>
           <a:p>
             <a:pPr>
-              <a:spcAft>
-                <a:spcPts val="1200"/>
+              <a:lnSpc>
+                <a:spcPct val="90000"/>
+              </a:lnSpc>
+              <a:spcAft>
+                <a:spcPts val="300"/>
               </a:spcAft>
               <a:defRPr sz="2000" b="1"/>
             </a:pPr>
             <a:r>
-              <a:rPr sz="1600"/>
+              <a:rPr sz="1400"/>
               <a:t>✅ Güçlü şifre oluşturma ve koruma</a:t>
             </a:r>
           </a:p>
           <a:p>
             <a:pPr>
-              <a:spcAft>
-                <a:spcPts val="1200"/>
+              <a:lnSpc>
+                <a:spcPct val="90000"/>
+              </a:lnSpc>
+              <a:spcAft>
+                <a:spcPts val="300"/>
               </a:spcAft>
               <a:defRPr sz="2000" b="1"/>
             </a:pPr>
             <a:r>
-              <a:rPr sz="1600"/>
+              <a:rPr sz="1400"/>
               <a:t>✅ Phishing (oltalama) saldırıları</a:t>
             </a:r>
           </a:p>
           <a:p>
             <a:pPr>
-              <a:spcAft>
-                <a:spcPts val="1200"/>
+              <a:lnSpc>
+                <a:spcPct val="90000"/>
+              </a:lnSpc>
+              <a:spcAft>
+                <a:spcPts val="300"/>
               </a:spcAft>
               <a:defRPr sz="2000" b="1"/>
             </a:pPr>
             <a:r>
-              <a:rPr sz="1600"/>
+              <a:rPr sz="1400"/>
               <a:t>✅ Zararlı yazılımlar ve korunma yöntemleri</a:t>
             </a:r>
           </a:p>
           <a:p>
             <a:pPr>
-              <a:spcAft>
-                <a:spcPts val="1200"/>
+              <a:lnSpc>
+                <a:spcPct val="90000"/>
+              </a:lnSpc>
+              <a:spcAft>
+                <a:spcPts val="300"/>
               </a:spcAft>
               <a:defRPr sz="2000" b="1"/>
             </a:pPr>
             <a:r>
-              <a:rPr sz="1600"/>
+              <a:rPr sz="1400"/>
               <a:t>✅ Sosyal mühendislik</a:t>
             </a:r>
           </a:p>
           <a:p>
             <a:pPr>
-              <a:spcAft>
-                <a:spcPts val="1200"/>
+              <a:lnSpc>
+                <a:spcPct val="90000"/>
+              </a:lnSpc>
+              <a:spcAft>
+                <a:spcPts val="300"/>
               </a:spcAft>
               <a:defRPr sz="2000" b="1"/>
             </a:pPr>
             <a:r>
-              <a:rPr sz="1600"/>
+              <a:rPr sz="1400"/>
               <a:t>✅ Güvenli dijital vatandaşlık</a:t>
             </a:r>
           </a:p>
           <a:p>
             <a:pPr>
-              <a:spcAft>
-                <a:spcPts val="1200"/>
+              <a:lnSpc>
+                <a:spcPct val="90000"/>
+              </a:lnSpc>
+              <a:spcAft>
+                <a:spcPts val="300"/>
               </a:spcAft>
               <a:defRPr sz="2000" b="1"/>
             </a:pPr>
             <a:r>
-              <a:rPr sz="1600"/>
+              <a:rPr sz="1400"/>
               <a:t>✅ İki faktörlü doğrulama (2FA)</a:t>
             </a:r>
           </a:p>
           <a:p>
             <a:pPr>
-              <a:spcAft>
-                <a:spcPts val="1200"/>
-              </a:spcAft>
-              <a:defRPr sz="2000"/>
-            </a:pPr>
-          </a:p>
-          <a:p>
-            <a:pPr>
-              <a:spcAft>
-                <a:spcPts val="1200"/>
+              <a:lnSpc>
+                <a:spcPct val="90000"/>
+              </a:lnSpc>
+              <a:spcAft>
+                <a:spcPts val="300"/>
+              </a:spcAft>
+              <a:defRPr sz="2000"/>
+            </a:pPr>
+          </a:p>
+          <a:p>
+            <a:pPr>
+              <a:lnSpc>
+                <a:spcPct val="90000"/>
+              </a:lnSpc>
+              <a:spcAft>
+                <a:spcPts val="300"/>
               </a:spcAft>
               <a:defRPr sz="2000" b="1"/>
             </a:pPr>
             <a:r>
-              <a:rPr sz="1600"/>
+              <a:rPr sz="1400"/>
               <a:t>💡 Anahtar Mesaj:</a:t>
             </a:r>
           </a:p>
           <a:p>
             <a:pPr>
-              <a:spcAft>
-                <a:spcPts val="1200"/>
-              </a:spcAft>
-              <a:defRPr sz="2000"/>
-            </a:pPr>
-            <a:r>
-              <a:rPr sz="1600"/>
+              <a:lnSpc>
+                <a:spcPct val="90000"/>
+              </a:lnSpc>
+              <a:spcAft>
+                <a:spcPts val="300"/>
+              </a:spcAft>
+              <a:defRPr sz="2000"/>
+            </a:pPr>
+            <a:r>
+              <a:rPr sz="1400"/>
               <a:t>Dijital dünyada da gerçek hayat gibi etik,</a:t>
             </a:r>
           </a:p>
           <a:p>
             <a:pPr>
-              <a:spcAft>
-                <a:spcPts val="1200"/>
-              </a:spcAft>
-              <a:defRPr sz="2000"/>
-            </a:pPr>
-            <a:r>
-              <a:rPr sz="1600"/>
+              <a:lnSpc>
+                <a:spcPct val="90000"/>
+              </a:lnSpc>
+              <a:spcAft>
+                <a:spcPts val="300"/>
+              </a:spcAft>
+              <a:defRPr sz="2000"/>
+            </a:pPr>
+            <a:r>
+              <a:rPr sz="1400"/>
               <a:t>güvenli ve sorumlu davranmalısın!</a:t>
             </a:r>
           </a:p>
           <a:p>
             <a:pPr>
-              <a:spcAft>
-                <a:spcPts val="1200"/>
-              </a:spcAft>
-              <a:defRPr sz="2000"/>
-            </a:pPr>
-          </a:p>
-          <a:p>
-            <a:pPr>
-              <a:spcAft>
-                <a:spcPts val="1200"/>
+              <a:lnSpc>
+                <a:spcPct val="90000"/>
+              </a:lnSpc>
+              <a:spcAft>
+                <a:spcPts val="300"/>
+              </a:spcAft>
+              <a:defRPr sz="2000"/>
+            </a:pPr>
+          </a:p>
+          <a:p>
+            <a:pPr>
+              <a:lnSpc>
+                <a:spcPct val="90000"/>
+              </a:lnSpc>
+              <a:spcAft>
+                <a:spcPts val="300"/>
               </a:spcAft>
               <a:defRPr sz="2000" b="1"/>
             </a:pPr>
             <a:r>
-              <a:rPr sz="1600"/>
+              <a:rPr sz="1400"/>
               <a:t>🎯 Artık güvenli bir dijital vatandaşsın!</a:t>
             </a:r>
           </a:p>
           <a:p>
             <a:pPr>
-              <a:spcAft>
-                <a:spcPts val="1200"/>
-              </a:spcAft>
-              <a:defRPr sz="2000"/>
-            </a:pPr>
-          </a:p>
-          <a:p>
-            <a:pPr>
-              <a:spcAft>
-                <a:spcPts val="1200"/>
-              </a:spcAft>
-              <a:defRPr sz="2000"/>
-            </a:pPr>
-            <a:r>
-              <a:rPr sz="1600"/>
+              <a:lnSpc>
+                <a:spcPct val="90000"/>
+              </a:lnSpc>
+              <a:spcAft>
+                <a:spcPts val="300"/>
+              </a:spcAft>
+              <a:defRPr sz="2000"/>
+            </a:pPr>
+          </a:p>
+          <a:p>
+            <a:pPr>
+              <a:lnSpc>
+                <a:spcPct val="90000"/>
+              </a:lnSpc>
+              <a:spcAft>
+                <a:spcPts val="300"/>
+              </a:spcAft>
+              <a:defRPr sz="2000"/>
+            </a:pPr>
+            <a:r>
+              <a:rPr sz="1400"/>
               <a:t>🔐 Kendini ve başkalarını koru!</a:t>
             </a:r>
           </a:p>
@@ -7576,7 +8008,7 @@
         </p:nvSpPr>
         <p:spPr/>
         <p:txBody>
-          <a:bodyPr/>
+          <a:bodyPr wrap="square"/>
           <a:lstStyle/>
           <a:p>
             <a:pPr>
@@ -7630,240 +8062,312 @@
             <a:spAutoFit/>
           </a:bodyPr>
           <a:lstStyle/>
-          <a:p/>
-          <a:p>
-            <a:pPr>
-              <a:spcAft>
-                <a:spcPts val="1200"/>
-              </a:spcAft>
-              <a:defRPr sz="2000"/>
-            </a:pPr>
-            <a:r>
-              <a:rPr sz="1400"/>
+          <a:p>
+            <a:pPr>
+              <a:lnSpc>
+                <a:spcPct val="90000"/>
+              </a:lnSpc>
+              <a:spcAft>
+                <a:spcPts val="300"/>
+              </a:spcAft>
+            </a:pPr>
+          </a:p>
+          <a:p>
+            <a:pPr>
+              <a:lnSpc>
+                <a:spcPct val="90000"/>
+              </a:lnSpc>
+              <a:spcAft>
+                <a:spcPts val="300"/>
+              </a:spcAft>
+              <a:defRPr sz="2000"/>
+            </a:pPr>
+            <a:r>
+              <a:rPr sz="1300"/>
               <a:t>🎥 İzlenecek Videolar:</a:t>
             </a:r>
           </a:p>
           <a:p>
             <a:pPr lvl="1">
-              <a:spcAft>
-                <a:spcPts val="1200"/>
-              </a:spcAft>
-              <a:defRPr sz="1800"/>
-            </a:pPr>
-            <a:r>
-              <a:rPr sz="1400"/>
+              <a:lnSpc>
+                <a:spcPct val="90000"/>
+              </a:lnSpc>
+              <a:spcAft>
+                <a:spcPts val="300"/>
+              </a:spcAft>
+              <a:defRPr sz="1800"/>
+            </a:pPr>
+            <a:r>
+              <a:rPr sz="1300"/>
               <a:t>    • 'Dijital Vatandaşlık' - MEB</a:t>
             </a:r>
           </a:p>
           <a:p>
             <a:pPr lvl="1">
-              <a:spcAft>
-                <a:spcPts val="1200"/>
-              </a:spcAft>
-              <a:defRPr sz="1800"/>
-            </a:pPr>
-            <a:r>
-              <a:rPr sz="1400"/>
+              <a:lnSpc>
+                <a:spcPct val="90000"/>
+              </a:lnSpc>
+              <a:spcAft>
+                <a:spcPts val="300"/>
+              </a:spcAft>
+              <a:defRPr sz="1800"/>
+            </a:pPr>
+            <a:r>
+              <a:rPr sz="1300"/>
               <a:t>    • 'Güçlü Şifre Nasıl Oluşturulur?'</a:t>
             </a:r>
           </a:p>
           <a:p>
             <a:pPr lvl="1">
-              <a:spcAft>
-                <a:spcPts val="1200"/>
-              </a:spcAft>
-              <a:defRPr sz="1800"/>
-            </a:pPr>
-            <a:r>
-              <a:rPr sz="1400"/>
+              <a:lnSpc>
+                <a:spcPct val="90000"/>
+              </a:lnSpc>
+              <a:spcAft>
+                <a:spcPts val="300"/>
+              </a:spcAft>
+              <a:defRPr sz="1800"/>
+            </a:pPr>
+            <a:r>
+              <a:rPr sz="1300"/>
               <a:t>    • 'Phishing Saldırıları' - Animasyon</a:t>
             </a:r>
           </a:p>
           <a:p>
             <a:pPr lvl="1">
-              <a:spcAft>
-                <a:spcPts val="1200"/>
-              </a:spcAft>
-              <a:defRPr sz="1800"/>
-            </a:pPr>
-            <a:r>
-              <a:rPr sz="1400"/>
+              <a:lnSpc>
+                <a:spcPct val="90000"/>
+              </a:lnSpc>
+              <a:spcAft>
+                <a:spcPts val="300"/>
+              </a:spcAft>
+              <a:defRPr sz="1800"/>
+            </a:pPr>
+            <a:r>
+              <a:rPr sz="1300"/>
               <a:t>    • 'Siber Güvenlik İpuçları'</a:t>
             </a:r>
           </a:p>
           <a:p>
             <a:pPr>
-              <a:spcAft>
-                <a:spcPts val="1200"/>
-              </a:spcAft>
-              <a:defRPr sz="2000"/>
-            </a:pPr>
-          </a:p>
-          <a:p>
-            <a:pPr>
-              <a:spcAft>
-                <a:spcPts val="1200"/>
-              </a:spcAft>
-              <a:defRPr sz="2000"/>
-            </a:pPr>
-            <a:r>
-              <a:rPr sz="1400"/>
+              <a:lnSpc>
+                <a:spcPct val="90000"/>
+              </a:lnSpc>
+              <a:spcAft>
+                <a:spcPts val="300"/>
+              </a:spcAft>
+              <a:defRPr sz="2000"/>
+            </a:pPr>
+          </a:p>
+          <a:p>
+            <a:pPr>
+              <a:lnSpc>
+                <a:spcPct val="90000"/>
+              </a:lnSpc>
+              <a:spcAft>
+                <a:spcPts val="300"/>
+              </a:spcAft>
+              <a:defRPr sz="2000"/>
+            </a:pPr>
+            <a:r>
+              <a:rPr sz="1300"/>
               <a:t>🌐 Keşfedilecek Siteler:</a:t>
             </a:r>
           </a:p>
           <a:p>
             <a:pPr lvl="1">
-              <a:spcAft>
-                <a:spcPts val="1200"/>
-              </a:spcAft>
-              <a:defRPr sz="1800"/>
-            </a:pPr>
-            <a:r>
-              <a:rPr sz="1400"/>
+              <a:lnSpc>
+                <a:spcPct val="90000"/>
+              </a:lnSpc>
+              <a:spcAft>
+                <a:spcPts val="300"/>
+              </a:spcAft>
+              <a:defRPr sz="1800"/>
+            </a:pPr>
+            <a:r>
+              <a:rPr sz="1300"/>
               <a:t>    • https://guvenliweb.org.tr</a:t>
             </a:r>
           </a:p>
           <a:p>
             <a:pPr lvl="1">
-              <a:spcAft>
-                <a:spcPts val="1200"/>
-              </a:spcAft>
-              <a:defRPr sz="1800"/>
-            </a:pPr>
-            <a:r>
-              <a:rPr sz="1400"/>
+              <a:lnSpc>
+                <a:spcPct val="90000"/>
+              </a:lnSpc>
+              <a:spcAft>
+                <a:spcPts val="300"/>
+              </a:spcAft>
+              <a:defRPr sz="1800"/>
+            </a:pPr>
+            <a:r>
+              <a:rPr sz="1300"/>
               <a:t>    • https://internetguvenlik.org</a:t>
             </a:r>
           </a:p>
           <a:p>
             <a:pPr lvl="1">
-              <a:spcAft>
-                <a:spcPts val="1200"/>
-              </a:spcAft>
-              <a:defRPr sz="1800"/>
-            </a:pPr>
-            <a:r>
-              <a:rPr sz="1400"/>
+              <a:lnSpc>
+                <a:spcPct val="90000"/>
+              </a:lnSpc>
+              <a:spcAft>
+                <a:spcPts val="300"/>
+              </a:spcAft>
+              <a:defRPr sz="1800"/>
+            </a:pPr>
+            <a:r>
+              <a:rPr sz="1300"/>
               <a:t>    • https://guvenliinternet.meb.gov.tr</a:t>
             </a:r>
           </a:p>
           <a:p>
             <a:pPr>
-              <a:spcAft>
-                <a:spcPts val="1200"/>
-              </a:spcAft>
-              <a:defRPr sz="2000"/>
-            </a:pPr>
-          </a:p>
-          <a:p>
-            <a:pPr>
-              <a:spcAft>
-                <a:spcPts val="1200"/>
-              </a:spcAft>
-              <a:defRPr sz="2000"/>
-            </a:pPr>
-            <a:r>
-              <a:rPr sz="1400"/>
+              <a:lnSpc>
+                <a:spcPct val="90000"/>
+              </a:lnSpc>
+              <a:spcAft>
+                <a:spcPts val="300"/>
+              </a:spcAft>
+              <a:defRPr sz="2000"/>
+            </a:pPr>
+          </a:p>
+          <a:p>
+            <a:pPr>
+              <a:lnSpc>
+                <a:spcPct val="90000"/>
+              </a:lnSpc>
+              <a:spcAft>
+                <a:spcPts val="300"/>
+              </a:spcAft>
+              <a:defRPr sz="2000"/>
+            </a:pPr>
+            <a:r>
+              <a:rPr sz="1300"/>
               <a:t>🎮 Oyunlar:</a:t>
             </a:r>
           </a:p>
           <a:p>
             <a:pPr lvl="1">
-              <a:spcAft>
-                <a:spcPts val="1200"/>
-              </a:spcAft>
-              <a:defRPr sz="1800"/>
-            </a:pPr>
-            <a:r>
-              <a:rPr sz="1400"/>
+              <a:lnSpc>
+                <a:spcPct val="90000"/>
+              </a:lnSpc>
+              <a:spcAft>
+                <a:spcPts val="300"/>
+              </a:spcAft>
+              <a:defRPr sz="1800"/>
+            </a:pPr>
+            <a:r>
+              <a:rPr sz="1300"/>
               <a:t>    • 'Siber Güvenlik Kahramanları'</a:t>
             </a:r>
           </a:p>
           <a:p>
             <a:pPr lvl="1">
-              <a:spcAft>
-                <a:spcPts val="1200"/>
-              </a:spcAft>
-              <a:defRPr sz="1800"/>
-            </a:pPr>
-            <a:r>
-              <a:rPr sz="1400"/>
+              <a:lnSpc>
+                <a:spcPct val="90000"/>
+              </a:lnSpc>
+              <a:spcAft>
+                <a:spcPts val="300"/>
+              </a:spcAft>
+              <a:defRPr sz="1800"/>
+            </a:pPr>
+            <a:r>
+              <a:rPr sz="1300"/>
               <a:t>    • 'Şifre Gücü Test Oyunu'</a:t>
             </a:r>
           </a:p>
           <a:p>
             <a:pPr>
-              <a:spcAft>
-                <a:spcPts val="1200"/>
-              </a:spcAft>
-              <a:defRPr sz="2000"/>
-            </a:pPr>
-          </a:p>
-          <a:p>
-            <a:pPr>
-              <a:spcAft>
-                <a:spcPts val="1200"/>
-              </a:spcAft>
-              <a:defRPr sz="2000"/>
-            </a:pPr>
-            <a:r>
-              <a:rPr sz="1400"/>
+              <a:lnSpc>
+                <a:spcPct val="90000"/>
+              </a:lnSpc>
+              <a:spcAft>
+                <a:spcPts val="300"/>
+              </a:spcAft>
+              <a:defRPr sz="2000"/>
+            </a:pPr>
+          </a:p>
+          <a:p>
+            <a:pPr>
+              <a:lnSpc>
+                <a:spcPct val="90000"/>
+              </a:lnSpc>
+              <a:spcAft>
+                <a:spcPts val="300"/>
+              </a:spcAft>
+              <a:defRPr sz="2000"/>
+            </a:pPr>
+            <a:r>
+              <a:rPr sz="1300"/>
               <a:t>📖 Aktiviteler:</a:t>
             </a:r>
           </a:p>
           <a:p>
             <a:pPr lvl="1">
-              <a:spcAft>
-                <a:spcPts val="1200"/>
-              </a:spcAft>
-              <a:defRPr sz="1800"/>
-            </a:pPr>
-            <a:r>
-              <a:rPr sz="1400"/>
+              <a:lnSpc>
+                <a:spcPct val="90000"/>
+              </a:lnSpc>
+              <a:spcAft>
+                <a:spcPts val="300"/>
+              </a:spcAft>
+              <a:defRPr sz="1800"/>
+            </a:pPr>
+            <a:r>
+              <a:rPr sz="1300"/>
               <a:t>    • Güçlü şifre yarışması</a:t>
             </a:r>
           </a:p>
           <a:p>
             <a:pPr lvl="1">
-              <a:spcAft>
-                <a:spcPts val="1200"/>
-              </a:spcAft>
-              <a:defRPr sz="1800"/>
-            </a:pPr>
-            <a:r>
-              <a:rPr sz="1400"/>
+              <a:lnSpc>
+                <a:spcPct val="90000"/>
+              </a:lnSpc>
+              <a:spcAft>
+                <a:spcPts val="300"/>
+              </a:spcAft>
+              <a:defRPr sz="1800"/>
+            </a:pPr>
+            <a:r>
+              <a:rPr sz="1300"/>
               <a:t>    • Phishing e-postası tanıma</a:t>
             </a:r>
           </a:p>
           <a:p>
             <a:pPr lvl="1">
-              <a:spcAft>
-                <a:spcPts val="1200"/>
-              </a:spcAft>
-              <a:defRPr sz="1800"/>
-            </a:pPr>
-            <a:r>
-              <a:rPr sz="1400"/>
+              <a:lnSpc>
+                <a:spcPct val="90000"/>
+              </a:lnSpc>
+              <a:spcAft>
+                <a:spcPts val="300"/>
+              </a:spcAft>
+              <a:defRPr sz="1800"/>
+            </a:pPr>
+            <a:r>
+              <a:rPr sz="1300"/>
               <a:t>    • Dijital vatandaşlık posteri hazırlama</a:t>
             </a:r>
           </a:p>
           <a:p>
             <a:pPr>
-              <a:spcAft>
-                <a:spcPts val="1200"/>
-              </a:spcAft>
-              <a:defRPr sz="2000"/>
-            </a:pPr>
-          </a:p>
-          <a:p>
-            <a:pPr>
-              <a:spcAft>
-                <a:spcPts val="1200"/>
+              <a:lnSpc>
+                <a:spcPct val="90000"/>
+              </a:lnSpc>
+              <a:spcAft>
+                <a:spcPts val="300"/>
+              </a:spcAft>
+              <a:defRPr sz="2000"/>
+            </a:pPr>
+          </a:p>
+          <a:p>
+            <a:pPr>
+              <a:lnSpc>
+                <a:spcPct val="90000"/>
+              </a:lnSpc>
+              <a:spcAft>
+                <a:spcPts val="300"/>
               </a:spcAft>
               <a:defRPr sz="2000" b="1"/>
             </a:pPr>
             <a:r>
-              <a:rPr sz="1400"/>
+              <a:rPr sz="1300"/>
               <a:t>💡 Güvenli dijital dünyada buluşalım!</a:t>
             </a:r>
           </a:p>
@@ -7912,7 +8416,7 @@
           <a:noFill/>
         </p:spPr>
         <p:txBody>
-          <a:bodyPr wrap="none">
+          <a:bodyPr wrap="square">
             <a:spAutoFit/>
           </a:bodyPr>
           <a:lstStyle/>
@@ -7947,7 +8451,7 @@
           <a:noFill/>
         </p:spPr>
         <p:txBody>
-          <a:bodyPr wrap="none">
+          <a:bodyPr wrap="square">
             <a:spAutoFit/>
           </a:bodyPr>
           <a:lstStyle/>
@@ -7995,7 +8499,7 @@
         </p:nvSpPr>
         <p:spPr/>
         <p:txBody>
-          <a:bodyPr/>
+          <a:bodyPr wrap="square"/>
           <a:lstStyle/>
           <a:p>
             <a:pPr>
@@ -8049,163 +8553,230 @@
             <a:spAutoFit/>
           </a:bodyPr>
           <a:lstStyle/>
-          <a:p/>
-          <a:p>
-            <a:pPr>
-              <a:spcAft>
-                <a:spcPts val="1200"/>
-              </a:spcAft>
-              <a:defRPr sz="2000"/>
-            </a:pPr>
-            <a:r>
+          <a:p>
+            <a:pPr>
+              <a:lnSpc>
+                <a:spcPct val="90000"/>
+              </a:lnSpc>
+              <a:spcAft>
+                <a:spcPts val="300"/>
+              </a:spcAft>
+            </a:pPr>
+          </a:p>
+          <a:p>
+            <a:pPr>
+              <a:lnSpc>
+                <a:spcPct val="90000"/>
+              </a:lnSpc>
+              <a:spcAft>
+                <a:spcPts val="300"/>
+              </a:spcAft>
+              <a:defRPr sz="2000"/>
+            </a:pPr>
+            <a:r>
+              <a:rPr sz="1500"/>
               <a:t>Bu ünitede neler öğreneceğiz?</a:t>
             </a:r>
           </a:p>
           <a:p>
             <a:pPr>
-              <a:spcAft>
-                <a:spcPts val="1200"/>
-              </a:spcAft>
-              <a:defRPr sz="2000"/>
-            </a:pPr>
-          </a:p>
-          <a:p>
-            <a:pPr>
-              <a:spcAft>
-                <a:spcPts val="1200"/>
+              <a:lnSpc>
+                <a:spcPct val="90000"/>
+              </a:lnSpc>
+              <a:spcAft>
+                <a:spcPts val="300"/>
+              </a:spcAft>
+              <a:defRPr sz="2000"/>
+            </a:pPr>
+          </a:p>
+          <a:p>
+            <a:pPr>
+              <a:lnSpc>
+                <a:spcPct val="90000"/>
+              </a:lnSpc>
+              <a:spcAft>
+                <a:spcPts val="300"/>
               </a:spcAft>
               <a:defRPr sz="2000" b="1"/>
             </a:pPr>
             <a:r>
+              <a:rPr sz="1500"/>
               <a:t>✅ 1. Dijital Etik Nedir?</a:t>
             </a:r>
           </a:p>
           <a:p>
             <a:pPr>
-              <a:spcAft>
-                <a:spcPts val="1200"/>
+              <a:lnSpc>
+                <a:spcPct val="90000"/>
+              </a:lnSpc>
+              <a:spcAft>
+                <a:spcPts val="300"/>
               </a:spcAft>
               <a:defRPr sz="2000" b="1"/>
             </a:pPr>
             <a:r>
+              <a:rPr sz="1500"/>
               <a:t>✅ 2. Dijital Ayak İzi</a:t>
             </a:r>
           </a:p>
           <a:p>
             <a:pPr>
-              <a:spcAft>
-                <a:spcPts val="1200"/>
+              <a:lnSpc>
+                <a:spcPct val="90000"/>
+              </a:lnSpc>
+              <a:spcAft>
+                <a:spcPts val="300"/>
               </a:spcAft>
               <a:defRPr sz="2000" b="1"/>
             </a:pPr>
             <a:r>
+              <a:rPr sz="1500"/>
               <a:t>✅ 3. Gizlilik ve Mahremiyet</a:t>
             </a:r>
           </a:p>
           <a:p>
             <a:pPr>
-              <a:spcAft>
-                <a:spcPts val="1200"/>
+              <a:lnSpc>
+                <a:spcPct val="90000"/>
+              </a:lnSpc>
+              <a:spcAft>
+                <a:spcPts val="300"/>
               </a:spcAft>
               <a:defRPr sz="2000" b="1"/>
             </a:pPr>
             <a:r>
+              <a:rPr sz="1500"/>
               <a:t>✅ 4. Kişisel Veri Güvenliği</a:t>
             </a:r>
           </a:p>
           <a:p>
             <a:pPr>
-              <a:spcAft>
-                <a:spcPts val="1200"/>
+              <a:lnSpc>
+                <a:spcPct val="90000"/>
+              </a:lnSpc>
+              <a:spcAft>
+                <a:spcPts val="300"/>
               </a:spcAft>
               <a:defRPr sz="2000" b="1"/>
             </a:pPr>
             <a:r>
+              <a:rPr sz="1500"/>
               <a:t>✅ 5. Güçlü Şifre Oluşturma</a:t>
             </a:r>
           </a:p>
           <a:p>
             <a:pPr>
-              <a:spcAft>
-                <a:spcPts val="1200"/>
+              <a:lnSpc>
+                <a:spcPct val="90000"/>
+              </a:lnSpc>
+              <a:spcAft>
+                <a:spcPts val="300"/>
               </a:spcAft>
               <a:defRPr sz="2000" b="1"/>
             </a:pPr>
             <a:r>
+              <a:rPr sz="1500"/>
               <a:t>✅ 6. Siber Güvenlik Tehditleri</a:t>
             </a:r>
           </a:p>
           <a:p>
             <a:pPr>
-              <a:spcAft>
-                <a:spcPts val="1200"/>
+              <a:lnSpc>
+                <a:spcPct val="90000"/>
+              </a:lnSpc>
+              <a:spcAft>
+                <a:spcPts val="300"/>
               </a:spcAft>
               <a:defRPr sz="2000" b="1"/>
             </a:pPr>
             <a:r>
+              <a:rPr sz="1500"/>
               <a:t>✅ 7. Phishing (Oltalama) Saldırıları</a:t>
             </a:r>
           </a:p>
           <a:p>
             <a:pPr>
-              <a:spcAft>
-                <a:spcPts val="1200"/>
+              <a:lnSpc>
+                <a:spcPct val="90000"/>
+              </a:lnSpc>
+              <a:spcAft>
+                <a:spcPts val="300"/>
               </a:spcAft>
               <a:defRPr sz="2000" b="1"/>
             </a:pPr>
             <a:r>
+              <a:rPr sz="1500"/>
               <a:t>✅ 8. Zararlı Yazılımlar (Virüs, Malware)</a:t>
             </a:r>
           </a:p>
           <a:p>
             <a:pPr>
-              <a:spcAft>
-                <a:spcPts val="1200"/>
+              <a:lnSpc>
+                <a:spcPct val="90000"/>
+              </a:lnSpc>
+              <a:spcAft>
+                <a:spcPts val="300"/>
               </a:spcAft>
               <a:defRPr sz="2000" b="1"/>
             </a:pPr>
             <a:r>
+              <a:rPr sz="1500"/>
               <a:t>✅ 9. Sosyal Mühendislik</a:t>
             </a:r>
           </a:p>
           <a:p>
             <a:pPr>
-              <a:spcAft>
-                <a:spcPts val="1200"/>
+              <a:lnSpc>
+                <a:spcPct val="90000"/>
+              </a:lnSpc>
+              <a:spcAft>
+                <a:spcPts val="300"/>
               </a:spcAft>
               <a:defRPr sz="2000" b="1"/>
             </a:pPr>
             <a:r>
+              <a:rPr sz="1500"/>
               <a:t>✅ 10. Güvenli Dijital Vatandaşlık</a:t>
             </a:r>
           </a:p>
           <a:p>
             <a:pPr>
-              <a:spcAft>
-                <a:spcPts val="1200"/>
-              </a:spcAft>
-              <a:defRPr sz="2000"/>
-            </a:pPr>
-          </a:p>
-          <a:p>
-            <a:pPr>
-              <a:spcAft>
-                <a:spcPts val="1200"/>
-              </a:spcAft>
-              <a:defRPr sz="2000"/>
-            </a:pPr>
-            <a:r>
+              <a:lnSpc>
+                <a:spcPct val="90000"/>
+              </a:lnSpc>
+              <a:spcAft>
+                <a:spcPts val="300"/>
+              </a:spcAft>
+              <a:defRPr sz="2000"/>
+            </a:pPr>
+          </a:p>
+          <a:p>
+            <a:pPr>
+              <a:lnSpc>
+                <a:spcPct val="90000"/>
+              </a:lnSpc>
+              <a:spcAft>
+                <a:spcPts val="300"/>
+              </a:spcAft>
+              <a:defRPr sz="2000"/>
+            </a:pPr>
+            <a:r>
+              <a:rPr sz="1500"/>
               <a:t>⏰ Süre: 2 Hafta</a:t>
             </a:r>
           </a:p>
           <a:p>
             <a:pPr>
-              <a:spcAft>
-                <a:spcPts val="1200"/>
+              <a:lnSpc>
+                <a:spcPct val="90000"/>
+              </a:lnSpc>
+              <a:spcAft>
+                <a:spcPts val="300"/>
               </a:spcAft>
               <a:defRPr sz="2000" b="1"/>
             </a:pPr>
             <a:r>
+              <a:rPr sz="1500"/>
               <a:t>🎯 Amaç: Dijital dünyada etik ve güvenli davranmak!</a:t>
             </a:r>
           </a:p>
@@ -8241,7 +8812,7 @@
         </p:nvSpPr>
         <p:spPr/>
         <p:txBody>
-          <a:bodyPr/>
+          <a:bodyPr wrap="square"/>
           <a:lstStyle/>
           <a:p>
             <a:pPr>
@@ -8295,268 +8866,349 @@
             <a:spAutoFit/>
           </a:bodyPr>
           <a:lstStyle/>
-          <a:p/>
-          <a:p>
-            <a:pPr>
-              <a:spcAft>
-                <a:spcPts val="1200"/>
-              </a:spcAft>
-              <a:defRPr sz="2000"/>
-            </a:pPr>
-            <a:r>
-              <a:rPr sz="1400"/>
+          <a:p>
+            <a:pPr>
+              <a:lnSpc>
+                <a:spcPct val="90000"/>
+              </a:lnSpc>
+              <a:spcAft>
+                <a:spcPts val="300"/>
+              </a:spcAft>
+            </a:pPr>
+          </a:p>
+          <a:p>
+            <a:pPr>
+              <a:lnSpc>
+                <a:spcPct val="90000"/>
+              </a:lnSpc>
+              <a:spcAft>
+                <a:spcPts val="300"/>
+              </a:spcAft>
+              <a:defRPr sz="2000"/>
+            </a:pPr>
+            <a:r>
+              <a:rPr sz="1300"/>
               <a:t>Etik = Doğru ve yanlış davranışlar</a:t>
             </a:r>
           </a:p>
           <a:p>
             <a:pPr>
-              <a:spcAft>
-                <a:spcPts val="1200"/>
-              </a:spcAft>
-              <a:defRPr sz="2000"/>
-            </a:pPr>
-            <a:r>
-              <a:rPr sz="1400"/>
+              <a:lnSpc>
+                <a:spcPct val="90000"/>
+              </a:lnSpc>
+              <a:spcAft>
+                <a:spcPts val="300"/>
+              </a:spcAft>
+              <a:defRPr sz="2000"/>
+            </a:pPr>
+            <a:r>
+              <a:rPr sz="1300"/>
               <a:t>Dijital Etik = Dijital dünyada doğru davranışlar</a:t>
             </a:r>
           </a:p>
           <a:p>
             <a:pPr>
-              <a:spcAft>
-                <a:spcPts val="1200"/>
-              </a:spcAft>
-              <a:defRPr sz="2000"/>
-            </a:pPr>
-          </a:p>
-          <a:p>
-            <a:pPr>
-              <a:spcAft>
-                <a:spcPts val="1200"/>
+              <a:lnSpc>
+                <a:spcPct val="90000"/>
+              </a:lnSpc>
+              <a:spcAft>
+                <a:spcPts val="300"/>
+              </a:spcAft>
+              <a:defRPr sz="2000"/>
+            </a:pPr>
+          </a:p>
+          <a:p>
+            <a:pPr>
+              <a:lnSpc>
+                <a:spcPct val="90000"/>
+              </a:lnSpc>
+              <a:spcAft>
+                <a:spcPts val="300"/>
               </a:spcAft>
               <a:defRPr sz="2000" b="1"/>
             </a:pPr>
             <a:r>
-              <a:rPr sz="1400"/>
+              <a:rPr sz="1300"/>
               <a:t>✅ Dijital Etik Kuralları:</a:t>
             </a:r>
           </a:p>
           <a:p>
             <a:pPr>
-              <a:spcAft>
-                <a:spcPts val="1200"/>
-              </a:spcAft>
-              <a:defRPr sz="2000"/>
-            </a:pPr>
-          </a:p>
-          <a:p>
-            <a:pPr>
-              <a:spcAft>
-                <a:spcPts val="1200"/>
-              </a:spcAft>
-              <a:defRPr sz="2000"/>
-            </a:pPr>
-            <a:r>
-              <a:rPr sz="1400"/>
+              <a:lnSpc>
+                <a:spcPct val="90000"/>
+              </a:lnSpc>
+              <a:spcAft>
+                <a:spcPts val="300"/>
+              </a:spcAft>
+              <a:defRPr sz="2000"/>
+            </a:pPr>
+          </a:p>
+          <a:p>
+            <a:pPr>
+              <a:lnSpc>
+                <a:spcPct val="90000"/>
+              </a:lnSpc>
+              <a:spcAft>
+                <a:spcPts val="300"/>
+              </a:spcAft>
+              <a:defRPr sz="2000"/>
+            </a:pPr>
+            <a:r>
+              <a:rPr sz="1300"/>
               <a:t>🤝 Saygı:</a:t>
             </a:r>
           </a:p>
           <a:p>
             <a:pPr lvl="1">
-              <a:spcAft>
-                <a:spcPts val="1200"/>
-              </a:spcAft>
-              <a:defRPr sz="1800"/>
-            </a:pPr>
-            <a:r>
-              <a:rPr sz="1400"/>
+              <a:lnSpc>
+                <a:spcPct val="90000"/>
+              </a:lnSpc>
+              <a:spcAft>
+                <a:spcPts val="300"/>
+              </a:spcAft>
+              <a:defRPr sz="1800"/>
+            </a:pPr>
+            <a:r>
+              <a:rPr sz="1300"/>
               <a:t>    • Başkalarına saygılı ol</a:t>
             </a:r>
           </a:p>
           <a:p>
             <a:pPr lvl="1">
-              <a:spcAft>
-                <a:spcPts val="1200"/>
-              </a:spcAft>
-              <a:defRPr sz="1800"/>
-            </a:pPr>
-            <a:r>
-              <a:rPr sz="1400"/>
+              <a:lnSpc>
+                <a:spcPct val="90000"/>
+              </a:lnSpc>
+              <a:spcAft>
+                <a:spcPts val="300"/>
+              </a:spcAft>
+              <a:defRPr sz="1800"/>
+            </a:pPr>
+            <a:r>
+              <a:rPr sz="1300"/>
               <a:t>    • Kötü yorum yapma</a:t>
             </a:r>
           </a:p>
           <a:p>
             <a:pPr lvl="1">
-              <a:spcAft>
-                <a:spcPts val="1200"/>
-              </a:spcAft>
-              <a:defRPr sz="1800"/>
-            </a:pPr>
-            <a:r>
-              <a:rPr sz="1400"/>
+              <a:lnSpc>
+                <a:spcPct val="90000"/>
+              </a:lnSpc>
+              <a:spcAft>
+                <a:spcPts val="300"/>
+              </a:spcAft>
+              <a:defRPr sz="1800"/>
+            </a:pPr>
+            <a:r>
+              <a:rPr sz="1300"/>
               <a:t>    • Nefret söylemi kullanma</a:t>
             </a:r>
           </a:p>
           <a:p>
             <a:pPr>
-              <a:spcAft>
-                <a:spcPts val="1200"/>
-              </a:spcAft>
-              <a:defRPr sz="2000"/>
-            </a:pPr>
-          </a:p>
-          <a:p>
-            <a:pPr>
-              <a:spcAft>
-                <a:spcPts val="1200"/>
-              </a:spcAft>
-              <a:defRPr sz="2000"/>
-            </a:pPr>
-            <a:r>
-              <a:rPr sz="1400"/>
+              <a:lnSpc>
+                <a:spcPct val="90000"/>
+              </a:lnSpc>
+              <a:spcAft>
+                <a:spcPts val="300"/>
+              </a:spcAft>
+              <a:defRPr sz="2000"/>
+            </a:pPr>
+          </a:p>
+          <a:p>
+            <a:pPr>
+              <a:lnSpc>
+                <a:spcPct val="90000"/>
+              </a:lnSpc>
+              <a:spcAft>
+                <a:spcPts val="300"/>
+              </a:spcAft>
+              <a:defRPr sz="2000"/>
+            </a:pPr>
+            <a:r>
+              <a:rPr sz="1300"/>
               <a:t>📝 Dürüstlük:</a:t>
             </a:r>
           </a:p>
           <a:p>
             <a:pPr lvl="1">
-              <a:spcAft>
-                <a:spcPts val="1200"/>
-              </a:spcAft>
-              <a:defRPr sz="1800"/>
-            </a:pPr>
-            <a:r>
-              <a:rPr sz="1400"/>
+              <a:lnSpc>
+                <a:spcPct val="90000"/>
+              </a:lnSpc>
+              <a:spcAft>
+                <a:spcPts val="300"/>
+              </a:spcAft>
+              <a:defRPr sz="1800"/>
+            </a:pPr>
+            <a:r>
+              <a:rPr sz="1300"/>
               <a:t>    • Yalan bilgi paylaşma</a:t>
             </a:r>
           </a:p>
           <a:p>
             <a:pPr lvl="1">
-              <a:spcAft>
-                <a:spcPts val="1200"/>
-              </a:spcAft>
-              <a:defRPr sz="1800"/>
-            </a:pPr>
-            <a:r>
-              <a:rPr sz="1400"/>
+              <a:lnSpc>
+                <a:spcPct val="90000"/>
+              </a:lnSpc>
+              <a:spcAft>
+                <a:spcPts val="300"/>
+              </a:spcAft>
+              <a:defRPr sz="1800"/>
+            </a:pPr>
+            <a:r>
+              <a:rPr sz="1300"/>
               <a:t>    • Başkasının eserini çalma</a:t>
             </a:r>
           </a:p>
           <a:p>
             <a:pPr lvl="1">
-              <a:spcAft>
-                <a:spcPts val="1200"/>
-              </a:spcAft>
-              <a:defRPr sz="1800"/>
-            </a:pPr>
-            <a:r>
-              <a:rPr sz="1400"/>
+              <a:lnSpc>
+                <a:spcPct val="90000"/>
+              </a:lnSpc>
+              <a:spcAft>
+                <a:spcPts val="300"/>
+              </a:spcAft>
+              <a:defRPr sz="1800"/>
+            </a:pPr>
+            <a:r>
+              <a:rPr sz="1300"/>
               <a:t>    • Kaynak göster</a:t>
             </a:r>
           </a:p>
           <a:p>
             <a:pPr>
-              <a:spcAft>
-                <a:spcPts val="1200"/>
-              </a:spcAft>
-              <a:defRPr sz="2000"/>
-            </a:pPr>
-          </a:p>
-          <a:p>
-            <a:pPr>
-              <a:spcAft>
-                <a:spcPts val="1200"/>
-              </a:spcAft>
-              <a:defRPr sz="2000"/>
-            </a:pPr>
-            <a:r>
-              <a:rPr sz="1400"/>
+              <a:lnSpc>
+                <a:spcPct val="90000"/>
+              </a:lnSpc>
+              <a:spcAft>
+                <a:spcPts val="300"/>
+              </a:spcAft>
+              <a:defRPr sz="2000"/>
+            </a:pPr>
+          </a:p>
+          <a:p>
+            <a:pPr>
+              <a:lnSpc>
+                <a:spcPct val="90000"/>
+              </a:lnSpc>
+              <a:spcAft>
+                <a:spcPts val="300"/>
+              </a:spcAft>
+              <a:defRPr sz="2000"/>
+            </a:pPr>
+            <a:r>
+              <a:rPr sz="1300"/>
               <a:t>🔒 Gizlilik:</a:t>
             </a:r>
           </a:p>
           <a:p>
             <a:pPr lvl="1">
-              <a:spcAft>
-                <a:spcPts val="1200"/>
-              </a:spcAft>
-              <a:defRPr sz="1800"/>
-            </a:pPr>
-            <a:r>
-              <a:rPr sz="1400"/>
+              <a:lnSpc>
+                <a:spcPct val="90000"/>
+              </a:lnSpc>
+              <a:spcAft>
+                <a:spcPts val="300"/>
+              </a:spcAft>
+              <a:defRPr sz="1800"/>
+            </a:pPr>
+            <a:r>
+              <a:rPr sz="1300"/>
               <a:t>    • Başkasının özel bilgilerini paylaşma</a:t>
             </a:r>
           </a:p>
           <a:p>
             <a:pPr lvl="1">
-              <a:spcAft>
-                <a:spcPts val="1200"/>
-              </a:spcAft>
-              <a:defRPr sz="1800"/>
-            </a:pPr>
-            <a:r>
-              <a:rPr sz="1400"/>
+              <a:lnSpc>
+                <a:spcPct val="90000"/>
+              </a:lnSpc>
+              <a:spcAft>
+                <a:spcPts val="300"/>
+              </a:spcAft>
+              <a:defRPr sz="1800"/>
+            </a:pPr>
+            <a:r>
+              <a:rPr sz="1300"/>
               <a:t>    • İzinsiz fotoğraf yayınlama</a:t>
             </a:r>
           </a:p>
           <a:p>
             <a:pPr>
-              <a:spcAft>
-                <a:spcPts val="1200"/>
-              </a:spcAft>
-              <a:defRPr sz="2000"/>
-            </a:pPr>
-          </a:p>
-          <a:p>
-            <a:pPr>
-              <a:spcAft>
-                <a:spcPts val="1200"/>
-              </a:spcAft>
-              <a:defRPr sz="2000"/>
-            </a:pPr>
-            <a:r>
-              <a:rPr sz="1400"/>
+              <a:lnSpc>
+                <a:spcPct val="90000"/>
+              </a:lnSpc>
+              <a:spcAft>
+                <a:spcPts val="300"/>
+              </a:spcAft>
+              <a:defRPr sz="2000"/>
+            </a:pPr>
+          </a:p>
+          <a:p>
+            <a:pPr>
+              <a:lnSpc>
+                <a:spcPct val="90000"/>
+              </a:lnSpc>
+              <a:spcAft>
+                <a:spcPts val="300"/>
+              </a:spcAft>
+              <a:defRPr sz="2000"/>
+            </a:pPr>
+            <a:r>
+              <a:rPr sz="1300"/>
               <a:t>⚖️ Sorumluluk:</a:t>
             </a:r>
           </a:p>
           <a:p>
             <a:pPr lvl="1">
-              <a:spcAft>
-                <a:spcPts val="1200"/>
-              </a:spcAft>
-              <a:defRPr sz="1800"/>
-            </a:pPr>
-            <a:r>
-              <a:rPr sz="1400"/>
+              <a:lnSpc>
+                <a:spcPct val="90000"/>
+              </a:lnSpc>
+              <a:spcAft>
+                <a:spcPts val="300"/>
+              </a:spcAft>
+              <a:defRPr sz="1800"/>
+            </a:pPr>
+            <a:r>
+              <a:rPr sz="1300"/>
               <a:t>    • Paylaştıklarından sorumlusun</a:t>
             </a:r>
           </a:p>
           <a:p>
             <a:pPr lvl="1">
-              <a:spcAft>
-                <a:spcPts val="1200"/>
-              </a:spcAft>
-              <a:defRPr sz="1800"/>
-            </a:pPr>
-            <a:r>
-              <a:rPr sz="1400"/>
+              <a:lnSpc>
+                <a:spcPct val="90000"/>
+              </a:lnSpc>
+              <a:spcAft>
+                <a:spcPts val="300"/>
+              </a:spcAft>
+              <a:defRPr sz="1800"/>
+            </a:pPr>
+            <a:r>
+              <a:rPr sz="1300"/>
               <a:t>    • 'İnternet'te dedim' mazeret değil!</a:t>
             </a:r>
           </a:p>
           <a:p>
             <a:pPr>
-              <a:spcAft>
-                <a:spcPts val="1200"/>
-              </a:spcAft>
-              <a:defRPr sz="2000"/>
-            </a:pPr>
-          </a:p>
-          <a:p>
-            <a:pPr>
-              <a:spcAft>
-                <a:spcPts val="1200"/>
+              <a:lnSpc>
+                <a:spcPct val="90000"/>
+              </a:lnSpc>
+              <a:spcAft>
+                <a:spcPts val="300"/>
+              </a:spcAft>
+              <a:defRPr sz="2000"/>
+            </a:pPr>
+          </a:p>
+          <a:p>
+            <a:pPr>
+              <a:lnSpc>
+                <a:spcPct val="90000"/>
+              </a:lnSpc>
+              <a:spcAft>
+                <a:spcPts val="300"/>
               </a:spcAft>
               <a:defRPr sz="2000" b="1"/>
             </a:pPr>
             <a:r>
-              <a:rPr sz="1400"/>
+              <a:rPr sz="1300"/>
               <a:t>💡 Gerçek hayatta nasıl davranıyorsan, dijital dünyada da öyle davran!</a:t>
             </a:r>
           </a:p>
@@ -8592,7 +9244,7 @@
         </p:nvSpPr>
         <p:spPr/>
         <p:txBody>
-          <a:bodyPr/>
+          <a:bodyPr wrap="square"/>
           <a:lstStyle/>
           <a:p>
             <a:pPr>
@@ -8646,256 +9298,334 @@
             <a:spAutoFit/>
           </a:bodyPr>
           <a:lstStyle/>
-          <a:p/>
-          <a:p>
-            <a:pPr>
-              <a:spcAft>
-                <a:spcPts val="1200"/>
-              </a:spcAft>
-              <a:defRPr sz="2000"/>
-            </a:pPr>
-            <a:r>
-              <a:rPr sz="1400"/>
+          <a:p>
+            <a:pPr>
+              <a:lnSpc>
+                <a:spcPct val="90000"/>
+              </a:lnSpc>
+              <a:spcAft>
+                <a:spcPts val="300"/>
+              </a:spcAft>
+            </a:pPr>
+          </a:p>
+          <a:p>
+            <a:pPr>
+              <a:lnSpc>
+                <a:spcPct val="90000"/>
+              </a:lnSpc>
+              <a:spcAft>
+                <a:spcPts val="300"/>
+              </a:spcAft>
+              <a:defRPr sz="2000"/>
+            </a:pPr>
+            <a:r>
+              <a:rPr sz="1300"/>
               <a:t>Dijital ayak izi = İnternet'te bıraktığın izler</a:t>
             </a:r>
           </a:p>
           <a:p>
             <a:pPr>
-              <a:spcAft>
-                <a:spcPts val="1200"/>
-              </a:spcAft>
-              <a:defRPr sz="2000"/>
-            </a:pPr>
-          </a:p>
-          <a:p>
-            <a:pPr>
-              <a:spcAft>
-                <a:spcPts val="1200"/>
+              <a:lnSpc>
+                <a:spcPct val="90000"/>
+              </a:lnSpc>
+              <a:spcAft>
+                <a:spcPts val="300"/>
+              </a:spcAft>
+              <a:defRPr sz="2000"/>
+            </a:pPr>
+          </a:p>
+          <a:p>
+            <a:pPr>
+              <a:lnSpc>
+                <a:spcPct val="90000"/>
+              </a:lnSpc>
+              <a:spcAft>
+                <a:spcPts val="300"/>
               </a:spcAft>
               <a:defRPr sz="2000" b="1"/>
             </a:pPr>
             <a:r>
-              <a:rPr sz="1400"/>
+              <a:rPr sz="1300"/>
               <a:t>✅ Dijital Ayak İzi Örnekleri:</a:t>
             </a:r>
           </a:p>
           <a:p>
             <a:pPr lvl="1">
-              <a:spcAft>
-                <a:spcPts val="1200"/>
-              </a:spcAft>
-              <a:defRPr sz="1800"/>
-            </a:pPr>
-            <a:r>
-              <a:rPr sz="1400"/>
+              <a:lnSpc>
+                <a:spcPct val="90000"/>
+              </a:lnSpc>
+              <a:spcAft>
+                <a:spcPts val="300"/>
+              </a:spcAft>
+              <a:defRPr sz="1800"/>
+            </a:pPr>
+            <a:r>
+              <a:rPr sz="1300"/>
               <a:t>    • Sosyal medya paylaşımları</a:t>
             </a:r>
           </a:p>
           <a:p>
             <a:pPr lvl="1">
-              <a:spcAft>
-                <a:spcPts val="1200"/>
-              </a:spcAft>
-              <a:defRPr sz="1800"/>
-            </a:pPr>
-            <a:r>
-              <a:rPr sz="1400"/>
+              <a:lnSpc>
+                <a:spcPct val="90000"/>
+              </a:lnSpc>
+              <a:spcAft>
+                <a:spcPts val="300"/>
+              </a:spcAft>
+              <a:defRPr sz="1800"/>
+            </a:pPr>
+            <a:r>
+              <a:rPr sz="1300"/>
               <a:t>    • Yorum yaptığın siteler</a:t>
             </a:r>
           </a:p>
           <a:p>
             <a:pPr lvl="1">
-              <a:spcAft>
-                <a:spcPts val="1200"/>
-              </a:spcAft>
-              <a:defRPr sz="1800"/>
-            </a:pPr>
-            <a:r>
-              <a:rPr sz="1400"/>
+              <a:lnSpc>
+                <a:spcPct val="90000"/>
+              </a:lnSpc>
+              <a:spcAft>
+                <a:spcPts val="300"/>
+              </a:spcAft>
+              <a:defRPr sz="1800"/>
+            </a:pPr>
+            <a:r>
+              <a:rPr sz="1300"/>
               <a:t>    • Beğendiğin videolar</a:t>
             </a:r>
           </a:p>
           <a:p>
             <a:pPr lvl="1">
-              <a:spcAft>
-                <a:spcPts val="1200"/>
-              </a:spcAft>
-              <a:defRPr sz="1800"/>
-            </a:pPr>
-            <a:r>
-              <a:rPr sz="1400"/>
+              <a:lnSpc>
+                <a:spcPct val="90000"/>
+              </a:lnSpc>
+              <a:spcAft>
+                <a:spcPts val="300"/>
+              </a:spcAft>
+              <a:defRPr sz="1800"/>
+            </a:pPr>
+            <a:r>
+              <a:rPr sz="1300"/>
               <a:t>    • Arama geçmişin</a:t>
             </a:r>
           </a:p>
           <a:p>
             <a:pPr lvl="1">
-              <a:spcAft>
-                <a:spcPts val="1200"/>
-              </a:spcAft>
-              <a:defRPr sz="1800"/>
-            </a:pPr>
-            <a:r>
-              <a:rPr sz="1400"/>
+              <a:lnSpc>
+                <a:spcPct val="90000"/>
+              </a:lnSpc>
+              <a:spcAft>
+                <a:spcPts val="300"/>
+              </a:spcAft>
+              <a:defRPr sz="1800"/>
+            </a:pPr>
+            <a:r>
+              <a:rPr sz="1300"/>
               <a:t>    • Online oyunlardaki mesajların</a:t>
             </a:r>
           </a:p>
           <a:p>
             <a:pPr>
-              <a:spcAft>
-                <a:spcPts val="1200"/>
-              </a:spcAft>
-              <a:defRPr sz="2000"/>
-            </a:pPr>
-          </a:p>
-          <a:p>
-            <a:pPr>
-              <a:spcAft>
-                <a:spcPts val="1200"/>
+              <a:lnSpc>
+                <a:spcPct val="90000"/>
+              </a:lnSpc>
+              <a:spcAft>
+                <a:spcPts val="300"/>
+              </a:spcAft>
+              <a:defRPr sz="2000"/>
+            </a:pPr>
+          </a:p>
+          <a:p>
+            <a:pPr>
+              <a:lnSpc>
+                <a:spcPct val="90000"/>
+              </a:lnSpc>
+              <a:spcAft>
+                <a:spcPts val="300"/>
               </a:spcAft>
               <a:defRPr sz="2000" b="1"/>
             </a:pPr>
             <a:r>
-              <a:rPr sz="1400"/>
+              <a:rPr sz="1300"/>
               <a:t>📌 İki Tür Dijital Ayak İzi:</a:t>
             </a:r>
           </a:p>
           <a:p>
             <a:pPr>
-              <a:spcAft>
-                <a:spcPts val="1200"/>
-              </a:spcAft>
-              <a:defRPr sz="2000"/>
-            </a:pPr>
-          </a:p>
-          <a:p>
-            <a:pPr>
-              <a:spcAft>
-                <a:spcPts val="1200"/>
-              </a:spcAft>
-              <a:defRPr sz="2000"/>
-            </a:pPr>
-            <a:r>
-              <a:rPr sz="1400"/>
+              <a:lnSpc>
+                <a:spcPct val="90000"/>
+              </a:lnSpc>
+              <a:spcAft>
+                <a:spcPts val="300"/>
+              </a:spcAft>
+              <a:defRPr sz="2000"/>
+            </a:pPr>
+          </a:p>
+          <a:p>
+            <a:pPr>
+              <a:lnSpc>
+                <a:spcPct val="90000"/>
+              </a:lnSpc>
+              <a:spcAft>
+                <a:spcPts val="300"/>
+              </a:spcAft>
+              <a:defRPr sz="2000"/>
+            </a:pPr>
+            <a:r>
+              <a:rPr sz="1300"/>
               <a:t>1️⃣ Aktif (Bilinçli):</a:t>
             </a:r>
           </a:p>
           <a:p>
             <a:pPr lvl="1">
-              <a:spcAft>
-                <a:spcPts val="1200"/>
-              </a:spcAft>
-              <a:defRPr sz="1800"/>
-            </a:pPr>
-            <a:r>
-              <a:rPr sz="1400"/>
+              <a:lnSpc>
+                <a:spcPct val="90000"/>
+              </a:lnSpc>
+              <a:spcAft>
+                <a:spcPts val="300"/>
+              </a:spcAft>
+              <a:defRPr sz="1800"/>
+            </a:pPr>
+            <a:r>
+              <a:rPr sz="1300"/>
               <a:t>    • Sen paylaşıyorsun (fotoğraf, yorum)</a:t>
             </a:r>
           </a:p>
           <a:p>
             <a:pPr>
-              <a:spcAft>
-                <a:spcPts val="1200"/>
-              </a:spcAft>
-              <a:defRPr sz="2000"/>
-            </a:pPr>
-          </a:p>
-          <a:p>
-            <a:pPr>
-              <a:spcAft>
-                <a:spcPts val="1200"/>
-              </a:spcAft>
-              <a:defRPr sz="2000"/>
-            </a:pPr>
-            <a:r>
-              <a:rPr sz="1400"/>
+              <a:lnSpc>
+                <a:spcPct val="90000"/>
+              </a:lnSpc>
+              <a:spcAft>
+                <a:spcPts val="300"/>
+              </a:spcAft>
+              <a:defRPr sz="2000"/>
+            </a:pPr>
+          </a:p>
+          <a:p>
+            <a:pPr>
+              <a:lnSpc>
+                <a:spcPct val="90000"/>
+              </a:lnSpc>
+              <a:spcAft>
+                <a:spcPts val="300"/>
+              </a:spcAft>
+              <a:defRPr sz="2000"/>
+            </a:pPr>
+            <a:r>
+              <a:rPr sz="1300"/>
               <a:t>2️⃣ Pasif (Otomatik):</a:t>
             </a:r>
           </a:p>
           <a:p>
             <a:pPr lvl="1">
-              <a:spcAft>
-                <a:spcPts val="1200"/>
-              </a:spcAft>
-              <a:defRPr sz="1800"/>
-            </a:pPr>
-            <a:r>
-              <a:rPr sz="1400"/>
+              <a:lnSpc>
+                <a:spcPct val="90000"/>
+              </a:lnSpc>
+              <a:spcAft>
+                <a:spcPts val="300"/>
+              </a:spcAft>
+              <a:defRPr sz="1800"/>
+            </a:pPr>
+            <a:r>
+              <a:rPr sz="1300"/>
               <a:t>    • Web siteleri kaydediyor (çerezler, IP)</a:t>
             </a:r>
           </a:p>
           <a:p>
             <a:pPr>
-              <a:spcAft>
-                <a:spcPts val="1200"/>
-              </a:spcAft>
-              <a:defRPr sz="2000"/>
-            </a:pPr>
-          </a:p>
-          <a:p>
-            <a:pPr>
-              <a:spcAft>
-                <a:spcPts val="1200"/>
-              </a:spcAft>
-              <a:defRPr sz="2000"/>
-            </a:pPr>
-            <a:r>
-              <a:rPr sz="1400"/>
+              <a:lnSpc>
+                <a:spcPct val="90000"/>
+              </a:lnSpc>
+              <a:spcAft>
+                <a:spcPts val="300"/>
+              </a:spcAft>
+              <a:defRPr sz="2000"/>
+            </a:pPr>
+          </a:p>
+          <a:p>
+            <a:pPr>
+              <a:lnSpc>
+                <a:spcPct val="90000"/>
+              </a:lnSpc>
+              <a:spcAft>
+                <a:spcPts val="300"/>
+              </a:spcAft>
+              <a:defRPr sz="2000"/>
+            </a:pPr>
+            <a:r>
+              <a:rPr sz="1300"/>
               <a:t>⚠️ Tehlikeler:</a:t>
             </a:r>
           </a:p>
           <a:p>
             <a:pPr lvl="1">
-              <a:spcAft>
-                <a:spcPts val="1200"/>
-              </a:spcAft>
-              <a:defRPr sz="1800"/>
-            </a:pPr>
-            <a:r>
-              <a:rPr sz="1400"/>
+              <a:lnSpc>
+                <a:spcPct val="90000"/>
+              </a:lnSpc>
+              <a:spcAft>
+                <a:spcPts val="300"/>
+              </a:spcAft>
+              <a:defRPr sz="1800"/>
+            </a:pPr>
+            <a:r>
+              <a:rPr sz="1300"/>
               <a:t>    • Dijital ayak izin silinmez!</a:t>
             </a:r>
           </a:p>
           <a:p>
             <a:pPr lvl="1">
-              <a:spcAft>
-                <a:spcPts val="1200"/>
-              </a:spcAft>
-              <a:defRPr sz="1800"/>
-            </a:pPr>
-            <a:r>
-              <a:rPr sz="1400"/>
+              <a:lnSpc>
+                <a:spcPct val="90000"/>
+              </a:lnSpc>
+              <a:spcAft>
+                <a:spcPts val="300"/>
+              </a:spcAft>
+              <a:defRPr sz="1800"/>
+            </a:pPr>
+            <a:r>
+              <a:rPr sz="1300"/>
               <a:t>    • Gelecekte sana zarar verebilir</a:t>
             </a:r>
           </a:p>
           <a:p>
             <a:pPr lvl="1">
-              <a:spcAft>
-                <a:spcPts val="1200"/>
-              </a:spcAft>
-              <a:defRPr sz="1800"/>
-            </a:pPr>
-            <a:r>
-              <a:rPr sz="1400"/>
+              <a:lnSpc>
+                <a:spcPct val="90000"/>
+              </a:lnSpc>
+              <a:spcAft>
+                <a:spcPts val="300"/>
+              </a:spcAft>
+              <a:defRPr sz="1800"/>
+            </a:pPr>
+            <a:r>
+              <a:rPr sz="1300"/>
               <a:t>    • Üniversite, iş başvurusu yapınca bakabilirler</a:t>
             </a:r>
           </a:p>
           <a:p>
             <a:pPr>
-              <a:spcAft>
-                <a:spcPts val="1200"/>
-              </a:spcAft>
-              <a:defRPr sz="2000"/>
-            </a:pPr>
-          </a:p>
-          <a:p>
-            <a:pPr>
-              <a:spcAft>
-                <a:spcPts val="1200"/>
+              <a:lnSpc>
+                <a:spcPct val="90000"/>
+              </a:lnSpc>
+              <a:spcAft>
+                <a:spcPts val="300"/>
+              </a:spcAft>
+              <a:defRPr sz="2000"/>
+            </a:pPr>
+          </a:p>
+          <a:p>
+            <a:pPr>
+              <a:lnSpc>
+                <a:spcPct val="90000"/>
+              </a:lnSpc>
+              <a:spcAft>
+                <a:spcPts val="300"/>
               </a:spcAft>
               <a:defRPr sz="2000" b="1"/>
             </a:pPr>
             <a:r>
-              <a:rPr sz="1400"/>
+              <a:rPr sz="1300"/>
               <a:t>💡 Paylaşmadan önce düşün: 'Bunu 10 yıl sonra görmek ister miyim?'</a:t>
             </a:r>
           </a:p>
@@ -8931,7 +9661,7 @@
         </p:nvSpPr>
         <p:spPr/>
         <p:txBody>
-          <a:bodyPr/>
+          <a:bodyPr wrap="square"/>
           <a:lstStyle/>
           <a:p>
             <a:pPr>
@@ -8985,284 +9715,368 @@
             <a:spAutoFit/>
           </a:bodyPr>
           <a:lstStyle/>
-          <a:p/>
-          <a:p>
-            <a:pPr>
-              <a:spcAft>
-                <a:spcPts val="1200"/>
-              </a:spcAft>
-              <a:defRPr sz="2000"/>
-            </a:pPr>
-            <a:r>
-              <a:rPr sz="1400"/>
+          <a:p>
+            <a:pPr>
+              <a:lnSpc>
+                <a:spcPct val="90000"/>
+              </a:lnSpc>
+              <a:spcAft>
+                <a:spcPts val="300"/>
+              </a:spcAft>
+            </a:pPr>
+          </a:p>
+          <a:p>
+            <a:pPr>
+              <a:lnSpc>
+                <a:spcPct val="90000"/>
+              </a:lnSpc>
+              <a:spcAft>
+                <a:spcPts val="300"/>
+              </a:spcAft>
+              <a:defRPr sz="2000"/>
+            </a:pPr>
+            <a:r>
+              <a:rPr sz="1300"/>
               <a:t>Gizlilik = Kişisel bilgilerini koruma hakkın</a:t>
             </a:r>
           </a:p>
           <a:p>
             <a:pPr>
-              <a:spcAft>
-                <a:spcPts val="1200"/>
-              </a:spcAft>
-              <a:defRPr sz="2000"/>
-            </a:pPr>
-          </a:p>
-          <a:p>
-            <a:pPr>
-              <a:spcAft>
-                <a:spcPts val="1200"/>
+              <a:lnSpc>
+                <a:spcPct val="90000"/>
+              </a:lnSpc>
+              <a:spcAft>
+                <a:spcPts val="300"/>
+              </a:spcAft>
+              <a:defRPr sz="2000"/>
+            </a:pPr>
+          </a:p>
+          <a:p>
+            <a:pPr>
+              <a:lnSpc>
+                <a:spcPct val="90000"/>
+              </a:lnSpc>
+              <a:spcAft>
+                <a:spcPts val="300"/>
               </a:spcAft>
               <a:defRPr sz="2000" b="1"/>
             </a:pPr>
             <a:r>
-              <a:rPr sz="1400"/>
+              <a:rPr sz="1300"/>
               <a:t>✅ Kişisel Bilgiler (ASLA Paylaşma!):</a:t>
             </a:r>
           </a:p>
           <a:p>
             <a:pPr lvl="1">
-              <a:spcAft>
-                <a:spcPts val="1200"/>
-              </a:spcAft>
-              <a:defRPr sz="1800"/>
-            </a:pPr>
-            <a:r>
-              <a:rPr sz="1400"/>
+              <a:lnSpc>
+                <a:spcPct val="90000"/>
+              </a:lnSpc>
+              <a:spcAft>
+                <a:spcPts val="300"/>
+              </a:spcAft>
+              <a:defRPr sz="1800"/>
+            </a:pPr>
+            <a:r>
+              <a:rPr sz="1300"/>
               <a:t>    • Tam adın, soyadın</a:t>
             </a:r>
           </a:p>
           <a:p>
             <a:pPr lvl="1">
-              <a:spcAft>
-                <a:spcPts val="1200"/>
-              </a:spcAft>
-              <a:defRPr sz="1800"/>
-            </a:pPr>
-            <a:r>
-              <a:rPr sz="1400"/>
+              <a:lnSpc>
+                <a:spcPct val="90000"/>
+              </a:lnSpc>
+              <a:spcAft>
+                <a:spcPts val="300"/>
+              </a:spcAft>
+              <a:defRPr sz="1800"/>
+            </a:pPr>
+            <a:r>
+              <a:rPr sz="1300"/>
               <a:t>    • Doğum tarihin</a:t>
             </a:r>
           </a:p>
           <a:p>
             <a:pPr lvl="1">
-              <a:spcAft>
-                <a:spcPts val="1200"/>
-              </a:spcAft>
-              <a:defRPr sz="1800"/>
-            </a:pPr>
-            <a:r>
-              <a:rPr sz="1400"/>
+              <a:lnSpc>
+                <a:spcPct val="90000"/>
+              </a:lnSpc>
+              <a:spcAft>
+                <a:spcPts val="300"/>
+              </a:spcAft>
+              <a:defRPr sz="1800"/>
+            </a:pPr>
+            <a:r>
+              <a:rPr sz="1300"/>
               <a:t>    • Adresin</a:t>
             </a:r>
           </a:p>
           <a:p>
             <a:pPr lvl="1">
-              <a:spcAft>
-                <a:spcPts val="1200"/>
-              </a:spcAft>
-              <a:defRPr sz="1800"/>
-            </a:pPr>
-            <a:r>
-              <a:rPr sz="1400"/>
+              <a:lnSpc>
+                <a:spcPct val="90000"/>
+              </a:lnSpc>
+              <a:spcAft>
+                <a:spcPts val="300"/>
+              </a:spcAft>
+              <a:defRPr sz="1800"/>
+            </a:pPr>
+            <a:r>
+              <a:rPr sz="1300"/>
               <a:t>    • Telefon numaran</a:t>
             </a:r>
           </a:p>
           <a:p>
             <a:pPr lvl="1">
-              <a:spcAft>
-                <a:spcPts val="1200"/>
-              </a:spcAft>
-              <a:defRPr sz="1800"/>
-            </a:pPr>
-            <a:r>
-              <a:rPr sz="1400"/>
+              <a:lnSpc>
+                <a:spcPct val="90000"/>
+              </a:lnSpc>
+              <a:spcAft>
+                <a:spcPts val="300"/>
+              </a:spcAft>
+              <a:defRPr sz="1800"/>
+            </a:pPr>
+            <a:r>
+              <a:rPr sz="1300"/>
               <a:t>    • Okul adın</a:t>
             </a:r>
           </a:p>
           <a:p>
             <a:pPr lvl="1">
-              <a:spcAft>
-                <a:spcPts val="1200"/>
-              </a:spcAft>
-              <a:defRPr sz="1800"/>
-            </a:pPr>
-            <a:r>
-              <a:rPr sz="1400"/>
+              <a:lnSpc>
+                <a:spcPct val="90000"/>
+              </a:lnSpc>
+              <a:spcAft>
+                <a:spcPts val="300"/>
+              </a:spcAft>
+              <a:defRPr sz="1800"/>
+            </a:pPr>
+            <a:r>
+              <a:rPr sz="1300"/>
               <a:t>    • Fotoğraflarında konum bilgisi</a:t>
             </a:r>
           </a:p>
           <a:p>
             <a:pPr>
-              <a:spcAft>
-                <a:spcPts val="1200"/>
-              </a:spcAft>
-              <a:defRPr sz="2000"/>
-            </a:pPr>
-          </a:p>
-          <a:p>
-            <a:pPr>
-              <a:spcAft>
-                <a:spcPts val="1200"/>
+              <a:lnSpc>
+                <a:spcPct val="90000"/>
+              </a:lnSpc>
+              <a:spcAft>
+                <a:spcPts val="300"/>
+              </a:spcAft>
+              <a:defRPr sz="2000"/>
+            </a:pPr>
+          </a:p>
+          <a:p>
+            <a:pPr>
+              <a:lnSpc>
+                <a:spcPct val="90000"/>
+              </a:lnSpc>
+              <a:spcAft>
+                <a:spcPts val="300"/>
               </a:spcAft>
               <a:defRPr sz="2000" b="1"/>
             </a:pPr>
             <a:r>
-              <a:rPr sz="1400"/>
+              <a:rPr sz="1300"/>
               <a:t>📌 Gizlilik Ayarları:</a:t>
             </a:r>
           </a:p>
           <a:p>
             <a:pPr>
-              <a:spcAft>
-                <a:spcPts val="1200"/>
-              </a:spcAft>
-              <a:defRPr sz="2000"/>
-            </a:pPr>
-          </a:p>
-          <a:p>
-            <a:pPr>
-              <a:spcAft>
-                <a:spcPts val="1200"/>
-              </a:spcAft>
-              <a:defRPr sz="2000"/>
-            </a:pPr>
-            <a:r>
-              <a:rPr sz="1400"/>
+              <a:lnSpc>
+                <a:spcPct val="90000"/>
+              </a:lnSpc>
+              <a:spcAft>
+                <a:spcPts val="300"/>
+              </a:spcAft>
+              <a:defRPr sz="2000"/>
+            </a:pPr>
+          </a:p>
+          <a:p>
+            <a:pPr>
+              <a:lnSpc>
+                <a:spcPct val="90000"/>
+              </a:lnSpc>
+              <a:spcAft>
+                <a:spcPts val="300"/>
+              </a:spcAft>
+              <a:defRPr sz="2000"/>
+            </a:pPr>
+            <a:r>
+              <a:rPr sz="1300"/>
               <a:t>🔒 Sosyal Medya:</a:t>
             </a:r>
           </a:p>
           <a:p>
             <a:pPr lvl="1">
-              <a:spcAft>
-                <a:spcPts val="1200"/>
-              </a:spcAft>
-              <a:defRPr sz="1800"/>
-            </a:pPr>
-            <a:r>
-              <a:rPr sz="1400"/>
+              <a:lnSpc>
+                <a:spcPct val="90000"/>
+              </a:lnSpc>
+              <a:spcAft>
+                <a:spcPts val="300"/>
+              </a:spcAft>
+              <a:defRPr sz="1800"/>
+            </a:pPr>
+            <a:r>
+              <a:rPr sz="1300"/>
               <a:t>    • Hesabını 'gizli' yap</a:t>
             </a:r>
           </a:p>
           <a:p>
             <a:pPr lvl="1">
-              <a:spcAft>
-                <a:spcPts val="1200"/>
-              </a:spcAft>
-              <a:defRPr sz="1800"/>
-            </a:pPr>
-            <a:r>
-              <a:rPr sz="1400"/>
+              <a:lnSpc>
+                <a:spcPct val="90000"/>
+              </a:lnSpc>
+              <a:spcAft>
+                <a:spcPts val="300"/>
+              </a:spcAft>
+              <a:defRPr sz="1800"/>
+            </a:pPr>
+            <a:r>
+              <a:rPr sz="1300"/>
               <a:t>    • Sadece arkadaşların görsün</a:t>
             </a:r>
           </a:p>
           <a:p>
             <a:pPr lvl="1">
-              <a:spcAft>
-                <a:spcPts val="1200"/>
-              </a:spcAft>
-              <a:defRPr sz="1800"/>
-            </a:pPr>
-            <a:r>
-              <a:rPr sz="1400"/>
+              <a:lnSpc>
+                <a:spcPct val="90000"/>
+              </a:lnSpc>
+              <a:spcAft>
+                <a:spcPts val="300"/>
+              </a:spcAft>
+              <a:defRPr sz="1800"/>
+            </a:pPr>
+            <a:r>
+              <a:rPr sz="1300"/>
               <a:t>    • Konum paylaşma</a:t>
             </a:r>
           </a:p>
           <a:p>
             <a:pPr>
-              <a:spcAft>
-                <a:spcPts val="1200"/>
-              </a:spcAft>
-              <a:defRPr sz="2000"/>
-            </a:pPr>
-          </a:p>
-          <a:p>
-            <a:pPr>
-              <a:spcAft>
-                <a:spcPts val="1200"/>
-              </a:spcAft>
-              <a:defRPr sz="2000"/>
-            </a:pPr>
-            <a:r>
-              <a:rPr sz="1400"/>
+              <a:lnSpc>
+                <a:spcPct val="90000"/>
+              </a:lnSpc>
+              <a:spcAft>
+                <a:spcPts val="300"/>
+              </a:spcAft>
+              <a:defRPr sz="2000"/>
+            </a:pPr>
+          </a:p>
+          <a:p>
+            <a:pPr>
+              <a:lnSpc>
+                <a:spcPct val="90000"/>
+              </a:lnSpc>
+              <a:spcAft>
+                <a:spcPts val="300"/>
+              </a:spcAft>
+              <a:defRPr sz="2000"/>
+            </a:pPr>
+            <a:r>
+              <a:rPr sz="1300"/>
               <a:t>📱 Telefon/Tablet:</a:t>
             </a:r>
           </a:p>
           <a:p>
             <a:pPr lvl="1">
-              <a:spcAft>
-                <a:spcPts val="1200"/>
-              </a:spcAft>
-              <a:defRPr sz="1800"/>
-            </a:pPr>
-            <a:r>
-              <a:rPr sz="1400"/>
+              <a:lnSpc>
+                <a:spcPct val="90000"/>
+              </a:lnSpc>
+              <a:spcAft>
+                <a:spcPts val="300"/>
+              </a:spcAft>
+              <a:defRPr sz="1800"/>
+            </a:pPr>
+            <a:r>
+              <a:rPr sz="1300"/>
               <a:t>    • Kilit ekranı koy</a:t>
             </a:r>
           </a:p>
           <a:p>
             <a:pPr lvl="1">
-              <a:spcAft>
-                <a:spcPts val="1200"/>
-              </a:spcAft>
-              <a:defRPr sz="1800"/>
-            </a:pPr>
-            <a:r>
-              <a:rPr sz="1400"/>
+              <a:lnSpc>
+                <a:spcPct val="90000"/>
+              </a:lnSpc>
+              <a:spcAft>
+                <a:spcPts val="300"/>
+              </a:spcAft>
+              <a:defRPr sz="1800"/>
+            </a:pPr>
+            <a:r>
+              <a:rPr sz="1300"/>
               <a:t>    • Parmak izi/yüz tanıma kullan</a:t>
             </a:r>
           </a:p>
           <a:p>
             <a:pPr>
-              <a:spcAft>
-                <a:spcPts val="1200"/>
-              </a:spcAft>
-              <a:defRPr sz="2000"/>
-            </a:pPr>
-          </a:p>
-          <a:p>
-            <a:pPr>
-              <a:spcAft>
-                <a:spcPts val="1200"/>
+              <a:lnSpc>
+                <a:spcPct val="90000"/>
+              </a:lnSpc>
+              <a:spcAft>
+                <a:spcPts val="300"/>
+              </a:spcAft>
+              <a:defRPr sz="2000"/>
+            </a:pPr>
+          </a:p>
+          <a:p>
+            <a:pPr>
+              <a:lnSpc>
+                <a:spcPct val="90000"/>
+              </a:lnSpc>
+              <a:spcAft>
+                <a:spcPts val="300"/>
               </a:spcAft>
               <a:defRPr sz="2000" b="1"/>
             </a:pPr>
             <a:r>
-              <a:rPr sz="1400"/>
+              <a:rPr sz="1300"/>
               <a:t>💡 Unutma:</a:t>
             </a:r>
           </a:p>
           <a:p>
             <a:pPr lvl="1">
-              <a:spcAft>
-                <a:spcPts val="1200"/>
-              </a:spcAft>
-              <a:defRPr sz="1800"/>
-            </a:pPr>
-            <a:r>
-              <a:rPr sz="1400"/>
+              <a:lnSpc>
+                <a:spcPct val="90000"/>
+              </a:lnSpc>
+              <a:spcAft>
+                <a:spcPts val="300"/>
+              </a:spcAft>
+              <a:defRPr sz="1800"/>
+            </a:pPr>
+            <a:r>
+              <a:rPr sz="1300"/>
               <a:t>    • Kişisel bilgiler sana özeldir</a:t>
             </a:r>
           </a:p>
           <a:p>
             <a:pPr lvl="1">
-              <a:spcAft>
-                <a:spcPts val="1200"/>
-              </a:spcAft>
-              <a:defRPr sz="1800"/>
-            </a:pPr>
-            <a:r>
-              <a:rPr sz="1400"/>
+              <a:lnSpc>
+                <a:spcPct val="90000"/>
+              </a:lnSpc>
+              <a:spcAft>
+                <a:spcPts val="300"/>
+              </a:spcAft>
+              <a:defRPr sz="1800"/>
+            </a:pPr>
+            <a:r>
+              <a:rPr sz="1300"/>
               <a:t>    • Başkaları sormaya hakkı yoktur</a:t>
             </a:r>
           </a:p>
           <a:p>
             <a:pPr lvl="1">
-              <a:spcAft>
-                <a:spcPts val="1200"/>
-              </a:spcAft>
-              <a:defRPr sz="1800"/>
-            </a:pPr>
-            <a:r>
-              <a:rPr sz="1400"/>
+              <a:lnSpc>
+                <a:spcPct val="90000"/>
+              </a:lnSpc>
+              <a:spcAft>
+                <a:spcPts val="300"/>
+              </a:spcAft>
+              <a:defRPr sz="1800"/>
+            </a:pPr>
+            <a:r>
+              <a:rPr sz="1300"/>
               <a:t>    • 'Bilmiyorum' deme hakkın var</a:t>
             </a:r>
           </a:p>
@@ -9298,7 +10112,7 @@
         </p:nvSpPr>
         <p:spPr/>
         <p:txBody>
-          <a:bodyPr/>
+          <a:bodyPr wrap="square"/>
           <a:lstStyle/>
           <a:p>
             <a:pPr>
@@ -9352,292 +10166,379 @@
             <a:spAutoFit/>
           </a:bodyPr>
           <a:lstStyle/>
-          <a:p/>
-          <a:p>
-            <a:pPr>
-              <a:spcAft>
-                <a:spcPts val="1200"/>
-              </a:spcAft>
-              <a:defRPr sz="2000"/>
-            </a:pPr>
-            <a:r>
-              <a:rPr sz="1600"/>
+          <a:p>
+            <a:pPr>
+              <a:lnSpc>
+                <a:spcPct val="90000"/>
+              </a:lnSpc>
+              <a:spcAft>
+                <a:spcPts val="300"/>
+              </a:spcAft>
+            </a:pPr>
+          </a:p>
+          <a:p>
+            <a:pPr>
+              <a:lnSpc>
+                <a:spcPct val="90000"/>
+              </a:lnSpc>
+              <a:spcAft>
+                <a:spcPts val="300"/>
+              </a:spcAft>
+              <a:defRPr sz="2000"/>
+            </a:pPr>
+            <a:r>
+              <a:rPr sz="1400"/>
               <a:t>Şifre = Dijital kapının anahtarı</a:t>
             </a:r>
           </a:p>
           <a:p>
             <a:pPr>
-              <a:spcAft>
-                <a:spcPts val="1200"/>
-              </a:spcAft>
-              <a:defRPr sz="2000"/>
-            </a:pPr>
-          </a:p>
-          <a:p>
-            <a:pPr>
-              <a:spcAft>
-                <a:spcPts val="1200"/>
+              <a:lnSpc>
+                <a:spcPct val="90000"/>
+              </a:lnSpc>
+              <a:spcAft>
+                <a:spcPts val="300"/>
+              </a:spcAft>
+              <a:defRPr sz="2000"/>
+            </a:pPr>
+          </a:p>
+          <a:p>
+            <a:pPr>
+              <a:lnSpc>
+                <a:spcPct val="90000"/>
+              </a:lnSpc>
+              <a:spcAft>
+                <a:spcPts val="300"/>
               </a:spcAft>
               <a:defRPr sz="2000" b="1"/>
             </a:pPr>
             <a:r>
-              <a:rPr sz="1600"/>
+              <a:rPr sz="1400"/>
               <a:t>✅ Güçlü Şifre Özellikleri:</a:t>
             </a:r>
           </a:p>
           <a:p>
             <a:pPr>
-              <a:spcAft>
-                <a:spcPts val="1200"/>
-              </a:spcAft>
-              <a:defRPr sz="2000"/>
-            </a:pPr>
-          </a:p>
-          <a:p>
-            <a:pPr>
-              <a:spcAft>
-                <a:spcPts val="1200"/>
-              </a:spcAft>
-              <a:defRPr sz="2000"/>
-            </a:pPr>
-            <a:r>
-              <a:rPr sz="1600"/>
+              <a:lnSpc>
+                <a:spcPct val="90000"/>
+              </a:lnSpc>
+              <a:spcAft>
+                <a:spcPts val="300"/>
+              </a:spcAft>
+              <a:defRPr sz="2000"/>
+            </a:pPr>
+          </a:p>
+          <a:p>
+            <a:pPr>
+              <a:lnSpc>
+                <a:spcPct val="90000"/>
+              </a:lnSpc>
+              <a:spcAft>
+                <a:spcPts val="300"/>
+              </a:spcAft>
+              <a:defRPr sz="2000"/>
+            </a:pPr>
+            <a:r>
+              <a:rPr sz="1400"/>
               <a:t>📏 Uzunluk:</a:t>
             </a:r>
           </a:p>
           <a:p>
             <a:pPr lvl="1">
-              <a:spcAft>
-                <a:spcPts val="1200"/>
-              </a:spcAft>
-              <a:defRPr sz="1800"/>
-            </a:pPr>
-            <a:r>
-              <a:rPr sz="1600"/>
+              <a:lnSpc>
+                <a:spcPct val="90000"/>
+              </a:lnSpc>
+              <a:spcAft>
+                <a:spcPts val="300"/>
+              </a:spcAft>
+              <a:defRPr sz="1800"/>
+            </a:pPr>
+            <a:r>
+              <a:rPr sz="1400"/>
               <a:t>    • En az 8 karakter (12+ daha iyi)</a:t>
             </a:r>
           </a:p>
           <a:p>
             <a:pPr>
-              <a:spcAft>
-                <a:spcPts val="1200"/>
-              </a:spcAft>
-              <a:defRPr sz="2000"/>
-            </a:pPr>
-          </a:p>
-          <a:p>
-            <a:pPr>
-              <a:spcAft>
-                <a:spcPts val="1200"/>
-              </a:spcAft>
-              <a:defRPr sz="2000"/>
-            </a:pPr>
-            <a:r>
-              <a:rPr sz="1600"/>
+              <a:lnSpc>
+                <a:spcPct val="90000"/>
+              </a:lnSpc>
+              <a:spcAft>
+                <a:spcPts val="300"/>
+              </a:spcAft>
+              <a:defRPr sz="2000"/>
+            </a:pPr>
+          </a:p>
+          <a:p>
+            <a:pPr>
+              <a:lnSpc>
+                <a:spcPct val="90000"/>
+              </a:lnSpc>
+              <a:spcAft>
+                <a:spcPts val="300"/>
+              </a:spcAft>
+              <a:defRPr sz="2000"/>
+            </a:pPr>
+            <a:r>
+              <a:rPr sz="1400"/>
               <a:t>🔤 Çeşitlilik:</a:t>
             </a:r>
           </a:p>
           <a:p>
             <a:pPr lvl="1">
-              <a:spcAft>
-                <a:spcPts val="1200"/>
-              </a:spcAft>
-              <a:defRPr sz="1800"/>
-            </a:pPr>
-            <a:r>
-              <a:rPr sz="1600"/>
+              <a:lnSpc>
+                <a:spcPct val="90000"/>
+              </a:lnSpc>
+              <a:spcAft>
+                <a:spcPts val="300"/>
+              </a:spcAft>
+              <a:defRPr sz="1800"/>
+            </a:pPr>
+            <a:r>
+              <a:rPr sz="1400"/>
               <a:t>    • Büyük harf: A, B, C</a:t>
             </a:r>
           </a:p>
           <a:p>
             <a:pPr lvl="1">
-              <a:spcAft>
-                <a:spcPts val="1200"/>
-              </a:spcAft>
-              <a:defRPr sz="1800"/>
-            </a:pPr>
-            <a:r>
-              <a:rPr sz="1600"/>
+              <a:lnSpc>
+                <a:spcPct val="90000"/>
+              </a:lnSpc>
+              <a:spcAft>
+                <a:spcPts val="300"/>
+              </a:spcAft>
+              <a:defRPr sz="1800"/>
+            </a:pPr>
+            <a:r>
+              <a:rPr sz="1400"/>
               <a:t>    • Küçük harf: a, b, c</a:t>
             </a:r>
           </a:p>
           <a:p>
             <a:pPr lvl="1">
-              <a:spcAft>
-                <a:spcPts val="1200"/>
-              </a:spcAft>
-              <a:defRPr sz="1800"/>
-            </a:pPr>
-            <a:r>
-              <a:rPr sz="1600"/>
+              <a:lnSpc>
+                <a:spcPct val="90000"/>
+              </a:lnSpc>
+              <a:spcAft>
+                <a:spcPts val="300"/>
+              </a:spcAft>
+              <a:defRPr sz="1800"/>
+            </a:pPr>
+            <a:r>
+              <a:rPr sz="1400"/>
               <a:t>    • Rakam: 1, 2, 3</a:t>
             </a:r>
           </a:p>
           <a:p>
             <a:pPr lvl="1">
-              <a:spcAft>
-                <a:spcPts val="1200"/>
-              </a:spcAft>
-              <a:defRPr sz="1800"/>
-            </a:pPr>
-            <a:r>
-              <a:rPr sz="1600"/>
+              <a:lnSpc>
+                <a:spcPct val="90000"/>
+              </a:lnSpc>
+              <a:spcAft>
+                <a:spcPts val="300"/>
+              </a:spcAft>
+              <a:defRPr sz="1800"/>
+            </a:pPr>
+            <a:r>
+              <a:rPr sz="1400"/>
               <a:t>    • Sembol: !, @, #, $, %</a:t>
             </a:r>
           </a:p>
           <a:p>
             <a:pPr>
-              <a:spcAft>
-                <a:spcPts val="1200"/>
-              </a:spcAft>
-              <a:defRPr sz="2000"/>
-            </a:pPr>
-          </a:p>
-          <a:p>
-            <a:pPr>
-              <a:spcAft>
-                <a:spcPts val="1200"/>
+              <a:lnSpc>
+                <a:spcPct val="90000"/>
+              </a:lnSpc>
+              <a:spcAft>
+                <a:spcPts val="300"/>
+              </a:spcAft>
+              <a:defRPr sz="2000"/>
+            </a:pPr>
+          </a:p>
+          <a:p>
+            <a:pPr>
+              <a:lnSpc>
+                <a:spcPct val="90000"/>
+              </a:lnSpc>
+              <a:spcAft>
+                <a:spcPts val="300"/>
               </a:spcAft>
               <a:defRPr sz="2000" b="1"/>
             </a:pPr>
             <a:r>
-              <a:rPr sz="1600"/>
+              <a:rPr sz="1400"/>
               <a:t>📌 Örnek Güçlü Şifre:</a:t>
             </a:r>
           </a:p>
           <a:p>
             <a:pPr lvl="1">
-              <a:spcAft>
-                <a:spcPts val="1200"/>
-              </a:spcAft>
-              <a:defRPr sz="1800"/>
-            </a:pPr>
-            <a:r>
-              <a:rPr sz="1600"/>
+              <a:lnSpc>
+                <a:spcPct val="90000"/>
+              </a:lnSpc>
+              <a:spcAft>
+                <a:spcPts val="300"/>
+              </a:spcAft>
+              <a:defRPr sz="1800"/>
+            </a:pPr>
+            <a:r>
+              <a:rPr sz="1400"/>
               <a:t>    • K1rm1z1Elma!2024</a:t>
             </a:r>
           </a:p>
           <a:p>
             <a:pPr lvl="1">
-              <a:spcAft>
-                <a:spcPts val="1200"/>
-              </a:spcAft>
-              <a:defRPr sz="1800"/>
-            </a:pPr>
-            <a:r>
-              <a:rPr sz="1600"/>
+              <a:lnSpc>
+                <a:spcPct val="90000"/>
+              </a:lnSpc>
+              <a:spcAft>
+                <a:spcPts val="300"/>
+              </a:spcAft>
+              <a:defRPr sz="1800"/>
+            </a:pPr>
+            <a:r>
+              <a:rPr sz="1400"/>
               <a:t>    • Ben5Y@s1ndayim</a:t>
             </a:r>
           </a:p>
           <a:p>
             <a:pPr>
-              <a:spcAft>
-                <a:spcPts val="1200"/>
-              </a:spcAft>
-              <a:defRPr sz="2000"/>
-            </a:pPr>
-          </a:p>
-          <a:p>
-            <a:pPr>
-              <a:spcAft>
-                <a:spcPts val="1200"/>
-              </a:spcAft>
-              <a:defRPr sz="2000"/>
-            </a:pPr>
-            <a:r>
-              <a:rPr sz="1600"/>
+              <a:lnSpc>
+                <a:spcPct val="90000"/>
+              </a:lnSpc>
+              <a:spcAft>
+                <a:spcPts val="300"/>
+              </a:spcAft>
+              <a:defRPr sz="2000"/>
+            </a:pPr>
+          </a:p>
+          <a:p>
+            <a:pPr>
+              <a:lnSpc>
+                <a:spcPct val="90000"/>
+              </a:lnSpc>
+              <a:spcAft>
+                <a:spcPts val="300"/>
+              </a:spcAft>
+              <a:defRPr sz="2000"/>
+            </a:pPr>
+            <a:r>
+              <a:rPr sz="1400"/>
               <a:t>❌ Zayıf Şifre Örnekleri (KULLANMA!):</a:t>
             </a:r>
           </a:p>
           <a:p>
             <a:pPr lvl="1">
-              <a:spcAft>
-                <a:spcPts val="1200"/>
-              </a:spcAft>
-              <a:defRPr sz="1800"/>
-            </a:pPr>
-            <a:r>
-              <a:rPr sz="1600"/>
+              <a:lnSpc>
+                <a:spcPct val="90000"/>
+              </a:lnSpc>
+              <a:spcAft>
+                <a:spcPts val="300"/>
+              </a:spcAft>
+              <a:defRPr sz="1800"/>
+            </a:pPr>
+            <a:r>
+              <a:rPr sz="1400"/>
               <a:t>    • 12345678</a:t>
             </a:r>
           </a:p>
           <a:p>
             <a:pPr lvl="1">
-              <a:spcAft>
-                <a:spcPts val="1200"/>
-              </a:spcAft>
-              <a:defRPr sz="1800"/>
-            </a:pPr>
-            <a:r>
-              <a:rPr sz="1600"/>
+              <a:lnSpc>
+                <a:spcPct val="90000"/>
+              </a:lnSpc>
+              <a:spcAft>
+                <a:spcPts val="300"/>
+              </a:spcAft>
+              <a:defRPr sz="1800"/>
+            </a:pPr>
+            <a:r>
+              <a:rPr sz="1400"/>
               <a:t>    • adınsoyadın</a:t>
             </a:r>
           </a:p>
           <a:p>
             <a:pPr lvl="1">
-              <a:spcAft>
-                <a:spcPts val="1200"/>
-              </a:spcAft>
-              <a:defRPr sz="1800"/>
-            </a:pPr>
-            <a:r>
-              <a:rPr sz="1600"/>
+              <a:lnSpc>
+                <a:spcPct val="90000"/>
+              </a:lnSpc>
+              <a:spcAft>
+                <a:spcPts val="300"/>
+              </a:spcAft>
+              <a:defRPr sz="1800"/>
+            </a:pPr>
+            <a:r>
+              <a:rPr sz="1400"/>
               <a:t>    • dogumtarihin</a:t>
             </a:r>
           </a:p>
           <a:p>
             <a:pPr lvl="1">
-              <a:spcAft>
-                <a:spcPts val="1200"/>
-              </a:spcAft>
-              <a:defRPr sz="1800"/>
-            </a:pPr>
-            <a:r>
-              <a:rPr sz="1600"/>
+              <a:lnSpc>
+                <a:spcPct val="90000"/>
+              </a:lnSpc>
+              <a:spcAft>
+                <a:spcPts val="300"/>
+              </a:spcAft>
+              <a:defRPr sz="1800"/>
+            </a:pPr>
+            <a:r>
+              <a:rPr sz="1400"/>
               <a:t>    • sifre123</a:t>
             </a:r>
           </a:p>
           <a:p>
             <a:pPr>
-              <a:spcAft>
-                <a:spcPts val="1200"/>
-              </a:spcAft>
-              <a:defRPr sz="2000"/>
-            </a:pPr>
-          </a:p>
-          <a:p>
-            <a:pPr>
-              <a:spcAft>
-                <a:spcPts val="1200"/>
+              <a:lnSpc>
+                <a:spcPct val="90000"/>
+              </a:lnSpc>
+              <a:spcAft>
+                <a:spcPts val="300"/>
+              </a:spcAft>
+              <a:defRPr sz="2000"/>
+            </a:pPr>
+          </a:p>
+          <a:p>
+            <a:pPr>
+              <a:lnSpc>
+                <a:spcPct val="90000"/>
+              </a:lnSpc>
+              <a:spcAft>
+                <a:spcPts val="300"/>
               </a:spcAft>
               <a:defRPr sz="2000" b="1"/>
             </a:pPr>
             <a:r>
-              <a:rPr sz="1600"/>
+              <a:rPr sz="1400"/>
               <a:t>💡 Şifre Oluşturma Yöntemi:</a:t>
             </a:r>
           </a:p>
           <a:p>
             <a:pPr>
-              <a:spcAft>
-                <a:spcPts val="1200"/>
-              </a:spcAft>
-              <a:defRPr sz="2000"/>
-            </a:pPr>
-            <a:r>
-              <a:rPr sz="1600"/>
+              <a:lnSpc>
+                <a:spcPct val="90000"/>
+              </a:lnSpc>
+              <a:spcAft>
+                <a:spcPts val="300"/>
+              </a:spcAft>
+              <a:defRPr sz="2000"/>
+            </a:pPr>
+            <a:r>
+              <a:rPr sz="1400"/>
               <a:t>Cümle yap → İlk harflerini al → Rakam/sembol ekle</a:t>
             </a:r>
           </a:p>
           <a:p>
             <a:pPr>
-              <a:spcAft>
-                <a:spcPts val="1200"/>
-              </a:spcAft>
-              <a:defRPr sz="2000"/>
-            </a:pPr>
-            <a:r>
-              <a:rPr sz="1600"/>
+              <a:lnSpc>
+                <a:spcPct val="90000"/>
+              </a:lnSpc>
+              <a:spcAft>
+                <a:spcPts val="300"/>
+              </a:spcAft>
+              <a:defRPr sz="2000"/>
+            </a:pPr>
+            <a:r>
+              <a:rPr sz="1400"/>
               <a:t>'Benim 2 tane kedim var' → B2tkv! → B2tkv!2024</a:t>
             </a:r>
           </a:p>
@@ -9673,7 +10574,7 @@
         </p:nvSpPr>
         <p:spPr/>
         <p:txBody>
-          <a:bodyPr/>
+          <a:bodyPr wrap="square"/>
           <a:lstStyle/>
           <a:p>
             <a:pPr>
@@ -9727,288 +10628,375 @@
             <a:spAutoFit/>
           </a:bodyPr>
           <a:lstStyle/>
-          <a:p/>
-          <a:p>
-            <a:pPr>
-              <a:spcAft>
-                <a:spcPts val="1200"/>
-              </a:spcAft>
-              <a:defRPr sz="2000"/>
-            </a:pPr>
-            <a:r>
-              <a:rPr sz="1400"/>
+          <a:p>
+            <a:pPr>
+              <a:lnSpc>
+                <a:spcPct val="90000"/>
+              </a:lnSpc>
+              <a:spcAft>
+                <a:spcPts val="300"/>
+              </a:spcAft>
+            </a:pPr>
+          </a:p>
+          <a:p>
+            <a:pPr>
+              <a:lnSpc>
+                <a:spcPct val="90000"/>
+              </a:lnSpc>
+              <a:spcAft>
+                <a:spcPts val="300"/>
+              </a:spcAft>
+              <a:defRPr sz="2000"/>
+            </a:pPr>
+            <a:r>
+              <a:rPr sz="1300"/>
               <a:t>Güçlü şifre oluşturdun, şimdi onu koru!</a:t>
             </a:r>
           </a:p>
           <a:p>
             <a:pPr>
-              <a:spcAft>
-                <a:spcPts val="1200"/>
-              </a:spcAft>
-              <a:defRPr sz="2000"/>
-            </a:pPr>
-          </a:p>
-          <a:p>
-            <a:pPr>
-              <a:spcAft>
-                <a:spcPts val="1200"/>
+              <a:lnSpc>
+                <a:spcPct val="90000"/>
+              </a:lnSpc>
+              <a:spcAft>
+                <a:spcPts val="300"/>
+              </a:spcAft>
+              <a:defRPr sz="2000"/>
+            </a:pPr>
+          </a:p>
+          <a:p>
+            <a:pPr>
+              <a:lnSpc>
+                <a:spcPct val="90000"/>
+              </a:lnSpc>
+              <a:spcAft>
+                <a:spcPts val="300"/>
               </a:spcAft>
               <a:defRPr sz="2000" b="1"/>
             </a:pPr>
             <a:r>
-              <a:rPr sz="1400"/>
+              <a:rPr sz="1300"/>
               <a:t>✅ Şifre Güvenliği Kuralları:</a:t>
             </a:r>
           </a:p>
           <a:p>
             <a:pPr>
-              <a:spcAft>
-                <a:spcPts val="1200"/>
-              </a:spcAft>
-              <a:defRPr sz="2000"/>
-            </a:pPr>
-          </a:p>
-          <a:p>
-            <a:pPr>
-              <a:spcAft>
-                <a:spcPts val="1200"/>
-              </a:spcAft>
-              <a:defRPr sz="2000"/>
-            </a:pPr>
-            <a:r>
-              <a:rPr sz="1400"/>
+              <a:lnSpc>
+                <a:spcPct val="90000"/>
+              </a:lnSpc>
+              <a:spcAft>
+                <a:spcPts val="300"/>
+              </a:spcAft>
+              <a:defRPr sz="2000"/>
+            </a:pPr>
+          </a:p>
+          <a:p>
+            <a:pPr>
+              <a:lnSpc>
+                <a:spcPct val="90000"/>
+              </a:lnSpc>
+              <a:spcAft>
+                <a:spcPts val="300"/>
+              </a:spcAft>
+              <a:defRPr sz="2000"/>
+            </a:pPr>
+            <a:r>
+              <a:rPr sz="1300"/>
               <a:t>❌ ASLA Paylaşma:</a:t>
             </a:r>
           </a:p>
           <a:p>
             <a:pPr lvl="1">
-              <a:spcAft>
-                <a:spcPts val="1200"/>
-              </a:spcAft>
-              <a:defRPr sz="1800"/>
-            </a:pPr>
-            <a:r>
-              <a:rPr sz="1400"/>
+              <a:lnSpc>
+                <a:spcPct val="90000"/>
+              </a:lnSpc>
+              <a:spcAft>
+                <a:spcPts val="300"/>
+              </a:spcAft>
+              <a:defRPr sz="1800"/>
+            </a:pPr>
+            <a:r>
+              <a:rPr sz="1300"/>
               <a:t>    • Arkadaşınla bile paylaşma</a:t>
             </a:r>
           </a:p>
           <a:p>
             <a:pPr lvl="1">
-              <a:spcAft>
-                <a:spcPts val="1200"/>
-              </a:spcAft>
-              <a:defRPr sz="1800"/>
-            </a:pPr>
-            <a:r>
-              <a:rPr sz="1400"/>
+              <a:lnSpc>
+                <a:spcPct val="90000"/>
+              </a:lnSpc>
+              <a:spcAft>
+                <a:spcPts val="300"/>
+              </a:spcAft>
+              <a:defRPr sz="1800"/>
+            </a:pPr>
+            <a:r>
+              <a:rPr sz="1300"/>
               <a:t>    • Öğretmen asla şifreni sormaz</a:t>
             </a:r>
           </a:p>
           <a:p>
             <a:pPr lvl="1">
-              <a:spcAft>
-                <a:spcPts val="1200"/>
-              </a:spcAft>
-              <a:defRPr sz="1800"/>
-            </a:pPr>
-            <a:r>
-              <a:rPr sz="1400"/>
+              <a:lnSpc>
+                <a:spcPct val="90000"/>
+              </a:lnSpc>
+              <a:spcAft>
+                <a:spcPts val="300"/>
+              </a:spcAft>
+              <a:defRPr sz="1800"/>
+            </a:pPr>
+            <a:r>
+              <a:rPr sz="1300"/>
               <a:t>    • Telefonda/mesajda şifre gönderme</a:t>
             </a:r>
           </a:p>
           <a:p>
             <a:pPr>
-              <a:spcAft>
-                <a:spcPts val="1200"/>
-              </a:spcAft>
-              <a:defRPr sz="2000"/>
-            </a:pPr>
-          </a:p>
-          <a:p>
-            <a:pPr>
-              <a:spcAft>
-                <a:spcPts val="1200"/>
-              </a:spcAft>
-              <a:defRPr sz="2000"/>
-            </a:pPr>
-            <a:r>
-              <a:rPr sz="1400"/>
+              <a:lnSpc>
+                <a:spcPct val="90000"/>
+              </a:lnSpc>
+              <a:spcAft>
+                <a:spcPts val="300"/>
+              </a:spcAft>
+              <a:defRPr sz="2000"/>
+            </a:pPr>
+          </a:p>
+          <a:p>
+            <a:pPr>
+              <a:lnSpc>
+                <a:spcPct val="90000"/>
+              </a:lnSpc>
+              <a:spcAft>
+                <a:spcPts val="300"/>
+              </a:spcAft>
+              <a:defRPr sz="2000"/>
+            </a:pPr>
+            <a:r>
+              <a:rPr sz="1300"/>
               <a:t>🔄 Farklı Şifreler Kullan:</a:t>
             </a:r>
           </a:p>
           <a:p>
             <a:pPr lvl="1">
-              <a:spcAft>
-                <a:spcPts val="1200"/>
-              </a:spcAft>
-              <a:defRPr sz="1800"/>
-            </a:pPr>
-            <a:r>
-              <a:rPr sz="1400"/>
+              <a:lnSpc>
+                <a:spcPct val="90000"/>
+              </a:lnSpc>
+              <a:spcAft>
+                <a:spcPts val="300"/>
+              </a:spcAft>
+              <a:defRPr sz="1800"/>
+            </a:pPr>
+            <a:r>
+              <a:rPr sz="1300"/>
               <a:t>    • Her hesap için farklı şifre</a:t>
             </a:r>
           </a:p>
           <a:p>
             <a:pPr lvl="1">
-              <a:spcAft>
-                <a:spcPts val="1200"/>
-              </a:spcAft>
-              <a:defRPr sz="1800"/>
-            </a:pPr>
-            <a:r>
-              <a:rPr sz="1400"/>
+              <a:lnSpc>
+                <a:spcPct val="90000"/>
+              </a:lnSpc>
+              <a:spcAft>
+                <a:spcPts val="300"/>
+              </a:spcAft>
+              <a:defRPr sz="1800"/>
+            </a:pPr>
+            <a:r>
+              <a:rPr sz="1300"/>
               <a:t>    • Bir şifre çalınırsa diğerleri güvende</a:t>
             </a:r>
           </a:p>
           <a:p>
             <a:pPr>
-              <a:spcAft>
-                <a:spcPts val="1200"/>
-              </a:spcAft>
-              <a:defRPr sz="2000"/>
-            </a:pPr>
-          </a:p>
-          <a:p>
-            <a:pPr>
-              <a:spcAft>
-                <a:spcPts val="1200"/>
-              </a:spcAft>
-              <a:defRPr sz="2000"/>
-            </a:pPr>
-            <a:r>
-              <a:rPr sz="1400"/>
+              <a:lnSpc>
+                <a:spcPct val="90000"/>
+              </a:lnSpc>
+              <a:spcAft>
+                <a:spcPts val="300"/>
+              </a:spcAft>
+              <a:defRPr sz="2000"/>
+            </a:pPr>
+          </a:p>
+          <a:p>
+            <a:pPr>
+              <a:lnSpc>
+                <a:spcPct val="90000"/>
+              </a:lnSpc>
+              <a:spcAft>
+                <a:spcPts val="300"/>
+              </a:spcAft>
+              <a:defRPr sz="2000"/>
+            </a:pPr>
+            <a:r>
+              <a:rPr sz="1300"/>
               <a:t>📝 Şifreyi Kaydet:</a:t>
             </a:r>
           </a:p>
           <a:p>
             <a:pPr lvl="1">
-              <a:spcAft>
-                <a:spcPts val="1200"/>
-              </a:spcAft>
-              <a:defRPr sz="1800"/>
-            </a:pPr>
-            <a:r>
-              <a:rPr sz="1400"/>
+              <a:lnSpc>
+                <a:spcPct val="90000"/>
+              </a:lnSpc>
+              <a:spcAft>
+                <a:spcPts val="300"/>
+              </a:spcAft>
+              <a:defRPr sz="1800"/>
+            </a:pPr>
+            <a:r>
+              <a:rPr sz="1300"/>
               <a:t>    • Unutacaksan güvenli yere yaz</a:t>
             </a:r>
           </a:p>
           <a:p>
             <a:pPr lvl="1">
-              <a:spcAft>
-                <a:spcPts val="1200"/>
-              </a:spcAft>
-              <a:defRPr sz="1800"/>
-            </a:pPr>
-            <a:r>
-              <a:rPr sz="1400"/>
+              <a:lnSpc>
+                <a:spcPct val="90000"/>
+              </a:lnSpc>
+              <a:spcAft>
+                <a:spcPts val="300"/>
+              </a:spcAft>
+              <a:defRPr sz="1800"/>
+            </a:pPr>
+            <a:r>
+              <a:rPr sz="1300"/>
               <a:t>    • Ebeveynin bilsin</a:t>
             </a:r>
           </a:p>
           <a:p>
             <a:pPr>
-              <a:spcAft>
-                <a:spcPts val="1200"/>
-              </a:spcAft>
-              <a:defRPr sz="2000"/>
-            </a:pPr>
-          </a:p>
-          <a:p>
-            <a:pPr>
-              <a:spcAft>
-                <a:spcPts val="1200"/>
-              </a:spcAft>
-              <a:defRPr sz="2000"/>
-            </a:pPr>
-            <a:r>
-              <a:rPr sz="1400"/>
+              <a:lnSpc>
+                <a:spcPct val="90000"/>
+              </a:lnSpc>
+              <a:spcAft>
+                <a:spcPts val="300"/>
+              </a:spcAft>
+              <a:defRPr sz="2000"/>
+            </a:pPr>
+          </a:p>
+          <a:p>
+            <a:pPr>
+              <a:lnSpc>
+                <a:spcPct val="90000"/>
+              </a:lnSpc>
+              <a:spcAft>
+                <a:spcPts val="300"/>
+              </a:spcAft>
+              <a:defRPr sz="2000"/>
+            </a:pPr>
+            <a:r>
+              <a:rPr sz="1300"/>
               <a:t>🔄 Düzenli Değiştir:</a:t>
             </a:r>
           </a:p>
           <a:p>
             <a:pPr lvl="1">
-              <a:spcAft>
-                <a:spcPts val="1200"/>
-              </a:spcAft>
-              <a:defRPr sz="1800"/>
-            </a:pPr>
-            <a:r>
-              <a:rPr sz="1400"/>
+              <a:lnSpc>
+                <a:spcPct val="90000"/>
+              </a:lnSpc>
+              <a:spcAft>
+                <a:spcPts val="300"/>
+              </a:spcAft>
+              <a:defRPr sz="1800"/>
+            </a:pPr>
+            <a:r>
+              <a:rPr sz="1300"/>
               <a:t>    • 3-6 ayda bir değiştir</a:t>
             </a:r>
           </a:p>
           <a:p>
             <a:pPr>
-              <a:spcAft>
-                <a:spcPts val="1200"/>
-              </a:spcAft>
-              <a:defRPr sz="2000"/>
-            </a:pPr>
-          </a:p>
-          <a:p>
-            <a:pPr>
-              <a:spcAft>
-                <a:spcPts val="1200"/>
-              </a:spcAft>
-              <a:defRPr sz="2000"/>
-            </a:pPr>
-            <a:r>
-              <a:rPr sz="1400"/>
+              <a:lnSpc>
+                <a:spcPct val="90000"/>
+              </a:lnSpc>
+              <a:spcAft>
+                <a:spcPts val="300"/>
+              </a:spcAft>
+              <a:defRPr sz="2000"/>
+            </a:pPr>
+          </a:p>
+          <a:p>
+            <a:pPr>
+              <a:lnSpc>
+                <a:spcPct val="90000"/>
+              </a:lnSpc>
+              <a:spcAft>
+                <a:spcPts val="300"/>
+              </a:spcAft>
+              <a:defRPr sz="2000"/>
+            </a:pPr>
+            <a:r>
+              <a:rPr sz="1300"/>
               <a:t>⚠️ Şüphe Duyarsan:</a:t>
             </a:r>
           </a:p>
           <a:p>
             <a:pPr lvl="1">
-              <a:spcAft>
-                <a:spcPts val="1200"/>
-              </a:spcAft>
-              <a:defRPr sz="1800"/>
-            </a:pPr>
-            <a:r>
-              <a:rPr sz="1400"/>
+              <a:lnSpc>
+                <a:spcPct val="90000"/>
+              </a:lnSpc>
+              <a:spcAft>
+                <a:spcPts val="300"/>
+              </a:spcAft>
+              <a:defRPr sz="1800"/>
+            </a:pPr>
+            <a:r>
+              <a:rPr sz="1300"/>
               <a:t>    • Hemen değiştir</a:t>
             </a:r>
           </a:p>
           <a:p>
             <a:pPr lvl="1">
-              <a:spcAft>
-                <a:spcPts val="1200"/>
-              </a:spcAft>
-              <a:defRPr sz="1800"/>
-            </a:pPr>
-            <a:r>
-              <a:rPr sz="1400"/>
+              <a:lnSpc>
+                <a:spcPct val="90000"/>
+              </a:lnSpc>
+              <a:spcAft>
+                <a:spcPts val="300"/>
+              </a:spcAft>
+              <a:defRPr sz="1800"/>
+            </a:pPr>
+            <a:r>
+              <a:rPr sz="1300"/>
               <a:t>    • Hesabını kontrol et</a:t>
             </a:r>
           </a:p>
           <a:p>
             <a:pPr>
-              <a:spcAft>
-                <a:spcPts val="1200"/>
-              </a:spcAft>
-              <a:defRPr sz="2000"/>
-            </a:pPr>
-          </a:p>
-          <a:p>
-            <a:pPr>
-              <a:spcAft>
-                <a:spcPts val="1200"/>
+              <a:lnSpc>
+                <a:spcPct val="90000"/>
+              </a:lnSpc>
+              <a:spcAft>
+                <a:spcPts val="300"/>
+              </a:spcAft>
+              <a:defRPr sz="2000"/>
+            </a:pPr>
+          </a:p>
+          <a:p>
+            <a:pPr>
+              <a:lnSpc>
+                <a:spcPct val="90000"/>
+              </a:lnSpc>
+              <a:spcAft>
+                <a:spcPts val="300"/>
               </a:spcAft>
               <a:defRPr sz="2000" b="1"/>
             </a:pPr>
             <a:r>
-              <a:rPr sz="1400"/>
+              <a:rPr sz="1300"/>
               <a:t>💡 Şifre = Ev anahtarın</a:t>
             </a:r>
           </a:p>
           <a:p>
             <a:pPr>
-              <a:spcAft>
-                <a:spcPts val="1200"/>
-              </a:spcAft>
-              <a:defRPr sz="2000"/>
-            </a:pPr>
-            <a:r>
-              <a:rPr sz="1400"/>
+              <a:lnSpc>
+                <a:spcPct val="90000"/>
+              </a:lnSpc>
+              <a:spcAft>
+                <a:spcPts val="300"/>
+              </a:spcAft>
+              <a:defRPr sz="2000"/>
+            </a:pPr>
+            <a:r>
+              <a:rPr sz="1300"/>
               <a:t>Kimseye vermezsin, değil mi?</a:t>
             </a:r>
           </a:p>
@@ -10044,7 +11032,7 @@
         </p:nvSpPr>
         <p:spPr/>
         <p:txBody>
-          <a:bodyPr/>
+          <a:bodyPr wrap="square"/>
           <a:lstStyle/>
           <a:p>
             <a:pPr>
@@ -10098,304 +11086,394 @@
             <a:spAutoFit/>
           </a:bodyPr>
           <a:lstStyle/>
-          <a:p/>
-          <a:p>
-            <a:pPr>
-              <a:spcAft>
-                <a:spcPts val="1200"/>
-              </a:spcAft>
-              <a:defRPr sz="2000"/>
-            </a:pPr>
-            <a:r>
-              <a:rPr sz="1400"/>
+          <a:p>
+            <a:pPr>
+              <a:lnSpc>
+                <a:spcPct val="90000"/>
+              </a:lnSpc>
+              <a:spcAft>
+                <a:spcPts val="300"/>
+              </a:spcAft>
+            </a:pPr>
+          </a:p>
+          <a:p>
+            <a:pPr>
+              <a:lnSpc>
+                <a:spcPct val="90000"/>
+              </a:lnSpc>
+              <a:spcAft>
+                <a:spcPts val="300"/>
+              </a:spcAft>
+              <a:defRPr sz="2000"/>
+            </a:pPr>
+            <a:r>
+              <a:rPr sz="1200"/>
               <a:t>Phishing = Dijital dolandırıcılık</a:t>
             </a:r>
           </a:p>
           <a:p>
             <a:pPr>
-              <a:spcAft>
-                <a:spcPts val="1200"/>
-              </a:spcAft>
-              <a:defRPr sz="2000"/>
-            </a:pPr>
-            <a:r>
-              <a:rPr sz="1400"/>
+              <a:lnSpc>
+                <a:spcPct val="90000"/>
+              </a:lnSpc>
+              <a:spcAft>
+                <a:spcPts val="300"/>
+              </a:spcAft>
+              <a:defRPr sz="2000"/>
+            </a:pPr>
+            <a:r>
+              <a:rPr sz="1200"/>
               <a:t>Seni kandırıp bilgilerini çalmaya çalışırlar</a:t>
             </a:r>
           </a:p>
           <a:p>
             <a:pPr>
-              <a:spcAft>
-                <a:spcPts val="1200"/>
-              </a:spcAft>
-              <a:defRPr sz="2000"/>
-            </a:pPr>
-          </a:p>
-          <a:p>
-            <a:pPr>
-              <a:spcAft>
-                <a:spcPts val="1200"/>
+              <a:lnSpc>
+                <a:spcPct val="90000"/>
+              </a:lnSpc>
+              <a:spcAft>
+                <a:spcPts val="300"/>
+              </a:spcAft>
+              <a:defRPr sz="2000"/>
+            </a:pPr>
+          </a:p>
+          <a:p>
+            <a:pPr>
+              <a:lnSpc>
+                <a:spcPct val="90000"/>
+              </a:lnSpc>
+              <a:spcAft>
+                <a:spcPts val="300"/>
               </a:spcAft>
               <a:defRPr sz="2000" b="1"/>
             </a:pPr>
             <a:r>
-              <a:rPr sz="1400"/>
+              <a:rPr sz="1200"/>
               <a:t>✅ Phishing Türleri:</a:t>
             </a:r>
           </a:p>
           <a:p>
             <a:pPr>
-              <a:spcAft>
-                <a:spcPts val="1200"/>
-              </a:spcAft>
-              <a:defRPr sz="2000"/>
-            </a:pPr>
-          </a:p>
-          <a:p>
-            <a:pPr>
-              <a:spcAft>
-                <a:spcPts val="1200"/>
-              </a:spcAft>
-              <a:defRPr sz="2000"/>
-            </a:pPr>
-            <a:r>
-              <a:rPr sz="1400"/>
+              <a:lnSpc>
+                <a:spcPct val="90000"/>
+              </a:lnSpc>
+              <a:spcAft>
+                <a:spcPts val="300"/>
+              </a:spcAft>
+              <a:defRPr sz="2000"/>
+            </a:pPr>
+          </a:p>
+          <a:p>
+            <a:pPr>
+              <a:lnSpc>
+                <a:spcPct val="90000"/>
+              </a:lnSpc>
+              <a:spcAft>
+                <a:spcPts val="300"/>
+              </a:spcAft>
+              <a:defRPr sz="2000"/>
+            </a:pPr>
+            <a:r>
+              <a:rPr sz="1200"/>
               <a:t>📧 E-posta Phishing:</a:t>
             </a:r>
           </a:p>
           <a:p>
             <a:pPr lvl="1">
-              <a:spcAft>
-                <a:spcPts val="1200"/>
-              </a:spcAft>
-              <a:defRPr sz="1800"/>
-            </a:pPr>
-            <a:r>
-              <a:rPr sz="1400"/>
+              <a:lnSpc>
+                <a:spcPct val="90000"/>
+              </a:lnSpc>
+              <a:spcAft>
+                <a:spcPts val="300"/>
+              </a:spcAft>
+              <a:defRPr sz="1800"/>
+            </a:pPr>
+            <a:r>
+              <a:rPr sz="1200"/>
               <a:t>    • 'Hesabın kapatılacak, şifreni gir!' mesajları</a:t>
             </a:r>
           </a:p>
           <a:p>
             <a:pPr lvl="1">
-              <a:spcAft>
-                <a:spcPts val="1200"/>
-              </a:spcAft>
-              <a:defRPr sz="1800"/>
-            </a:pPr>
-            <a:r>
-              <a:rPr sz="1400"/>
+              <a:lnSpc>
+                <a:spcPct val="90000"/>
+              </a:lnSpc>
+              <a:spcAft>
+                <a:spcPts val="300"/>
+              </a:spcAft>
+              <a:defRPr sz="1800"/>
+            </a:pPr>
+            <a:r>
+              <a:rPr sz="1200"/>
               <a:t>    • 'Hediye kazandın!' yalanları</a:t>
             </a:r>
           </a:p>
           <a:p>
             <a:pPr>
-              <a:spcAft>
-                <a:spcPts val="1200"/>
-              </a:spcAft>
-              <a:defRPr sz="2000"/>
-            </a:pPr>
-          </a:p>
-          <a:p>
-            <a:pPr>
-              <a:spcAft>
-                <a:spcPts val="1200"/>
-              </a:spcAft>
-              <a:defRPr sz="2000"/>
-            </a:pPr>
-            <a:r>
-              <a:rPr sz="1400"/>
+              <a:lnSpc>
+                <a:spcPct val="90000"/>
+              </a:lnSpc>
+              <a:spcAft>
+                <a:spcPts val="300"/>
+              </a:spcAft>
+              <a:defRPr sz="2000"/>
+            </a:pPr>
+          </a:p>
+          <a:p>
+            <a:pPr>
+              <a:lnSpc>
+                <a:spcPct val="90000"/>
+              </a:lnSpc>
+              <a:spcAft>
+                <a:spcPts val="300"/>
+              </a:spcAft>
+              <a:defRPr sz="2000"/>
+            </a:pPr>
+            <a:r>
+              <a:rPr sz="1200"/>
               <a:t>💬 SMS Phishing (Smishing):</a:t>
             </a:r>
           </a:p>
           <a:p>
             <a:pPr lvl="1">
-              <a:spcAft>
-                <a:spcPts val="1200"/>
-              </a:spcAft>
-              <a:defRPr sz="1800"/>
-            </a:pPr>
-            <a:r>
-              <a:rPr sz="1400"/>
+              <a:lnSpc>
+                <a:spcPct val="90000"/>
+              </a:lnSpc>
+              <a:spcAft>
+                <a:spcPts val="300"/>
+              </a:spcAft>
+              <a:defRPr sz="1800"/>
+            </a:pPr>
+            <a:r>
+              <a:rPr sz="1200"/>
               <a:t>    • 'Banka hesabın kilitlendi' SMS'i</a:t>
             </a:r>
           </a:p>
           <a:p>
             <a:pPr>
-              <a:spcAft>
-                <a:spcPts val="1200"/>
-              </a:spcAft>
-              <a:defRPr sz="2000"/>
-            </a:pPr>
-          </a:p>
-          <a:p>
-            <a:pPr>
-              <a:spcAft>
-                <a:spcPts val="1200"/>
-              </a:spcAft>
-              <a:defRPr sz="2000"/>
-            </a:pPr>
-            <a:r>
-              <a:rPr sz="1400"/>
+              <a:lnSpc>
+                <a:spcPct val="90000"/>
+              </a:lnSpc>
+              <a:spcAft>
+                <a:spcPts val="300"/>
+              </a:spcAft>
+              <a:defRPr sz="2000"/>
+            </a:pPr>
+          </a:p>
+          <a:p>
+            <a:pPr>
+              <a:lnSpc>
+                <a:spcPct val="90000"/>
+              </a:lnSpc>
+              <a:spcAft>
+                <a:spcPts val="300"/>
+              </a:spcAft>
+              <a:defRPr sz="2000"/>
+            </a:pPr>
+            <a:r>
+              <a:rPr sz="1200"/>
               <a:t>📱 Sosyal Medya:</a:t>
             </a:r>
           </a:p>
           <a:p>
             <a:pPr lvl="1">
-              <a:spcAft>
-                <a:spcPts val="1200"/>
-              </a:spcAft>
-              <a:defRPr sz="1800"/>
-            </a:pPr>
-            <a:r>
-              <a:rPr sz="1400"/>
+              <a:lnSpc>
+                <a:spcPct val="90000"/>
+              </a:lnSpc>
+              <a:spcAft>
+                <a:spcPts val="300"/>
+              </a:spcAft>
+              <a:defRPr sz="1800"/>
+            </a:pPr>
+            <a:r>
+              <a:rPr sz="1200"/>
               <a:t>    • Sahte hesaplar</a:t>
             </a:r>
           </a:p>
           <a:p>
             <a:pPr lvl="1">
-              <a:spcAft>
-                <a:spcPts val="1200"/>
-              </a:spcAft>
-              <a:defRPr sz="1800"/>
-            </a:pPr>
-            <a:r>
-              <a:rPr sz="1400"/>
+              <a:lnSpc>
+                <a:spcPct val="90000"/>
+              </a:lnSpc>
+              <a:spcAft>
+                <a:spcPts val="300"/>
+              </a:spcAft>
+              <a:defRPr sz="1800"/>
+            </a:pPr>
+            <a:r>
+              <a:rPr sz="1200"/>
               <a:t>    • 'Arkadaşından mesaj' gibi görünme</a:t>
             </a:r>
           </a:p>
           <a:p>
             <a:pPr>
-              <a:spcAft>
-                <a:spcPts val="1200"/>
-              </a:spcAft>
-              <a:defRPr sz="2000"/>
-            </a:pPr>
-          </a:p>
-          <a:p>
-            <a:pPr>
-              <a:spcAft>
-                <a:spcPts val="1200"/>
+              <a:lnSpc>
+                <a:spcPct val="90000"/>
+              </a:lnSpc>
+              <a:spcAft>
+                <a:spcPts val="300"/>
+              </a:spcAft>
+              <a:defRPr sz="2000"/>
+            </a:pPr>
+          </a:p>
+          <a:p>
+            <a:pPr>
+              <a:lnSpc>
+                <a:spcPct val="90000"/>
+              </a:lnSpc>
+              <a:spcAft>
+                <a:spcPts val="300"/>
               </a:spcAft>
               <a:defRPr sz="2000" b="1"/>
             </a:pPr>
             <a:r>
-              <a:rPr sz="1400"/>
+              <a:rPr sz="1200"/>
               <a:t>📌 Phishing Nasıl Anlaşılır?</a:t>
             </a:r>
           </a:p>
           <a:p>
             <a:pPr lvl="1">
-              <a:spcAft>
-                <a:spcPts val="1200"/>
-              </a:spcAft>
-              <a:defRPr sz="1800"/>
-            </a:pPr>
-            <a:r>
-              <a:rPr sz="1400"/>
+              <a:lnSpc>
+                <a:spcPct val="90000"/>
+              </a:lnSpc>
+              <a:spcAft>
+                <a:spcPts val="300"/>
+              </a:spcAft>
+              <a:defRPr sz="1800"/>
+            </a:pPr>
+            <a:r>
+              <a:rPr sz="1200"/>
               <a:t>    • Acele ettiriyor ('Hemen tıkla!')</a:t>
             </a:r>
           </a:p>
           <a:p>
             <a:pPr lvl="1">
-              <a:spcAft>
-                <a:spcPts val="1200"/>
-              </a:spcAft>
-              <a:defRPr sz="1800"/>
-            </a:pPr>
-            <a:r>
-              <a:rPr sz="1400"/>
+              <a:lnSpc>
+                <a:spcPct val="90000"/>
+              </a:lnSpc>
+              <a:spcAft>
+                <a:spcPts val="300"/>
+              </a:spcAft>
+              <a:defRPr sz="1800"/>
+            </a:pPr>
+            <a:r>
+              <a:rPr sz="1200"/>
               <a:t>    • Kişisel bilgi istiyor</a:t>
             </a:r>
           </a:p>
           <a:p>
             <a:pPr lvl="1">
-              <a:spcAft>
-                <a:spcPts val="1200"/>
-              </a:spcAft>
-              <a:defRPr sz="1800"/>
-            </a:pPr>
-            <a:r>
-              <a:rPr sz="1400"/>
+              <a:lnSpc>
+                <a:spcPct val="90000"/>
+              </a:lnSpc>
+              <a:spcAft>
+                <a:spcPts val="300"/>
+              </a:spcAft>
+              <a:defRPr sz="1800"/>
+            </a:pPr>
+            <a:r>
+              <a:rPr sz="1200"/>
               <a:t>    • E-posta adresi garip (goog1e.com gibi)</a:t>
             </a:r>
           </a:p>
           <a:p>
             <a:pPr lvl="1">
-              <a:spcAft>
-                <a:spcPts val="1200"/>
-              </a:spcAft>
-              <a:defRPr sz="1800"/>
-            </a:pPr>
-            <a:r>
-              <a:rPr sz="1400"/>
+              <a:lnSpc>
+                <a:spcPct val="90000"/>
+              </a:lnSpc>
+              <a:spcAft>
+                <a:spcPts val="300"/>
+              </a:spcAft>
+              <a:defRPr sz="1800"/>
+            </a:pPr>
+            <a:r>
+              <a:rPr sz="1200"/>
               <a:t>    • Yazım hataları çok</a:t>
             </a:r>
           </a:p>
           <a:p>
             <a:pPr lvl="1">
-              <a:spcAft>
-                <a:spcPts val="1200"/>
-              </a:spcAft>
-              <a:defRPr sz="1800"/>
-            </a:pPr>
-            <a:r>
-              <a:rPr sz="1400"/>
+              <a:lnSpc>
+                <a:spcPct val="90000"/>
+              </a:lnSpc>
+              <a:spcAft>
+                <a:spcPts val="300"/>
+              </a:spcAft>
+              <a:defRPr sz="1800"/>
+            </a:pPr>
+            <a:r>
+              <a:rPr sz="1200"/>
               <a:t>    • Link tıklandığında farklı site açılıyor</a:t>
             </a:r>
           </a:p>
           <a:p>
             <a:pPr>
-              <a:spcAft>
-                <a:spcPts val="1200"/>
-              </a:spcAft>
-              <a:defRPr sz="2000"/>
-            </a:pPr>
-          </a:p>
-          <a:p>
-            <a:pPr>
-              <a:spcAft>
-                <a:spcPts val="1200"/>
+              <a:lnSpc>
+                <a:spcPct val="90000"/>
+              </a:lnSpc>
+              <a:spcAft>
+                <a:spcPts val="300"/>
+              </a:spcAft>
+              <a:defRPr sz="2000"/>
+            </a:pPr>
+          </a:p>
+          <a:p>
+            <a:pPr>
+              <a:lnSpc>
+                <a:spcPct val="90000"/>
+              </a:lnSpc>
+              <a:spcAft>
+                <a:spcPts val="300"/>
               </a:spcAft>
               <a:defRPr sz="2000" b="1"/>
             </a:pPr>
             <a:r>
-              <a:rPr sz="1400"/>
+              <a:rPr sz="1200"/>
               <a:t>💡 Şüphe duyarsan:</a:t>
             </a:r>
           </a:p>
           <a:p>
             <a:pPr lvl="1">
-              <a:spcAft>
-                <a:spcPts val="1200"/>
-              </a:spcAft>
-              <a:defRPr sz="1800"/>
-            </a:pPr>
-            <a:r>
-              <a:rPr sz="1400"/>
+              <a:lnSpc>
+                <a:spcPct val="90000"/>
+              </a:lnSpc>
+              <a:spcAft>
+                <a:spcPts val="300"/>
+              </a:spcAft>
+              <a:defRPr sz="1800"/>
+            </a:pPr>
+            <a:r>
+              <a:rPr sz="1200"/>
               <a:t>    • Tıklama!</a:t>
             </a:r>
           </a:p>
           <a:p>
             <a:pPr lvl="1">
-              <a:spcAft>
-                <a:spcPts val="1200"/>
-              </a:spcAft>
-              <a:defRPr sz="1800"/>
-            </a:pPr>
-            <a:r>
-              <a:rPr sz="1400"/>
+              <a:lnSpc>
+                <a:spcPct val="90000"/>
+              </a:lnSpc>
+              <a:spcAft>
+                <a:spcPts val="300"/>
+              </a:spcAft>
+              <a:defRPr sz="1800"/>
+            </a:pPr>
+            <a:r>
+              <a:rPr sz="1200"/>
               <a:t>    • Ebeveynine göster</a:t>
             </a:r>
           </a:p>
           <a:p>
             <a:pPr lvl="1">
-              <a:spcAft>
-                <a:spcPts val="1200"/>
-              </a:spcAft>
-              <a:defRPr sz="1800"/>
-            </a:pPr>
-            <a:r>
-              <a:rPr sz="1400"/>
+              <a:lnSpc>
+                <a:spcPct val="90000"/>
+              </a:lnSpc>
+              <a:spcAft>
+                <a:spcPts val="300"/>
+              </a:spcAft>
+              <a:defRPr sz="1800"/>
+            </a:pPr>
+            <a:r>
+              <a:rPr sz="1200"/>
               <a:t>    • Direkt sil</a:t>
             </a:r>
           </a:p>
@@ -10431,7 +11509,7 @@
         </p:nvSpPr>
         <p:spPr/>
         <p:txBody>
-          <a:bodyPr/>
+          <a:bodyPr wrap="square"/>
           <a:lstStyle/>
           <a:p>
             <a:pPr>
@@ -10485,312 +11563,405 @@
             <a:spAutoFit/>
           </a:bodyPr>
           <a:lstStyle/>
-          <a:p/>
-          <a:p>
-            <a:pPr>
-              <a:spcAft>
-                <a:spcPts val="1200"/>
-              </a:spcAft>
-              <a:defRPr sz="2000"/>
-            </a:pPr>
-            <a:r>
-              <a:rPr sz="1400"/>
+          <a:p>
+            <a:pPr>
+              <a:lnSpc>
+                <a:spcPct val="90000"/>
+              </a:lnSpc>
+              <a:spcAft>
+                <a:spcPts val="300"/>
+              </a:spcAft>
+            </a:pPr>
+          </a:p>
+          <a:p>
+            <a:pPr>
+              <a:lnSpc>
+                <a:spcPct val="90000"/>
+              </a:lnSpc>
+              <a:spcAft>
+                <a:spcPts val="300"/>
+              </a:spcAft>
+              <a:defRPr sz="2000"/>
+            </a:pPr>
+            <a:r>
+              <a:rPr sz="1300"/>
               <a:t>Zararlı yazılım = Bilgisayara/telefona zarar veren programlar</a:t>
             </a:r>
           </a:p>
           <a:p>
             <a:pPr>
-              <a:spcAft>
-                <a:spcPts val="1200"/>
-              </a:spcAft>
-              <a:defRPr sz="2000"/>
-            </a:pPr>
-          </a:p>
-          <a:p>
-            <a:pPr>
-              <a:spcAft>
-                <a:spcPts val="1200"/>
+              <a:lnSpc>
+                <a:spcPct val="90000"/>
+              </a:lnSpc>
+              <a:spcAft>
+                <a:spcPts val="300"/>
+              </a:spcAft>
+              <a:defRPr sz="2000"/>
+            </a:pPr>
+          </a:p>
+          <a:p>
+            <a:pPr>
+              <a:lnSpc>
+                <a:spcPct val="90000"/>
+              </a:lnSpc>
+              <a:spcAft>
+                <a:spcPts val="300"/>
               </a:spcAft>
               <a:defRPr sz="2000" b="1"/>
             </a:pPr>
             <a:r>
-              <a:rPr sz="1400"/>
+              <a:rPr sz="1300"/>
               <a:t>✅ Zararlı Yazılım Türleri:</a:t>
             </a:r>
           </a:p>
           <a:p>
             <a:pPr>
-              <a:spcAft>
-                <a:spcPts val="1200"/>
-              </a:spcAft>
-              <a:defRPr sz="2000"/>
-            </a:pPr>
-          </a:p>
-          <a:p>
-            <a:pPr>
-              <a:spcAft>
-                <a:spcPts val="1200"/>
-              </a:spcAft>
-              <a:defRPr sz="2000"/>
-            </a:pPr>
-            <a:r>
-              <a:rPr sz="1400"/>
+              <a:lnSpc>
+                <a:spcPct val="90000"/>
+              </a:lnSpc>
+              <a:spcAft>
+                <a:spcPts val="300"/>
+              </a:spcAft>
+              <a:defRPr sz="2000"/>
+            </a:pPr>
+          </a:p>
+          <a:p>
+            <a:pPr>
+              <a:lnSpc>
+                <a:spcPct val="90000"/>
+              </a:lnSpc>
+              <a:spcAft>
+                <a:spcPts val="300"/>
+              </a:spcAft>
+              <a:defRPr sz="2000"/>
+            </a:pPr>
+            <a:r>
+              <a:rPr sz="1300"/>
               <a:t>🦠 Virüs:</a:t>
             </a:r>
           </a:p>
           <a:p>
             <a:pPr lvl="1">
-              <a:spcAft>
-                <a:spcPts val="1200"/>
-              </a:spcAft>
-              <a:defRPr sz="1800"/>
-            </a:pPr>
-            <a:r>
-              <a:rPr sz="1400"/>
+              <a:lnSpc>
+                <a:spcPct val="90000"/>
+              </a:lnSpc>
+              <a:spcAft>
+                <a:spcPts val="300"/>
+              </a:spcAft>
+              <a:defRPr sz="1800"/>
+            </a:pPr>
+            <a:r>
+              <a:rPr sz="1300"/>
               <a:t>    • Kendini kopyalar</a:t>
             </a:r>
           </a:p>
           <a:p>
             <a:pPr lvl="1">
-              <a:spcAft>
-                <a:spcPts val="1200"/>
-              </a:spcAft>
-              <a:defRPr sz="1800"/>
-            </a:pPr>
-            <a:r>
-              <a:rPr sz="1400"/>
+              <a:lnSpc>
+                <a:spcPct val="90000"/>
+              </a:lnSpc>
+              <a:spcAft>
+                <a:spcPts val="300"/>
+              </a:spcAft>
+              <a:defRPr sz="1800"/>
+            </a:pPr>
+            <a:r>
+              <a:rPr sz="1300"/>
               <a:t>    • Dosyalara bulaşır</a:t>
             </a:r>
           </a:p>
           <a:p>
             <a:pPr lvl="1">
-              <a:spcAft>
-                <a:spcPts val="1200"/>
-              </a:spcAft>
-              <a:defRPr sz="1800"/>
-            </a:pPr>
-            <a:r>
-              <a:rPr sz="1400"/>
+              <a:lnSpc>
+                <a:spcPct val="90000"/>
+              </a:lnSpc>
+              <a:spcAft>
+                <a:spcPts val="300"/>
+              </a:spcAft>
+              <a:defRPr sz="1800"/>
+            </a:pPr>
+            <a:r>
+              <a:rPr sz="1300"/>
               <a:t>    • Sistem yavaşlar</a:t>
             </a:r>
           </a:p>
           <a:p>
             <a:pPr>
-              <a:spcAft>
-                <a:spcPts val="1200"/>
-              </a:spcAft>
-              <a:defRPr sz="2000"/>
-            </a:pPr>
-          </a:p>
-          <a:p>
-            <a:pPr>
-              <a:spcAft>
-                <a:spcPts val="1200"/>
-              </a:spcAft>
-              <a:defRPr sz="2000"/>
-            </a:pPr>
-            <a:r>
-              <a:rPr sz="1400"/>
+              <a:lnSpc>
+                <a:spcPct val="90000"/>
+              </a:lnSpc>
+              <a:spcAft>
+                <a:spcPts val="300"/>
+              </a:spcAft>
+              <a:defRPr sz="2000"/>
+            </a:pPr>
+          </a:p>
+          <a:p>
+            <a:pPr>
+              <a:lnSpc>
+                <a:spcPct val="90000"/>
+              </a:lnSpc>
+              <a:spcAft>
+                <a:spcPts val="300"/>
+              </a:spcAft>
+              <a:defRPr sz="2000"/>
+            </a:pPr>
+            <a:r>
+              <a:rPr sz="1300"/>
               <a:t>🐴 Truva Atı (Trojan):</a:t>
             </a:r>
           </a:p>
           <a:p>
             <a:pPr lvl="1">
-              <a:spcAft>
-                <a:spcPts val="1200"/>
-              </a:spcAft>
-              <a:defRPr sz="1800"/>
-            </a:pPr>
-            <a:r>
-              <a:rPr sz="1400"/>
+              <a:lnSpc>
+                <a:spcPct val="90000"/>
+              </a:lnSpc>
+              <a:spcAft>
+                <a:spcPts val="300"/>
+              </a:spcAft>
+              <a:defRPr sz="1800"/>
+            </a:pPr>
+            <a:r>
+              <a:rPr sz="1300"/>
               <a:t>    • Masum görünür (oyun, program)</a:t>
             </a:r>
           </a:p>
           <a:p>
             <a:pPr lvl="1">
-              <a:spcAft>
-                <a:spcPts val="1200"/>
-              </a:spcAft>
-              <a:defRPr sz="1800"/>
-            </a:pPr>
-            <a:r>
-              <a:rPr sz="1400"/>
+              <a:lnSpc>
+                <a:spcPct val="90000"/>
+              </a:lnSpc>
+              <a:spcAft>
+                <a:spcPts val="300"/>
+              </a:spcAft>
+              <a:defRPr sz="1800"/>
+            </a:pPr>
+            <a:r>
+              <a:rPr sz="1300"/>
               <a:t>    • Aslında zararlı</a:t>
             </a:r>
           </a:p>
           <a:p>
             <a:pPr>
-              <a:spcAft>
-                <a:spcPts val="1200"/>
-              </a:spcAft>
-              <a:defRPr sz="2000"/>
-            </a:pPr>
-          </a:p>
-          <a:p>
-            <a:pPr>
-              <a:spcAft>
-                <a:spcPts val="1200"/>
-              </a:spcAft>
-              <a:defRPr sz="2000"/>
-            </a:pPr>
-            <a:r>
-              <a:rPr sz="1400"/>
+              <a:lnSpc>
+                <a:spcPct val="90000"/>
+              </a:lnSpc>
+              <a:spcAft>
+                <a:spcPts val="300"/>
+              </a:spcAft>
+              <a:defRPr sz="2000"/>
+            </a:pPr>
+          </a:p>
+          <a:p>
+            <a:pPr>
+              <a:lnSpc>
+                <a:spcPct val="90000"/>
+              </a:lnSpc>
+              <a:spcAft>
+                <a:spcPts val="300"/>
+              </a:spcAft>
+              <a:defRPr sz="2000"/>
+            </a:pPr>
+            <a:r>
+              <a:rPr sz="1300"/>
               <a:t>🔒 Fidye Yazılımı (Ransomware):</a:t>
             </a:r>
           </a:p>
           <a:p>
             <a:pPr lvl="1">
-              <a:spcAft>
-                <a:spcPts val="1200"/>
-              </a:spcAft>
-              <a:defRPr sz="1800"/>
-            </a:pPr>
-            <a:r>
-              <a:rPr sz="1400"/>
+              <a:lnSpc>
+                <a:spcPct val="90000"/>
+              </a:lnSpc>
+              <a:spcAft>
+                <a:spcPts val="300"/>
+              </a:spcAft>
+              <a:defRPr sz="1800"/>
+            </a:pPr>
+            <a:r>
+              <a:rPr sz="1300"/>
               <a:t>    • Dosyalarını kilitler</a:t>
             </a:r>
           </a:p>
           <a:p>
             <a:pPr lvl="1">
-              <a:spcAft>
-                <a:spcPts val="1200"/>
-              </a:spcAft>
-              <a:defRPr sz="1800"/>
-            </a:pPr>
-            <a:r>
-              <a:rPr sz="1400"/>
+              <a:lnSpc>
+                <a:spcPct val="90000"/>
+              </a:lnSpc>
+              <a:spcAft>
+                <a:spcPts val="300"/>
+              </a:spcAft>
+              <a:defRPr sz="1800"/>
+            </a:pPr>
+            <a:r>
+              <a:rPr sz="1300"/>
               <a:t>    • Para ister</a:t>
             </a:r>
           </a:p>
           <a:p>
             <a:pPr>
-              <a:spcAft>
-                <a:spcPts val="1200"/>
-              </a:spcAft>
-              <a:defRPr sz="2000"/>
-            </a:pPr>
-          </a:p>
-          <a:p>
-            <a:pPr>
-              <a:spcAft>
-                <a:spcPts val="1200"/>
-              </a:spcAft>
-              <a:defRPr sz="2000"/>
-            </a:pPr>
-            <a:r>
-              <a:rPr sz="1400"/>
+              <a:lnSpc>
+                <a:spcPct val="90000"/>
+              </a:lnSpc>
+              <a:spcAft>
+                <a:spcPts val="300"/>
+              </a:spcAft>
+              <a:defRPr sz="2000"/>
+            </a:pPr>
+          </a:p>
+          <a:p>
+            <a:pPr>
+              <a:lnSpc>
+                <a:spcPct val="90000"/>
+              </a:lnSpc>
+              <a:spcAft>
+                <a:spcPts val="300"/>
+              </a:spcAft>
+              <a:defRPr sz="2000"/>
+            </a:pPr>
+            <a:r>
+              <a:rPr sz="1300"/>
               <a:t>🕵️ Casus Yazılım (Spyware):</a:t>
             </a:r>
           </a:p>
           <a:p>
             <a:pPr lvl="1">
-              <a:spcAft>
-                <a:spcPts val="1200"/>
-              </a:spcAft>
-              <a:defRPr sz="1800"/>
-            </a:pPr>
-            <a:r>
-              <a:rPr sz="1400"/>
+              <a:lnSpc>
+                <a:spcPct val="90000"/>
+              </a:lnSpc>
+              <a:spcAft>
+                <a:spcPts val="300"/>
+              </a:spcAft>
+              <a:defRPr sz="1800"/>
+            </a:pPr>
+            <a:r>
+              <a:rPr sz="1300"/>
               <a:t>    • Yaptıklarını izler</a:t>
             </a:r>
           </a:p>
           <a:p>
             <a:pPr lvl="1">
-              <a:spcAft>
-                <a:spcPts val="1200"/>
-              </a:spcAft>
-              <a:defRPr sz="1800"/>
-            </a:pPr>
-            <a:r>
-              <a:rPr sz="1400"/>
+              <a:lnSpc>
+                <a:spcPct val="90000"/>
+              </a:lnSpc>
+              <a:spcAft>
+                <a:spcPts val="300"/>
+              </a:spcAft>
+              <a:defRPr sz="1800"/>
+            </a:pPr>
+            <a:r>
+              <a:rPr sz="1300"/>
               <a:t>    • Bilgi çalar</a:t>
             </a:r>
           </a:p>
           <a:p>
             <a:pPr>
-              <a:spcAft>
-                <a:spcPts val="1200"/>
-              </a:spcAft>
-              <a:defRPr sz="2000"/>
-            </a:pPr>
-          </a:p>
-          <a:p>
-            <a:pPr>
-              <a:spcAft>
-                <a:spcPts val="1200"/>
+              <a:lnSpc>
+                <a:spcPct val="90000"/>
+              </a:lnSpc>
+              <a:spcAft>
+                <a:spcPts val="300"/>
+              </a:spcAft>
+              <a:defRPr sz="2000"/>
+            </a:pPr>
+          </a:p>
+          <a:p>
+            <a:pPr>
+              <a:lnSpc>
+                <a:spcPct val="90000"/>
+              </a:lnSpc>
+              <a:spcAft>
+                <a:spcPts val="300"/>
               </a:spcAft>
               <a:defRPr sz="2000" b="1"/>
             </a:pPr>
             <a:r>
-              <a:rPr sz="1400"/>
+              <a:rPr sz="1300"/>
               <a:t>📌 Bulaşma Yolları:</a:t>
             </a:r>
           </a:p>
           <a:p>
             <a:pPr lvl="1">
-              <a:spcAft>
-                <a:spcPts val="1200"/>
-              </a:spcAft>
-              <a:defRPr sz="1800"/>
-            </a:pPr>
-            <a:r>
-              <a:rPr sz="1400"/>
+              <a:lnSpc>
+                <a:spcPct val="90000"/>
+              </a:lnSpc>
+              <a:spcAft>
+                <a:spcPts val="300"/>
+              </a:spcAft>
+              <a:defRPr sz="1800"/>
+            </a:pPr>
+            <a:r>
+              <a:rPr sz="1300"/>
               <a:t>    • Bilinmeyen sitelerdeki indirmeler</a:t>
             </a:r>
           </a:p>
           <a:p>
             <a:pPr lvl="1">
-              <a:spcAft>
-                <a:spcPts val="1200"/>
-              </a:spcAft>
-              <a:defRPr sz="1800"/>
-            </a:pPr>
-            <a:r>
-              <a:rPr sz="1400"/>
+              <a:lnSpc>
+                <a:spcPct val="90000"/>
+              </a:lnSpc>
+              <a:spcAft>
+                <a:spcPts val="300"/>
+              </a:spcAft>
+              <a:defRPr sz="1800"/>
+            </a:pPr>
+            <a:r>
+              <a:rPr sz="1300"/>
               <a:t>    • E-posta ekleri</a:t>
             </a:r>
           </a:p>
           <a:p>
             <a:pPr lvl="1">
-              <a:spcAft>
-                <a:spcPts val="1200"/>
-              </a:spcAft>
-              <a:defRPr sz="1800"/>
-            </a:pPr>
-            <a:r>
-              <a:rPr sz="1400"/>
+              <a:lnSpc>
+                <a:spcPct val="90000"/>
+              </a:lnSpc>
+              <a:spcAft>
+                <a:spcPts val="300"/>
+              </a:spcAft>
+              <a:defRPr sz="1800"/>
+            </a:pPr>
+            <a:r>
+              <a:rPr sz="1300"/>
               <a:t>    • Korsan programlar</a:t>
             </a:r>
           </a:p>
           <a:p>
             <a:pPr lvl="1">
-              <a:spcAft>
-                <a:spcPts val="1200"/>
-              </a:spcAft>
-              <a:defRPr sz="1800"/>
-            </a:pPr>
-            <a:r>
-              <a:rPr sz="1400"/>
+              <a:lnSpc>
+                <a:spcPct val="90000"/>
+              </a:lnSpc>
+              <a:spcAft>
+                <a:spcPts val="300"/>
+              </a:spcAft>
+              <a:defRPr sz="1800"/>
+            </a:pPr>
+            <a:r>
+              <a:rPr sz="1300"/>
               <a:t>    • USB bellekler</a:t>
             </a:r>
           </a:p>
           <a:p>
             <a:pPr>
-              <a:spcAft>
-                <a:spcPts val="1200"/>
-              </a:spcAft>
-              <a:defRPr sz="2000"/>
-            </a:pPr>
-          </a:p>
-          <a:p>
-            <a:pPr>
-              <a:spcAft>
-                <a:spcPts val="1200"/>
+              <a:lnSpc>
+                <a:spcPct val="90000"/>
+              </a:lnSpc>
+              <a:spcAft>
+                <a:spcPts val="300"/>
+              </a:spcAft>
+              <a:defRPr sz="2000"/>
+            </a:pPr>
+          </a:p>
+          <a:p>
+            <a:pPr>
+              <a:lnSpc>
+                <a:spcPct val="90000"/>
+              </a:lnSpc>
+              <a:spcAft>
+                <a:spcPts val="300"/>
               </a:spcAft>
               <a:defRPr sz="2000" b="1"/>
             </a:pPr>
             <a:r>
-              <a:rPr sz="1400"/>
+              <a:rPr sz="1300"/>
               <a:t>💡 Korunma: Antivirüs programı kullan!</a:t>
             </a:r>
           </a:p>

--- a/sunumlar/5-sinif-unite4-etik-guvenlik-DETAYLI.pptx
+++ b/sunumlar/5-sinif-unite4-etik-guvenlik-DETAYLI.pptx
@@ -5638,12 +5638,21 @@
           <a:noFill/>
         </p:spPr>
         <p:txBody>
-          <a:bodyPr wrap="square">
+          <a:bodyPr wrap="square" tIns="25400" bIns="25400" lIns="63500" rIns="63500">
             <a:spAutoFit/>
           </a:bodyPr>
           <a:lstStyle/>
           <a:p>
             <a:pPr algn="ctr">
+              <a:lnSpc>
+                <a:spcPct val="85000"/>
+              </a:lnSpc>
+              <a:spcBef>
+                <a:spcPts val="200"/>
+              </a:spcBef>
+              <a:spcAft>
+                <a:spcPts val="200"/>
+              </a:spcAft>
               <a:defRPr sz="5400" b="1">
                 <a:solidFill>
                   <a:srgbClr val="FFFFFF"/>
@@ -5651,6 +5660,7 @@
               </a:defRPr>
             </a:pPr>
             <a:r>
+              <a:rPr/>
               <a:t>ÜNİTE 4</a:t>
             </a:r>
           </a:p>
@@ -5673,12 +5683,21 @@
           <a:noFill/>
         </p:spPr>
         <p:txBody>
-          <a:bodyPr wrap="square">
+          <a:bodyPr wrap="square" tIns="25400" bIns="25400" lIns="63500" rIns="63500">
             <a:spAutoFit/>
           </a:bodyPr>
           <a:lstStyle/>
           <a:p>
             <a:pPr algn="ctr">
+              <a:lnSpc>
+                <a:spcPct val="85000"/>
+              </a:lnSpc>
+              <a:spcBef>
+                <a:spcPts val="200"/>
+              </a:spcBef>
+              <a:spcAft>
+                <a:spcPts val="200"/>
+              </a:spcAft>
               <a:defRPr sz="2800">
                 <a:solidFill>
                   <a:srgbClr val="FFFFFF"/>
@@ -5686,6 +5705,7 @@
               </a:defRPr>
             </a:pPr>
             <a:r>
+              <a:rPr/>
               <a:t>Etik ve Güvenlik</a:t>
             </a:r>
           </a:p>
@@ -5721,10 +5741,19 @@
         </p:nvSpPr>
         <p:spPr/>
         <p:txBody>
-          <a:bodyPr wrap="square"/>
+          <a:bodyPr wrap="square" tIns="25400" bIns="25400" lIns="63500" rIns="63500"/>
           <a:lstStyle/>
           <a:p>
             <a:pPr>
+              <a:lnSpc>
+                <a:spcPct val="85000"/>
+              </a:lnSpc>
+              <a:spcBef>
+                <a:spcPts val="200"/>
+              </a:spcBef>
+              <a:spcAft>
+                <a:spcPts val="200"/>
+              </a:spcAft>
               <a:defRPr sz="4000" b="1">
                 <a:solidFill>
                   <a:srgbClr val="667EEA"/>
@@ -5732,6 +5761,7 @@
               </a:defRPr>
             </a:pPr>
             <a:r>
+              <a:rPr/>
               <a:t>🛡️ Zararlı Yazılımlardan Korunma</a:t>
             </a:r>
           </a:p>
@@ -5771,7 +5801,7 @@
           <a:noFill/>
         </p:spPr>
         <p:txBody>
-          <a:bodyPr wrap="square">
+          <a:bodyPr wrap="square" tIns="25400" bIns="25400" lIns="63500" rIns="63500">
             <a:spAutoFit/>
           </a:bodyPr>
           <a:lstStyle/>
@@ -5788,6 +5818,24 @@
           <a:p>
             <a:pPr>
               <a:lnSpc>
+                <a:spcPct val="85000"/>
+              </a:lnSpc>
+              <a:spcBef>
+                <a:spcPts val="200"/>
+              </a:spcBef>
+              <a:spcAft>
+                <a:spcPts val="200"/>
+              </a:spcAft>
+              <a:defRPr sz="2000"/>
+            </a:pPr>
+            <a:r>
+              <a:rPr sz="1300"/>
+              <a:t>Nasıl korunuruz?</a:t>
+            </a:r>
+          </a:p>
+          <a:p>
+            <a:pPr>
+              <a:lnSpc>
                 <a:spcPct val="90000"/>
               </a:lnSpc>
               <a:spcAft>
@@ -5795,9 +5843,23 @@
               </a:spcAft>
               <a:defRPr sz="2000"/>
             </a:pPr>
-            <a:r>
-              <a:rPr sz="1300"/>
-              <a:t>Nasıl korunuruz?</a:t>
+          </a:p>
+          <a:p>
+            <a:pPr>
+              <a:lnSpc>
+                <a:spcPct val="85000"/>
+              </a:lnSpc>
+              <a:spcBef>
+                <a:spcPts val="200"/>
+              </a:spcBef>
+              <a:spcAft>
+                <a:spcPts val="200"/>
+              </a:spcAft>
+              <a:defRPr sz="2000" b="1"/>
+            </a:pPr>
+            <a:r>
+              <a:rPr sz="1300"/>
+              <a:t>✅ Korunma Yöntemleri:</a:t>
             </a:r>
           </a:p>
           <a:p>
@@ -5814,16 +5876,156 @@
           <a:p>
             <a:pPr>
               <a:lnSpc>
+                <a:spcPct val="85000"/>
+              </a:lnSpc>
+              <a:spcBef>
+                <a:spcPts val="200"/>
+              </a:spcBef>
+              <a:spcAft>
+                <a:spcPts val="200"/>
+              </a:spcAft>
+              <a:defRPr sz="2000"/>
+            </a:pPr>
+            <a:r>
+              <a:rPr sz="1300"/>
+              <a:t>🛡️ Antivirüs Programı:</a:t>
+            </a:r>
+          </a:p>
+          <a:p>
+            <a:pPr lvl="1">
+              <a:lnSpc>
+                <a:spcPct val="85000"/>
+              </a:lnSpc>
+              <a:spcBef>
+                <a:spcPts val="200"/>
+              </a:spcBef>
+              <a:spcAft>
+                <a:spcPts val="200"/>
+              </a:spcAft>
+              <a:defRPr sz="1800"/>
+            </a:pPr>
+            <a:r>
+              <a:rPr sz="1300"/>
+              <a:t>    • Windows Defender (yerleşik)</a:t>
+            </a:r>
+          </a:p>
+          <a:p>
+            <a:pPr lvl="1">
+              <a:lnSpc>
+                <a:spcPct val="85000"/>
+              </a:lnSpc>
+              <a:spcBef>
+                <a:spcPts val="200"/>
+              </a:spcBef>
+              <a:spcAft>
+                <a:spcPts val="200"/>
+              </a:spcAft>
+              <a:defRPr sz="1800"/>
+            </a:pPr>
+            <a:r>
+              <a:rPr sz="1300"/>
+              <a:t>    • Avast, AVG, Kaspersky</a:t>
+            </a:r>
+          </a:p>
+          <a:p>
+            <a:pPr lvl="1">
+              <a:lnSpc>
+                <a:spcPct val="85000"/>
+              </a:lnSpc>
+              <a:spcBef>
+                <a:spcPts val="200"/>
+              </a:spcBef>
+              <a:spcAft>
+                <a:spcPts val="200"/>
+              </a:spcAft>
+              <a:defRPr sz="1800"/>
+            </a:pPr>
+            <a:r>
+              <a:rPr sz="1300"/>
+              <a:t>    • Düzenli tara</a:t>
+            </a:r>
+          </a:p>
+          <a:p>
+            <a:pPr>
+              <a:lnSpc>
                 <a:spcPct val="90000"/>
               </a:lnSpc>
               <a:spcAft>
                 <a:spcPts val="300"/>
               </a:spcAft>
-              <a:defRPr sz="2000" b="1"/>
-            </a:pPr>
-            <a:r>
-              <a:rPr sz="1300"/>
-              <a:t>✅ Korunma Yöntemleri:</a:t>
+              <a:defRPr sz="2000"/>
+            </a:pPr>
+          </a:p>
+          <a:p>
+            <a:pPr>
+              <a:lnSpc>
+                <a:spcPct val="85000"/>
+              </a:lnSpc>
+              <a:spcBef>
+                <a:spcPts val="200"/>
+              </a:spcBef>
+              <a:spcAft>
+                <a:spcPts val="200"/>
+              </a:spcAft>
+              <a:defRPr sz="2000"/>
+            </a:pPr>
+            <a:r>
+              <a:rPr sz="1300"/>
+              <a:t>🔄 Güncellemeleri Yap:</a:t>
+            </a:r>
+          </a:p>
+          <a:p>
+            <a:pPr lvl="1">
+              <a:lnSpc>
+                <a:spcPct val="85000"/>
+              </a:lnSpc>
+              <a:spcBef>
+                <a:spcPts val="200"/>
+              </a:spcBef>
+              <a:spcAft>
+                <a:spcPts val="200"/>
+              </a:spcAft>
+              <a:defRPr sz="1800"/>
+            </a:pPr>
+            <a:r>
+              <a:rPr sz="1300"/>
+              <a:t>    • İşletim sistemini güncelle</a:t>
+            </a:r>
+          </a:p>
+          <a:p>
+            <a:pPr lvl="1">
+              <a:lnSpc>
+                <a:spcPct val="85000"/>
+              </a:lnSpc>
+              <a:spcBef>
+                <a:spcPts val="200"/>
+              </a:spcBef>
+              <a:spcAft>
+                <a:spcPts val="200"/>
+              </a:spcAft>
+              <a:defRPr sz="1800"/>
+            </a:pPr>
+            <a:r>
+              <a:rPr sz="1300"/>
+              <a:t>    • Programları güncelle</a:t>
+            </a:r>
+          </a:p>
+          <a:p>
+            <a:pPr lvl="1">
+              <a:lnSpc>
+                <a:spcPct val="85000"/>
+              </a:lnSpc>
+              <a:spcBef>
+                <a:spcPts val="200"/>
+              </a:spcBef>
+              <a:spcAft>
+                <a:spcPts val="200"/>
+              </a:spcAft>
+              <a:defRPr sz="1800"/>
+            </a:pPr>
+            <a:r>
+              <a:rPr sz="1300"/>
+              <a:t>    • Güvenlik yamaları önemli</a:t>
             </a:r>
           </a:p>
           <a:p>
@@ -5840,6 +6042,78 @@
           <a:p>
             <a:pPr>
               <a:lnSpc>
+                <a:spcPct val="85000"/>
+              </a:lnSpc>
+              <a:spcBef>
+                <a:spcPts val="200"/>
+              </a:spcBef>
+              <a:spcAft>
+                <a:spcPts val="200"/>
+              </a:spcAft>
+              <a:defRPr sz="2000"/>
+            </a:pPr>
+            <a:r>
+              <a:rPr sz="1300"/>
+              <a:t>⬇️ Dikkatli İndir:</a:t>
+            </a:r>
+          </a:p>
+          <a:p>
+            <a:pPr lvl="1">
+              <a:lnSpc>
+                <a:spcPct val="85000"/>
+              </a:lnSpc>
+              <a:spcBef>
+                <a:spcPts val="200"/>
+              </a:spcBef>
+              <a:spcAft>
+                <a:spcPts val="200"/>
+              </a:spcAft>
+              <a:defRPr sz="1800"/>
+            </a:pPr>
+            <a:r>
+              <a:rPr sz="1300"/>
+              <a:t>    • Sadece güvenilir sitelerden</a:t>
+            </a:r>
+          </a:p>
+          <a:p>
+            <a:pPr lvl="1">
+              <a:lnSpc>
+                <a:spcPct val="85000"/>
+              </a:lnSpc>
+              <a:spcBef>
+                <a:spcPts val="200"/>
+              </a:spcBef>
+              <a:spcAft>
+                <a:spcPts val="200"/>
+              </a:spcAft>
+              <a:defRPr sz="1800"/>
+            </a:pPr>
+            <a:r>
+              <a:rPr sz="1300"/>
+              <a:t>    • Korsan program kullanma</a:t>
+            </a:r>
+          </a:p>
+          <a:p>
+            <a:pPr lvl="1">
+              <a:lnSpc>
+                <a:spcPct val="85000"/>
+              </a:lnSpc>
+              <a:spcBef>
+                <a:spcPts val="200"/>
+              </a:spcBef>
+              <a:spcAft>
+                <a:spcPts val="200"/>
+              </a:spcAft>
+              <a:defRPr sz="1800"/>
+            </a:pPr>
+            <a:r>
+              <a:rPr sz="1300"/>
+              <a:t>    • İndirmeden önce tara</a:t>
+            </a:r>
+          </a:p>
+          <a:p>
+            <a:pPr>
+              <a:lnSpc>
                 <a:spcPct val="90000"/>
               </a:lnSpc>
               <a:spcAft>
@@ -5847,328 +6121,147 @@
               </a:spcAft>
               <a:defRPr sz="2000"/>
             </a:pPr>
-            <a:r>
-              <a:rPr sz="1300"/>
-              <a:t>🛡️ Antivirüs Programı:</a:t>
-            </a:r>
-          </a:p>
-          <a:p>
-            <a:pPr lvl="1">
+          </a:p>
+          <a:p>
+            <a:pPr>
+              <a:lnSpc>
+                <a:spcPct val="85000"/>
+              </a:lnSpc>
+              <a:spcBef>
+                <a:spcPts val="200"/>
+              </a:spcBef>
+              <a:spcAft>
+                <a:spcPts val="200"/>
+              </a:spcAft>
+              <a:defRPr sz="2000"/>
+            </a:pPr>
+            <a:r>
+              <a:rPr sz="1300"/>
+              <a:t>📎 E-posta Ekleri:</a:t>
+            </a:r>
+          </a:p>
+          <a:p>
+            <a:pPr lvl="1">
+              <a:lnSpc>
+                <a:spcPct val="85000"/>
+              </a:lnSpc>
+              <a:spcBef>
+                <a:spcPts val="200"/>
+              </a:spcBef>
+              <a:spcAft>
+                <a:spcPts val="200"/>
+              </a:spcAft>
+              <a:defRPr sz="1800"/>
+            </a:pPr>
+            <a:r>
+              <a:rPr sz="1300"/>
+              <a:t>    • Tanımadığın kişiden ek açma</a:t>
+            </a:r>
+          </a:p>
+          <a:p>
+            <a:pPr lvl="1">
+              <a:lnSpc>
+                <a:spcPct val="85000"/>
+              </a:lnSpc>
+              <a:spcBef>
+                <a:spcPts val="200"/>
+              </a:spcBef>
+              <a:spcAft>
+                <a:spcPts val="200"/>
+              </a:spcAft>
+              <a:defRPr sz="1800"/>
+            </a:pPr>
+            <a:r>
+              <a:rPr sz="1300"/>
+              <a:t>    • Şüpheli ekleri tara</a:t>
+            </a:r>
+          </a:p>
+          <a:p>
+            <a:pPr>
               <a:lnSpc>
                 <a:spcPct val="90000"/>
               </a:lnSpc>
               <a:spcAft>
                 <a:spcPts val="300"/>
               </a:spcAft>
-              <a:defRPr sz="1800"/>
-            </a:pPr>
-            <a:r>
-              <a:rPr sz="1300"/>
-              <a:t>    • Windows Defender (yerleşik)</a:t>
-            </a:r>
-          </a:p>
-          <a:p>
-            <a:pPr lvl="1">
+              <a:defRPr sz="2000"/>
+            </a:pPr>
+          </a:p>
+          <a:p>
+            <a:pPr>
+              <a:lnSpc>
+                <a:spcPct val="85000"/>
+              </a:lnSpc>
+              <a:spcBef>
+                <a:spcPts val="200"/>
+              </a:spcBef>
+              <a:spcAft>
+                <a:spcPts val="200"/>
+              </a:spcAft>
+              <a:defRPr sz="2000"/>
+            </a:pPr>
+            <a:r>
+              <a:rPr sz="1300"/>
+              <a:t>💾 Yedekleme Yap:</a:t>
+            </a:r>
+          </a:p>
+          <a:p>
+            <a:pPr lvl="1">
+              <a:lnSpc>
+                <a:spcPct val="85000"/>
+              </a:lnSpc>
+              <a:spcBef>
+                <a:spcPts val="200"/>
+              </a:spcBef>
+              <a:spcAft>
+                <a:spcPts val="200"/>
+              </a:spcAft>
+              <a:defRPr sz="1800"/>
+            </a:pPr>
+            <a:r>
+              <a:rPr sz="1300"/>
+              <a:t>    • Önemli dosyaları yedekle</a:t>
+            </a:r>
+          </a:p>
+          <a:p>
+            <a:pPr lvl="1">
+              <a:lnSpc>
+                <a:spcPct val="85000"/>
+              </a:lnSpc>
+              <a:spcBef>
+                <a:spcPts val="200"/>
+              </a:spcBef>
+              <a:spcAft>
+                <a:spcPts val="200"/>
+              </a:spcAft>
+              <a:defRPr sz="1800"/>
+            </a:pPr>
+            <a:r>
+              <a:rPr sz="1300"/>
+              <a:t>    • Cloud (bulut) veya USB'ye</a:t>
+            </a:r>
+          </a:p>
+          <a:p>
+            <a:pPr>
               <a:lnSpc>
                 <a:spcPct val="90000"/>
               </a:lnSpc>
               <a:spcAft>
                 <a:spcPts val="300"/>
               </a:spcAft>
-              <a:defRPr sz="1800"/>
-            </a:pPr>
-            <a:r>
-              <a:rPr sz="1300"/>
-              <a:t>    • Avast, AVG, Kaspersky</a:t>
-            </a:r>
-          </a:p>
-          <a:p>
-            <a:pPr lvl="1">
-              <a:lnSpc>
-                <a:spcPct val="90000"/>
-              </a:lnSpc>
-              <a:spcAft>
-                <a:spcPts val="300"/>
-              </a:spcAft>
-              <a:defRPr sz="1800"/>
-            </a:pPr>
-            <a:r>
-              <a:rPr sz="1300"/>
-              <a:t>    • Düzenli tara</a:t>
-            </a:r>
-          </a:p>
-          <a:p>
-            <a:pPr>
-              <a:lnSpc>
-                <a:spcPct val="90000"/>
-              </a:lnSpc>
-              <a:spcAft>
-                <a:spcPts val="300"/>
-              </a:spcAft>
-              <a:defRPr sz="2000"/>
-            </a:pPr>
-          </a:p>
-          <a:p>
-            <a:pPr>
-              <a:lnSpc>
-                <a:spcPct val="90000"/>
-              </a:lnSpc>
-              <a:spcAft>
-                <a:spcPts val="300"/>
-              </a:spcAft>
-              <a:defRPr sz="2000"/>
-            </a:pPr>
-            <a:r>
-              <a:rPr sz="1300"/>
-              <a:t>🔄 Güncellemeleri Yap:</a:t>
-            </a:r>
-          </a:p>
-          <a:p>
-            <a:pPr lvl="1">
-              <a:lnSpc>
-                <a:spcPct val="90000"/>
-              </a:lnSpc>
-              <a:spcAft>
-                <a:spcPts val="300"/>
-              </a:spcAft>
-              <a:defRPr sz="1800"/>
-            </a:pPr>
-            <a:r>
-              <a:rPr sz="1300"/>
-              <a:t>    • İşletim sistemini güncelle</a:t>
-            </a:r>
-          </a:p>
-          <a:p>
-            <a:pPr lvl="1">
-              <a:lnSpc>
-                <a:spcPct val="90000"/>
-              </a:lnSpc>
-              <a:spcAft>
-                <a:spcPts val="300"/>
-              </a:spcAft>
-              <a:defRPr sz="1800"/>
-            </a:pPr>
-            <a:r>
-              <a:rPr sz="1300"/>
-              <a:t>    • Programları güncelle</a:t>
-            </a:r>
-          </a:p>
-          <a:p>
-            <a:pPr lvl="1">
-              <a:lnSpc>
-                <a:spcPct val="90000"/>
-              </a:lnSpc>
-              <a:spcAft>
-                <a:spcPts val="300"/>
-              </a:spcAft>
-              <a:defRPr sz="1800"/>
-            </a:pPr>
-            <a:r>
-              <a:rPr sz="1300"/>
-              <a:t>    • Güvenlik yamaları önemli</a:t>
-            </a:r>
-          </a:p>
-          <a:p>
-            <a:pPr>
-              <a:lnSpc>
-                <a:spcPct val="90000"/>
-              </a:lnSpc>
-              <a:spcAft>
-                <a:spcPts val="300"/>
-              </a:spcAft>
-              <a:defRPr sz="2000"/>
-            </a:pPr>
-          </a:p>
-          <a:p>
-            <a:pPr>
-              <a:lnSpc>
-                <a:spcPct val="90000"/>
-              </a:lnSpc>
-              <a:spcAft>
-                <a:spcPts val="300"/>
-              </a:spcAft>
-              <a:defRPr sz="2000"/>
-            </a:pPr>
-            <a:r>
-              <a:rPr sz="1300"/>
-              <a:t>⬇️ Dikkatli İndir:</a:t>
-            </a:r>
-          </a:p>
-          <a:p>
-            <a:pPr lvl="1">
-              <a:lnSpc>
-                <a:spcPct val="90000"/>
-              </a:lnSpc>
-              <a:spcAft>
-                <a:spcPts val="300"/>
-              </a:spcAft>
-              <a:defRPr sz="1800"/>
-            </a:pPr>
-            <a:r>
-              <a:rPr sz="1300"/>
-              <a:t>    • Sadece güvenilir sitelerden</a:t>
-            </a:r>
-          </a:p>
-          <a:p>
-            <a:pPr lvl="1">
-              <a:lnSpc>
-                <a:spcPct val="90000"/>
-              </a:lnSpc>
-              <a:spcAft>
-                <a:spcPts val="300"/>
-              </a:spcAft>
-              <a:defRPr sz="1800"/>
-            </a:pPr>
-            <a:r>
-              <a:rPr sz="1300"/>
-              <a:t>    • Korsan program kullanma</a:t>
-            </a:r>
-          </a:p>
-          <a:p>
-            <a:pPr lvl="1">
-              <a:lnSpc>
-                <a:spcPct val="90000"/>
-              </a:lnSpc>
-              <a:spcAft>
-                <a:spcPts val="300"/>
-              </a:spcAft>
-              <a:defRPr sz="1800"/>
-            </a:pPr>
-            <a:r>
-              <a:rPr sz="1300"/>
-              <a:t>    • İndirmeden önce tara</a:t>
-            </a:r>
-          </a:p>
-          <a:p>
-            <a:pPr>
-              <a:lnSpc>
-                <a:spcPct val="90000"/>
-              </a:lnSpc>
-              <a:spcAft>
-                <a:spcPts val="300"/>
-              </a:spcAft>
-              <a:defRPr sz="2000"/>
-            </a:pPr>
-          </a:p>
-          <a:p>
-            <a:pPr>
-              <a:lnSpc>
-                <a:spcPct val="90000"/>
-              </a:lnSpc>
-              <a:spcAft>
-                <a:spcPts val="300"/>
-              </a:spcAft>
-              <a:defRPr sz="2000"/>
-            </a:pPr>
-            <a:r>
-              <a:rPr sz="1300"/>
-              <a:t>📎 E-posta Ekleri:</a:t>
-            </a:r>
-          </a:p>
-          <a:p>
-            <a:pPr lvl="1">
-              <a:lnSpc>
-                <a:spcPct val="90000"/>
-              </a:lnSpc>
-              <a:spcAft>
-                <a:spcPts val="300"/>
-              </a:spcAft>
-              <a:defRPr sz="1800"/>
-            </a:pPr>
-            <a:r>
-              <a:rPr sz="1300"/>
-              <a:t>    • Tanımadığın kişiden ek açma</a:t>
-            </a:r>
-          </a:p>
-          <a:p>
-            <a:pPr lvl="1">
-              <a:lnSpc>
-                <a:spcPct val="90000"/>
-              </a:lnSpc>
-              <a:spcAft>
-                <a:spcPts val="300"/>
-              </a:spcAft>
-              <a:defRPr sz="1800"/>
-            </a:pPr>
-            <a:r>
-              <a:rPr sz="1300"/>
-              <a:t>    • Şüpheli ekleri tara</a:t>
-            </a:r>
-          </a:p>
-          <a:p>
-            <a:pPr>
-              <a:lnSpc>
-                <a:spcPct val="90000"/>
-              </a:lnSpc>
-              <a:spcAft>
-                <a:spcPts val="300"/>
-              </a:spcAft>
-              <a:defRPr sz="2000"/>
-            </a:pPr>
-          </a:p>
-          <a:p>
-            <a:pPr>
-              <a:lnSpc>
-                <a:spcPct val="90000"/>
-              </a:lnSpc>
-              <a:spcAft>
-                <a:spcPts val="300"/>
-              </a:spcAft>
-              <a:defRPr sz="2000"/>
-            </a:pPr>
-            <a:r>
-              <a:rPr sz="1300"/>
-              <a:t>💾 Yedekleme Yap:</a:t>
-            </a:r>
-          </a:p>
-          <a:p>
-            <a:pPr lvl="1">
-              <a:lnSpc>
-                <a:spcPct val="90000"/>
-              </a:lnSpc>
-              <a:spcAft>
-                <a:spcPts val="300"/>
-              </a:spcAft>
-              <a:defRPr sz="1800"/>
-            </a:pPr>
-            <a:r>
-              <a:rPr sz="1300"/>
-              <a:t>    • Önemli dosyaları yedekle</a:t>
-            </a:r>
-          </a:p>
-          <a:p>
-            <a:pPr lvl="1">
-              <a:lnSpc>
-                <a:spcPct val="90000"/>
-              </a:lnSpc>
-              <a:spcAft>
-                <a:spcPts val="300"/>
-              </a:spcAft>
-              <a:defRPr sz="1800"/>
-            </a:pPr>
-            <a:r>
-              <a:rPr sz="1300"/>
-              <a:t>    • Cloud (bulut) veya USB'ye</a:t>
-            </a:r>
-          </a:p>
-          <a:p>
-            <a:pPr>
-              <a:lnSpc>
-                <a:spcPct val="90000"/>
-              </a:lnSpc>
-              <a:spcAft>
-                <a:spcPts val="300"/>
-              </a:spcAft>
-              <a:defRPr sz="2000"/>
-            </a:pPr>
-          </a:p>
-          <a:p>
-            <a:pPr>
-              <a:lnSpc>
-                <a:spcPct val="90000"/>
-              </a:lnSpc>
-              <a:spcAft>
-                <a:spcPts val="300"/>
+              <a:defRPr sz="2000"/>
+            </a:pPr>
+          </a:p>
+          <a:p>
+            <a:pPr>
+              <a:lnSpc>
+                <a:spcPct val="85000"/>
+              </a:lnSpc>
+              <a:spcBef>
+                <a:spcPts val="200"/>
+              </a:spcBef>
+              <a:spcAft>
+                <a:spcPts val="200"/>
               </a:spcAft>
               <a:defRPr sz="2000" b="1"/>
             </a:pPr>
@@ -6209,10 +6302,19 @@
         </p:nvSpPr>
         <p:spPr/>
         <p:txBody>
-          <a:bodyPr wrap="square"/>
+          <a:bodyPr wrap="square" tIns="25400" bIns="25400" lIns="63500" rIns="63500"/>
           <a:lstStyle/>
           <a:p>
             <a:pPr>
+              <a:lnSpc>
+                <a:spcPct val="85000"/>
+              </a:lnSpc>
+              <a:spcBef>
+                <a:spcPts val="200"/>
+              </a:spcBef>
+              <a:spcAft>
+                <a:spcPts val="200"/>
+              </a:spcAft>
               <a:defRPr sz="4000" b="1">
                 <a:solidFill>
                   <a:srgbClr val="667EEA"/>
@@ -6220,6 +6322,7 @@
               </a:defRPr>
             </a:pPr>
             <a:r>
+              <a:rPr/>
               <a:t>🎭 Sosyal Mühendislik</a:t>
             </a:r>
           </a:p>
@@ -6259,7 +6362,7 @@
           <a:noFill/>
         </p:spPr>
         <p:txBody>
-          <a:bodyPr wrap="square">
+          <a:bodyPr wrap="square" tIns="25400" bIns="25400" lIns="63500" rIns="63500">
             <a:spAutoFit/>
           </a:bodyPr>
           <a:lstStyle/>
@@ -6276,6 +6379,42 @@
           <a:p>
             <a:pPr>
               <a:lnSpc>
+                <a:spcPct val="85000"/>
+              </a:lnSpc>
+              <a:spcBef>
+                <a:spcPts val="200"/>
+              </a:spcBef>
+              <a:spcAft>
+                <a:spcPts val="200"/>
+              </a:spcAft>
+              <a:defRPr sz="2000"/>
+            </a:pPr>
+            <a:r>
+              <a:rPr sz="1300"/>
+              <a:t>Sosyal mühendislik = İnsanları kandırma sanatı</a:t>
+            </a:r>
+          </a:p>
+          <a:p>
+            <a:pPr>
+              <a:lnSpc>
+                <a:spcPct val="85000"/>
+              </a:lnSpc>
+              <a:spcBef>
+                <a:spcPts val="200"/>
+              </a:spcBef>
+              <a:spcAft>
+                <a:spcPts val="200"/>
+              </a:spcAft>
+              <a:defRPr sz="2000"/>
+            </a:pPr>
+            <a:r>
+              <a:rPr sz="1300"/>
+              <a:t>Teknik değil, psikolojik saldırı!</a:t>
+            </a:r>
+          </a:p>
+          <a:p>
+            <a:pPr>
+              <a:lnSpc>
                 <a:spcPct val="90000"/>
               </a:lnSpc>
               <a:spcAft>
@@ -6283,9 +6422,23 @@
               </a:spcAft>
               <a:defRPr sz="2000"/>
             </a:pPr>
-            <a:r>
-              <a:rPr sz="1300"/>
-              <a:t>Sosyal mühendislik = İnsanları kandırma sanatı</a:t>
+          </a:p>
+          <a:p>
+            <a:pPr>
+              <a:lnSpc>
+                <a:spcPct val="85000"/>
+              </a:lnSpc>
+              <a:spcBef>
+                <a:spcPts val="200"/>
+              </a:spcBef>
+              <a:spcAft>
+                <a:spcPts val="200"/>
+              </a:spcAft>
+              <a:defRPr sz="2000" b="1"/>
+            </a:pPr>
+            <a:r>
+              <a:rPr sz="1300"/>
+              <a:t>✅ Sosyal Mühendislik Örnekleri:</a:t>
             </a:r>
           </a:p>
           <a:p>
@@ -6298,9 +6451,59 @@
               </a:spcAft>
               <a:defRPr sz="2000"/>
             </a:pPr>
-            <a:r>
-              <a:rPr sz="1300"/>
-              <a:t>Teknik değil, psikolojik saldırı!</a:t>
+          </a:p>
+          <a:p>
+            <a:pPr>
+              <a:lnSpc>
+                <a:spcPct val="85000"/>
+              </a:lnSpc>
+              <a:spcBef>
+                <a:spcPts val="200"/>
+              </a:spcBef>
+              <a:spcAft>
+                <a:spcPts val="200"/>
+              </a:spcAft>
+              <a:defRPr sz="2000"/>
+            </a:pPr>
+            <a:r>
+              <a:rPr sz="1300"/>
+              <a:t>📞 Telefon Dolandırıcılığı:</a:t>
+            </a:r>
+          </a:p>
+          <a:p>
+            <a:pPr lvl="1">
+              <a:lnSpc>
+                <a:spcPct val="85000"/>
+              </a:lnSpc>
+              <a:spcBef>
+                <a:spcPts val="200"/>
+              </a:spcBef>
+              <a:spcAft>
+                <a:spcPts val="200"/>
+              </a:spcAft>
+              <a:defRPr sz="1800"/>
+            </a:pPr>
+            <a:r>
+              <a:rPr sz="1300"/>
+              <a:t>    • 'Bankadan arıyorum' yalanı</a:t>
+            </a:r>
+          </a:p>
+          <a:p>
+            <a:pPr lvl="1">
+              <a:lnSpc>
+                <a:spcPct val="85000"/>
+              </a:lnSpc>
+              <a:spcBef>
+                <a:spcPts val="200"/>
+              </a:spcBef>
+              <a:spcAft>
+                <a:spcPts val="200"/>
+              </a:spcAft>
+              <a:defRPr sz="1800"/>
+            </a:pPr>
+            <a:r>
+              <a:rPr sz="1300"/>
+              <a:t>    • 'Kart bilgilerinizi söyleyin'</a:t>
             </a:r>
           </a:p>
           <a:p>
@@ -6317,16 +6520,286 @@
           <a:p>
             <a:pPr>
               <a:lnSpc>
+                <a:spcPct val="85000"/>
+              </a:lnSpc>
+              <a:spcBef>
+                <a:spcPts val="200"/>
+              </a:spcBef>
+              <a:spcAft>
+                <a:spcPts val="200"/>
+              </a:spcAft>
+              <a:defRPr sz="2000"/>
+            </a:pPr>
+            <a:r>
+              <a:rPr sz="1300"/>
+              <a:t>🎁 Sahte Hediye:</a:t>
+            </a:r>
+          </a:p>
+          <a:p>
+            <a:pPr lvl="1">
+              <a:lnSpc>
+                <a:spcPct val="85000"/>
+              </a:lnSpc>
+              <a:spcBef>
+                <a:spcPts val="200"/>
+              </a:spcBef>
+              <a:spcAft>
+                <a:spcPts val="200"/>
+              </a:spcAft>
+              <a:defRPr sz="1800"/>
+            </a:pPr>
+            <a:r>
+              <a:rPr sz="1300"/>
+              <a:t>    • 'Bedava telefon kazandın!'</a:t>
+            </a:r>
+          </a:p>
+          <a:p>
+            <a:pPr lvl="1">
+              <a:lnSpc>
+                <a:spcPct val="85000"/>
+              </a:lnSpc>
+              <a:spcBef>
+                <a:spcPts val="200"/>
+              </a:spcBef>
+              <a:spcAft>
+                <a:spcPts val="200"/>
+              </a:spcAft>
+              <a:defRPr sz="1800"/>
+            </a:pPr>
+            <a:r>
+              <a:rPr sz="1300"/>
+              <a:t>    • 'Bu anketi doldur, ödül kazan'</a:t>
+            </a:r>
+          </a:p>
+          <a:p>
+            <a:pPr>
+              <a:lnSpc>
                 <a:spcPct val="90000"/>
               </a:lnSpc>
               <a:spcAft>
                 <a:spcPts val="300"/>
               </a:spcAft>
+              <a:defRPr sz="2000"/>
+            </a:pPr>
+          </a:p>
+          <a:p>
+            <a:pPr>
+              <a:lnSpc>
+                <a:spcPct val="85000"/>
+              </a:lnSpc>
+              <a:spcBef>
+                <a:spcPts val="200"/>
+              </a:spcBef>
+              <a:spcAft>
+                <a:spcPts val="200"/>
+              </a:spcAft>
+              <a:defRPr sz="2000"/>
+            </a:pPr>
+            <a:r>
+              <a:rPr sz="1300"/>
+              <a:t>👤 Kimliğe Bürünme:</a:t>
+            </a:r>
+          </a:p>
+          <a:p>
+            <a:pPr lvl="1">
+              <a:lnSpc>
+                <a:spcPct val="85000"/>
+              </a:lnSpc>
+              <a:spcBef>
+                <a:spcPts val="200"/>
+              </a:spcBef>
+              <a:spcAft>
+                <a:spcPts val="200"/>
+              </a:spcAft>
+              <a:defRPr sz="1800"/>
+            </a:pPr>
+            <a:r>
+              <a:rPr sz="1300"/>
+              <a:t>    • Arkadaşın gibi davranma</a:t>
+            </a:r>
+          </a:p>
+          <a:p>
+            <a:pPr lvl="1">
+              <a:lnSpc>
+                <a:spcPct val="85000"/>
+              </a:lnSpc>
+              <a:spcBef>
+                <a:spcPts val="200"/>
+              </a:spcBef>
+              <a:spcAft>
+                <a:spcPts val="200"/>
+              </a:spcAft>
+              <a:defRPr sz="1800"/>
+            </a:pPr>
+            <a:r>
+              <a:rPr sz="1300"/>
+              <a:t>    • 'Ben öğretmenim, şifreni ver'</a:t>
+            </a:r>
+          </a:p>
+          <a:p>
+            <a:pPr>
+              <a:lnSpc>
+                <a:spcPct val="90000"/>
+              </a:lnSpc>
+              <a:spcAft>
+                <a:spcPts val="300"/>
+              </a:spcAft>
+              <a:defRPr sz="2000"/>
+            </a:pPr>
+          </a:p>
+          <a:p>
+            <a:pPr>
+              <a:lnSpc>
+                <a:spcPct val="85000"/>
+              </a:lnSpc>
+              <a:spcBef>
+                <a:spcPts val="200"/>
+              </a:spcBef>
+              <a:spcAft>
+                <a:spcPts val="200"/>
+              </a:spcAft>
+              <a:defRPr sz="2000"/>
+            </a:pPr>
+            <a:r>
+              <a:rPr sz="1300"/>
+              <a:t>😱 Korku:</a:t>
+            </a:r>
+          </a:p>
+          <a:p>
+            <a:pPr lvl="1">
+              <a:lnSpc>
+                <a:spcPct val="85000"/>
+              </a:lnSpc>
+              <a:spcBef>
+                <a:spcPts val="200"/>
+              </a:spcBef>
+              <a:spcAft>
+                <a:spcPts val="200"/>
+              </a:spcAft>
+              <a:defRPr sz="1800"/>
+            </a:pPr>
+            <a:r>
+              <a:rPr sz="1300"/>
+              <a:t>    • 'Hesabın kapatılacak!'</a:t>
+            </a:r>
+          </a:p>
+          <a:p>
+            <a:pPr lvl="1">
+              <a:lnSpc>
+                <a:spcPct val="85000"/>
+              </a:lnSpc>
+              <a:spcBef>
+                <a:spcPts val="200"/>
+              </a:spcBef>
+              <a:spcAft>
+                <a:spcPts val="200"/>
+              </a:spcAft>
+              <a:defRPr sz="1800"/>
+            </a:pPr>
+            <a:r>
+              <a:rPr sz="1300"/>
+              <a:t>    • 'Virüs var, hemen tıkla!'</a:t>
+            </a:r>
+          </a:p>
+          <a:p>
+            <a:pPr>
+              <a:lnSpc>
+                <a:spcPct val="90000"/>
+              </a:lnSpc>
+              <a:spcAft>
+                <a:spcPts val="300"/>
+              </a:spcAft>
+              <a:defRPr sz="2000"/>
+            </a:pPr>
+          </a:p>
+          <a:p>
+            <a:pPr>
+              <a:lnSpc>
+                <a:spcPct val="85000"/>
+              </a:lnSpc>
+              <a:spcBef>
+                <a:spcPts val="200"/>
+              </a:spcBef>
+              <a:spcAft>
+                <a:spcPts val="200"/>
+              </a:spcAft>
               <a:defRPr sz="2000" b="1"/>
             </a:pPr>
             <a:r>
               <a:rPr sz="1300"/>
-              <a:t>✅ Sosyal Mühendislik Örnekleri:</a:t>
+              <a:t>📌 Korunma:</a:t>
+            </a:r>
+          </a:p>
+          <a:p>
+            <a:pPr lvl="1">
+              <a:lnSpc>
+                <a:spcPct val="85000"/>
+              </a:lnSpc>
+              <a:spcBef>
+                <a:spcPts val="200"/>
+              </a:spcBef>
+              <a:spcAft>
+                <a:spcPts val="200"/>
+              </a:spcAft>
+              <a:defRPr sz="1800"/>
+            </a:pPr>
+            <a:r>
+              <a:rPr sz="1300"/>
+              <a:t>    • Acele kararlar alma</a:t>
+            </a:r>
+          </a:p>
+          <a:p>
+            <a:pPr lvl="1">
+              <a:lnSpc>
+                <a:spcPct val="85000"/>
+              </a:lnSpc>
+              <a:spcBef>
+                <a:spcPts val="200"/>
+              </a:spcBef>
+              <a:spcAft>
+                <a:spcPts val="200"/>
+              </a:spcAft>
+              <a:defRPr sz="1800"/>
+            </a:pPr>
+            <a:r>
+              <a:rPr sz="1300"/>
+              <a:t>    • Doğrula (arayıp sor)</a:t>
+            </a:r>
+          </a:p>
+          <a:p>
+            <a:pPr lvl="1">
+              <a:lnSpc>
+                <a:spcPct val="85000"/>
+              </a:lnSpc>
+              <a:spcBef>
+                <a:spcPts val="200"/>
+              </a:spcBef>
+              <a:spcAft>
+                <a:spcPts val="200"/>
+              </a:spcAft>
+              <a:defRPr sz="1800"/>
+            </a:pPr>
+            <a:r>
+              <a:rPr sz="1300"/>
+              <a:t>    • Şüphe duy</a:t>
+            </a:r>
+          </a:p>
+          <a:p>
+            <a:pPr lvl="1">
+              <a:lnSpc>
+                <a:spcPct val="85000"/>
+              </a:lnSpc>
+              <a:spcBef>
+                <a:spcPts val="200"/>
+              </a:spcBef>
+              <a:spcAft>
+                <a:spcPts val="200"/>
+              </a:spcAft>
+              <a:defRPr sz="1800"/>
+            </a:pPr>
+            <a:r>
+              <a:rPr sz="1300"/>
+              <a:t>    • 'Hayır' deme hakkın var</a:t>
             </a:r>
           </a:p>
           <a:p>
@@ -6343,320 +6816,13 @@
           <a:p>
             <a:pPr>
               <a:lnSpc>
-                <a:spcPct val="90000"/>
-              </a:lnSpc>
-              <a:spcAft>
-                <a:spcPts val="300"/>
-              </a:spcAft>
-              <a:defRPr sz="2000"/>
-            </a:pPr>
-            <a:r>
-              <a:rPr sz="1300"/>
-              <a:t>📞 Telefon Dolandırıcılığı:</a:t>
-            </a:r>
-          </a:p>
-          <a:p>
-            <a:pPr lvl="1">
-              <a:lnSpc>
-                <a:spcPct val="90000"/>
-              </a:lnSpc>
-              <a:spcAft>
-                <a:spcPts val="300"/>
-              </a:spcAft>
-              <a:defRPr sz="1800"/>
-            </a:pPr>
-            <a:r>
-              <a:rPr sz="1300"/>
-              <a:t>    • 'Bankadan arıyorum' yalanı</a:t>
-            </a:r>
-          </a:p>
-          <a:p>
-            <a:pPr lvl="1">
-              <a:lnSpc>
-                <a:spcPct val="90000"/>
-              </a:lnSpc>
-              <a:spcAft>
-                <a:spcPts val="300"/>
-              </a:spcAft>
-              <a:defRPr sz="1800"/>
-            </a:pPr>
-            <a:r>
-              <a:rPr sz="1300"/>
-              <a:t>    • 'Kart bilgilerinizi söyleyin'</a:t>
-            </a:r>
-          </a:p>
-          <a:p>
-            <a:pPr>
-              <a:lnSpc>
-                <a:spcPct val="90000"/>
-              </a:lnSpc>
-              <a:spcAft>
-                <a:spcPts val="300"/>
-              </a:spcAft>
-              <a:defRPr sz="2000"/>
-            </a:pPr>
-          </a:p>
-          <a:p>
-            <a:pPr>
-              <a:lnSpc>
-                <a:spcPct val="90000"/>
-              </a:lnSpc>
-              <a:spcAft>
-                <a:spcPts val="300"/>
-              </a:spcAft>
-              <a:defRPr sz="2000"/>
-            </a:pPr>
-            <a:r>
-              <a:rPr sz="1300"/>
-              <a:t>🎁 Sahte Hediye:</a:t>
-            </a:r>
-          </a:p>
-          <a:p>
-            <a:pPr lvl="1">
-              <a:lnSpc>
-                <a:spcPct val="90000"/>
-              </a:lnSpc>
-              <a:spcAft>
-                <a:spcPts val="300"/>
-              </a:spcAft>
-              <a:defRPr sz="1800"/>
-            </a:pPr>
-            <a:r>
-              <a:rPr sz="1300"/>
-              <a:t>    • 'Bedava telefon kazandın!'</a:t>
-            </a:r>
-          </a:p>
-          <a:p>
-            <a:pPr lvl="1">
-              <a:lnSpc>
-                <a:spcPct val="90000"/>
-              </a:lnSpc>
-              <a:spcAft>
-                <a:spcPts val="300"/>
-              </a:spcAft>
-              <a:defRPr sz="1800"/>
-            </a:pPr>
-            <a:r>
-              <a:rPr sz="1300"/>
-              <a:t>    • 'Bu anketi doldur, ödül kazan'</a:t>
-            </a:r>
-          </a:p>
-          <a:p>
-            <a:pPr>
-              <a:lnSpc>
-                <a:spcPct val="90000"/>
-              </a:lnSpc>
-              <a:spcAft>
-                <a:spcPts val="300"/>
-              </a:spcAft>
-              <a:defRPr sz="2000"/>
-            </a:pPr>
-          </a:p>
-          <a:p>
-            <a:pPr>
-              <a:lnSpc>
-                <a:spcPct val="90000"/>
-              </a:lnSpc>
-              <a:spcAft>
-                <a:spcPts val="300"/>
-              </a:spcAft>
-              <a:defRPr sz="2000"/>
-            </a:pPr>
-            <a:r>
-              <a:rPr sz="1300"/>
-              <a:t>👤 Kimliğe Bürünme:</a:t>
-            </a:r>
-          </a:p>
-          <a:p>
-            <a:pPr lvl="1">
-              <a:lnSpc>
-                <a:spcPct val="90000"/>
-              </a:lnSpc>
-              <a:spcAft>
-                <a:spcPts val="300"/>
-              </a:spcAft>
-              <a:defRPr sz="1800"/>
-            </a:pPr>
-            <a:r>
-              <a:rPr sz="1300"/>
-              <a:t>    • Arkadaşın gibi davranma</a:t>
-            </a:r>
-          </a:p>
-          <a:p>
-            <a:pPr lvl="1">
-              <a:lnSpc>
-                <a:spcPct val="90000"/>
-              </a:lnSpc>
-              <a:spcAft>
-                <a:spcPts val="300"/>
-              </a:spcAft>
-              <a:defRPr sz="1800"/>
-            </a:pPr>
-            <a:r>
-              <a:rPr sz="1300"/>
-              <a:t>    • 'Ben öğretmenim, şifreni ver'</a:t>
-            </a:r>
-          </a:p>
-          <a:p>
-            <a:pPr>
-              <a:lnSpc>
-                <a:spcPct val="90000"/>
-              </a:lnSpc>
-              <a:spcAft>
-                <a:spcPts val="300"/>
-              </a:spcAft>
-              <a:defRPr sz="2000"/>
-            </a:pPr>
-          </a:p>
-          <a:p>
-            <a:pPr>
-              <a:lnSpc>
-                <a:spcPct val="90000"/>
-              </a:lnSpc>
-              <a:spcAft>
-                <a:spcPts val="300"/>
-              </a:spcAft>
-              <a:defRPr sz="2000"/>
-            </a:pPr>
-            <a:r>
-              <a:rPr sz="1300"/>
-              <a:t>😱 Korku:</a:t>
-            </a:r>
-          </a:p>
-          <a:p>
-            <a:pPr lvl="1">
-              <a:lnSpc>
-                <a:spcPct val="90000"/>
-              </a:lnSpc>
-              <a:spcAft>
-                <a:spcPts val="300"/>
-              </a:spcAft>
-              <a:defRPr sz="1800"/>
-            </a:pPr>
-            <a:r>
-              <a:rPr sz="1300"/>
-              <a:t>    • 'Hesabın kapatılacak!'</a:t>
-            </a:r>
-          </a:p>
-          <a:p>
-            <a:pPr lvl="1">
-              <a:lnSpc>
-                <a:spcPct val="90000"/>
-              </a:lnSpc>
-              <a:spcAft>
-                <a:spcPts val="300"/>
-              </a:spcAft>
-              <a:defRPr sz="1800"/>
-            </a:pPr>
-            <a:r>
-              <a:rPr sz="1300"/>
-              <a:t>    • 'Virüs var, hemen tıkla!'</a:t>
-            </a:r>
-          </a:p>
-          <a:p>
-            <a:pPr>
-              <a:lnSpc>
-                <a:spcPct val="90000"/>
-              </a:lnSpc>
-              <a:spcAft>
-                <a:spcPts val="300"/>
-              </a:spcAft>
-              <a:defRPr sz="2000"/>
-            </a:pPr>
-          </a:p>
-          <a:p>
-            <a:pPr>
-              <a:lnSpc>
-                <a:spcPct val="90000"/>
-              </a:lnSpc>
-              <a:spcAft>
-                <a:spcPts val="300"/>
-              </a:spcAft>
-              <a:defRPr sz="2000" b="1"/>
-            </a:pPr>
-            <a:r>
-              <a:rPr sz="1300"/>
-              <a:t>📌 Korunma:</a:t>
-            </a:r>
-          </a:p>
-          <a:p>
-            <a:pPr lvl="1">
-              <a:lnSpc>
-                <a:spcPct val="90000"/>
-              </a:lnSpc>
-              <a:spcAft>
-                <a:spcPts val="300"/>
-              </a:spcAft>
-              <a:defRPr sz="1800"/>
-            </a:pPr>
-            <a:r>
-              <a:rPr sz="1300"/>
-              <a:t>    • Acele kararlar alma</a:t>
-            </a:r>
-          </a:p>
-          <a:p>
-            <a:pPr lvl="1">
-              <a:lnSpc>
-                <a:spcPct val="90000"/>
-              </a:lnSpc>
-              <a:spcAft>
-                <a:spcPts val="300"/>
-              </a:spcAft>
-              <a:defRPr sz="1800"/>
-            </a:pPr>
-            <a:r>
-              <a:rPr sz="1300"/>
-              <a:t>    • Doğrula (arayıp sor)</a:t>
-            </a:r>
-          </a:p>
-          <a:p>
-            <a:pPr lvl="1">
-              <a:lnSpc>
-                <a:spcPct val="90000"/>
-              </a:lnSpc>
-              <a:spcAft>
-                <a:spcPts val="300"/>
-              </a:spcAft>
-              <a:defRPr sz="1800"/>
-            </a:pPr>
-            <a:r>
-              <a:rPr sz="1300"/>
-              <a:t>    • Şüphe duy</a:t>
-            </a:r>
-          </a:p>
-          <a:p>
-            <a:pPr lvl="1">
-              <a:lnSpc>
-                <a:spcPct val="90000"/>
-              </a:lnSpc>
-              <a:spcAft>
-                <a:spcPts val="300"/>
-              </a:spcAft>
-              <a:defRPr sz="1800"/>
-            </a:pPr>
-            <a:r>
-              <a:rPr sz="1300"/>
-              <a:t>    • 'Hayır' deme hakkın var</a:t>
-            </a:r>
-          </a:p>
-          <a:p>
-            <a:pPr>
-              <a:lnSpc>
-                <a:spcPct val="90000"/>
-              </a:lnSpc>
-              <a:spcAft>
-                <a:spcPts val="300"/>
-              </a:spcAft>
-              <a:defRPr sz="2000"/>
-            </a:pPr>
-          </a:p>
-          <a:p>
-            <a:pPr>
-              <a:lnSpc>
-                <a:spcPct val="90000"/>
-              </a:lnSpc>
-              <a:spcAft>
-                <a:spcPts val="300"/>
+                <a:spcPct val="85000"/>
+              </a:lnSpc>
+              <a:spcBef>
+                <a:spcPts val="200"/>
+              </a:spcBef>
+              <a:spcAft>
+                <a:spcPts val="200"/>
               </a:spcAft>
               <a:defRPr sz="2000" b="1"/>
             </a:pPr>
@@ -6697,10 +6863,19 @@
         </p:nvSpPr>
         <p:spPr/>
         <p:txBody>
-          <a:bodyPr wrap="square"/>
+          <a:bodyPr wrap="square" tIns="25400" bIns="25400" lIns="63500" rIns="63500"/>
           <a:lstStyle/>
           <a:p>
             <a:pPr>
+              <a:lnSpc>
+                <a:spcPct val="85000"/>
+              </a:lnSpc>
+              <a:spcBef>
+                <a:spcPts val="200"/>
+              </a:spcBef>
+              <a:spcAft>
+                <a:spcPts val="200"/>
+              </a:spcAft>
               <a:defRPr sz="4000" b="1">
                 <a:solidFill>
                   <a:srgbClr val="667EEA"/>
@@ -6708,6 +6883,7 @@
               </a:defRPr>
             </a:pPr>
             <a:r>
+              <a:rPr/>
               <a:t>🌟 Güvenli Dijital Vatandaş Ol!</a:t>
             </a:r>
           </a:p>
@@ -6747,7 +6923,7 @@
           <a:noFill/>
         </p:spPr>
         <p:txBody>
-          <a:bodyPr wrap="square">
+          <a:bodyPr wrap="square" tIns="25400" bIns="25400" lIns="63500" rIns="63500">
             <a:spAutoFit/>
           </a:bodyPr>
           <a:lstStyle/>
@@ -6764,6 +6940,24 @@
           <a:p>
             <a:pPr>
               <a:lnSpc>
+                <a:spcPct val="85000"/>
+              </a:lnSpc>
+              <a:spcBef>
+                <a:spcPts val="200"/>
+              </a:spcBef>
+              <a:spcAft>
+                <a:spcPts val="200"/>
+              </a:spcAft>
+              <a:defRPr sz="2000"/>
+            </a:pPr>
+            <a:r>
+              <a:rPr sz="1300"/>
+              <a:t>Dijital vatandaşlık = Dijital dünyada sorumlu davranmak</a:t>
+            </a:r>
+          </a:p>
+          <a:p>
+            <a:pPr>
+              <a:lnSpc>
                 <a:spcPct val="90000"/>
               </a:lnSpc>
               <a:spcAft>
@@ -6771,9 +6965,23 @@
               </a:spcAft>
               <a:defRPr sz="2000"/>
             </a:pPr>
-            <a:r>
-              <a:rPr sz="1300"/>
-              <a:t>Dijital vatandaşlık = Dijital dünyada sorumlu davranmak</a:t>
+          </a:p>
+          <a:p>
+            <a:pPr>
+              <a:lnSpc>
+                <a:spcPct val="85000"/>
+              </a:lnSpc>
+              <a:spcBef>
+                <a:spcPts val="200"/>
+              </a:spcBef>
+              <a:spcAft>
+                <a:spcPts val="200"/>
+              </a:spcAft>
+              <a:defRPr sz="2000" b="1"/>
+            </a:pPr>
+            <a:r>
+              <a:rPr sz="1300"/>
+              <a:t>✅ Güvenli Dijital Vatandaş:</a:t>
             </a:r>
           </a:p>
           <a:p>
@@ -6790,16 +6998,380 @@
           <a:p>
             <a:pPr>
               <a:lnSpc>
+                <a:spcPct val="85000"/>
+              </a:lnSpc>
+              <a:spcBef>
+                <a:spcPts val="200"/>
+              </a:spcBef>
+              <a:spcAft>
+                <a:spcPts val="200"/>
+              </a:spcAft>
+              <a:defRPr sz="2000"/>
+            </a:pPr>
+            <a:r>
+              <a:rPr sz="1300"/>
+              <a:t>🤝 Saygılı:</a:t>
+            </a:r>
+          </a:p>
+          <a:p>
+            <a:pPr lvl="1">
+              <a:lnSpc>
+                <a:spcPct val="85000"/>
+              </a:lnSpc>
+              <a:spcBef>
+                <a:spcPts val="200"/>
+              </a:spcBef>
+              <a:spcAft>
+                <a:spcPts val="200"/>
+              </a:spcAft>
+              <a:defRPr sz="1800"/>
+            </a:pPr>
+            <a:r>
+              <a:rPr sz="1300"/>
+              <a:t>    • Başkalarına saygı göster</a:t>
+            </a:r>
+          </a:p>
+          <a:p>
+            <a:pPr lvl="1">
+              <a:lnSpc>
+                <a:spcPct val="85000"/>
+              </a:lnSpc>
+              <a:spcBef>
+                <a:spcPts val="200"/>
+              </a:spcBef>
+              <a:spcAft>
+                <a:spcPts val="200"/>
+              </a:spcAft>
+              <a:defRPr sz="1800"/>
+            </a:pPr>
+            <a:r>
+              <a:rPr sz="1300"/>
+              <a:t>    • Zorbalık yapma</a:t>
+            </a:r>
+          </a:p>
+          <a:p>
+            <a:pPr>
+              <a:lnSpc>
                 <a:spcPct val="90000"/>
               </a:lnSpc>
               <a:spcAft>
                 <a:spcPts val="300"/>
               </a:spcAft>
+              <a:defRPr sz="2000"/>
+            </a:pPr>
+          </a:p>
+          <a:p>
+            <a:pPr>
+              <a:lnSpc>
+                <a:spcPct val="85000"/>
+              </a:lnSpc>
+              <a:spcBef>
+                <a:spcPts val="200"/>
+              </a:spcBef>
+              <a:spcAft>
+                <a:spcPts val="200"/>
+              </a:spcAft>
+              <a:defRPr sz="2000"/>
+            </a:pPr>
+            <a:r>
+              <a:rPr sz="1300"/>
+              <a:t>📝 Dürüst:</a:t>
+            </a:r>
+          </a:p>
+          <a:p>
+            <a:pPr lvl="1">
+              <a:lnSpc>
+                <a:spcPct val="85000"/>
+              </a:lnSpc>
+              <a:spcBef>
+                <a:spcPts val="200"/>
+              </a:spcBef>
+              <a:spcAft>
+                <a:spcPts val="200"/>
+              </a:spcAft>
+              <a:defRPr sz="1800"/>
+            </a:pPr>
+            <a:r>
+              <a:rPr sz="1300"/>
+              <a:t>    • Telif haklarına uy</a:t>
+            </a:r>
+          </a:p>
+          <a:p>
+            <a:pPr lvl="1">
+              <a:lnSpc>
+                <a:spcPct val="85000"/>
+              </a:lnSpc>
+              <a:spcBef>
+                <a:spcPts val="200"/>
+              </a:spcBef>
+              <a:spcAft>
+                <a:spcPts val="200"/>
+              </a:spcAft>
+              <a:defRPr sz="1800"/>
+            </a:pPr>
+            <a:r>
+              <a:rPr sz="1300"/>
+              <a:t>    • Doğru bilgi paylaş</a:t>
+            </a:r>
+          </a:p>
+          <a:p>
+            <a:pPr>
+              <a:lnSpc>
+                <a:spcPct val="90000"/>
+              </a:lnSpc>
+              <a:spcAft>
+                <a:spcPts val="300"/>
+              </a:spcAft>
+              <a:defRPr sz="2000"/>
+            </a:pPr>
+          </a:p>
+          <a:p>
+            <a:pPr>
+              <a:lnSpc>
+                <a:spcPct val="85000"/>
+              </a:lnSpc>
+              <a:spcBef>
+                <a:spcPts val="200"/>
+              </a:spcBef>
+              <a:spcAft>
+                <a:spcPts val="200"/>
+              </a:spcAft>
+              <a:defRPr sz="2000"/>
+            </a:pPr>
+            <a:r>
+              <a:rPr sz="1300"/>
+              <a:t>🔒 Güvenli:</a:t>
+            </a:r>
+          </a:p>
+          <a:p>
+            <a:pPr lvl="1">
+              <a:lnSpc>
+                <a:spcPct val="85000"/>
+              </a:lnSpc>
+              <a:spcBef>
+                <a:spcPts val="200"/>
+              </a:spcBef>
+              <a:spcAft>
+                <a:spcPts val="200"/>
+              </a:spcAft>
+              <a:defRPr sz="1800"/>
+            </a:pPr>
+            <a:r>
+              <a:rPr sz="1300"/>
+              <a:t>    • Kişisel bilgilerini koru</a:t>
+            </a:r>
+          </a:p>
+          <a:p>
+            <a:pPr lvl="1">
+              <a:lnSpc>
+                <a:spcPct val="85000"/>
+              </a:lnSpc>
+              <a:spcBef>
+                <a:spcPts val="200"/>
+              </a:spcBef>
+              <a:spcAft>
+                <a:spcPts val="200"/>
+              </a:spcAft>
+              <a:defRPr sz="1800"/>
+            </a:pPr>
+            <a:r>
+              <a:rPr sz="1300"/>
+              <a:t>    • Güçlü şifre kullan</a:t>
+            </a:r>
+          </a:p>
+          <a:p>
+            <a:pPr>
+              <a:lnSpc>
+                <a:spcPct val="90000"/>
+              </a:lnSpc>
+              <a:spcAft>
+                <a:spcPts val="300"/>
+              </a:spcAft>
+              <a:defRPr sz="2000"/>
+            </a:pPr>
+          </a:p>
+          <a:p>
+            <a:pPr>
+              <a:lnSpc>
+                <a:spcPct val="85000"/>
+              </a:lnSpc>
+              <a:spcBef>
+                <a:spcPts val="200"/>
+              </a:spcBef>
+              <a:spcAft>
+                <a:spcPts val="200"/>
+              </a:spcAft>
+              <a:defRPr sz="2000"/>
+            </a:pPr>
+            <a:r>
+              <a:rPr sz="1300"/>
+              <a:t>📚 Bilinçli:</a:t>
+            </a:r>
+          </a:p>
+          <a:p>
+            <a:pPr lvl="1">
+              <a:lnSpc>
+                <a:spcPct val="85000"/>
+              </a:lnSpc>
+              <a:spcBef>
+                <a:spcPts val="200"/>
+              </a:spcBef>
+              <a:spcAft>
+                <a:spcPts val="200"/>
+              </a:spcAft>
+              <a:defRPr sz="1800"/>
+            </a:pPr>
+            <a:r>
+              <a:rPr sz="1300"/>
+              <a:t>    • Eleştirel düşün</a:t>
+            </a:r>
+          </a:p>
+          <a:p>
+            <a:pPr lvl="1">
+              <a:lnSpc>
+                <a:spcPct val="85000"/>
+              </a:lnSpc>
+              <a:spcBef>
+                <a:spcPts val="200"/>
+              </a:spcBef>
+              <a:spcAft>
+                <a:spcPts val="200"/>
+              </a:spcAft>
+              <a:defRPr sz="1800"/>
+            </a:pPr>
+            <a:r>
+              <a:rPr sz="1300"/>
+              <a:t>    • Doğrula, araştır</a:t>
+            </a:r>
+          </a:p>
+          <a:p>
+            <a:pPr>
+              <a:lnSpc>
+                <a:spcPct val="90000"/>
+              </a:lnSpc>
+              <a:spcAft>
+                <a:spcPts val="300"/>
+              </a:spcAft>
+              <a:defRPr sz="2000"/>
+            </a:pPr>
+          </a:p>
+          <a:p>
+            <a:pPr>
+              <a:lnSpc>
+                <a:spcPct val="85000"/>
+              </a:lnSpc>
+              <a:spcBef>
+                <a:spcPts val="200"/>
+              </a:spcBef>
+              <a:spcAft>
+                <a:spcPts val="200"/>
+              </a:spcAft>
+              <a:defRPr sz="2000"/>
+            </a:pPr>
+            <a:r>
+              <a:rPr sz="1300"/>
+              <a:t>⚖️ Sorumlu:</a:t>
+            </a:r>
+          </a:p>
+          <a:p>
+            <a:pPr lvl="1">
+              <a:lnSpc>
+                <a:spcPct val="85000"/>
+              </a:lnSpc>
+              <a:spcBef>
+                <a:spcPts val="200"/>
+              </a:spcBef>
+              <a:spcAft>
+                <a:spcPts val="200"/>
+              </a:spcAft>
+              <a:defRPr sz="1800"/>
+            </a:pPr>
+            <a:r>
+              <a:rPr sz="1300"/>
+              <a:t>    • Paylaştıklarından sorumlu ol</a:t>
+            </a:r>
+          </a:p>
+          <a:p>
+            <a:pPr lvl="1">
+              <a:lnSpc>
+                <a:spcPct val="85000"/>
+              </a:lnSpc>
+              <a:spcBef>
+                <a:spcPts val="200"/>
+              </a:spcBef>
+              <a:spcAft>
+                <a:spcPts val="200"/>
+              </a:spcAft>
+              <a:defRPr sz="1800"/>
+            </a:pPr>
+            <a:r>
+              <a:rPr sz="1300"/>
+              <a:t>    • Dengeli kullan</a:t>
+            </a:r>
+          </a:p>
+          <a:p>
+            <a:pPr>
+              <a:lnSpc>
+                <a:spcPct val="90000"/>
+              </a:lnSpc>
+              <a:spcAft>
+                <a:spcPts val="300"/>
+              </a:spcAft>
+              <a:defRPr sz="2000"/>
+            </a:pPr>
+          </a:p>
+          <a:p>
+            <a:pPr>
+              <a:lnSpc>
+                <a:spcPct val="85000"/>
+              </a:lnSpc>
+              <a:spcBef>
+                <a:spcPts val="200"/>
+              </a:spcBef>
+              <a:spcAft>
+                <a:spcPts val="200"/>
+              </a:spcAft>
               <a:defRPr sz="2000" b="1"/>
             </a:pPr>
             <a:r>
               <a:rPr sz="1300"/>
-              <a:t>✅ Güvenli Dijital Vatandaş:</a:t>
+              <a:t>💡 Dijital Vatandaşlık Yemini:</a:t>
+            </a:r>
+          </a:p>
+          <a:p>
+            <a:pPr>
+              <a:lnSpc>
+                <a:spcPct val="85000"/>
+              </a:lnSpc>
+              <a:spcBef>
+                <a:spcPts val="200"/>
+              </a:spcBef>
+              <a:spcAft>
+                <a:spcPts val="200"/>
+              </a:spcAft>
+              <a:defRPr sz="2000"/>
+            </a:pPr>
+            <a:r>
+              <a:rPr sz="1300"/>
+              <a:t>'Ben dijital dünyada saygılı, dürüst, güvenli,</a:t>
+            </a:r>
+          </a:p>
+          <a:p>
+            <a:pPr>
+              <a:lnSpc>
+                <a:spcPct val="85000"/>
+              </a:lnSpc>
+              <a:spcBef>
+                <a:spcPts val="200"/>
+              </a:spcBef>
+              <a:spcAft>
+                <a:spcPts val="200"/>
+              </a:spcAft>
+              <a:defRPr sz="2000"/>
+            </a:pPr>
+            <a:r>
+              <a:rPr sz="1300"/>
+              <a:t>bilinçli ve sorumlu davranacağıma söz veriyorum!'</a:t>
             </a:r>
           </a:p>
           <a:p>
@@ -6816,346 +7388,13 @@
           <a:p>
             <a:pPr>
               <a:lnSpc>
-                <a:spcPct val="90000"/>
-              </a:lnSpc>
-              <a:spcAft>
-                <a:spcPts val="300"/>
-              </a:spcAft>
-              <a:defRPr sz="2000"/>
-            </a:pPr>
-            <a:r>
-              <a:rPr sz="1300"/>
-              <a:t>🤝 Saygılı:</a:t>
-            </a:r>
-          </a:p>
-          <a:p>
-            <a:pPr lvl="1">
-              <a:lnSpc>
-                <a:spcPct val="90000"/>
-              </a:lnSpc>
-              <a:spcAft>
-                <a:spcPts val="300"/>
-              </a:spcAft>
-              <a:defRPr sz="1800"/>
-            </a:pPr>
-            <a:r>
-              <a:rPr sz="1300"/>
-              <a:t>    • Başkalarına saygı göster</a:t>
-            </a:r>
-          </a:p>
-          <a:p>
-            <a:pPr lvl="1">
-              <a:lnSpc>
-                <a:spcPct val="90000"/>
-              </a:lnSpc>
-              <a:spcAft>
-                <a:spcPts val="300"/>
-              </a:spcAft>
-              <a:defRPr sz="1800"/>
-            </a:pPr>
-            <a:r>
-              <a:rPr sz="1300"/>
-              <a:t>    • Zorbalık yapma</a:t>
-            </a:r>
-          </a:p>
-          <a:p>
-            <a:pPr>
-              <a:lnSpc>
-                <a:spcPct val="90000"/>
-              </a:lnSpc>
-              <a:spcAft>
-                <a:spcPts val="300"/>
-              </a:spcAft>
-              <a:defRPr sz="2000"/>
-            </a:pPr>
-          </a:p>
-          <a:p>
-            <a:pPr>
-              <a:lnSpc>
-                <a:spcPct val="90000"/>
-              </a:lnSpc>
-              <a:spcAft>
-                <a:spcPts val="300"/>
-              </a:spcAft>
-              <a:defRPr sz="2000"/>
-            </a:pPr>
-            <a:r>
-              <a:rPr sz="1300"/>
-              <a:t>📝 Dürüst:</a:t>
-            </a:r>
-          </a:p>
-          <a:p>
-            <a:pPr lvl="1">
-              <a:lnSpc>
-                <a:spcPct val="90000"/>
-              </a:lnSpc>
-              <a:spcAft>
-                <a:spcPts val="300"/>
-              </a:spcAft>
-              <a:defRPr sz="1800"/>
-            </a:pPr>
-            <a:r>
-              <a:rPr sz="1300"/>
-              <a:t>    • Telif haklarına uy</a:t>
-            </a:r>
-          </a:p>
-          <a:p>
-            <a:pPr lvl="1">
-              <a:lnSpc>
-                <a:spcPct val="90000"/>
-              </a:lnSpc>
-              <a:spcAft>
-                <a:spcPts val="300"/>
-              </a:spcAft>
-              <a:defRPr sz="1800"/>
-            </a:pPr>
-            <a:r>
-              <a:rPr sz="1300"/>
-              <a:t>    • Doğru bilgi paylaş</a:t>
-            </a:r>
-          </a:p>
-          <a:p>
-            <a:pPr>
-              <a:lnSpc>
-                <a:spcPct val="90000"/>
-              </a:lnSpc>
-              <a:spcAft>
-                <a:spcPts val="300"/>
-              </a:spcAft>
-              <a:defRPr sz="2000"/>
-            </a:pPr>
-          </a:p>
-          <a:p>
-            <a:pPr>
-              <a:lnSpc>
-                <a:spcPct val="90000"/>
-              </a:lnSpc>
-              <a:spcAft>
-                <a:spcPts val="300"/>
-              </a:spcAft>
-              <a:defRPr sz="2000"/>
-            </a:pPr>
-            <a:r>
-              <a:rPr sz="1300"/>
-              <a:t>🔒 Güvenli:</a:t>
-            </a:r>
-          </a:p>
-          <a:p>
-            <a:pPr lvl="1">
-              <a:lnSpc>
-                <a:spcPct val="90000"/>
-              </a:lnSpc>
-              <a:spcAft>
-                <a:spcPts val="300"/>
-              </a:spcAft>
-              <a:defRPr sz="1800"/>
-            </a:pPr>
-            <a:r>
-              <a:rPr sz="1300"/>
-              <a:t>    • Kişisel bilgilerini koru</a:t>
-            </a:r>
-          </a:p>
-          <a:p>
-            <a:pPr lvl="1">
-              <a:lnSpc>
-                <a:spcPct val="90000"/>
-              </a:lnSpc>
-              <a:spcAft>
-                <a:spcPts val="300"/>
-              </a:spcAft>
-              <a:defRPr sz="1800"/>
-            </a:pPr>
-            <a:r>
-              <a:rPr sz="1300"/>
-              <a:t>    • Güçlü şifre kullan</a:t>
-            </a:r>
-          </a:p>
-          <a:p>
-            <a:pPr>
-              <a:lnSpc>
-                <a:spcPct val="90000"/>
-              </a:lnSpc>
-              <a:spcAft>
-                <a:spcPts val="300"/>
-              </a:spcAft>
-              <a:defRPr sz="2000"/>
-            </a:pPr>
-          </a:p>
-          <a:p>
-            <a:pPr>
-              <a:lnSpc>
-                <a:spcPct val="90000"/>
-              </a:lnSpc>
-              <a:spcAft>
-                <a:spcPts val="300"/>
-              </a:spcAft>
-              <a:defRPr sz="2000"/>
-            </a:pPr>
-            <a:r>
-              <a:rPr sz="1300"/>
-              <a:t>📚 Bilinçli:</a:t>
-            </a:r>
-          </a:p>
-          <a:p>
-            <a:pPr lvl="1">
-              <a:lnSpc>
-                <a:spcPct val="90000"/>
-              </a:lnSpc>
-              <a:spcAft>
-                <a:spcPts val="300"/>
-              </a:spcAft>
-              <a:defRPr sz="1800"/>
-            </a:pPr>
-            <a:r>
-              <a:rPr sz="1300"/>
-              <a:t>    • Eleştirel düşün</a:t>
-            </a:r>
-          </a:p>
-          <a:p>
-            <a:pPr lvl="1">
-              <a:lnSpc>
-                <a:spcPct val="90000"/>
-              </a:lnSpc>
-              <a:spcAft>
-                <a:spcPts val="300"/>
-              </a:spcAft>
-              <a:defRPr sz="1800"/>
-            </a:pPr>
-            <a:r>
-              <a:rPr sz="1300"/>
-              <a:t>    • Doğrula, araştır</a:t>
-            </a:r>
-          </a:p>
-          <a:p>
-            <a:pPr>
-              <a:lnSpc>
-                <a:spcPct val="90000"/>
-              </a:lnSpc>
-              <a:spcAft>
-                <a:spcPts val="300"/>
-              </a:spcAft>
-              <a:defRPr sz="2000"/>
-            </a:pPr>
-          </a:p>
-          <a:p>
-            <a:pPr>
-              <a:lnSpc>
-                <a:spcPct val="90000"/>
-              </a:lnSpc>
-              <a:spcAft>
-                <a:spcPts val="300"/>
-              </a:spcAft>
-              <a:defRPr sz="2000"/>
-            </a:pPr>
-            <a:r>
-              <a:rPr sz="1300"/>
-              <a:t>⚖️ Sorumlu:</a:t>
-            </a:r>
-          </a:p>
-          <a:p>
-            <a:pPr lvl="1">
-              <a:lnSpc>
-                <a:spcPct val="90000"/>
-              </a:lnSpc>
-              <a:spcAft>
-                <a:spcPts val="300"/>
-              </a:spcAft>
-              <a:defRPr sz="1800"/>
-            </a:pPr>
-            <a:r>
-              <a:rPr sz="1300"/>
-              <a:t>    • Paylaştıklarından sorumlu ol</a:t>
-            </a:r>
-          </a:p>
-          <a:p>
-            <a:pPr lvl="1">
-              <a:lnSpc>
-                <a:spcPct val="90000"/>
-              </a:lnSpc>
-              <a:spcAft>
-                <a:spcPts val="300"/>
-              </a:spcAft>
-              <a:defRPr sz="1800"/>
-            </a:pPr>
-            <a:r>
-              <a:rPr sz="1300"/>
-              <a:t>    • Dengeli kullan</a:t>
-            </a:r>
-          </a:p>
-          <a:p>
-            <a:pPr>
-              <a:lnSpc>
-                <a:spcPct val="90000"/>
-              </a:lnSpc>
-              <a:spcAft>
-                <a:spcPts val="300"/>
-              </a:spcAft>
-              <a:defRPr sz="2000"/>
-            </a:pPr>
-          </a:p>
-          <a:p>
-            <a:pPr>
-              <a:lnSpc>
-                <a:spcPct val="90000"/>
-              </a:lnSpc>
-              <a:spcAft>
-                <a:spcPts val="300"/>
-              </a:spcAft>
-              <a:defRPr sz="2000" b="1"/>
-            </a:pPr>
-            <a:r>
-              <a:rPr sz="1300"/>
-              <a:t>💡 Dijital Vatandaşlık Yemini:</a:t>
-            </a:r>
-          </a:p>
-          <a:p>
-            <a:pPr>
-              <a:lnSpc>
-                <a:spcPct val="90000"/>
-              </a:lnSpc>
-              <a:spcAft>
-                <a:spcPts val="300"/>
-              </a:spcAft>
-              <a:defRPr sz="2000"/>
-            </a:pPr>
-            <a:r>
-              <a:rPr sz="1300"/>
-              <a:t>'Ben dijital dünyada saygılı, dürüst, güvenli,</a:t>
-            </a:r>
-          </a:p>
-          <a:p>
-            <a:pPr>
-              <a:lnSpc>
-                <a:spcPct val="90000"/>
-              </a:lnSpc>
-              <a:spcAft>
-                <a:spcPts val="300"/>
-              </a:spcAft>
-              <a:defRPr sz="2000"/>
-            </a:pPr>
-            <a:r>
-              <a:rPr sz="1300"/>
-              <a:t>bilinçli ve sorumlu davranacağıma söz veriyorum!'</a:t>
-            </a:r>
-          </a:p>
-          <a:p>
-            <a:pPr>
-              <a:lnSpc>
-                <a:spcPct val="90000"/>
-              </a:lnSpc>
-              <a:spcAft>
-                <a:spcPts val="300"/>
-              </a:spcAft>
-              <a:defRPr sz="2000"/>
-            </a:pPr>
-          </a:p>
-          <a:p>
-            <a:pPr>
-              <a:lnSpc>
-                <a:spcPct val="90000"/>
-              </a:lnSpc>
-              <a:spcAft>
-                <a:spcPts val="300"/>
+                <a:spcPct val="85000"/>
+              </a:lnSpc>
+              <a:spcBef>
+                <a:spcPts val="200"/>
+              </a:spcBef>
+              <a:spcAft>
+                <a:spcPts val="200"/>
               </a:spcAft>
               <a:defRPr sz="2000" b="1"/>
             </a:pPr>
@@ -7196,10 +7435,19 @@
         </p:nvSpPr>
         <p:spPr/>
         <p:txBody>
-          <a:bodyPr wrap="square"/>
+          <a:bodyPr wrap="square" tIns="25400" bIns="25400" lIns="63500" rIns="63500"/>
           <a:lstStyle/>
           <a:p>
             <a:pPr>
+              <a:lnSpc>
+                <a:spcPct val="85000"/>
+              </a:lnSpc>
+              <a:spcBef>
+                <a:spcPts val="200"/>
+              </a:spcBef>
+              <a:spcAft>
+                <a:spcPts val="200"/>
+              </a:spcAft>
               <a:defRPr sz="4000" b="1">
                 <a:solidFill>
                   <a:srgbClr val="667EEA"/>
@@ -7207,6 +7455,7 @@
               </a:defRPr>
             </a:pPr>
             <a:r>
+              <a:rPr/>
               <a:t>📱 İki Faktörlü Doğrulama (2FA)</a:t>
             </a:r>
           </a:p>
@@ -7246,7 +7495,7 @@
           <a:noFill/>
         </p:spPr>
         <p:txBody>
-          <a:bodyPr wrap="square">
+          <a:bodyPr wrap="square" tIns="25400" bIns="25400" lIns="63500" rIns="63500">
             <a:spAutoFit/>
           </a:bodyPr>
           <a:lstStyle/>
@@ -7263,6 +7512,24 @@
           <a:p>
             <a:pPr>
               <a:lnSpc>
+                <a:spcPct val="85000"/>
+              </a:lnSpc>
+              <a:spcBef>
+                <a:spcPts val="200"/>
+              </a:spcBef>
+              <a:spcAft>
+                <a:spcPts val="200"/>
+              </a:spcAft>
+              <a:defRPr sz="2000"/>
+            </a:pPr>
+            <a:r>
+              <a:rPr sz="1300"/>
+              <a:t>2FA = İki kademeli güvenlik sistemi</a:t>
+            </a:r>
+          </a:p>
+          <a:p>
+            <a:pPr>
+              <a:lnSpc>
                 <a:spcPct val="90000"/>
               </a:lnSpc>
               <a:spcAft>
@@ -7270,9 +7537,23 @@
               </a:spcAft>
               <a:defRPr sz="2000"/>
             </a:pPr>
-            <a:r>
-              <a:rPr sz="1300"/>
-              <a:t>2FA = İki kademeli güvenlik sistemi</a:t>
+          </a:p>
+          <a:p>
+            <a:pPr>
+              <a:lnSpc>
+                <a:spcPct val="85000"/>
+              </a:lnSpc>
+              <a:spcBef>
+                <a:spcPts val="200"/>
+              </a:spcBef>
+              <a:spcAft>
+                <a:spcPts val="200"/>
+              </a:spcAft>
+              <a:defRPr sz="2000" b="1"/>
+            </a:pPr>
+            <a:r>
+              <a:rPr sz="1300"/>
+              <a:t>✅ Nasıl Çalışır?</a:t>
             </a:r>
           </a:p>
           <a:p>
@@ -7289,16 +7570,138 @@
           <a:p>
             <a:pPr>
               <a:lnSpc>
+                <a:spcPct val="85000"/>
+              </a:lnSpc>
+              <a:spcBef>
+                <a:spcPts val="200"/>
+              </a:spcBef>
+              <a:spcAft>
+                <a:spcPts val="200"/>
+              </a:spcAft>
+              <a:defRPr sz="2000"/>
+            </a:pPr>
+            <a:r>
+              <a:rPr sz="1300"/>
+              <a:t>1️⃣ Adım 1: Şifre gir</a:t>
+            </a:r>
+          </a:p>
+          <a:p>
+            <a:pPr>
+              <a:lnSpc>
+                <a:spcPct val="85000"/>
+              </a:lnSpc>
+              <a:spcBef>
+                <a:spcPts val="200"/>
+              </a:spcBef>
+              <a:spcAft>
+                <a:spcPts val="200"/>
+              </a:spcAft>
+              <a:defRPr sz="2000"/>
+            </a:pPr>
+            <a:r>
+              <a:rPr sz="1300"/>
+              <a:t>2️⃣ Adım 2: Kod gir (SMS veya uygulama)</a:t>
+            </a:r>
+          </a:p>
+          <a:p>
+            <a:pPr>
+              <a:lnSpc>
                 <a:spcPct val="90000"/>
               </a:lnSpc>
               <a:spcAft>
                 <a:spcPts val="300"/>
               </a:spcAft>
+              <a:defRPr sz="2000"/>
+            </a:pPr>
+          </a:p>
+          <a:p>
+            <a:pPr>
+              <a:lnSpc>
+                <a:spcPct val="85000"/>
+              </a:lnSpc>
+              <a:spcBef>
+                <a:spcPts val="200"/>
+              </a:spcBef>
+              <a:spcAft>
+                <a:spcPts val="200"/>
+              </a:spcAft>
               <a:defRPr sz="2000" b="1"/>
             </a:pPr>
             <a:r>
               <a:rPr sz="1300"/>
-              <a:t>✅ Nasıl Çalışır?</a:t>
+              <a:t>📌 Örnek:</a:t>
+            </a:r>
+          </a:p>
+          <a:p>
+            <a:pPr lvl="1">
+              <a:lnSpc>
+                <a:spcPct val="85000"/>
+              </a:lnSpc>
+              <a:spcBef>
+                <a:spcPts val="200"/>
+              </a:spcBef>
+              <a:spcAft>
+                <a:spcPts val="200"/>
+              </a:spcAft>
+              <a:defRPr sz="1800"/>
+            </a:pPr>
+            <a:r>
+              <a:rPr sz="1300"/>
+              <a:t>    • Gmail'e giriş yap</a:t>
+            </a:r>
+          </a:p>
+          <a:p>
+            <a:pPr lvl="1">
+              <a:lnSpc>
+                <a:spcPct val="85000"/>
+              </a:lnSpc>
+              <a:spcBef>
+                <a:spcPts val="200"/>
+              </a:spcBef>
+              <a:spcAft>
+                <a:spcPts val="200"/>
+              </a:spcAft>
+              <a:defRPr sz="1800"/>
+            </a:pPr>
+            <a:r>
+              <a:rPr sz="1300"/>
+              <a:t>    • Şifreni gir</a:t>
+            </a:r>
+          </a:p>
+          <a:p>
+            <a:pPr lvl="1">
+              <a:lnSpc>
+                <a:spcPct val="85000"/>
+              </a:lnSpc>
+              <a:spcBef>
+                <a:spcPts val="200"/>
+              </a:spcBef>
+              <a:spcAft>
+                <a:spcPts val="200"/>
+              </a:spcAft>
+              <a:defRPr sz="1800"/>
+            </a:pPr>
+            <a:r>
+              <a:rPr sz="1300"/>
+              <a:t>    • Telefonuna kod gelir (örn: 123456)</a:t>
+            </a:r>
+          </a:p>
+          <a:p>
+            <a:pPr lvl="1">
+              <a:lnSpc>
+                <a:spcPct val="85000"/>
+              </a:lnSpc>
+              <a:spcBef>
+                <a:spcPts val="200"/>
+              </a:spcBef>
+              <a:spcAft>
+                <a:spcPts val="200"/>
+              </a:spcAft>
+              <a:defRPr sz="1800"/>
+            </a:pPr>
+            <a:r>
+              <a:rPr sz="1300"/>
+              <a:t>    • Kodu gir → Giriş başarılı</a:t>
             </a:r>
           </a:p>
           <a:p>
@@ -7315,6 +7718,78 @@
           <a:p>
             <a:pPr>
               <a:lnSpc>
+                <a:spcPct val="85000"/>
+              </a:lnSpc>
+              <a:spcBef>
+                <a:spcPts val="200"/>
+              </a:spcBef>
+              <a:spcAft>
+                <a:spcPts val="200"/>
+              </a:spcAft>
+              <a:defRPr sz="2000" b="1"/>
+            </a:pPr>
+            <a:r>
+              <a:rPr sz="1300"/>
+              <a:t>✅ Neden Kullanmalısın?</a:t>
+            </a:r>
+          </a:p>
+          <a:p>
+            <a:pPr lvl="1">
+              <a:lnSpc>
+                <a:spcPct val="85000"/>
+              </a:lnSpc>
+              <a:spcBef>
+                <a:spcPts val="200"/>
+              </a:spcBef>
+              <a:spcAft>
+                <a:spcPts val="200"/>
+              </a:spcAft>
+              <a:defRPr sz="1800"/>
+            </a:pPr>
+            <a:r>
+              <a:rPr sz="1300"/>
+              <a:t>    • Şifren çalınsa bile girişi engelliyor</a:t>
+            </a:r>
+          </a:p>
+          <a:p>
+            <a:pPr lvl="1">
+              <a:lnSpc>
+                <a:spcPct val="85000"/>
+              </a:lnSpc>
+              <a:spcBef>
+                <a:spcPts val="200"/>
+              </a:spcBef>
+              <a:spcAft>
+                <a:spcPts val="200"/>
+              </a:spcAft>
+              <a:defRPr sz="1800"/>
+            </a:pPr>
+            <a:r>
+              <a:rPr sz="1300"/>
+              <a:t>    • Çok daha güvenli</a:t>
+            </a:r>
+          </a:p>
+          <a:p>
+            <a:pPr lvl="1">
+              <a:lnSpc>
+                <a:spcPct val="85000"/>
+              </a:lnSpc>
+              <a:spcBef>
+                <a:spcPts val="200"/>
+              </a:spcBef>
+              <a:spcAft>
+                <a:spcPts val="200"/>
+              </a:spcAft>
+              <a:defRPr sz="1800"/>
+            </a:pPr>
+            <a:r>
+              <a:rPr sz="1300"/>
+              <a:t>    • Bildirim alırsın (biri girmeye çalışırsa)</a:t>
+            </a:r>
+          </a:p>
+          <a:p>
+            <a:pPr>
+              <a:lnSpc>
                 <a:spcPct val="90000"/>
               </a:lnSpc>
               <a:spcAft>
@@ -7322,9 +7797,77 @@
               </a:spcAft>
               <a:defRPr sz="2000"/>
             </a:pPr>
-            <a:r>
-              <a:rPr sz="1300"/>
-              <a:t>1️⃣ Adım 1: Şifre gir</a:t>
+          </a:p>
+          <a:p>
+            <a:pPr>
+              <a:lnSpc>
+                <a:spcPct val="85000"/>
+              </a:lnSpc>
+              <a:spcBef>
+                <a:spcPts val="200"/>
+              </a:spcBef>
+              <a:spcAft>
+                <a:spcPts val="200"/>
+              </a:spcAft>
+              <a:defRPr sz="2000" b="1"/>
+            </a:pPr>
+            <a:r>
+              <a:rPr sz="1300"/>
+              <a:t>📌 2FA Nereden Açılır?</a:t>
+            </a:r>
+          </a:p>
+          <a:p>
+            <a:pPr lvl="1">
+              <a:lnSpc>
+                <a:spcPct val="85000"/>
+              </a:lnSpc>
+              <a:spcBef>
+                <a:spcPts val="200"/>
+              </a:spcBef>
+              <a:spcAft>
+                <a:spcPts val="200"/>
+              </a:spcAft>
+              <a:defRPr sz="1800"/>
+            </a:pPr>
+            <a:r>
+              <a:rPr sz="1300"/>
+              <a:t>    • Google hesabı → Güvenlik</a:t>
+            </a:r>
+          </a:p>
+          <a:p>
+            <a:pPr lvl="1">
+              <a:lnSpc>
+                <a:spcPct val="85000"/>
+              </a:lnSpc>
+              <a:spcBef>
+                <a:spcPts val="200"/>
+              </a:spcBef>
+              <a:spcAft>
+                <a:spcPts val="200"/>
+              </a:spcAft>
+              <a:defRPr sz="1800"/>
+            </a:pPr>
+            <a:r>
+              <a:rPr sz="1300"/>
+              <a:t>    • Instagram → Ayarlar → Güvenlik</a:t>
+            </a:r>
+          </a:p>
+          <a:p>
+            <a:pPr lvl="1">
+              <a:lnSpc>
+                <a:spcPct val="85000"/>
+              </a:lnSpc>
+              <a:spcBef>
+                <a:spcPts val="200"/>
+              </a:spcBef>
+              <a:spcAft>
+                <a:spcPts val="200"/>
+              </a:spcAft>
+              <a:defRPr sz="1800"/>
+            </a:pPr>
+            <a:r>
+              <a:rPr sz="1300"/>
+              <a:t>    • Çoğu uygulamada 'Güvenlik' bölümünde</a:t>
             </a:r>
           </a:p>
           <a:p>
@@ -7337,272 +7880,35 @@
               </a:spcAft>
               <a:defRPr sz="2000"/>
             </a:pPr>
-            <a:r>
-              <a:rPr sz="1300"/>
-              <a:t>2️⃣ Adım 2: Kod gir (SMS veya uygulama)</a:t>
-            </a:r>
-          </a:p>
-          <a:p>
-            <a:pPr>
-              <a:lnSpc>
-                <a:spcPct val="90000"/>
-              </a:lnSpc>
-              <a:spcAft>
-                <a:spcPts val="300"/>
-              </a:spcAft>
-              <a:defRPr sz="2000"/>
-            </a:pPr>
-          </a:p>
-          <a:p>
-            <a:pPr>
-              <a:lnSpc>
-                <a:spcPct val="90000"/>
-              </a:lnSpc>
-              <a:spcAft>
-                <a:spcPts val="300"/>
+          </a:p>
+          <a:p>
+            <a:pPr>
+              <a:lnSpc>
+                <a:spcPct val="85000"/>
+              </a:lnSpc>
+              <a:spcBef>
+                <a:spcPts val="200"/>
+              </a:spcBef>
+              <a:spcAft>
+                <a:spcPts val="200"/>
               </a:spcAft>
               <a:defRPr sz="2000" b="1"/>
             </a:pPr>
             <a:r>
               <a:rPr sz="1300"/>
-              <a:t>📌 Örnek:</a:t>
-            </a:r>
-          </a:p>
-          <a:p>
-            <a:pPr lvl="1">
-              <a:lnSpc>
-                <a:spcPct val="90000"/>
-              </a:lnSpc>
-              <a:spcAft>
-                <a:spcPts val="300"/>
-              </a:spcAft>
-              <a:defRPr sz="1800"/>
-            </a:pPr>
-            <a:r>
-              <a:rPr sz="1300"/>
-              <a:t>    • Gmail'e giriş yap</a:t>
-            </a:r>
-          </a:p>
-          <a:p>
-            <a:pPr lvl="1">
-              <a:lnSpc>
-                <a:spcPct val="90000"/>
-              </a:lnSpc>
-              <a:spcAft>
-                <a:spcPts val="300"/>
-              </a:spcAft>
-              <a:defRPr sz="1800"/>
-            </a:pPr>
-            <a:r>
-              <a:rPr sz="1300"/>
-              <a:t>    • Şifreni gir</a:t>
-            </a:r>
-          </a:p>
-          <a:p>
-            <a:pPr lvl="1">
-              <a:lnSpc>
-                <a:spcPct val="90000"/>
-              </a:lnSpc>
-              <a:spcAft>
-                <a:spcPts val="300"/>
-              </a:spcAft>
-              <a:defRPr sz="1800"/>
-            </a:pPr>
-            <a:r>
-              <a:rPr sz="1300"/>
-              <a:t>    • Telefonuna kod gelir (örn: 123456)</a:t>
-            </a:r>
-          </a:p>
-          <a:p>
-            <a:pPr lvl="1">
-              <a:lnSpc>
-                <a:spcPct val="90000"/>
-              </a:lnSpc>
-              <a:spcAft>
-                <a:spcPts val="300"/>
-              </a:spcAft>
-              <a:defRPr sz="1800"/>
-            </a:pPr>
-            <a:r>
-              <a:rPr sz="1300"/>
-              <a:t>    • Kodu gir → Giriş başarılı</a:t>
-            </a:r>
-          </a:p>
-          <a:p>
-            <a:pPr>
-              <a:lnSpc>
-                <a:spcPct val="90000"/>
-              </a:lnSpc>
-              <a:spcAft>
-                <a:spcPts val="300"/>
-              </a:spcAft>
-              <a:defRPr sz="2000"/>
-            </a:pPr>
-          </a:p>
-          <a:p>
-            <a:pPr>
-              <a:lnSpc>
-                <a:spcPct val="90000"/>
-              </a:lnSpc>
-              <a:spcAft>
-                <a:spcPts val="300"/>
-              </a:spcAft>
-              <a:defRPr sz="2000" b="1"/>
-            </a:pPr>
-            <a:r>
-              <a:rPr sz="1300"/>
-              <a:t>✅ Neden Kullanmalısın?</a:t>
-            </a:r>
-          </a:p>
-          <a:p>
-            <a:pPr lvl="1">
-              <a:lnSpc>
-                <a:spcPct val="90000"/>
-              </a:lnSpc>
-              <a:spcAft>
-                <a:spcPts val="300"/>
-              </a:spcAft>
-              <a:defRPr sz="1800"/>
-            </a:pPr>
-            <a:r>
-              <a:rPr sz="1300"/>
-              <a:t>    • Şifren çalınsa bile girişi engelliyor</a:t>
-            </a:r>
-          </a:p>
-          <a:p>
-            <a:pPr lvl="1">
-              <a:lnSpc>
-                <a:spcPct val="90000"/>
-              </a:lnSpc>
-              <a:spcAft>
-                <a:spcPts val="300"/>
-              </a:spcAft>
-              <a:defRPr sz="1800"/>
-            </a:pPr>
-            <a:r>
-              <a:rPr sz="1300"/>
-              <a:t>    • Çok daha güvenli</a:t>
-            </a:r>
-          </a:p>
-          <a:p>
-            <a:pPr lvl="1">
-              <a:lnSpc>
-                <a:spcPct val="90000"/>
-              </a:lnSpc>
-              <a:spcAft>
-                <a:spcPts val="300"/>
-              </a:spcAft>
-              <a:defRPr sz="1800"/>
-            </a:pPr>
-            <a:r>
-              <a:rPr sz="1300"/>
-              <a:t>    • Bildirim alırsın (biri girmeye çalışırsa)</a:t>
-            </a:r>
-          </a:p>
-          <a:p>
-            <a:pPr>
-              <a:lnSpc>
-                <a:spcPct val="90000"/>
-              </a:lnSpc>
-              <a:spcAft>
-                <a:spcPts val="300"/>
-              </a:spcAft>
-              <a:defRPr sz="2000"/>
-            </a:pPr>
-          </a:p>
-          <a:p>
-            <a:pPr>
-              <a:lnSpc>
-                <a:spcPct val="90000"/>
-              </a:lnSpc>
-              <a:spcAft>
-                <a:spcPts val="300"/>
-              </a:spcAft>
-              <a:defRPr sz="2000" b="1"/>
-            </a:pPr>
-            <a:r>
-              <a:rPr sz="1300"/>
-              <a:t>📌 2FA Nereden Açılır?</a:t>
-            </a:r>
-          </a:p>
-          <a:p>
-            <a:pPr lvl="1">
-              <a:lnSpc>
-                <a:spcPct val="90000"/>
-              </a:lnSpc>
-              <a:spcAft>
-                <a:spcPts val="300"/>
-              </a:spcAft>
-              <a:defRPr sz="1800"/>
-            </a:pPr>
-            <a:r>
-              <a:rPr sz="1300"/>
-              <a:t>    • Google hesabı → Güvenlik</a:t>
-            </a:r>
-          </a:p>
-          <a:p>
-            <a:pPr lvl="1">
-              <a:lnSpc>
-                <a:spcPct val="90000"/>
-              </a:lnSpc>
-              <a:spcAft>
-                <a:spcPts val="300"/>
-              </a:spcAft>
-              <a:defRPr sz="1800"/>
-            </a:pPr>
-            <a:r>
-              <a:rPr sz="1300"/>
-              <a:t>    • Instagram → Ayarlar → Güvenlik</a:t>
-            </a:r>
-          </a:p>
-          <a:p>
-            <a:pPr lvl="1">
-              <a:lnSpc>
-                <a:spcPct val="90000"/>
-              </a:lnSpc>
-              <a:spcAft>
-                <a:spcPts val="300"/>
-              </a:spcAft>
-              <a:defRPr sz="1800"/>
-            </a:pPr>
-            <a:r>
-              <a:rPr sz="1300"/>
-              <a:t>    • Çoğu uygulamada 'Güvenlik' bölümünde</a:t>
-            </a:r>
-          </a:p>
-          <a:p>
-            <a:pPr>
-              <a:lnSpc>
-                <a:spcPct val="90000"/>
-              </a:lnSpc>
-              <a:spcAft>
-                <a:spcPts val="300"/>
-              </a:spcAft>
-              <a:defRPr sz="2000"/>
-            </a:pPr>
-          </a:p>
-          <a:p>
-            <a:pPr>
-              <a:lnSpc>
-                <a:spcPct val="90000"/>
-              </a:lnSpc>
-              <a:spcAft>
-                <a:spcPts val="300"/>
-              </a:spcAft>
-              <a:defRPr sz="2000" b="1"/>
-            </a:pPr>
-            <a:r>
-              <a:rPr sz="1300"/>
               <a:t>💡 Mutlaka 2FA'yı aç!</a:t>
             </a:r>
           </a:p>
           <a:p>
             <a:pPr>
               <a:lnSpc>
-                <a:spcPct val="90000"/>
-              </a:lnSpc>
-              <a:spcAft>
-                <a:spcPts val="300"/>
+                <a:spcPct val="85000"/>
+              </a:lnSpc>
+              <a:spcBef>
+                <a:spcPts val="200"/>
+              </a:spcBef>
+              <a:spcAft>
+                <a:spcPts val="200"/>
               </a:spcAft>
               <a:defRPr sz="2000"/>
             </a:pPr>
@@ -7643,10 +7949,19 @@
         </p:nvSpPr>
         <p:spPr/>
         <p:txBody>
-          <a:bodyPr wrap="square"/>
+          <a:bodyPr wrap="square" tIns="25400" bIns="25400" lIns="63500" rIns="63500"/>
           <a:lstStyle/>
           <a:p>
             <a:pPr>
+              <a:lnSpc>
+                <a:spcPct val="85000"/>
+              </a:lnSpc>
+              <a:spcBef>
+                <a:spcPts val="200"/>
+              </a:spcBef>
+              <a:spcAft>
+                <a:spcPts val="200"/>
+              </a:spcAft>
               <a:defRPr sz="4000" b="1">
                 <a:solidFill>
                   <a:srgbClr val="667EEA"/>
@@ -7654,6 +7969,7 @@
               </a:defRPr>
             </a:pPr>
             <a:r>
+              <a:rPr/>
               <a:t>📝 Ünite Özeti</a:t>
             </a:r>
           </a:p>
@@ -7693,7 +8009,7 @@
           <a:noFill/>
         </p:spPr>
         <p:txBody>
-          <a:bodyPr wrap="square">
+          <a:bodyPr wrap="square" tIns="25400" bIns="25400" lIns="63500" rIns="63500">
             <a:spAutoFit/>
           </a:bodyPr>
           <a:lstStyle/>
@@ -7710,10 +8026,13 @@
           <a:p>
             <a:pPr>
               <a:lnSpc>
-                <a:spcPct val="90000"/>
-              </a:lnSpc>
-              <a:spcAft>
-                <a:spcPts val="300"/>
+                <a:spcPct val="85000"/>
+              </a:lnSpc>
+              <a:spcBef>
+                <a:spcPts val="200"/>
+              </a:spcBef>
+              <a:spcAft>
+                <a:spcPts val="200"/>
               </a:spcAft>
               <a:defRPr sz="2000"/>
             </a:pPr>
@@ -7736,10 +8055,13 @@
           <a:p>
             <a:pPr>
               <a:lnSpc>
-                <a:spcPct val="90000"/>
-              </a:lnSpc>
-              <a:spcAft>
-                <a:spcPts val="300"/>
+                <a:spcPct val="85000"/>
+              </a:lnSpc>
+              <a:spcBef>
+                <a:spcPts val="200"/>
+              </a:spcBef>
+              <a:spcAft>
+                <a:spcPts val="200"/>
               </a:spcAft>
               <a:defRPr sz="2000" b="1"/>
             </a:pPr>
@@ -7751,10 +8073,13 @@
           <a:p>
             <a:pPr>
               <a:lnSpc>
-                <a:spcPct val="90000"/>
-              </a:lnSpc>
-              <a:spcAft>
-                <a:spcPts val="300"/>
+                <a:spcPct val="85000"/>
+              </a:lnSpc>
+              <a:spcBef>
+                <a:spcPts val="200"/>
+              </a:spcBef>
+              <a:spcAft>
+                <a:spcPts val="200"/>
               </a:spcAft>
               <a:defRPr sz="2000" b="1"/>
             </a:pPr>
@@ -7766,10 +8091,13 @@
           <a:p>
             <a:pPr>
               <a:lnSpc>
-                <a:spcPct val="90000"/>
-              </a:lnSpc>
-              <a:spcAft>
-                <a:spcPts val="300"/>
+                <a:spcPct val="85000"/>
+              </a:lnSpc>
+              <a:spcBef>
+                <a:spcPts val="200"/>
+              </a:spcBef>
+              <a:spcAft>
+                <a:spcPts val="200"/>
               </a:spcAft>
               <a:defRPr sz="2000" b="1"/>
             </a:pPr>
@@ -7781,10 +8109,13 @@
           <a:p>
             <a:pPr>
               <a:lnSpc>
-                <a:spcPct val="90000"/>
-              </a:lnSpc>
-              <a:spcAft>
-                <a:spcPts val="300"/>
+                <a:spcPct val="85000"/>
+              </a:lnSpc>
+              <a:spcBef>
+                <a:spcPts val="200"/>
+              </a:spcBef>
+              <a:spcAft>
+                <a:spcPts val="200"/>
               </a:spcAft>
               <a:defRPr sz="2000" b="1"/>
             </a:pPr>
@@ -7796,10 +8127,13 @@
           <a:p>
             <a:pPr>
               <a:lnSpc>
-                <a:spcPct val="90000"/>
-              </a:lnSpc>
-              <a:spcAft>
-                <a:spcPts val="300"/>
+                <a:spcPct val="85000"/>
+              </a:lnSpc>
+              <a:spcBef>
+                <a:spcPts val="200"/>
+              </a:spcBef>
+              <a:spcAft>
+                <a:spcPts val="200"/>
               </a:spcAft>
               <a:defRPr sz="2000" b="1"/>
             </a:pPr>
@@ -7811,10 +8145,13 @@
           <a:p>
             <a:pPr>
               <a:lnSpc>
-                <a:spcPct val="90000"/>
-              </a:lnSpc>
-              <a:spcAft>
-                <a:spcPts val="300"/>
+                <a:spcPct val="85000"/>
+              </a:lnSpc>
+              <a:spcBef>
+                <a:spcPts val="200"/>
+              </a:spcBef>
+              <a:spcAft>
+                <a:spcPts val="200"/>
               </a:spcAft>
               <a:defRPr sz="2000" b="1"/>
             </a:pPr>
@@ -7826,10 +8163,13 @@
           <a:p>
             <a:pPr>
               <a:lnSpc>
-                <a:spcPct val="90000"/>
-              </a:lnSpc>
-              <a:spcAft>
-                <a:spcPts val="300"/>
+                <a:spcPct val="85000"/>
+              </a:lnSpc>
+              <a:spcBef>
+                <a:spcPts val="200"/>
+              </a:spcBef>
+              <a:spcAft>
+                <a:spcPts val="200"/>
               </a:spcAft>
               <a:defRPr sz="2000" b="1"/>
             </a:pPr>
@@ -7841,10 +8181,13 @@
           <a:p>
             <a:pPr>
               <a:lnSpc>
-                <a:spcPct val="90000"/>
-              </a:lnSpc>
-              <a:spcAft>
-                <a:spcPts val="300"/>
+                <a:spcPct val="85000"/>
+              </a:lnSpc>
+              <a:spcBef>
+                <a:spcPts val="200"/>
+              </a:spcBef>
+              <a:spcAft>
+                <a:spcPts val="200"/>
               </a:spcAft>
               <a:defRPr sz="2000" b="1"/>
             </a:pPr>
@@ -7856,10 +8199,13 @@
           <a:p>
             <a:pPr>
               <a:lnSpc>
-                <a:spcPct val="90000"/>
-              </a:lnSpc>
-              <a:spcAft>
-                <a:spcPts val="300"/>
+                <a:spcPct val="85000"/>
+              </a:lnSpc>
+              <a:spcBef>
+                <a:spcPts val="200"/>
+              </a:spcBef>
+              <a:spcAft>
+                <a:spcPts val="200"/>
               </a:spcAft>
               <a:defRPr sz="2000" b="1"/>
             </a:pPr>
@@ -7882,10 +8228,13 @@
           <a:p>
             <a:pPr>
               <a:lnSpc>
-                <a:spcPct val="90000"/>
-              </a:lnSpc>
-              <a:spcAft>
-                <a:spcPts val="300"/>
+                <a:spcPct val="85000"/>
+              </a:lnSpc>
+              <a:spcBef>
+                <a:spcPts val="200"/>
+              </a:spcBef>
+              <a:spcAft>
+                <a:spcPts val="200"/>
               </a:spcAft>
               <a:defRPr sz="2000" b="1"/>
             </a:pPr>
@@ -7897,10 +8246,13 @@
           <a:p>
             <a:pPr>
               <a:lnSpc>
-                <a:spcPct val="90000"/>
-              </a:lnSpc>
-              <a:spcAft>
-                <a:spcPts val="300"/>
+                <a:spcPct val="85000"/>
+              </a:lnSpc>
+              <a:spcBef>
+                <a:spcPts val="200"/>
+              </a:spcBef>
+              <a:spcAft>
+                <a:spcPts val="200"/>
               </a:spcAft>
               <a:defRPr sz="2000"/>
             </a:pPr>
@@ -7912,10 +8264,13 @@
           <a:p>
             <a:pPr>
               <a:lnSpc>
-                <a:spcPct val="90000"/>
-              </a:lnSpc>
-              <a:spcAft>
-                <a:spcPts val="300"/>
+                <a:spcPct val="85000"/>
+              </a:lnSpc>
+              <a:spcBef>
+                <a:spcPts val="200"/>
+              </a:spcBef>
+              <a:spcAft>
+                <a:spcPts val="200"/>
               </a:spcAft>
               <a:defRPr sz="2000"/>
             </a:pPr>
@@ -7938,10 +8293,13 @@
           <a:p>
             <a:pPr>
               <a:lnSpc>
-                <a:spcPct val="90000"/>
-              </a:lnSpc>
-              <a:spcAft>
-                <a:spcPts val="300"/>
+                <a:spcPct val="85000"/>
+              </a:lnSpc>
+              <a:spcBef>
+                <a:spcPts val="200"/>
+              </a:spcBef>
+              <a:spcAft>
+                <a:spcPts val="200"/>
               </a:spcAft>
               <a:defRPr sz="2000" b="1"/>
             </a:pPr>
@@ -7964,10 +8322,13 @@
           <a:p>
             <a:pPr>
               <a:lnSpc>
-                <a:spcPct val="90000"/>
-              </a:lnSpc>
-              <a:spcAft>
-                <a:spcPts val="300"/>
+                <a:spcPct val="85000"/>
+              </a:lnSpc>
+              <a:spcBef>
+                <a:spcPts val="200"/>
+              </a:spcBef>
+              <a:spcAft>
+                <a:spcPts val="200"/>
               </a:spcAft>
               <a:defRPr sz="2000"/>
             </a:pPr>
@@ -8008,10 +8369,19 @@
         </p:nvSpPr>
         <p:spPr/>
         <p:txBody>
-          <a:bodyPr wrap="square"/>
+          <a:bodyPr wrap="square" tIns="25400" bIns="25400" lIns="63500" rIns="63500"/>
           <a:lstStyle/>
           <a:p>
             <a:pPr>
+              <a:lnSpc>
+                <a:spcPct val="85000"/>
+              </a:lnSpc>
+              <a:spcBef>
+                <a:spcPts val="200"/>
+              </a:spcBef>
+              <a:spcAft>
+                <a:spcPts val="200"/>
+              </a:spcAft>
               <a:defRPr sz="4000" b="1">
                 <a:solidFill>
                   <a:srgbClr val="667EEA"/>
@@ -8019,6 +8389,7 @@
               </a:defRPr>
             </a:pPr>
             <a:r>
+              <a:rPr/>
               <a:t>📚 Kaynaklar</a:t>
             </a:r>
           </a:p>
@@ -8058,7 +8429,7 @@
           <a:noFill/>
         </p:spPr>
         <p:txBody>
-          <a:bodyPr wrap="square">
+          <a:bodyPr wrap="square" tIns="25400" bIns="25400" lIns="63500" rIns="63500">
             <a:spAutoFit/>
           </a:bodyPr>
           <a:lstStyle/>
@@ -8075,6 +8446,96 @@
           <a:p>
             <a:pPr>
               <a:lnSpc>
+                <a:spcPct val="85000"/>
+              </a:lnSpc>
+              <a:spcBef>
+                <a:spcPts val="200"/>
+              </a:spcBef>
+              <a:spcAft>
+                <a:spcPts val="200"/>
+              </a:spcAft>
+              <a:defRPr sz="2000"/>
+            </a:pPr>
+            <a:r>
+              <a:rPr sz="1300"/>
+              <a:t>🎥 İzlenecek Videolar:</a:t>
+            </a:r>
+          </a:p>
+          <a:p>
+            <a:pPr lvl="1">
+              <a:lnSpc>
+                <a:spcPct val="85000"/>
+              </a:lnSpc>
+              <a:spcBef>
+                <a:spcPts val="200"/>
+              </a:spcBef>
+              <a:spcAft>
+                <a:spcPts val="200"/>
+              </a:spcAft>
+              <a:defRPr sz="1800"/>
+            </a:pPr>
+            <a:r>
+              <a:rPr sz="1300"/>
+              <a:t>    • 'Dijital Vatandaşlık' - MEB</a:t>
+            </a:r>
+          </a:p>
+          <a:p>
+            <a:pPr lvl="1">
+              <a:lnSpc>
+                <a:spcPct val="85000"/>
+              </a:lnSpc>
+              <a:spcBef>
+                <a:spcPts val="200"/>
+              </a:spcBef>
+              <a:spcAft>
+                <a:spcPts val="200"/>
+              </a:spcAft>
+              <a:defRPr sz="1800"/>
+            </a:pPr>
+            <a:r>
+              <a:rPr sz="1300"/>
+              <a:t>    • 'Güçlü Şifre Nasıl Oluşturulur?'</a:t>
+            </a:r>
+          </a:p>
+          <a:p>
+            <a:pPr lvl="1">
+              <a:lnSpc>
+                <a:spcPct val="85000"/>
+              </a:lnSpc>
+              <a:spcBef>
+                <a:spcPts val="200"/>
+              </a:spcBef>
+              <a:spcAft>
+                <a:spcPts val="200"/>
+              </a:spcAft>
+              <a:defRPr sz="1800"/>
+            </a:pPr>
+            <a:r>
+              <a:rPr sz="1300"/>
+              <a:t>    • 'Phishing Saldırıları' - Animasyon</a:t>
+            </a:r>
+          </a:p>
+          <a:p>
+            <a:pPr lvl="1">
+              <a:lnSpc>
+                <a:spcPct val="85000"/>
+              </a:lnSpc>
+              <a:spcBef>
+                <a:spcPts val="200"/>
+              </a:spcBef>
+              <a:spcAft>
+                <a:spcPts val="200"/>
+              </a:spcAft>
+              <a:defRPr sz="1800"/>
+            </a:pPr>
+            <a:r>
+              <a:rPr sz="1300"/>
+              <a:t>    • 'Siber Güvenlik İpuçları'</a:t>
+            </a:r>
+          </a:p>
+          <a:p>
+            <a:pPr>
+              <a:lnSpc>
                 <a:spcPct val="90000"/>
               </a:lnSpc>
               <a:spcAft>
@@ -8082,287 +8543,248 @@
               </a:spcAft>
               <a:defRPr sz="2000"/>
             </a:pPr>
-            <a:r>
-              <a:rPr sz="1300"/>
-              <a:t>🎥 İzlenecek Videolar:</a:t>
-            </a:r>
-          </a:p>
-          <a:p>
-            <a:pPr lvl="1">
+          </a:p>
+          <a:p>
+            <a:pPr>
+              <a:lnSpc>
+                <a:spcPct val="85000"/>
+              </a:lnSpc>
+              <a:spcBef>
+                <a:spcPts val="200"/>
+              </a:spcBef>
+              <a:spcAft>
+                <a:spcPts val="200"/>
+              </a:spcAft>
+              <a:defRPr sz="2000"/>
+            </a:pPr>
+            <a:r>
+              <a:rPr sz="1300"/>
+              <a:t>🌐 Keşfedilecek Siteler:</a:t>
+            </a:r>
+          </a:p>
+          <a:p>
+            <a:pPr lvl="1">
+              <a:lnSpc>
+                <a:spcPct val="85000"/>
+              </a:lnSpc>
+              <a:spcBef>
+                <a:spcPts val="200"/>
+              </a:spcBef>
+              <a:spcAft>
+                <a:spcPts val="200"/>
+              </a:spcAft>
+              <a:defRPr sz="1800"/>
+            </a:pPr>
+            <a:r>
+              <a:rPr sz="1300"/>
+              <a:t>    • https://guvenliweb.org.tr</a:t>
+            </a:r>
+          </a:p>
+          <a:p>
+            <a:pPr lvl="1">
+              <a:lnSpc>
+                <a:spcPct val="85000"/>
+              </a:lnSpc>
+              <a:spcBef>
+                <a:spcPts val="200"/>
+              </a:spcBef>
+              <a:spcAft>
+                <a:spcPts val="200"/>
+              </a:spcAft>
+              <a:defRPr sz="1800"/>
+            </a:pPr>
+            <a:r>
+              <a:rPr sz="1300"/>
+              <a:t>    • https://internetguvenlik.org</a:t>
+            </a:r>
+          </a:p>
+          <a:p>
+            <a:pPr lvl="1">
+              <a:lnSpc>
+                <a:spcPct val="85000"/>
+              </a:lnSpc>
+              <a:spcBef>
+                <a:spcPts val="200"/>
+              </a:spcBef>
+              <a:spcAft>
+                <a:spcPts val="200"/>
+              </a:spcAft>
+              <a:defRPr sz="1800"/>
+            </a:pPr>
+            <a:r>
+              <a:rPr sz="1300"/>
+              <a:t>    • https://guvenliinternet.meb.gov.tr</a:t>
+            </a:r>
+          </a:p>
+          <a:p>
+            <a:pPr>
               <a:lnSpc>
                 <a:spcPct val="90000"/>
               </a:lnSpc>
               <a:spcAft>
                 <a:spcPts val="300"/>
               </a:spcAft>
-              <a:defRPr sz="1800"/>
-            </a:pPr>
-            <a:r>
-              <a:rPr sz="1300"/>
-              <a:t>    • 'Dijital Vatandaşlık' - MEB</a:t>
-            </a:r>
-          </a:p>
-          <a:p>
-            <a:pPr lvl="1">
+              <a:defRPr sz="2000"/>
+            </a:pPr>
+          </a:p>
+          <a:p>
+            <a:pPr>
+              <a:lnSpc>
+                <a:spcPct val="85000"/>
+              </a:lnSpc>
+              <a:spcBef>
+                <a:spcPts val="200"/>
+              </a:spcBef>
+              <a:spcAft>
+                <a:spcPts val="200"/>
+              </a:spcAft>
+              <a:defRPr sz="2000"/>
+            </a:pPr>
+            <a:r>
+              <a:rPr sz="1300"/>
+              <a:t>🎮 Oyunlar:</a:t>
+            </a:r>
+          </a:p>
+          <a:p>
+            <a:pPr lvl="1">
+              <a:lnSpc>
+                <a:spcPct val="85000"/>
+              </a:lnSpc>
+              <a:spcBef>
+                <a:spcPts val="200"/>
+              </a:spcBef>
+              <a:spcAft>
+                <a:spcPts val="200"/>
+              </a:spcAft>
+              <a:defRPr sz="1800"/>
+            </a:pPr>
+            <a:r>
+              <a:rPr sz="1300"/>
+              <a:t>    • 'Siber Güvenlik Kahramanları'</a:t>
+            </a:r>
+          </a:p>
+          <a:p>
+            <a:pPr lvl="1">
+              <a:lnSpc>
+                <a:spcPct val="85000"/>
+              </a:lnSpc>
+              <a:spcBef>
+                <a:spcPts val="200"/>
+              </a:spcBef>
+              <a:spcAft>
+                <a:spcPts val="200"/>
+              </a:spcAft>
+              <a:defRPr sz="1800"/>
+            </a:pPr>
+            <a:r>
+              <a:rPr sz="1300"/>
+              <a:t>    • 'Şifre Gücü Test Oyunu'</a:t>
+            </a:r>
+          </a:p>
+          <a:p>
+            <a:pPr>
               <a:lnSpc>
                 <a:spcPct val="90000"/>
               </a:lnSpc>
               <a:spcAft>
                 <a:spcPts val="300"/>
               </a:spcAft>
-              <a:defRPr sz="1800"/>
-            </a:pPr>
-            <a:r>
-              <a:rPr sz="1300"/>
-              <a:t>    • 'Güçlü Şifre Nasıl Oluşturulur?'</a:t>
-            </a:r>
-          </a:p>
-          <a:p>
-            <a:pPr lvl="1">
+              <a:defRPr sz="2000"/>
+            </a:pPr>
+          </a:p>
+          <a:p>
+            <a:pPr>
+              <a:lnSpc>
+                <a:spcPct val="85000"/>
+              </a:lnSpc>
+              <a:spcBef>
+                <a:spcPts val="200"/>
+              </a:spcBef>
+              <a:spcAft>
+                <a:spcPts val="200"/>
+              </a:spcAft>
+              <a:defRPr sz="2000"/>
+            </a:pPr>
+            <a:r>
+              <a:rPr sz="1300"/>
+              <a:t>📖 Aktiviteler:</a:t>
+            </a:r>
+          </a:p>
+          <a:p>
+            <a:pPr lvl="1">
+              <a:lnSpc>
+                <a:spcPct val="85000"/>
+              </a:lnSpc>
+              <a:spcBef>
+                <a:spcPts val="200"/>
+              </a:spcBef>
+              <a:spcAft>
+                <a:spcPts val="200"/>
+              </a:spcAft>
+              <a:defRPr sz="1800"/>
+            </a:pPr>
+            <a:r>
+              <a:rPr sz="1300"/>
+              <a:t>    • Güçlü şifre yarışması</a:t>
+            </a:r>
+          </a:p>
+          <a:p>
+            <a:pPr lvl="1">
+              <a:lnSpc>
+                <a:spcPct val="85000"/>
+              </a:lnSpc>
+              <a:spcBef>
+                <a:spcPts val="200"/>
+              </a:spcBef>
+              <a:spcAft>
+                <a:spcPts val="200"/>
+              </a:spcAft>
+              <a:defRPr sz="1800"/>
+            </a:pPr>
+            <a:r>
+              <a:rPr sz="1300"/>
+              <a:t>    • Phishing e-postası tanıma</a:t>
+            </a:r>
+          </a:p>
+          <a:p>
+            <a:pPr lvl="1">
+              <a:lnSpc>
+                <a:spcPct val="85000"/>
+              </a:lnSpc>
+              <a:spcBef>
+                <a:spcPts val="200"/>
+              </a:spcBef>
+              <a:spcAft>
+                <a:spcPts val="200"/>
+              </a:spcAft>
+              <a:defRPr sz="1800"/>
+            </a:pPr>
+            <a:r>
+              <a:rPr sz="1300"/>
+              <a:t>    • Dijital vatandaşlık posteri hazırlama</a:t>
+            </a:r>
+          </a:p>
+          <a:p>
+            <a:pPr>
               <a:lnSpc>
                 <a:spcPct val="90000"/>
               </a:lnSpc>
               <a:spcAft>
                 <a:spcPts val="300"/>
               </a:spcAft>
-              <a:defRPr sz="1800"/>
-            </a:pPr>
-            <a:r>
-              <a:rPr sz="1300"/>
-              <a:t>    • 'Phishing Saldırıları' - Animasyon</a:t>
-            </a:r>
-          </a:p>
-          <a:p>
-            <a:pPr lvl="1">
-              <a:lnSpc>
-                <a:spcPct val="90000"/>
-              </a:lnSpc>
-              <a:spcAft>
-                <a:spcPts val="300"/>
-              </a:spcAft>
-              <a:defRPr sz="1800"/>
-            </a:pPr>
-            <a:r>
-              <a:rPr sz="1300"/>
-              <a:t>    • 'Siber Güvenlik İpuçları'</a:t>
-            </a:r>
-          </a:p>
-          <a:p>
-            <a:pPr>
-              <a:lnSpc>
-                <a:spcPct val="90000"/>
-              </a:lnSpc>
-              <a:spcAft>
-                <a:spcPts val="300"/>
-              </a:spcAft>
-              <a:defRPr sz="2000"/>
-            </a:pPr>
-          </a:p>
-          <a:p>
-            <a:pPr>
-              <a:lnSpc>
-                <a:spcPct val="90000"/>
-              </a:lnSpc>
-              <a:spcAft>
-                <a:spcPts val="300"/>
-              </a:spcAft>
-              <a:defRPr sz="2000"/>
-            </a:pPr>
-            <a:r>
-              <a:rPr sz="1300"/>
-              <a:t>🌐 Keşfedilecek Siteler:</a:t>
-            </a:r>
-          </a:p>
-          <a:p>
-            <a:pPr lvl="1">
-              <a:lnSpc>
-                <a:spcPct val="90000"/>
-              </a:lnSpc>
-              <a:spcAft>
-                <a:spcPts val="300"/>
-              </a:spcAft>
-              <a:defRPr sz="1800"/>
-            </a:pPr>
-            <a:r>
-              <a:rPr sz="1300"/>
-              <a:t>    • https://guvenliweb.org.tr</a:t>
-            </a:r>
-          </a:p>
-          <a:p>
-            <a:pPr lvl="1">
-              <a:lnSpc>
-                <a:spcPct val="90000"/>
-              </a:lnSpc>
-              <a:spcAft>
-                <a:spcPts val="300"/>
-              </a:spcAft>
-              <a:defRPr sz="1800"/>
-            </a:pPr>
-            <a:r>
-              <a:rPr sz="1300"/>
-              <a:t>    • https://internetguvenlik.org</a:t>
-            </a:r>
-          </a:p>
-          <a:p>
-            <a:pPr lvl="1">
-              <a:lnSpc>
-                <a:spcPct val="90000"/>
-              </a:lnSpc>
-              <a:spcAft>
-                <a:spcPts val="300"/>
-              </a:spcAft>
-              <a:defRPr sz="1800"/>
-            </a:pPr>
-            <a:r>
-              <a:rPr sz="1300"/>
-              <a:t>    • https://guvenliinternet.meb.gov.tr</a:t>
-            </a:r>
-          </a:p>
-          <a:p>
-            <a:pPr>
-              <a:lnSpc>
-                <a:spcPct val="90000"/>
-              </a:lnSpc>
-              <a:spcAft>
-                <a:spcPts val="300"/>
-              </a:spcAft>
-              <a:defRPr sz="2000"/>
-            </a:pPr>
-          </a:p>
-          <a:p>
-            <a:pPr>
-              <a:lnSpc>
-                <a:spcPct val="90000"/>
-              </a:lnSpc>
-              <a:spcAft>
-                <a:spcPts val="300"/>
-              </a:spcAft>
-              <a:defRPr sz="2000"/>
-            </a:pPr>
-            <a:r>
-              <a:rPr sz="1300"/>
-              <a:t>🎮 Oyunlar:</a:t>
-            </a:r>
-          </a:p>
-          <a:p>
-            <a:pPr lvl="1">
-              <a:lnSpc>
-                <a:spcPct val="90000"/>
-              </a:lnSpc>
-              <a:spcAft>
-                <a:spcPts val="300"/>
-              </a:spcAft>
-              <a:defRPr sz="1800"/>
-            </a:pPr>
-            <a:r>
-              <a:rPr sz="1300"/>
-              <a:t>    • 'Siber Güvenlik Kahramanları'</a:t>
-            </a:r>
-          </a:p>
-          <a:p>
-            <a:pPr lvl="1">
-              <a:lnSpc>
-                <a:spcPct val="90000"/>
-              </a:lnSpc>
-              <a:spcAft>
-                <a:spcPts val="300"/>
-              </a:spcAft>
-              <a:defRPr sz="1800"/>
-            </a:pPr>
-            <a:r>
-              <a:rPr sz="1300"/>
-              <a:t>    • 'Şifre Gücü Test Oyunu'</a:t>
-            </a:r>
-          </a:p>
-          <a:p>
-            <a:pPr>
-              <a:lnSpc>
-                <a:spcPct val="90000"/>
-              </a:lnSpc>
-              <a:spcAft>
-                <a:spcPts val="300"/>
-              </a:spcAft>
-              <a:defRPr sz="2000"/>
-            </a:pPr>
-          </a:p>
-          <a:p>
-            <a:pPr>
-              <a:lnSpc>
-                <a:spcPct val="90000"/>
-              </a:lnSpc>
-              <a:spcAft>
-                <a:spcPts val="300"/>
-              </a:spcAft>
-              <a:defRPr sz="2000"/>
-            </a:pPr>
-            <a:r>
-              <a:rPr sz="1300"/>
-              <a:t>📖 Aktiviteler:</a:t>
-            </a:r>
-          </a:p>
-          <a:p>
-            <a:pPr lvl="1">
-              <a:lnSpc>
-                <a:spcPct val="90000"/>
-              </a:lnSpc>
-              <a:spcAft>
-                <a:spcPts val="300"/>
-              </a:spcAft>
-              <a:defRPr sz="1800"/>
-            </a:pPr>
-            <a:r>
-              <a:rPr sz="1300"/>
-              <a:t>    • Güçlü şifre yarışması</a:t>
-            </a:r>
-          </a:p>
-          <a:p>
-            <a:pPr lvl="1">
-              <a:lnSpc>
-                <a:spcPct val="90000"/>
-              </a:lnSpc>
-              <a:spcAft>
-                <a:spcPts val="300"/>
-              </a:spcAft>
-              <a:defRPr sz="1800"/>
-            </a:pPr>
-            <a:r>
-              <a:rPr sz="1300"/>
-              <a:t>    • Phishing e-postası tanıma</a:t>
-            </a:r>
-          </a:p>
-          <a:p>
-            <a:pPr lvl="1">
-              <a:lnSpc>
-                <a:spcPct val="90000"/>
-              </a:lnSpc>
-              <a:spcAft>
-                <a:spcPts val="300"/>
-              </a:spcAft>
-              <a:defRPr sz="1800"/>
-            </a:pPr>
-            <a:r>
-              <a:rPr sz="1300"/>
-              <a:t>    • Dijital vatandaşlık posteri hazırlama</a:t>
-            </a:r>
-          </a:p>
-          <a:p>
-            <a:pPr>
-              <a:lnSpc>
-                <a:spcPct val="90000"/>
-              </a:lnSpc>
-              <a:spcAft>
-                <a:spcPts val="300"/>
-              </a:spcAft>
-              <a:defRPr sz="2000"/>
-            </a:pPr>
-          </a:p>
-          <a:p>
-            <a:pPr>
-              <a:lnSpc>
-                <a:spcPct val="90000"/>
-              </a:lnSpc>
-              <a:spcAft>
-                <a:spcPts val="300"/>
+              <a:defRPr sz="2000"/>
+            </a:pPr>
+          </a:p>
+          <a:p>
+            <a:pPr>
+              <a:lnSpc>
+                <a:spcPct val="85000"/>
+              </a:lnSpc>
+              <a:spcBef>
+                <a:spcPts val="200"/>
+              </a:spcBef>
+              <a:spcAft>
+                <a:spcPts val="200"/>
               </a:spcAft>
               <a:defRPr sz="2000" b="1"/>
             </a:pPr>
@@ -8416,12 +8838,21 @@
           <a:noFill/>
         </p:spPr>
         <p:txBody>
-          <a:bodyPr wrap="square">
+          <a:bodyPr wrap="square" tIns="25400" bIns="25400" lIns="63500" rIns="63500">
             <a:spAutoFit/>
           </a:bodyPr>
           <a:lstStyle/>
           <a:p>
             <a:pPr algn="ctr">
+              <a:lnSpc>
+                <a:spcPct val="85000"/>
+              </a:lnSpc>
+              <a:spcBef>
+                <a:spcPts val="200"/>
+              </a:spcBef>
+              <a:spcAft>
+                <a:spcPts val="200"/>
+              </a:spcAft>
               <a:defRPr sz="5400" b="1">
                 <a:solidFill>
                   <a:srgbClr val="FFFFFF"/>
@@ -8429,6 +8860,7 @@
               </a:defRPr>
             </a:pPr>
             <a:r>
+              <a:rPr/>
               <a:t>Tebrikler! 🎉</a:t>
             </a:r>
           </a:p>
@@ -8451,12 +8883,21 @@
           <a:noFill/>
         </p:spPr>
         <p:txBody>
-          <a:bodyPr wrap="square">
+          <a:bodyPr wrap="square" tIns="25400" bIns="25400" lIns="63500" rIns="63500">
             <a:spAutoFit/>
           </a:bodyPr>
           <a:lstStyle/>
           <a:p>
             <a:pPr algn="ctr">
+              <a:lnSpc>
+                <a:spcPct val="85000"/>
+              </a:lnSpc>
+              <a:spcBef>
+                <a:spcPts val="200"/>
+              </a:spcBef>
+              <a:spcAft>
+                <a:spcPts val="200"/>
+              </a:spcAft>
               <a:defRPr sz="2800">
                 <a:solidFill>
                   <a:srgbClr val="FFFFFF"/>
@@ -8464,6 +8905,7 @@
               </a:defRPr>
             </a:pPr>
             <a:r>
+              <a:rPr/>
               <a:t>Ünite 4'ü Tamamladınız - Güvenli Dijital Vatandaşsınız!</a:t>
             </a:r>
           </a:p>
@@ -8499,10 +8941,19 @@
         </p:nvSpPr>
         <p:spPr/>
         <p:txBody>
-          <a:bodyPr wrap="square"/>
+          <a:bodyPr wrap="square" tIns="25400" bIns="25400" lIns="63500" rIns="63500"/>
           <a:lstStyle/>
           <a:p>
             <a:pPr>
+              <a:lnSpc>
+                <a:spcPct val="85000"/>
+              </a:lnSpc>
+              <a:spcBef>
+                <a:spcPts val="200"/>
+              </a:spcBef>
+              <a:spcAft>
+                <a:spcPts val="200"/>
+              </a:spcAft>
               <a:defRPr sz="4000" b="1">
                 <a:solidFill>
                   <a:srgbClr val="667EEA"/>
@@ -8510,6 +8961,7 @@
               </a:defRPr>
             </a:pPr>
             <a:r>
+              <a:rPr/>
               <a:t>📚 Ünitenin Konuları</a:t>
             </a:r>
           </a:p>
@@ -8549,7 +9001,7 @@
           <a:noFill/>
         </p:spPr>
         <p:txBody>
-          <a:bodyPr wrap="square">
+          <a:bodyPr wrap="square" tIns="25400" bIns="25400" lIns="63500" rIns="63500">
             <a:spAutoFit/>
           </a:bodyPr>
           <a:lstStyle/>
@@ -8566,10 +9018,13 @@
           <a:p>
             <a:pPr>
               <a:lnSpc>
-                <a:spcPct val="90000"/>
-              </a:lnSpc>
-              <a:spcAft>
-                <a:spcPts val="300"/>
+                <a:spcPct val="85000"/>
+              </a:lnSpc>
+              <a:spcBef>
+                <a:spcPts val="200"/>
+              </a:spcBef>
+              <a:spcAft>
+                <a:spcPts val="200"/>
               </a:spcAft>
               <a:defRPr sz="2000"/>
             </a:pPr>
@@ -8592,10 +9047,13 @@
           <a:p>
             <a:pPr>
               <a:lnSpc>
-                <a:spcPct val="90000"/>
-              </a:lnSpc>
-              <a:spcAft>
-                <a:spcPts val="300"/>
+                <a:spcPct val="85000"/>
+              </a:lnSpc>
+              <a:spcBef>
+                <a:spcPts val="200"/>
+              </a:spcBef>
+              <a:spcAft>
+                <a:spcPts val="200"/>
               </a:spcAft>
               <a:defRPr sz="2000" b="1"/>
             </a:pPr>
@@ -8607,10 +9065,13 @@
           <a:p>
             <a:pPr>
               <a:lnSpc>
-                <a:spcPct val="90000"/>
-              </a:lnSpc>
-              <a:spcAft>
-                <a:spcPts val="300"/>
+                <a:spcPct val="85000"/>
+              </a:lnSpc>
+              <a:spcBef>
+                <a:spcPts val="200"/>
+              </a:spcBef>
+              <a:spcAft>
+                <a:spcPts val="200"/>
               </a:spcAft>
               <a:defRPr sz="2000" b="1"/>
             </a:pPr>
@@ -8622,10 +9083,13 @@
           <a:p>
             <a:pPr>
               <a:lnSpc>
-                <a:spcPct val="90000"/>
-              </a:lnSpc>
-              <a:spcAft>
-                <a:spcPts val="300"/>
+                <a:spcPct val="85000"/>
+              </a:lnSpc>
+              <a:spcBef>
+                <a:spcPts val="200"/>
+              </a:spcBef>
+              <a:spcAft>
+                <a:spcPts val="200"/>
               </a:spcAft>
               <a:defRPr sz="2000" b="1"/>
             </a:pPr>
@@ -8637,10 +9101,13 @@
           <a:p>
             <a:pPr>
               <a:lnSpc>
-                <a:spcPct val="90000"/>
-              </a:lnSpc>
-              <a:spcAft>
-                <a:spcPts val="300"/>
+                <a:spcPct val="85000"/>
+              </a:lnSpc>
+              <a:spcBef>
+                <a:spcPts val="200"/>
+              </a:spcBef>
+              <a:spcAft>
+                <a:spcPts val="200"/>
               </a:spcAft>
               <a:defRPr sz="2000" b="1"/>
             </a:pPr>
@@ -8652,10 +9119,13 @@
           <a:p>
             <a:pPr>
               <a:lnSpc>
-                <a:spcPct val="90000"/>
-              </a:lnSpc>
-              <a:spcAft>
-                <a:spcPts val="300"/>
+                <a:spcPct val="85000"/>
+              </a:lnSpc>
+              <a:spcBef>
+                <a:spcPts val="200"/>
+              </a:spcBef>
+              <a:spcAft>
+                <a:spcPts val="200"/>
               </a:spcAft>
               <a:defRPr sz="2000" b="1"/>
             </a:pPr>
@@ -8667,10 +9137,13 @@
           <a:p>
             <a:pPr>
               <a:lnSpc>
-                <a:spcPct val="90000"/>
-              </a:lnSpc>
-              <a:spcAft>
-                <a:spcPts val="300"/>
+                <a:spcPct val="85000"/>
+              </a:lnSpc>
+              <a:spcBef>
+                <a:spcPts val="200"/>
+              </a:spcBef>
+              <a:spcAft>
+                <a:spcPts val="200"/>
               </a:spcAft>
               <a:defRPr sz="2000" b="1"/>
             </a:pPr>
@@ -8682,10 +9155,13 @@
           <a:p>
             <a:pPr>
               <a:lnSpc>
-                <a:spcPct val="90000"/>
-              </a:lnSpc>
-              <a:spcAft>
-                <a:spcPts val="300"/>
+                <a:spcPct val="85000"/>
+              </a:lnSpc>
+              <a:spcBef>
+                <a:spcPts val="200"/>
+              </a:spcBef>
+              <a:spcAft>
+                <a:spcPts val="200"/>
               </a:spcAft>
               <a:defRPr sz="2000" b="1"/>
             </a:pPr>
@@ -8697,10 +9173,13 @@
           <a:p>
             <a:pPr>
               <a:lnSpc>
-                <a:spcPct val="90000"/>
-              </a:lnSpc>
-              <a:spcAft>
-                <a:spcPts val="300"/>
+                <a:spcPct val="85000"/>
+              </a:lnSpc>
+              <a:spcBef>
+                <a:spcPts val="200"/>
+              </a:spcBef>
+              <a:spcAft>
+                <a:spcPts val="200"/>
               </a:spcAft>
               <a:defRPr sz="2000" b="1"/>
             </a:pPr>
@@ -8712,10 +9191,13 @@
           <a:p>
             <a:pPr>
               <a:lnSpc>
-                <a:spcPct val="90000"/>
-              </a:lnSpc>
-              <a:spcAft>
-                <a:spcPts val="300"/>
+                <a:spcPct val="85000"/>
+              </a:lnSpc>
+              <a:spcBef>
+                <a:spcPts val="200"/>
+              </a:spcBef>
+              <a:spcAft>
+                <a:spcPts val="200"/>
               </a:spcAft>
               <a:defRPr sz="2000" b="1"/>
             </a:pPr>
@@ -8727,10 +9209,13 @@
           <a:p>
             <a:pPr>
               <a:lnSpc>
-                <a:spcPct val="90000"/>
-              </a:lnSpc>
-              <a:spcAft>
-                <a:spcPts val="300"/>
+                <a:spcPct val="85000"/>
+              </a:lnSpc>
+              <a:spcBef>
+                <a:spcPts val="200"/>
+              </a:spcBef>
+              <a:spcAft>
+                <a:spcPts val="200"/>
               </a:spcAft>
               <a:defRPr sz="2000" b="1"/>
             </a:pPr>
@@ -8753,10 +9238,13 @@
           <a:p>
             <a:pPr>
               <a:lnSpc>
-                <a:spcPct val="90000"/>
-              </a:lnSpc>
-              <a:spcAft>
-                <a:spcPts val="300"/>
+                <a:spcPct val="85000"/>
+              </a:lnSpc>
+              <a:spcBef>
+                <a:spcPts val="200"/>
+              </a:spcBef>
+              <a:spcAft>
+                <a:spcPts val="200"/>
               </a:spcAft>
               <a:defRPr sz="2000"/>
             </a:pPr>
@@ -8768,10 +9256,13 @@
           <a:p>
             <a:pPr>
               <a:lnSpc>
-                <a:spcPct val="90000"/>
-              </a:lnSpc>
-              <a:spcAft>
-                <a:spcPts val="300"/>
+                <a:spcPct val="85000"/>
+              </a:lnSpc>
+              <a:spcBef>
+                <a:spcPts val="200"/>
+              </a:spcBef>
+              <a:spcAft>
+                <a:spcPts val="200"/>
               </a:spcAft>
               <a:defRPr sz="2000" b="1"/>
             </a:pPr>
@@ -8812,10 +9303,19 @@
         </p:nvSpPr>
         <p:spPr/>
         <p:txBody>
-          <a:bodyPr wrap="square"/>
+          <a:bodyPr wrap="square" tIns="25400" bIns="25400" lIns="63500" rIns="63500"/>
           <a:lstStyle/>
           <a:p>
             <a:pPr>
+              <a:lnSpc>
+                <a:spcPct val="85000"/>
+              </a:lnSpc>
+              <a:spcBef>
+                <a:spcPts val="200"/>
+              </a:spcBef>
+              <a:spcAft>
+                <a:spcPts val="200"/>
+              </a:spcAft>
               <a:defRPr sz="4000" b="1">
                 <a:solidFill>
                   <a:srgbClr val="667EEA"/>
@@ -8823,6 +9323,7 @@
               </a:defRPr>
             </a:pPr>
             <a:r>
+              <a:rPr/>
               <a:t>⚖️ Dijital Etik Nedir?</a:t>
             </a:r>
           </a:p>
@@ -8862,7 +9363,7 @@
           <a:noFill/>
         </p:spPr>
         <p:txBody>
-          <a:bodyPr wrap="square">
+          <a:bodyPr wrap="square" tIns="25400" bIns="25400" lIns="63500" rIns="63500">
             <a:spAutoFit/>
           </a:bodyPr>
           <a:lstStyle/>
@@ -8879,6 +9380,42 @@
           <a:p>
             <a:pPr>
               <a:lnSpc>
+                <a:spcPct val="85000"/>
+              </a:lnSpc>
+              <a:spcBef>
+                <a:spcPts val="200"/>
+              </a:spcBef>
+              <a:spcAft>
+                <a:spcPts val="200"/>
+              </a:spcAft>
+              <a:defRPr sz="2000"/>
+            </a:pPr>
+            <a:r>
+              <a:rPr sz="1300"/>
+              <a:t>Etik = Doğru ve yanlış davranışlar</a:t>
+            </a:r>
+          </a:p>
+          <a:p>
+            <a:pPr>
+              <a:lnSpc>
+                <a:spcPct val="85000"/>
+              </a:lnSpc>
+              <a:spcBef>
+                <a:spcPts val="200"/>
+              </a:spcBef>
+              <a:spcAft>
+                <a:spcPts val="200"/>
+              </a:spcAft>
+              <a:defRPr sz="2000"/>
+            </a:pPr>
+            <a:r>
+              <a:rPr sz="1300"/>
+              <a:t>Dijital Etik = Dijital dünyada doğru davranışlar</a:t>
+            </a:r>
+          </a:p>
+          <a:p>
+            <a:pPr>
+              <a:lnSpc>
                 <a:spcPct val="90000"/>
               </a:lnSpc>
               <a:spcAft>
@@ -8886,9 +9423,23 @@
               </a:spcAft>
               <a:defRPr sz="2000"/>
             </a:pPr>
-            <a:r>
-              <a:rPr sz="1300"/>
-              <a:t>Etik = Doğru ve yanlış davranışlar</a:t>
+          </a:p>
+          <a:p>
+            <a:pPr>
+              <a:lnSpc>
+                <a:spcPct val="85000"/>
+              </a:lnSpc>
+              <a:spcBef>
+                <a:spcPts val="200"/>
+              </a:spcBef>
+              <a:spcAft>
+                <a:spcPts val="200"/>
+              </a:spcAft>
+              <a:defRPr sz="2000" b="1"/>
+            </a:pPr>
+            <a:r>
+              <a:rPr sz="1300"/>
+              <a:t>✅ Dijital Etik Kuralları:</a:t>
             </a:r>
           </a:p>
           <a:p>
@@ -8901,9 +9452,77 @@
               </a:spcAft>
               <a:defRPr sz="2000"/>
             </a:pPr>
-            <a:r>
-              <a:rPr sz="1300"/>
-              <a:t>Dijital Etik = Dijital dünyada doğru davranışlar</a:t>
+          </a:p>
+          <a:p>
+            <a:pPr>
+              <a:lnSpc>
+                <a:spcPct val="85000"/>
+              </a:lnSpc>
+              <a:spcBef>
+                <a:spcPts val="200"/>
+              </a:spcBef>
+              <a:spcAft>
+                <a:spcPts val="200"/>
+              </a:spcAft>
+              <a:defRPr sz="2000"/>
+            </a:pPr>
+            <a:r>
+              <a:rPr sz="1300"/>
+              <a:t>🤝 Saygı:</a:t>
+            </a:r>
+          </a:p>
+          <a:p>
+            <a:pPr lvl="1">
+              <a:lnSpc>
+                <a:spcPct val="85000"/>
+              </a:lnSpc>
+              <a:spcBef>
+                <a:spcPts val="200"/>
+              </a:spcBef>
+              <a:spcAft>
+                <a:spcPts val="200"/>
+              </a:spcAft>
+              <a:defRPr sz="1800"/>
+            </a:pPr>
+            <a:r>
+              <a:rPr sz="1300"/>
+              <a:t>    • Başkalarına saygılı ol</a:t>
+            </a:r>
+          </a:p>
+          <a:p>
+            <a:pPr lvl="1">
+              <a:lnSpc>
+                <a:spcPct val="85000"/>
+              </a:lnSpc>
+              <a:spcBef>
+                <a:spcPts val="200"/>
+              </a:spcBef>
+              <a:spcAft>
+                <a:spcPts val="200"/>
+              </a:spcAft>
+              <a:defRPr sz="1800"/>
+            </a:pPr>
+            <a:r>
+              <a:rPr sz="1300"/>
+              <a:t>    • Kötü yorum yapma</a:t>
+            </a:r>
+          </a:p>
+          <a:p>
+            <a:pPr lvl="1">
+              <a:lnSpc>
+                <a:spcPct val="85000"/>
+              </a:lnSpc>
+              <a:spcBef>
+                <a:spcPts val="200"/>
+              </a:spcBef>
+              <a:spcAft>
+                <a:spcPts val="200"/>
+              </a:spcAft>
+              <a:defRPr sz="1800"/>
+            </a:pPr>
+            <a:r>
+              <a:rPr sz="1300"/>
+              <a:t>    • Nefret söylemi kullanma</a:t>
             </a:r>
           </a:p>
           <a:p>
@@ -8920,16 +9539,138 @@
           <a:p>
             <a:pPr>
               <a:lnSpc>
+                <a:spcPct val="85000"/>
+              </a:lnSpc>
+              <a:spcBef>
+                <a:spcPts val="200"/>
+              </a:spcBef>
+              <a:spcAft>
+                <a:spcPts val="200"/>
+              </a:spcAft>
+              <a:defRPr sz="2000"/>
+            </a:pPr>
+            <a:r>
+              <a:rPr sz="1300"/>
+              <a:t>📝 Dürüstlük:</a:t>
+            </a:r>
+          </a:p>
+          <a:p>
+            <a:pPr lvl="1">
+              <a:lnSpc>
+                <a:spcPct val="85000"/>
+              </a:lnSpc>
+              <a:spcBef>
+                <a:spcPts val="200"/>
+              </a:spcBef>
+              <a:spcAft>
+                <a:spcPts val="200"/>
+              </a:spcAft>
+              <a:defRPr sz="1800"/>
+            </a:pPr>
+            <a:r>
+              <a:rPr sz="1300"/>
+              <a:t>    • Yalan bilgi paylaşma</a:t>
+            </a:r>
+          </a:p>
+          <a:p>
+            <a:pPr lvl="1">
+              <a:lnSpc>
+                <a:spcPct val="85000"/>
+              </a:lnSpc>
+              <a:spcBef>
+                <a:spcPts val="200"/>
+              </a:spcBef>
+              <a:spcAft>
+                <a:spcPts val="200"/>
+              </a:spcAft>
+              <a:defRPr sz="1800"/>
+            </a:pPr>
+            <a:r>
+              <a:rPr sz="1300"/>
+              <a:t>    • Başkasının eserini çalma</a:t>
+            </a:r>
+          </a:p>
+          <a:p>
+            <a:pPr lvl="1">
+              <a:lnSpc>
+                <a:spcPct val="85000"/>
+              </a:lnSpc>
+              <a:spcBef>
+                <a:spcPts val="200"/>
+              </a:spcBef>
+              <a:spcAft>
+                <a:spcPts val="200"/>
+              </a:spcAft>
+              <a:defRPr sz="1800"/>
+            </a:pPr>
+            <a:r>
+              <a:rPr sz="1300"/>
+              <a:t>    • Kaynak göster</a:t>
+            </a:r>
+          </a:p>
+          <a:p>
+            <a:pPr>
+              <a:lnSpc>
                 <a:spcPct val="90000"/>
               </a:lnSpc>
               <a:spcAft>
                 <a:spcPts val="300"/>
               </a:spcAft>
-              <a:defRPr sz="2000" b="1"/>
-            </a:pPr>
-            <a:r>
-              <a:rPr sz="1300"/>
-              <a:t>✅ Dijital Etik Kuralları:</a:t>
+              <a:defRPr sz="2000"/>
+            </a:pPr>
+          </a:p>
+          <a:p>
+            <a:pPr>
+              <a:lnSpc>
+                <a:spcPct val="85000"/>
+              </a:lnSpc>
+              <a:spcBef>
+                <a:spcPts val="200"/>
+              </a:spcBef>
+              <a:spcAft>
+                <a:spcPts val="200"/>
+              </a:spcAft>
+              <a:defRPr sz="2000"/>
+            </a:pPr>
+            <a:r>
+              <a:rPr sz="1300"/>
+              <a:t>🔒 Gizlilik:</a:t>
+            </a:r>
+          </a:p>
+          <a:p>
+            <a:pPr lvl="1">
+              <a:lnSpc>
+                <a:spcPct val="85000"/>
+              </a:lnSpc>
+              <a:spcBef>
+                <a:spcPts val="200"/>
+              </a:spcBef>
+              <a:spcAft>
+                <a:spcPts val="200"/>
+              </a:spcAft>
+              <a:defRPr sz="1800"/>
+            </a:pPr>
+            <a:r>
+              <a:rPr sz="1300"/>
+              <a:t>    • Başkasının özel bilgilerini paylaşma</a:t>
+            </a:r>
+          </a:p>
+          <a:p>
+            <a:pPr lvl="1">
+              <a:lnSpc>
+                <a:spcPct val="85000"/>
+              </a:lnSpc>
+              <a:spcBef>
+                <a:spcPts val="200"/>
+              </a:spcBef>
+              <a:spcAft>
+                <a:spcPts val="200"/>
+              </a:spcAft>
+              <a:defRPr sz="1800"/>
+            </a:pPr>
+            <a:r>
+              <a:rPr sz="1300"/>
+              <a:t>    • İzinsiz fotoğraf yayınlama</a:t>
             </a:r>
           </a:p>
           <a:p>
@@ -8946,6 +9687,60 @@
           <a:p>
             <a:pPr>
               <a:lnSpc>
+                <a:spcPct val="85000"/>
+              </a:lnSpc>
+              <a:spcBef>
+                <a:spcPts val="200"/>
+              </a:spcBef>
+              <a:spcAft>
+                <a:spcPts val="200"/>
+              </a:spcAft>
+              <a:defRPr sz="2000"/>
+            </a:pPr>
+            <a:r>
+              <a:rPr sz="1300"/>
+              <a:t>⚖️ Sorumluluk:</a:t>
+            </a:r>
+          </a:p>
+          <a:p>
+            <a:pPr lvl="1">
+              <a:lnSpc>
+                <a:spcPct val="85000"/>
+              </a:lnSpc>
+              <a:spcBef>
+                <a:spcPts val="200"/>
+              </a:spcBef>
+              <a:spcAft>
+                <a:spcPts val="200"/>
+              </a:spcAft>
+              <a:defRPr sz="1800"/>
+            </a:pPr>
+            <a:r>
+              <a:rPr sz="1300"/>
+              <a:t>    • Paylaştıklarından sorumlusun</a:t>
+            </a:r>
+          </a:p>
+          <a:p>
+            <a:pPr lvl="1">
+              <a:lnSpc>
+                <a:spcPct val="85000"/>
+              </a:lnSpc>
+              <a:spcBef>
+                <a:spcPts val="200"/>
+              </a:spcBef>
+              <a:spcAft>
+                <a:spcPts val="200"/>
+              </a:spcAft>
+              <a:defRPr sz="1800"/>
+            </a:pPr>
+            <a:r>
+              <a:rPr sz="1300"/>
+              <a:t>    • 'İnternet'te dedim' mazeret değil!</a:t>
+            </a:r>
+          </a:p>
+          <a:p>
+            <a:pPr>
+              <a:lnSpc>
                 <a:spcPct val="90000"/>
               </a:lnSpc>
               <a:spcAft>
@@ -8953,257 +9748,17 @@
               </a:spcAft>
               <a:defRPr sz="2000"/>
             </a:pPr>
-            <a:r>
-              <a:rPr sz="1300"/>
-              <a:t>🤝 Saygı:</a:t>
-            </a:r>
-          </a:p>
-          <a:p>
-            <a:pPr lvl="1">
-              <a:lnSpc>
-                <a:spcPct val="90000"/>
-              </a:lnSpc>
-              <a:spcAft>
-                <a:spcPts val="300"/>
-              </a:spcAft>
-              <a:defRPr sz="1800"/>
-            </a:pPr>
-            <a:r>
-              <a:rPr sz="1300"/>
-              <a:t>    • Başkalarına saygılı ol</a:t>
-            </a:r>
-          </a:p>
-          <a:p>
-            <a:pPr lvl="1">
-              <a:lnSpc>
-                <a:spcPct val="90000"/>
-              </a:lnSpc>
-              <a:spcAft>
-                <a:spcPts val="300"/>
-              </a:spcAft>
-              <a:defRPr sz="1800"/>
-            </a:pPr>
-            <a:r>
-              <a:rPr sz="1300"/>
-              <a:t>    • Kötü yorum yapma</a:t>
-            </a:r>
-          </a:p>
-          <a:p>
-            <a:pPr lvl="1">
-              <a:lnSpc>
-                <a:spcPct val="90000"/>
-              </a:lnSpc>
-              <a:spcAft>
-                <a:spcPts val="300"/>
-              </a:spcAft>
-              <a:defRPr sz="1800"/>
-            </a:pPr>
-            <a:r>
-              <a:rPr sz="1300"/>
-              <a:t>    • Nefret söylemi kullanma</a:t>
-            </a:r>
-          </a:p>
-          <a:p>
-            <a:pPr>
-              <a:lnSpc>
-                <a:spcPct val="90000"/>
-              </a:lnSpc>
-              <a:spcAft>
-                <a:spcPts val="300"/>
-              </a:spcAft>
-              <a:defRPr sz="2000"/>
-            </a:pPr>
-          </a:p>
-          <a:p>
-            <a:pPr>
-              <a:lnSpc>
-                <a:spcPct val="90000"/>
-              </a:lnSpc>
-              <a:spcAft>
-                <a:spcPts val="300"/>
-              </a:spcAft>
-              <a:defRPr sz="2000"/>
-            </a:pPr>
-            <a:r>
-              <a:rPr sz="1300"/>
-              <a:t>📝 Dürüstlük:</a:t>
-            </a:r>
-          </a:p>
-          <a:p>
-            <a:pPr lvl="1">
-              <a:lnSpc>
-                <a:spcPct val="90000"/>
-              </a:lnSpc>
-              <a:spcAft>
-                <a:spcPts val="300"/>
-              </a:spcAft>
-              <a:defRPr sz="1800"/>
-            </a:pPr>
-            <a:r>
-              <a:rPr sz="1300"/>
-              <a:t>    • Yalan bilgi paylaşma</a:t>
-            </a:r>
-          </a:p>
-          <a:p>
-            <a:pPr lvl="1">
-              <a:lnSpc>
-                <a:spcPct val="90000"/>
-              </a:lnSpc>
-              <a:spcAft>
-                <a:spcPts val="300"/>
-              </a:spcAft>
-              <a:defRPr sz="1800"/>
-            </a:pPr>
-            <a:r>
-              <a:rPr sz="1300"/>
-              <a:t>    • Başkasının eserini çalma</a:t>
-            </a:r>
-          </a:p>
-          <a:p>
-            <a:pPr lvl="1">
-              <a:lnSpc>
-                <a:spcPct val="90000"/>
-              </a:lnSpc>
-              <a:spcAft>
-                <a:spcPts val="300"/>
-              </a:spcAft>
-              <a:defRPr sz="1800"/>
-            </a:pPr>
-            <a:r>
-              <a:rPr sz="1300"/>
-              <a:t>    • Kaynak göster</a:t>
-            </a:r>
-          </a:p>
-          <a:p>
-            <a:pPr>
-              <a:lnSpc>
-                <a:spcPct val="90000"/>
-              </a:lnSpc>
-              <a:spcAft>
-                <a:spcPts val="300"/>
-              </a:spcAft>
-              <a:defRPr sz="2000"/>
-            </a:pPr>
-          </a:p>
-          <a:p>
-            <a:pPr>
-              <a:lnSpc>
-                <a:spcPct val="90000"/>
-              </a:lnSpc>
-              <a:spcAft>
-                <a:spcPts val="300"/>
-              </a:spcAft>
-              <a:defRPr sz="2000"/>
-            </a:pPr>
-            <a:r>
-              <a:rPr sz="1300"/>
-              <a:t>🔒 Gizlilik:</a:t>
-            </a:r>
-          </a:p>
-          <a:p>
-            <a:pPr lvl="1">
-              <a:lnSpc>
-                <a:spcPct val="90000"/>
-              </a:lnSpc>
-              <a:spcAft>
-                <a:spcPts val="300"/>
-              </a:spcAft>
-              <a:defRPr sz="1800"/>
-            </a:pPr>
-            <a:r>
-              <a:rPr sz="1300"/>
-              <a:t>    • Başkasının özel bilgilerini paylaşma</a:t>
-            </a:r>
-          </a:p>
-          <a:p>
-            <a:pPr lvl="1">
-              <a:lnSpc>
-                <a:spcPct val="90000"/>
-              </a:lnSpc>
-              <a:spcAft>
-                <a:spcPts val="300"/>
-              </a:spcAft>
-              <a:defRPr sz="1800"/>
-            </a:pPr>
-            <a:r>
-              <a:rPr sz="1300"/>
-              <a:t>    • İzinsiz fotoğraf yayınlama</a:t>
-            </a:r>
-          </a:p>
-          <a:p>
-            <a:pPr>
-              <a:lnSpc>
-                <a:spcPct val="90000"/>
-              </a:lnSpc>
-              <a:spcAft>
-                <a:spcPts val="300"/>
-              </a:spcAft>
-              <a:defRPr sz="2000"/>
-            </a:pPr>
-          </a:p>
-          <a:p>
-            <a:pPr>
-              <a:lnSpc>
-                <a:spcPct val="90000"/>
-              </a:lnSpc>
-              <a:spcAft>
-                <a:spcPts val="300"/>
-              </a:spcAft>
-              <a:defRPr sz="2000"/>
-            </a:pPr>
-            <a:r>
-              <a:rPr sz="1300"/>
-              <a:t>⚖️ Sorumluluk:</a:t>
-            </a:r>
-          </a:p>
-          <a:p>
-            <a:pPr lvl="1">
-              <a:lnSpc>
-                <a:spcPct val="90000"/>
-              </a:lnSpc>
-              <a:spcAft>
-                <a:spcPts val="300"/>
-              </a:spcAft>
-              <a:defRPr sz="1800"/>
-            </a:pPr>
-            <a:r>
-              <a:rPr sz="1300"/>
-              <a:t>    • Paylaştıklarından sorumlusun</a:t>
-            </a:r>
-          </a:p>
-          <a:p>
-            <a:pPr lvl="1">
-              <a:lnSpc>
-                <a:spcPct val="90000"/>
-              </a:lnSpc>
-              <a:spcAft>
-                <a:spcPts val="300"/>
-              </a:spcAft>
-              <a:defRPr sz="1800"/>
-            </a:pPr>
-            <a:r>
-              <a:rPr sz="1300"/>
-              <a:t>    • 'İnternet'te dedim' mazeret değil!</a:t>
-            </a:r>
-          </a:p>
-          <a:p>
-            <a:pPr>
-              <a:lnSpc>
-                <a:spcPct val="90000"/>
-              </a:lnSpc>
-              <a:spcAft>
-                <a:spcPts val="300"/>
-              </a:spcAft>
-              <a:defRPr sz="2000"/>
-            </a:pPr>
-          </a:p>
-          <a:p>
-            <a:pPr>
-              <a:lnSpc>
-                <a:spcPct val="90000"/>
-              </a:lnSpc>
-              <a:spcAft>
-                <a:spcPts val="300"/>
+          </a:p>
+          <a:p>
+            <a:pPr>
+              <a:lnSpc>
+                <a:spcPct val="85000"/>
+              </a:lnSpc>
+              <a:spcBef>
+                <a:spcPts val="200"/>
+              </a:spcBef>
+              <a:spcAft>
+                <a:spcPts val="200"/>
               </a:spcAft>
               <a:defRPr sz="2000" b="1"/>
             </a:pPr>
@@ -9244,10 +9799,19 @@
         </p:nvSpPr>
         <p:spPr/>
         <p:txBody>
-          <a:bodyPr wrap="square"/>
+          <a:bodyPr wrap="square" tIns="25400" bIns="25400" lIns="63500" rIns="63500"/>
           <a:lstStyle/>
           <a:p>
             <a:pPr>
+              <a:lnSpc>
+                <a:spcPct val="85000"/>
+              </a:lnSpc>
+              <a:spcBef>
+                <a:spcPts val="200"/>
+              </a:spcBef>
+              <a:spcAft>
+                <a:spcPts val="200"/>
+              </a:spcAft>
               <a:defRPr sz="4000" b="1">
                 <a:solidFill>
                   <a:srgbClr val="667EEA"/>
@@ -9255,6 +9819,7 @@
               </a:defRPr>
             </a:pPr>
             <a:r>
+              <a:rPr/>
               <a:t>👣 Dijital Ayak İzi</a:t>
             </a:r>
           </a:p>
@@ -9294,7 +9859,7 @@
           <a:noFill/>
         </p:spPr>
         <p:txBody>
-          <a:bodyPr wrap="square">
+          <a:bodyPr wrap="square" tIns="25400" bIns="25400" lIns="63500" rIns="63500">
             <a:spAutoFit/>
           </a:bodyPr>
           <a:lstStyle/>
@@ -9311,6 +9876,24 @@
           <a:p>
             <a:pPr>
               <a:lnSpc>
+                <a:spcPct val="85000"/>
+              </a:lnSpc>
+              <a:spcBef>
+                <a:spcPts val="200"/>
+              </a:spcBef>
+              <a:spcAft>
+                <a:spcPts val="200"/>
+              </a:spcAft>
+              <a:defRPr sz="2000"/>
+            </a:pPr>
+            <a:r>
+              <a:rPr sz="1300"/>
+              <a:t>Dijital ayak izi = İnternet'te bıraktığın izler</a:t>
+            </a:r>
+          </a:p>
+          <a:p>
+            <a:pPr>
+              <a:lnSpc>
                 <a:spcPct val="90000"/>
               </a:lnSpc>
               <a:spcAft>
@@ -9318,9 +9901,113 @@
               </a:spcAft>
               <a:defRPr sz="2000"/>
             </a:pPr>
-            <a:r>
-              <a:rPr sz="1300"/>
-              <a:t>Dijital ayak izi = İnternet'te bıraktığın izler</a:t>
+          </a:p>
+          <a:p>
+            <a:pPr>
+              <a:lnSpc>
+                <a:spcPct val="85000"/>
+              </a:lnSpc>
+              <a:spcBef>
+                <a:spcPts val="200"/>
+              </a:spcBef>
+              <a:spcAft>
+                <a:spcPts val="200"/>
+              </a:spcAft>
+              <a:defRPr sz="2000" b="1"/>
+            </a:pPr>
+            <a:r>
+              <a:rPr sz="1300"/>
+              <a:t>✅ Dijital Ayak İzi Örnekleri:</a:t>
+            </a:r>
+          </a:p>
+          <a:p>
+            <a:pPr lvl="1">
+              <a:lnSpc>
+                <a:spcPct val="85000"/>
+              </a:lnSpc>
+              <a:spcBef>
+                <a:spcPts val="200"/>
+              </a:spcBef>
+              <a:spcAft>
+                <a:spcPts val="200"/>
+              </a:spcAft>
+              <a:defRPr sz="1800"/>
+            </a:pPr>
+            <a:r>
+              <a:rPr sz="1300"/>
+              <a:t>    • Sosyal medya paylaşımları</a:t>
+            </a:r>
+          </a:p>
+          <a:p>
+            <a:pPr lvl="1">
+              <a:lnSpc>
+                <a:spcPct val="85000"/>
+              </a:lnSpc>
+              <a:spcBef>
+                <a:spcPts val="200"/>
+              </a:spcBef>
+              <a:spcAft>
+                <a:spcPts val="200"/>
+              </a:spcAft>
+              <a:defRPr sz="1800"/>
+            </a:pPr>
+            <a:r>
+              <a:rPr sz="1300"/>
+              <a:t>    • Yorum yaptığın siteler</a:t>
+            </a:r>
+          </a:p>
+          <a:p>
+            <a:pPr lvl="1">
+              <a:lnSpc>
+                <a:spcPct val="85000"/>
+              </a:lnSpc>
+              <a:spcBef>
+                <a:spcPts val="200"/>
+              </a:spcBef>
+              <a:spcAft>
+                <a:spcPts val="200"/>
+              </a:spcAft>
+              <a:defRPr sz="1800"/>
+            </a:pPr>
+            <a:r>
+              <a:rPr sz="1300"/>
+              <a:t>    • Beğendiğin videolar</a:t>
+            </a:r>
+          </a:p>
+          <a:p>
+            <a:pPr lvl="1">
+              <a:lnSpc>
+                <a:spcPct val="85000"/>
+              </a:lnSpc>
+              <a:spcBef>
+                <a:spcPts val="200"/>
+              </a:spcBef>
+              <a:spcAft>
+                <a:spcPts val="200"/>
+              </a:spcAft>
+              <a:defRPr sz="1800"/>
+            </a:pPr>
+            <a:r>
+              <a:rPr sz="1300"/>
+              <a:t>    • Arama geçmişin</a:t>
+            </a:r>
+          </a:p>
+          <a:p>
+            <a:pPr lvl="1">
+              <a:lnSpc>
+                <a:spcPct val="85000"/>
+              </a:lnSpc>
+              <a:spcBef>
+                <a:spcPts val="200"/>
+              </a:spcBef>
+              <a:spcAft>
+                <a:spcPts val="200"/>
+              </a:spcAft>
+              <a:defRPr sz="1800"/>
+            </a:pPr>
+            <a:r>
+              <a:rPr sz="1300"/>
+              <a:t>    • Online oyunlardaki mesajların</a:t>
             </a:r>
           </a:p>
           <a:p>
@@ -9337,290 +10024,219 @@
           <a:p>
             <a:pPr>
               <a:lnSpc>
+                <a:spcPct val="85000"/>
+              </a:lnSpc>
+              <a:spcBef>
+                <a:spcPts val="200"/>
+              </a:spcBef>
+              <a:spcAft>
+                <a:spcPts val="200"/>
+              </a:spcAft>
+              <a:defRPr sz="2000" b="1"/>
+            </a:pPr>
+            <a:r>
+              <a:rPr sz="1300"/>
+              <a:t>📌 İki Tür Dijital Ayak İzi:</a:t>
+            </a:r>
+          </a:p>
+          <a:p>
+            <a:pPr>
+              <a:lnSpc>
                 <a:spcPct val="90000"/>
               </a:lnSpc>
               <a:spcAft>
                 <a:spcPts val="300"/>
               </a:spcAft>
-              <a:defRPr sz="2000" b="1"/>
-            </a:pPr>
-            <a:r>
-              <a:rPr sz="1300"/>
-              <a:t>✅ Dijital Ayak İzi Örnekleri:</a:t>
-            </a:r>
-          </a:p>
-          <a:p>
-            <a:pPr lvl="1">
+              <a:defRPr sz="2000"/>
+            </a:pPr>
+          </a:p>
+          <a:p>
+            <a:pPr>
+              <a:lnSpc>
+                <a:spcPct val="85000"/>
+              </a:lnSpc>
+              <a:spcBef>
+                <a:spcPts val="200"/>
+              </a:spcBef>
+              <a:spcAft>
+                <a:spcPts val="200"/>
+              </a:spcAft>
+              <a:defRPr sz="2000"/>
+            </a:pPr>
+            <a:r>
+              <a:rPr sz="1300"/>
+              <a:t>1️⃣ Aktif (Bilinçli):</a:t>
+            </a:r>
+          </a:p>
+          <a:p>
+            <a:pPr lvl="1">
+              <a:lnSpc>
+                <a:spcPct val="85000"/>
+              </a:lnSpc>
+              <a:spcBef>
+                <a:spcPts val="200"/>
+              </a:spcBef>
+              <a:spcAft>
+                <a:spcPts val="200"/>
+              </a:spcAft>
+              <a:defRPr sz="1800"/>
+            </a:pPr>
+            <a:r>
+              <a:rPr sz="1300"/>
+              <a:t>    • Sen paylaşıyorsun (fotoğraf, yorum)</a:t>
+            </a:r>
+          </a:p>
+          <a:p>
+            <a:pPr>
               <a:lnSpc>
                 <a:spcPct val="90000"/>
               </a:lnSpc>
               <a:spcAft>
                 <a:spcPts val="300"/>
               </a:spcAft>
-              <a:defRPr sz="1800"/>
-            </a:pPr>
-            <a:r>
-              <a:rPr sz="1300"/>
-              <a:t>    • Sosyal medya paylaşımları</a:t>
-            </a:r>
-          </a:p>
-          <a:p>
-            <a:pPr lvl="1">
+              <a:defRPr sz="2000"/>
+            </a:pPr>
+          </a:p>
+          <a:p>
+            <a:pPr>
+              <a:lnSpc>
+                <a:spcPct val="85000"/>
+              </a:lnSpc>
+              <a:spcBef>
+                <a:spcPts val="200"/>
+              </a:spcBef>
+              <a:spcAft>
+                <a:spcPts val="200"/>
+              </a:spcAft>
+              <a:defRPr sz="2000"/>
+            </a:pPr>
+            <a:r>
+              <a:rPr sz="1300"/>
+              <a:t>2️⃣ Pasif (Otomatik):</a:t>
+            </a:r>
+          </a:p>
+          <a:p>
+            <a:pPr lvl="1">
+              <a:lnSpc>
+                <a:spcPct val="85000"/>
+              </a:lnSpc>
+              <a:spcBef>
+                <a:spcPts val="200"/>
+              </a:spcBef>
+              <a:spcAft>
+                <a:spcPts val="200"/>
+              </a:spcAft>
+              <a:defRPr sz="1800"/>
+            </a:pPr>
+            <a:r>
+              <a:rPr sz="1300"/>
+              <a:t>    • Web siteleri kaydediyor (çerezler, IP)</a:t>
+            </a:r>
+          </a:p>
+          <a:p>
+            <a:pPr>
               <a:lnSpc>
                 <a:spcPct val="90000"/>
               </a:lnSpc>
               <a:spcAft>
                 <a:spcPts val="300"/>
               </a:spcAft>
-              <a:defRPr sz="1800"/>
-            </a:pPr>
-            <a:r>
-              <a:rPr sz="1300"/>
-              <a:t>    • Yorum yaptığın siteler</a:t>
-            </a:r>
-          </a:p>
-          <a:p>
-            <a:pPr lvl="1">
+              <a:defRPr sz="2000"/>
+            </a:pPr>
+          </a:p>
+          <a:p>
+            <a:pPr>
+              <a:lnSpc>
+                <a:spcPct val="85000"/>
+              </a:lnSpc>
+              <a:spcBef>
+                <a:spcPts val="200"/>
+              </a:spcBef>
+              <a:spcAft>
+                <a:spcPts val="200"/>
+              </a:spcAft>
+              <a:defRPr sz="2000"/>
+            </a:pPr>
+            <a:r>
+              <a:rPr sz="1300"/>
+              <a:t>⚠️ Tehlikeler:</a:t>
+            </a:r>
+          </a:p>
+          <a:p>
+            <a:pPr lvl="1">
+              <a:lnSpc>
+                <a:spcPct val="85000"/>
+              </a:lnSpc>
+              <a:spcBef>
+                <a:spcPts val="200"/>
+              </a:spcBef>
+              <a:spcAft>
+                <a:spcPts val="200"/>
+              </a:spcAft>
+              <a:defRPr sz="1800"/>
+            </a:pPr>
+            <a:r>
+              <a:rPr sz="1300"/>
+              <a:t>    • Dijital ayak izin silinmez!</a:t>
+            </a:r>
+          </a:p>
+          <a:p>
+            <a:pPr lvl="1">
+              <a:lnSpc>
+                <a:spcPct val="85000"/>
+              </a:lnSpc>
+              <a:spcBef>
+                <a:spcPts val="200"/>
+              </a:spcBef>
+              <a:spcAft>
+                <a:spcPts val="200"/>
+              </a:spcAft>
+              <a:defRPr sz="1800"/>
+            </a:pPr>
+            <a:r>
+              <a:rPr sz="1300"/>
+              <a:t>    • Gelecekte sana zarar verebilir</a:t>
+            </a:r>
+          </a:p>
+          <a:p>
+            <a:pPr lvl="1">
+              <a:lnSpc>
+                <a:spcPct val="85000"/>
+              </a:lnSpc>
+              <a:spcBef>
+                <a:spcPts val="200"/>
+              </a:spcBef>
+              <a:spcAft>
+                <a:spcPts val="200"/>
+              </a:spcAft>
+              <a:defRPr sz="1800"/>
+            </a:pPr>
+            <a:r>
+              <a:rPr sz="1300"/>
+              <a:t>    • Üniversite, iş başvurusu yapınca bakabilirler</a:t>
+            </a:r>
+          </a:p>
+          <a:p>
+            <a:pPr>
               <a:lnSpc>
                 <a:spcPct val="90000"/>
               </a:lnSpc>
               <a:spcAft>
                 <a:spcPts val="300"/>
               </a:spcAft>
-              <a:defRPr sz="1800"/>
-            </a:pPr>
-            <a:r>
-              <a:rPr sz="1300"/>
-              <a:t>    • Beğendiğin videolar</a:t>
-            </a:r>
-          </a:p>
-          <a:p>
-            <a:pPr lvl="1">
-              <a:lnSpc>
-                <a:spcPct val="90000"/>
-              </a:lnSpc>
-              <a:spcAft>
-                <a:spcPts val="300"/>
-              </a:spcAft>
-              <a:defRPr sz="1800"/>
-            </a:pPr>
-            <a:r>
-              <a:rPr sz="1300"/>
-              <a:t>    • Arama geçmişin</a:t>
-            </a:r>
-          </a:p>
-          <a:p>
-            <a:pPr lvl="1">
-              <a:lnSpc>
-                <a:spcPct val="90000"/>
-              </a:lnSpc>
-              <a:spcAft>
-                <a:spcPts val="300"/>
-              </a:spcAft>
-              <a:defRPr sz="1800"/>
-            </a:pPr>
-            <a:r>
-              <a:rPr sz="1300"/>
-              <a:t>    • Online oyunlardaki mesajların</a:t>
-            </a:r>
-          </a:p>
-          <a:p>
-            <a:pPr>
-              <a:lnSpc>
-                <a:spcPct val="90000"/>
-              </a:lnSpc>
-              <a:spcAft>
-                <a:spcPts val="300"/>
-              </a:spcAft>
-              <a:defRPr sz="2000"/>
-            </a:pPr>
-          </a:p>
-          <a:p>
-            <a:pPr>
-              <a:lnSpc>
-                <a:spcPct val="90000"/>
-              </a:lnSpc>
-              <a:spcAft>
-                <a:spcPts val="300"/>
-              </a:spcAft>
-              <a:defRPr sz="2000" b="1"/>
-            </a:pPr>
-            <a:r>
-              <a:rPr sz="1300"/>
-              <a:t>📌 İki Tür Dijital Ayak İzi:</a:t>
-            </a:r>
-          </a:p>
-          <a:p>
-            <a:pPr>
-              <a:lnSpc>
-                <a:spcPct val="90000"/>
-              </a:lnSpc>
-              <a:spcAft>
-                <a:spcPts val="300"/>
-              </a:spcAft>
-              <a:defRPr sz="2000"/>
-            </a:pPr>
-          </a:p>
-          <a:p>
-            <a:pPr>
-              <a:lnSpc>
-                <a:spcPct val="90000"/>
-              </a:lnSpc>
-              <a:spcAft>
-                <a:spcPts val="300"/>
-              </a:spcAft>
-              <a:defRPr sz="2000"/>
-            </a:pPr>
-            <a:r>
-              <a:rPr sz="1300"/>
-              <a:t>1️⃣ Aktif (Bilinçli):</a:t>
-            </a:r>
-          </a:p>
-          <a:p>
-            <a:pPr lvl="1">
-              <a:lnSpc>
-                <a:spcPct val="90000"/>
-              </a:lnSpc>
-              <a:spcAft>
-                <a:spcPts val="300"/>
-              </a:spcAft>
-              <a:defRPr sz="1800"/>
-            </a:pPr>
-            <a:r>
-              <a:rPr sz="1300"/>
-              <a:t>    • Sen paylaşıyorsun (fotoğraf, yorum)</a:t>
-            </a:r>
-          </a:p>
-          <a:p>
-            <a:pPr>
-              <a:lnSpc>
-                <a:spcPct val="90000"/>
-              </a:lnSpc>
-              <a:spcAft>
-                <a:spcPts val="300"/>
-              </a:spcAft>
-              <a:defRPr sz="2000"/>
-            </a:pPr>
-          </a:p>
-          <a:p>
-            <a:pPr>
-              <a:lnSpc>
-                <a:spcPct val="90000"/>
-              </a:lnSpc>
-              <a:spcAft>
-                <a:spcPts val="300"/>
-              </a:spcAft>
-              <a:defRPr sz="2000"/>
-            </a:pPr>
-            <a:r>
-              <a:rPr sz="1300"/>
-              <a:t>2️⃣ Pasif (Otomatik):</a:t>
-            </a:r>
-          </a:p>
-          <a:p>
-            <a:pPr lvl="1">
-              <a:lnSpc>
-                <a:spcPct val="90000"/>
-              </a:lnSpc>
-              <a:spcAft>
-                <a:spcPts val="300"/>
-              </a:spcAft>
-              <a:defRPr sz="1800"/>
-            </a:pPr>
-            <a:r>
-              <a:rPr sz="1300"/>
-              <a:t>    • Web siteleri kaydediyor (çerezler, IP)</a:t>
-            </a:r>
-          </a:p>
-          <a:p>
-            <a:pPr>
-              <a:lnSpc>
-                <a:spcPct val="90000"/>
-              </a:lnSpc>
-              <a:spcAft>
-                <a:spcPts val="300"/>
-              </a:spcAft>
-              <a:defRPr sz="2000"/>
-            </a:pPr>
-          </a:p>
-          <a:p>
-            <a:pPr>
-              <a:lnSpc>
-                <a:spcPct val="90000"/>
-              </a:lnSpc>
-              <a:spcAft>
-                <a:spcPts val="300"/>
-              </a:spcAft>
-              <a:defRPr sz="2000"/>
-            </a:pPr>
-            <a:r>
-              <a:rPr sz="1300"/>
-              <a:t>⚠️ Tehlikeler:</a:t>
-            </a:r>
-          </a:p>
-          <a:p>
-            <a:pPr lvl="1">
-              <a:lnSpc>
-                <a:spcPct val="90000"/>
-              </a:lnSpc>
-              <a:spcAft>
-                <a:spcPts val="300"/>
-              </a:spcAft>
-              <a:defRPr sz="1800"/>
-            </a:pPr>
-            <a:r>
-              <a:rPr sz="1300"/>
-              <a:t>    • Dijital ayak izin silinmez!</a:t>
-            </a:r>
-          </a:p>
-          <a:p>
-            <a:pPr lvl="1">
-              <a:lnSpc>
-                <a:spcPct val="90000"/>
-              </a:lnSpc>
-              <a:spcAft>
-                <a:spcPts val="300"/>
-              </a:spcAft>
-              <a:defRPr sz="1800"/>
-            </a:pPr>
-            <a:r>
-              <a:rPr sz="1300"/>
-              <a:t>    • Gelecekte sana zarar verebilir</a:t>
-            </a:r>
-          </a:p>
-          <a:p>
-            <a:pPr lvl="1">
-              <a:lnSpc>
-                <a:spcPct val="90000"/>
-              </a:lnSpc>
-              <a:spcAft>
-                <a:spcPts val="300"/>
-              </a:spcAft>
-              <a:defRPr sz="1800"/>
-            </a:pPr>
-            <a:r>
-              <a:rPr sz="1300"/>
-              <a:t>    • Üniversite, iş başvurusu yapınca bakabilirler</a:t>
-            </a:r>
-          </a:p>
-          <a:p>
-            <a:pPr>
-              <a:lnSpc>
-                <a:spcPct val="90000"/>
-              </a:lnSpc>
-              <a:spcAft>
-                <a:spcPts val="300"/>
-              </a:spcAft>
-              <a:defRPr sz="2000"/>
-            </a:pPr>
-          </a:p>
-          <a:p>
-            <a:pPr>
-              <a:lnSpc>
-                <a:spcPct val="90000"/>
-              </a:lnSpc>
-              <a:spcAft>
-                <a:spcPts val="300"/>
+              <a:defRPr sz="2000"/>
+            </a:pPr>
+          </a:p>
+          <a:p>
+            <a:pPr>
+              <a:lnSpc>
+                <a:spcPct val="85000"/>
+              </a:lnSpc>
+              <a:spcBef>
+                <a:spcPts val="200"/>
+              </a:spcBef>
+              <a:spcAft>
+                <a:spcPts val="200"/>
               </a:spcAft>
               <a:defRPr sz="2000" b="1"/>
             </a:pPr>
@@ -9661,10 +10277,19 @@
         </p:nvSpPr>
         <p:spPr/>
         <p:txBody>
-          <a:bodyPr wrap="square"/>
+          <a:bodyPr wrap="square" tIns="25400" bIns="25400" lIns="63500" rIns="63500"/>
           <a:lstStyle/>
           <a:p>
             <a:pPr>
+              <a:lnSpc>
+                <a:spcPct val="85000"/>
+              </a:lnSpc>
+              <a:spcBef>
+                <a:spcPts val="200"/>
+              </a:spcBef>
+              <a:spcAft>
+                <a:spcPts val="200"/>
+              </a:spcAft>
               <a:defRPr sz="4000" b="1">
                 <a:solidFill>
                   <a:srgbClr val="667EEA"/>
@@ -9672,6 +10297,7 @@
               </a:defRPr>
             </a:pPr>
             <a:r>
+              <a:rPr/>
               <a:t>🔐 Gizlilik ve Mahremiyet</a:t>
             </a:r>
           </a:p>
@@ -9711,7 +10337,7 @@
           <a:noFill/>
         </p:spPr>
         <p:txBody>
-          <a:bodyPr wrap="square">
+          <a:bodyPr wrap="square" tIns="25400" bIns="25400" lIns="63500" rIns="63500">
             <a:spAutoFit/>
           </a:bodyPr>
           <a:lstStyle/>
@@ -9728,6 +10354,24 @@
           <a:p>
             <a:pPr>
               <a:lnSpc>
+                <a:spcPct val="85000"/>
+              </a:lnSpc>
+              <a:spcBef>
+                <a:spcPts val="200"/>
+              </a:spcBef>
+              <a:spcAft>
+                <a:spcPts val="200"/>
+              </a:spcAft>
+              <a:defRPr sz="2000"/>
+            </a:pPr>
+            <a:r>
+              <a:rPr sz="1300"/>
+              <a:t>Gizlilik = Kişisel bilgilerini koruma hakkın</a:t>
+            </a:r>
+          </a:p>
+          <a:p>
+            <a:pPr>
+              <a:lnSpc>
                 <a:spcPct val="90000"/>
               </a:lnSpc>
               <a:spcAft>
@@ -9735,9 +10379,131 @@
               </a:spcAft>
               <a:defRPr sz="2000"/>
             </a:pPr>
-            <a:r>
-              <a:rPr sz="1300"/>
-              <a:t>Gizlilik = Kişisel bilgilerini koruma hakkın</a:t>
+          </a:p>
+          <a:p>
+            <a:pPr>
+              <a:lnSpc>
+                <a:spcPct val="85000"/>
+              </a:lnSpc>
+              <a:spcBef>
+                <a:spcPts val="200"/>
+              </a:spcBef>
+              <a:spcAft>
+                <a:spcPts val="200"/>
+              </a:spcAft>
+              <a:defRPr sz="2000" b="1"/>
+            </a:pPr>
+            <a:r>
+              <a:rPr sz="1300"/>
+              <a:t>✅ Kişisel Bilgiler (ASLA Paylaşma!):</a:t>
+            </a:r>
+          </a:p>
+          <a:p>
+            <a:pPr lvl="1">
+              <a:lnSpc>
+                <a:spcPct val="85000"/>
+              </a:lnSpc>
+              <a:spcBef>
+                <a:spcPts val="200"/>
+              </a:spcBef>
+              <a:spcAft>
+                <a:spcPts val="200"/>
+              </a:spcAft>
+              <a:defRPr sz="1800"/>
+            </a:pPr>
+            <a:r>
+              <a:rPr sz="1300"/>
+              <a:t>    • Tam adın, soyadın</a:t>
+            </a:r>
+          </a:p>
+          <a:p>
+            <a:pPr lvl="1">
+              <a:lnSpc>
+                <a:spcPct val="85000"/>
+              </a:lnSpc>
+              <a:spcBef>
+                <a:spcPts val="200"/>
+              </a:spcBef>
+              <a:spcAft>
+                <a:spcPts val="200"/>
+              </a:spcAft>
+              <a:defRPr sz="1800"/>
+            </a:pPr>
+            <a:r>
+              <a:rPr sz="1300"/>
+              <a:t>    • Doğum tarihin</a:t>
+            </a:r>
+          </a:p>
+          <a:p>
+            <a:pPr lvl="1">
+              <a:lnSpc>
+                <a:spcPct val="85000"/>
+              </a:lnSpc>
+              <a:spcBef>
+                <a:spcPts val="200"/>
+              </a:spcBef>
+              <a:spcAft>
+                <a:spcPts val="200"/>
+              </a:spcAft>
+              <a:defRPr sz="1800"/>
+            </a:pPr>
+            <a:r>
+              <a:rPr sz="1300"/>
+              <a:t>    • Adresin</a:t>
+            </a:r>
+          </a:p>
+          <a:p>
+            <a:pPr lvl="1">
+              <a:lnSpc>
+                <a:spcPct val="85000"/>
+              </a:lnSpc>
+              <a:spcBef>
+                <a:spcPts val="200"/>
+              </a:spcBef>
+              <a:spcAft>
+                <a:spcPts val="200"/>
+              </a:spcAft>
+              <a:defRPr sz="1800"/>
+            </a:pPr>
+            <a:r>
+              <a:rPr sz="1300"/>
+              <a:t>    • Telefon numaran</a:t>
+            </a:r>
+          </a:p>
+          <a:p>
+            <a:pPr lvl="1">
+              <a:lnSpc>
+                <a:spcPct val="85000"/>
+              </a:lnSpc>
+              <a:spcBef>
+                <a:spcPts val="200"/>
+              </a:spcBef>
+              <a:spcAft>
+                <a:spcPts val="200"/>
+              </a:spcAft>
+              <a:defRPr sz="1800"/>
+            </a:pPr>
+            <a:r>
+              <a:rPr sz="1300"/>
+              <a:t>    • Okul adın</a:t>
+            </a:r>
+          </a:p>
+          <a:p>
+            <a:pPr lvl="1">
+              <a:lnSpc>
+                <a:spcPct val="85000"/>
+              </a:lnSpc>
+              <a:spcBef>
+                <a:spcPts val="200"/>
+              </a:spcBef>
+              <a:spcAft>
+                <a:spcPts val="200"/>
+              </a:spcAft>
+              <a:defRPr sz="1800"/>
+            </a:pPr>
+            <a:r>
+              <a:rPr sz="1300"/>
+              <a:t>    • Fotoğraflarında konum bilgisi</a:t>
             </a:r>
           </a:p>
           <a:p>
@@ -9754,294 +10520,208 @@
           <a:p>
             <a:pPr>
               <a:lnSpc>
+                <a:spcPct val="85000"/>
+              </a:lnSpc>
+              <a:spcBef>
+                <a:spcPts val="200"/>
+              </a:spcBef>
+              <a:spcAft>
+                <a:spcPts val="200"/>
+              </a:spcAft>
+              <a:defRPr sz="2000" b="1"/>
+            </a:pPr>
+            <a:r>
+              <a:rPr sz="1300"/>
+              <a:t>📌 Gizlilik Ayarları:</a:t>
+            </a:r>
+          </a:p>
+          <a:p>
+            <a:pPr>
+              <a:lnSpc>
                 <a:spcPct val="90000"/>
               </a:lnSpc>
               <a:spcAft>
                 <a:spcPts val="300"/>
               </a:spcAft>
+              <a:defRPr sz="2000"/>
+            </a:pPr>
+          </a:p>
+          <a:p>
+            <a:pPr>
+              <a:lnSpc>
+                <a:spcPct val="85000"/>
+              </a:lnSpc>
+              <a:spcBef>
+                <a:spcPts val="200"/>
+              </a:spcBef>
+              <a:spcAft>
+                <a:spcPts val="200"/>
+              </a:spcAft>
+              <a:defRPr sz="2000"/>
+            </a:pPr>
+            <a:r>
+              <a:rPr sz="1300"/>
+              <a:t>🔒 Sosyal Medya:</a:t>
+            </a:r>
+          </a:p>
+          <a:p>
+            <a:pPr lvl="1">
+              <a:lnSpc>
+                <a:spcPct val="85000"/>
+              </a:lnSpc>
+              <a:spcBef>
+                <a:spcPts val="200"/>
+              </a:spcBef>
+              <a:spcAft>
+                <a:spcPts val="200"/>
+              </a:spcAft>
+              <a:defRPr sz="1800"/>
+            </a:pPr>
+            <a:r>
+              <a:rPr sz="1300"/>
+              <a:t>    • Hesabını 'gizli' yap</a:t>
+            </a:r>
+          </a:p>
+          <a:p>
+            <a:pPr lvl="1">
+              <a:lnSpc>
+                <a:spcPct val="85000"/>
+              </a:lnSpc>
+              <a:spcBef>
+                <a:spcPts val="200"/>
+              </a:spcBef>
+              <a:spcAft>
+                <a:spcPts val="200"/>
+              </a:spcAft>
+              <a:defRPr sz="1800"/>
+            </a:pPr>
+            <a:r>
+              <a:rPr sz="1300"/>
+              <a:t>    • Sadece arkadaşların görsün</a:t>
+            </a:r>
+          </a:p>
+          <a:p>
+            <a:pPr lvl="1">
+              <a:lnSpc>
+                <a:spcPct val="85000"/>
+              </a:lnSpc>
+              <a:spcBef>
+                <a:spcPts val="200"/>
+              </a:spcBef>
+              <a:spcAft>
+                <a:spcPts val="200"/>
+              </a:spcAft>
+              <a:defRPr sz="1800"/>
+            </a:pPr>
+            <a:r>
+              <a:rPr sz="1300"/>
+              <a:t>    • Konum paylaşma</a:t>
+            </a:r>
+          </a:p>
+          <a:p>
+            <a:pPr>
+              <a:lnSpc>
+                <a:spcPct val="90000"/>
+              </a:lnSpc>
+              <a:spcAft>
+                <a:spcPts val="300"/>
+              </a:spcAft>
+              <a:defRPr sz="2000"/>
+            </a:pPr>
+          </a:p>
+          <a:p>
+            <a:pPr>
+              <a:lnSpc>
+                <a:spcPct val="85000"/>
+              </a:lnSpc>
+              <a:spcBef>
+                <a:spcPts val="200"/>
+              </a:spcBef>
+              <a:spcAft>
+                <a:spcPts val="200"/>
+              </a:spcAft>
+              <a:defRPr sz="2000"/>
+            </a:pPr>
+            <a:r>
+              <a:rPr sz="1300"/>
+              <a:t>📱 Telefon/Tablet:</a:t>
+            </a:r>
+          </a:p>
+          <a:p>
+            <a:pPr lvl="1">
+              <a:lnSpc>
+                <a:spcPct val="85000"/>
+              </a:lnSpc>
+              <a:spcBef>
+                <a:spcPts val="200"/>
+              </a:spcBef>
+              <a:spcAft>
+                <a:spcPts val="200"/>
+              </a:spcAft>
+              <a:defRPr sz="1800"/>
+            </a:pPr>
+            <a:r>
+              <a:rPr sz="1300"/>
+              <a:t>    • Kilit ekranı koy</a:t>
+            </a:r>
+          </a:p>
+          <a:p>
+            <a:pPr lvl="1">
+              <a:lnSpc>
+                <a:spcPct val="85000"/>
+              </a:lnSpc>
+              <a:spcBef>
+                <a:spcPts val="200"/>
+              </a:spcBef>
+              <a:spcAft>
+                <a:spcPts val="200"/>
+              </a:spcAft>
+              <a:defRPr sz="1800"/>
+            </a:pPr>
+            <a:r>
+              <a:rPr sz="1300"/>
+              <a:t>    • Parmak izi/yüz tanıma kullan</a:t>
+            </a:r>
+          </a:p>
+          <a:p>
+            <a:pPr>
+              <a:lnSpc>
+                <a:spcPct val="90000"/>
+              </a:lnSpc>
+              <a:spcAft>
+                <a:spcPts val="300"/>
+              </a:spcAft>
+              <a:defRPr sz="2000"/>
+            </a:pPr>
+          </a:p>
+          <a:p>
+            <a:pPr>
+              <a:lnSpc>
+                <a:spcPct val="85000"/>
+              </a:lnSpc>
+              <a:spcBef>
+                <a:spcPts val="200"/>
+              </a:spcBef>
+              <a:spcAft>
+                <a:spcPts val="200"/>
+              </a:spcAft>
               <a:defRPr sz="2000" b="1"/>
             </a:pPr>
             <a:r>
               <a:rPr sz="1300"/>
-              <a:t>✅ Kişisel Bilgiler (ASLA Paylaşma!):</a:t>
-            </a:r>
-          </a:p>
-          <a:p>
-            <a:pPr lvl="1">
-              <a:lnSpc>
-                <a:spcPct val="90000"/>
-              </a:lnSpc>
-              <a:spcAft>
-                <a:spcPts val="300"/>
-              </a:spcAft>
-              <a:defRPr sz="1800"/>
-            </a:pPr>
-            <a:r>
-              <a:rPr sz="1300"/>
-              <a:t>    • Tam adın, soyadın</a:t>
-            </a:r>
-          </a:p>
-          <a:p>
-            <a:pPr lvl="1">
-              <a:lnSpc>
-                <a:spcPct val="90000"/>
-              </a:lnSpc>
-              <a:spcAft>
-                <a:spcPts val="300"/>
-              </a:spcAft>
-              <a:defRPr sz="1800"/>
-            </a:pPr>
-            <a:r>
-              <a:rPr sz="1300"/>
-              <a:t>    • Doğum tarihin</a:t>
-            </a:r>
-          </a:p>
-          <a:p>
-            <a:pPr lvl="1">
-              <a:lnSpc>
-                <a:spcPct val="90000"/>
-              </a:lnSpc>
-              <a:spcAft>
-                <a:spcPts val="300"/>
-              </a:spcAft>
-              <a:defRPr sz="1800"/>
-            </a:pPr>
-            <a:r>
-              <a:rPr sz="1300"/>
-              <a:t>    • Adresin</a:t>
-            </a:r>
-          </a:p>
-          <a:p>
-            <a:pPr lvl="1">
-              <a:lnSpc>
-                <a:spcPct val="90000"/>
-              </a:lnSpc>
-              <a:spcAft>
-                <a:spcPts val="300"/>
-              </a:spcAft>
-              <a:defRPr sz="1800"/>
-            </a:pPr>
-            <a:r>
-              <a:rPr sz="1300"/>
-              <a:t>    • Telefon numaran</a:t>
-            </a:r>
-          </a:p>
-          <a:p>
-            <a:pPr lvl="1">
-              <a:lnSpc>
-                <a:spcPct val="90000"/>
-              </a:lnSpc>
-              <a:spcAft>
-                <a:spcPts val="300"/>
-              </a:spcAft>
-              <a:defRPr sz="1800"/>
-            </a:pPr>
-            <a:r>
-              <a:rPr sz="1300"/>
-              <a:t>    • Okul adın</a:t>
-            </a:r>
-          </a:p>
-          <a:p>
-            <a:pPr lvl="1">
-              <a:lnSpc>
-                <a:spcPct val="90000"/>
-              </a:lnSpc>
-              <a:spcAft>
-                <a:spcPts val="300"/>
-              </a:spcAft>
-              <a:defRPr sz="1800"/>
-            </a:pPr>
-            <a:r>
-              <a:rPr sz="1300"/>
-              <a:t>    • Fotoğraflarında konum bilgisi</a:t>
-            </a:r>
-          </a:p>
-          <a:p>
-            <a:pPr>
-              <a:lnSpc>
-                <a:spcPct val="90000"/>
-              </a:lnSpc>
-              <a:spcAft>
-                <a:spcPts val="300"/>
-              </a:spcAft>
-              <a:defRPr sz="2000"/>
-            </a:pPr>
-          </a:p>
-          <a:p>
-            <a:pPr>
-              <a:lnSpc>
-                <a:spcPct val="90000"/>
-              </a:lnSpc>
-              <a:spcAft>
-                <a:spcPts val="300"/>
-              </a:spcAft>
-              <a:defRPr sz="2000" b="1"/>
-            </a:pPr>
-            <a:r>
-              <a:rPr sz="1300"/>
-              <a:t>📌 Gizlilik Ayarları:</a:t>
-            </a:r>
-          </a:p>
-          <a:p>
-            <a:pPr>
-              <a:lnSpc>
-                <a:spcPct val="90000"/>
-              </a:lnSpc>
-              <a:spcAft>
-                <a:spcPts val="300"/>
-              </a:spcAft>
-              <a:defRPr sz="2000"/>
-            </a:pPr>
-          </a:p>
-          <a:p>
-            <a:pPr>
-              <a:lnSpc>
-                <a:spcPct val="90000"/>
-              </a:lnSpc>
-              <a:spcAft>
-                <a:spcPts val="300"/>
-              </a:spcAft>
-              <a:defRPr sz="2000"/>
-            </a:pPr>
-            <a:r>
-              <a:rPr sz="1300"/>
-              <a:t>🔒 Sosyal Medya:</a:t>
-            </a:r>
-          </a:p>
-          <a:p>
-            <a:pPr lvl="1">
-              <a:lnSpc>
-                <a:spcPct val="90000"/>
-              </a:lnSpc>
-              <a:spcAft>
-                <a:spcPts val="300"/>
-              </a:spcAft>
-              <a:defRPr sz="1800"/>
-            </a:pPr>
-            <a:r>
-              <a:rPr sz="1300"/>
-              <a:t>    • Hesabını 'gizli' yap</a:t>
-            </a:r>
-          </a:p>
-          <a:p>
-            <a:pPr lvl="1">
-              <a:lnSpc>
-                <a:spcPct val="90000"/>
-              </a:lnSpc>
-              <a:spcAft>
-                <a:spcPts val="300"/>
-              </a:spcAft>
-              <a:defRPr sz="1800"/>
-            </a:pPr>
-            <a:r>
-              <a:rPr sz="1300"/>
-              <a:t>    • Sadece arkadaşların görsün</a:t>
-            </a:r>
-          </a:p>
-          <a:p>
-            <a:pPr lvl="1">
-              <a:lnSpc>
-                <a:spcPct val="90000"/>
-              </a:lnSpc>
-              <a:spcAft>
-                <a:spcPts val="300"/>
-              </a:spcAft>
-              <a:defRPr sz="1800"/>
-            </a:pPr>
-            <a:r>
-              <a:rPr sz="1300"/>
-              <a:t>    • Konum paylaşma</a:t>
-            </a:r>
-          </a:p>
-          <a:p>
-            <a:pPr>
-              <a:lnSpc>
-                <a:spcPct val="90000"/>
-              </a:lnSpc>
-              <a:spcAft>
-                <a:spcPts val="300"/>
-              </a:spcAft>
-              <a:defRPr sz="2000"/>
-            </a:pPr>
-          </a:p>
-          <a:p>
-            <a:pPr>
-              <a:lnSpc>
-                <a:spcPct val="90000"/>
-              </a:lnSpc>
-              <a:spcAft>
-                <a:spcPts val="300"/>
-              </a:spcAft>
-              <a:defRPr sz="2000"/>
-            </a:pPr>
-            <a:r>
-              <a:rPr sz="1300"/>
-              <a:t>📱 Telefon/Tablet:</a:t>
-            </a:r>
-          </a:p>
-          <a:p>
-            <a:pPr lvl="1">
-              <a:lnSpc>
-                <a:spcPct val="90000"/>
-              </a:lnSpc>
-              <a:spcAft>
-                <a:spcPts val="300"/>
-              </a:spcAft>
-              <a:defRPr sz="1800"/>
-            </a:pPr>
-            <a:r>
-              <a:rPr sz="1300"/>
-              <a:t>    • Kilit ekranı koy</a:t>
-            </a:r>
-          </a:p>
-          <a:p>
-            <a:pPr lvl="1">
-              <a:lnSpc>
-                <a:spcPct val="90000"/>
-              </a:lnSpc>
-              <a:spcAft>
-                <a:spcPts val="300"/>
-              </a:spcAft>
-              <a:defRPr sz="1800"/>
-            </a:pPr>
-            <a:r>
-              <a:rPr sz="1300"/>
-              <a:t>    • Parmak izi/yüz tanıma kullan</a:t>
-            </a:r>
-          </a:p>
-          <a:p>
-            <a:pPr>
-              <a:lnSpc>
-                <a:spcPct val="90000"/>
-              </a:lnSpc>
-              <a:spcAft>
-                <a:spcPts val="300"/>
-              </a:spcAft>
-              <a:defRPr sz="2000"/>
-            </a:pPr>
-          </a:p>
-          <a:p>
-            <a:pPr>
-              <a:lnSpc>
-                <a:spcPct val="90000"/>
-              </a:lnSpc>
-              <a:spcAft>
-                <a:spcPts val="300"/>
-              </a:spcAft>
-              <a:defRPr sz="2000" b="1"/>
-            </a:pPr>
-            <a:r>
-              <a:rPr sz="1300"/>
               <a:t>💡 Unutma:</a:t>
             </a:r>
           </a:p>
           <a:p>
             <a:pPr lvl="1">
               <a:lnSpc>
-                <a:spcPct val="90000"/>
-              </a:lnSpc>
-              <a:spcAft>
-                <a:spcPts val="300"/>
+                <a:spcPct val="85000"/>
+              </a:lnSpc>
+              <a:spcBef>
+                <a:spcPts val="200"/>
+              </a:spcBef>
+              <a:spcAft>
+                <a:spcPts val="200"/>
               </a:spcAft>
               <a:defRPr sz="1800"/>
             </a:pPr>
@@ -10053,10 +10733,13 @@
           <a:p>
             <a:pPr lvl="1">
               <a:lnSpc>
-                <a:spcPct val="90000"/>
-              </a:lnSpc>
-              <a:spcAft>
-                <a:spcPts val="300"/>
+                <a:spcPct val="85000"/>
+              </a:lnSpc>
+              <a:spcBef>
+                <a:spcPts val="200"/>
+              </a:spcBef>
+              <a:spcAft>
+                <a:spcPts val="200"/>
               </a:spcAft>
               <a:defRPr sz="1800"/>
             </a:pPr>
@@ -10068,10 +10751,13 @@
           <a:p>
             <a:pPr lvl="1">
               <a:lnSpc>
-                <a:spcPct val="90000"/>
-              </a:lnSpc>
-              <a:spcAft>
-                <a:spcPts val="300"/>
+                <a:spcPct val="85000"/>
+              </a:lnSpc>
+              <a:spcBef>
+                <a:spcPts val="200"/>
+              </a:spcBef>
+              <a:spcAft>
+                <a:spcPts val="200"/>
               </a:spcAft>
               <a:defRPr sz="1800"/>
             </a:pPr>
@@ -10112,10 +10798,19 @@
         </p:nvSpPr>
         <p:spPr/>
         <p:txBody>
-          <a:bodyPr wrap="square"/>
+          <a:bodyPr wrap="square" tIns="25400" bIns="25400" lIns="63500" rIns="63500"/>
           <a:lstStyle/>
           <a:p>
             <a:pPr>
+              <a:lnSpc>
+                <a:spcPct val="85000"/>
+              </a:lnSpc>
+              <a:spcBef>
+                <a:spcPts val="200"/>
+              </a:spcBef>
+              <a:spcAft>
+                <a:spcPts val="200"/>
+              </a:spcAft>
               <a:defRPr sz="4000" b="1">
                 <a:solidFill>
                   <a:srgbClr val="667EEA"/>
@@ -10123,6 +10818,7 @@
               </a:defRPr>
             </a:pPr>
             <a:r>
+              <a:rPr/>
               <a:t>🔑 Güçlü Şifre Oluşturma</a:t>
             </a:r>
           </a:p>
@@ -10162,7 +10858,7 @@
           <a:noFill/>
         </p:spPr>
         <p:txBody>
-          <a:bodyPr wrap="square">
+          <a:bodyPr wrap="square" tIns="25400" bIns="25400" lIns="63500" rIns="63500">
             <a:spAutoFit/>
           </a:bodyPr>
           <a:lstStyle/>
@@ -10179,10 +10875,13 @@
           <a:p>
             <a:pPr>
               <a:lnSpc>
-                <a:spcPct val="90000"/>
-              </a:lnSpc>
-              <a:spcAft>
-                <a:spcPts val="300"/>
+                <a:spcPct val="85000"/>
+              </a:lnSpc>
+              <a:spcBef>
+                <a:spcPts val="200"/>
+              </a:spcBef>
+              <a:spcAft>
+                <a:spcPts val="200"/>
               </a:spcAft>
               <a:defRPr sz="2000"/>
             </a:pPr>
@@ -10205,10 +10904,13 @@
           <a:p>
             <a:pPr>
               <a:lnSpc>
-                <a:spcPct val="90000"/>
-              </a:lnSpc>
-              <a:spcAft>
-                <a:spcPts val="300"/>
+                <a:spcPct val="85000"/>
+              </a:lnSpc>
+              <a:spcBef>
+                <a:spcPts val="200"/>
+              </a:spcBef>
+              <a:spcAft>
+                <a:spcPts val="200"/>
               </a:spcAft>
               <a:defRPr sz="2000" b="1"/>
             </a:pPr>
@@ -10231,10 +10933,13 @@
           <a:p>
             <a:pPr>
               <a:lnSpc>
-                <a:spcPct val="90000"/>
-              </a:lnSpc>
-              <a:spcAft>
-                <a:spcPts val="300"/>
+                <a:spcPct val="85000"/>
+              </a:lnSpc>
+              <a:spcBef>
+                <a:spcPts val="200"/>
+              </a:spcBef>
+              <a:spcAft>
+                <a:spcPts val="200"/>
               </a:spcAft>
               <a:defRPr sz="2000"/>
             </a:pPr>
@@ -10246,10 +10951,13 @@
           <a:p>
             <a:pPr lvl="1">
               <a:lnSpc>
-                <a:spcPct val="90000"/>
-              </a:lnSpc>
-              <a:spcAft>
-                <a:spcPts val="300"/>
+                <a:spcPct val="85000"/>
+              </a:lnSpc>
+              <a:spcBef>
+                <a:spcPts val="200"/>
+              </a:spcBef>
+              <a:spcAft>
+                <a:spcPts val="200"/>
               </a:spcAft>
               <a:defRPr sz="1800"/>
             </a:pPr>
@@ -10272,10 +10980,13 @@
           <a:p>
             <a:pPr>
               <a:lnSpc>
-                <a:spcPct val="90000"/>
-              </a:lnSpc>
-              <a:spcAft>
-                <a:spcPts val="300"/>
+                <a:spcPct val="85000"/>
+              </a:lnSpc>
+              <a:spcBef>
+                <a:spcPts val="200"/>
+              </a:spcBef>
+              <a:spcAft>
+                <a:spcPts val="200"/>
               </a:spcAft>
               <a:defRPr sz="2000"/>
             </a:pPr>
@@ -10287,10 +10998,13 @@
           <a:p>
             <a:pPr lvl="1">
               <a:lnSpc>
-                <a:spcPct val="90000"/>
-              </a:lnSpc>
-              <a:spcAft>
-                <a:spcPts val="300"/>
+                <a:spcPct val="85000"/>
+              </a:lnSpc>
+              <a:spcBef>
+                <a:spcPts val="200"/>
+              </a:spcBef>
+              <a:spcAft>
+                <a:spcPts val="200"/>
               </a:spcAft>
               <a:defRPr sz="1800"/>
             </a:pPr>
@@ -10302,10 +11016,13 @@
           <a:p>
             <a:pPr lvl="1">
               <a:lnSpc>
-                <a:spcPct val="90000"/>
-              </a:lnSpc>
-              <a:spcAft>
-                <a:spcPts val="300"/>
+                <a:spcPct val="85000"/>
+              </a:lnSpc>
+              <a:spcBef>
+                <a:spcPts val="200"/>
+              </a:spcBef>
+              <a:spcAft>
+                <a:spcPts val="200"/>
               </a:spcAft>
               <a:defRPr sz="1800"/>
             </a:pPr>
@@ -10317,10 +11034,13 @@
           <a:p>
             <a:pPr lvl="1">
               <a:lnSpc>
-                <a:spcPct val="90000"/>
-              </a:lnSpc>
-              <a:spcAft>
-                <a:spcPts val="300"/>
+                <a:spcPct val="85000"/>
+              </a:lnSpc>
+              <a:spcBef>
+                <a:spcPts val="200"/>
+              </a:spcBef>
+              <a:spcAft>
+                <a:spcPts val="200"/>
               </a:spcAft>
               <a:defRPr sz="1800"/>
             </a:pPr>
@@ -10332,10 +11052,13 @@
           <a:p>
             <a:pPr lvl="1">
               <a:lnSpc>
-                <a:spcPct val="90000"/>
-              </a:lnSpc>
-              <a:spcAft>
-                <a:spcPts val="300"/>
+                <a:spcPct val="85000"/>
+              </a:lnSpc>
+              <a:spcBef>
+                <a:spcPts val="200"/>
+              </a:spcBef>
+              <a:spcAft>
+                <a:spcPts val="200"/>
               </a:spcAft>
               <a:defRPr sz="1800"/>
             </a:pPr>
@@ -10358,10 +11081,13 @@
           <a:p>
             <a:pPr>
               <a:lnSpc>
-                <a:spcPct val="90000"/>
-              </a:lnSpc>
-              <a:spcAft>
-                <a:spcPts val="300"/>
+                <a:spcPct val="85000"/>
+              </a:lnSpc>
+              <a:spcBef>
+                <a:spcPts val="200"/>
+              </a:spcBef>
+              <a:spcAft>
+                <a:spcPts val="200"/>
               </a:spcAft>
               <a:defRPr sz="2000" b="1"/>
             </a:pPr>
@@ -10373,10 +11099,13 @@
           <a:p>
             <a:pPr lvl="1">
               <a:lnSpc>
-                <a:spcPct val="90000"/>
-              </a:lnSpc>
-              <a:spcAft>
-                <a:spcPts val="300"/>
+                <a:spcPct val="85000"/>
+              </a:lnSpc>
+              <a:spcBef>
+                <a:spcPts val="200"/>
+              </a:spcBef>
+              <a:spcAft>
+                <a:spcPts val="200"/>
               </a:spcAft>
               <a:defRPr sz="1800"/>
             </a:pPr>
@@ -10388,10 +11117,13 @@
           <a:p>
             <a:pPr lvl="1">
               <a:lnSpc>
-                <a:spcPct val="90000"/>
-              </a:lnSpc>
-              <a:spcAft>
-                <a:spcPts val="300"/>
+                <a:spcPct val="85000"/>
+              </a:lnSpc>
+              <a:spcBef>
+                <a:spcPts val="200"/>
+              </a:spcBef>
+              <a:spcAft>
+                <a:spcPts val="200"/>
               </a:spcAft>
               <a:defRPr sz="1800"/>
             </a:pPr>
@@ -10414,10 +11146,13 @@
           <a:p>
             <a:pPr>
               <a:lnSpc>
-                <a:spcPct val="90000"/>
-              </a:lnSpc>
-              <a:spcAft>
-                <a:spcPts val="300"/>
+                <a:spcPct val="85000"/>
+              </a:lnSpc>
+              <a:spcBef>
+                <a:spcPts val="200"/>
+              </a:spcBef>
+              <a:spcAft>
+                <a:spcPts val="200"/>
               </a:spcAft>
               <a:defRPr sz="2000"/>
             </a:pPr>
@@ -10429,10 +11164,13 @@
           <a:p>
             <a:pPr lvl="1">
               <a:lnSpc>
-                <a:spcPct val="90000"/>
-              </a:lnSpc>
-              <a:spcAft>
-                <a:spcPts val="300"/>
+                <a:spcPct val="85000"/>
+              </a:lnSpc>
+              <a:spcBef>
+                <a:spcPts val="200"/>
+              </a:spcBef>
+              <a:spcAft>
+                <a:spcPts val="200"/>
               </a:spcAft>
               <a:defRPr sz="1800"/>
             </a:pPr>
@@ -10444,10 +11182,13 @@
           <a:p>
             <a:pPr lvl="1">
               <a:lnSpc>
-                <a:spcPct val="90000"/>
-              </a:lnSpc>
-              <a:spcAft>
-                <a:spcPts val="300"/>
+                <a:spcPct val="85000"/>
+              </a:lnSpc>
+              <a:spcBef>
+                <a:spcPts val="200"/>
+              </a:spcBef>
+              <a:spcAft>
+                <a:spcPts val="200"/>
               </a:spcAft>
               <a:defRPr sz="1800"/>
             </a:pPr>
@@ -10459,10 +11200,13 @@
           <a:p>
             <a:pPr lvl="1">
               <a:lnSpc>
-                <a:spcPct val="90000"/>
-              </a:lnSpc>
-              <a:spcAft>
-                <a:spcPts val="300"/>
+                <a:spcPct val="85000"/>
+              </a:lnSpc>
+              <a:spcBef>
+                <a:spcPts val="200"/>
+              </a:spcBef>
+              <a:spcAft>
+                <a:spcPts val="200"/>
               </a:spcAft>
               <a:defRPr sz="1800"/>
             </a:pPr>
@@ -10474,10 +11218,13 @@
           <a:p>
             <a:pPr lvl="1">
               <a:lnSpc>
-                <a:spcPct val="90000"/>
-              </a:lnSpc>
-              <a:spcAft>
-                <a:spcPts val="300"/>
+                <a:spcPct val="85000"/>
+              </a:lnSpc>
+              <a:spcBef>
+                <a:spcPts val="200"/>
+              </a:spcBef>
+              <a:spcAft>
+                <a:spcPts val="200"/>
               </a:spcAft>
               <a:defRPr sz="1800"/>
             </a:pPr>
@@ -10500,10 +11247,13 @@
           <a:p>
             <a:pPr>
               <a:lnSpc>
-                <a:spcPct val="90000"/>
-              </a:lnSpc>
-              <a:spcAft>
-                <a:spcPts val="300"/>
+                <a:spcPct val="85000"/>
+              </a:lnSpc>
+              <a:spcBef>
+                <a:spcPts val="200"/>
+              </a:spcBef>
+              <a:spcAft>
+                <a:spcPts val="200"/>
               </a:spcAft>
               <a:defRPr sz="2000" b="1"/>
             </a:pPr>
@@ -10515,10 +11265,13 @@
           <a:p>
             <a:pPr>
               <a:lnSpc>
-                <a:spcPct val="90000"/>
-              </a:lnSpc>
-              <a:spcAft>
-                <a:spcPts val="300"/>
+                <a:spcPct val="85000"/>
+              </a:lnSpc>
+              <a:spcBef>
+                <a:spcPts val="200"/>
+              </a:spcBef>
+              <a:spcAft>
+                <a:spcPts val="200"/>
               </a:spcAft>
               <a:defRPr sz="2000"/>
             </a:pPr>
@@ -10530,10 +11283,13 @@
           <a:p>
             <a:pPr>
               <a:lnSpc>
-                <a:spcPct val="90000"/>
-              </a:lnSpc>
-              <a:spcAft>
-                <a:spcPts val="300"/>
+                <a:spcPct val="85000"/>
+              </a:lnSpc>
+              <a:spcBef>
+                <a:spcPts val="200"/>
+              </a:spcBef>
+              <a:spcAft>
+                <a:spcPts val="200"/>
               </a:spcAft>
               <a:defRPr sz="2000"/>
             </a:pPr>
@@ -10574,10 +11330,19 @@
         </p:nvSpPr>
         <p:spPr/>
         <p:txBody>
-          <a:bodyPr wrap="square"/>
+          <a:bodyPr wrap="square" tIns="25400" bIns="25400" lIns="63500" rIns="63500"/>
           <a:lstStyle/>
           <a:p>
             <a:pPr>
+              <a:lnSpc>
+                <a:spcPct val="85000"/>
+              </a:lnSpc>
+              <a:spcBef>
+                <a:spcPts val="200"/>
+              </a:spcBef>
+              <a:spcAft>
+                <a:spcPts val="200"/>
+              </a:spcAft>
               <a:defRPr sz="4000" b="1">
                 <a:solidFill>
                   <a:srgbClr val="667EEA"/>
@@ -10585,6 +11350,7 @@
               </a:defRPr>
             </a:pPr>
             <a:r>
+              <a:rPr/>
               <a:t>🔐 Şifre Güvenliği İpuçları</a:t>
             </a:r>
           </a:p>
@@ -10624,7 +11390,7 @@
           <a:noFill/>
         </p:spPr>
         <p:txBody>
-          <a:bodyPr wrap="square">
+          <a:bodyPr wrap="square" tIns="25400" bIns="25400" lIns="63500" rIns="63500">
             <a:spAutoFit/>
           </a:bodyPr>
           <a:lstStyle/>
@@ -10641,6 +11407,24 @@
           <a:p>
             <a:pPr>
               <a:lnSpc>
+                <a:spcPct val="85000"/>
+              </a:lnSpc>
+              <a:spcBef>
+                <a:spcPts val="200"/>
+              </a:spcBef>
+              <a:spcAft>
+                <a:spcPts val="200"/>
+              </a:spcAft>
+              <a:defRPr sz="2000"/>
+            </a:pPr>
+            <a:r>
+              <a:rPr sz="1300"/>
+              <a:t>Güçlü şifre oluşturdun, şimdi onu koru!</a:t>
+            </a:r>
+          </a:p>
+          <a:p>
+            <a:pPr>
+              <a:lnSpc>
                 <a:spcPct val="90000"/>
               </a:lnSpc>
               <a:spcAft>
@@ -10648,9 +11432,23 @@
               </a:spcAft>
               <a:defRPr sz="2000"/>
             </a:pPr>
-            <a:r>
-              <a:rPr sz="1300"/>
-              <a:t>Güçlü şifre oluşturdun, şimdi onu koru!</a:t>
+          </a:p>
+          <a:p>
+            <a:pPr>
+              <a:lnSpc>
+                <a:spcPct val="85000"/>
+              </a:lnSpc>
+              <a:spcBef>
+                <a:spcPts val="200"/>
+              </a:spcBef>
+              <a:spcAft>
+                <a:spcPts val="200"/>
+              </a:spcAft>
+              <a:defRPr sz="2000" b="1"/>
+            </a:pPr>
+            <a:r>
+              <a:rPr sz="1300"/>
+              <a:t>✅ Şifre Güvenliği Kuralları:</a:t>
             </a:r>
           </a:p>
           <a:p>
@@ -10667,331 +11465,356 @@
           <a:p>
             <a:pPr>
               <a:lnSpc>
+                <a:spcPct val="85000"/>
+              </a:lnSpc>
+              <a:spcBef>
+                <a:spcPts val="200"/>
+              </a:spcBef>
+              <a:spcAft>
+                <a:spcPts val="200"/>
+              </a:spcAft>
+              <a:defRPr sz="2000"/>
+            </a:pPr>
+            <a:r>
+              <a:rPr sz="1300"/>
+              <a:t>❌ ASLA Paylaşma:</a:t>
+            </a:r>
+          </a:p>
+          <a:p>
+            <a:pPr lvl="1">
+              <a:lnSpc>
+                <a:spcPct val="85000"/>
+              </a:lnSpc>
+              <a:spcBef>
+                <a:spcPts val="200"/>
+              </a:spcBef>
+              <a:spcAft>
+                <a:spcPts val="200"/>
+              </a:spcAft>
+              <a:defRPr sz="1800"/>
+            </a:pPr>
+            <a:r>
+              <a:rPr sz="1300"/>
+              <a:t>    • Arkadaşınla bile paylaşma</a:t>
+            </a:r>
+          </a:p>
+          <a:p>
+            <a:pPr lvl="1">
+              <a:lnSpc>
+                <a:spcPct val="85000"/>
+              </a:lnSpc>
+              <a:spcBef>
+                <a:spcPts val="200"/>
+              </a:spcBef>
+              <a:spcAft>
+                <a:spcPts val="200"/>
+              </a:spcAft>
+              <a:defRPr sz="1800"/>
+            </a:pPr>
+            <a:r>
+              <a:rPr sz="1300"/>
+              <a:t>    • Öğretmen asla şifreni sormaz</a:t>
+            </a:r>
+          </a:p>
+          <a:p>
+            <a:pPr lvl="1">
+              <a:lnSpc>
+                <a:spcPct val="85000"/>
+              </a:lnSpc>
+              <a:spcBef>
+                <a:spcPts val="200"/>
+              </a:spcBef>
+              <a:spcAft>
+                <a:spcPts val="200"/>
+              </a:spcAft>
+              <a:defRPr sz="1800"/>
+            </a:pPr>
+            <a:r>
+              <a:rPr sz="1300"/>
+              <a:t>    • Telefonda/mesajda şifre gönderme</a:t>
+            </a:r>
+          </a:p>
+          <a:p>
+            <a:pPr>
+              <a:lnSpc>
                 <a:spcPct val="90000"/>
               </a:lnSpc>
               <a:spcAft>
                 <a:spcPts val="300"/>
               </a:spcAft>
+              <a:defRPr sz="2000"/>
+            </a:pPr>
+          </a:p>
+          <a:p>
+            <a:pPr>
+              <a:lnSpc>
+                <a:spcPct val="85000"/>
+              </a:lnSpc>
+              <a:spcBef>
+                <a:spcPts val="200"/>
+              </a:spcBef>
+              <a:spcAft>
+                <a:spcPts val="200"/>
+              </a:spcAft>
+              <a:defRPr sz="2000"/>
+            </a:pPr>
+            <a:r>
+              <a:rPr sz="1300"/>
+              <a:t>🔄 Farklı Şifreler Kullan:</a:t>
+            </a:r>
+          </a:p>
+          <a:p>
+            <a:pPr lvl="1">
+              <a:lnSpc>
+                <a:spcPct val="85000"/>
+              </a:lnSpc>
+              <a:spcBef>
+                <a:spcPts val="200"/>
+              </a:spcBef>
+              <a:spcAft>
+                <a:spcPts val="200"/>
+              </a:spcAft>
+              <a:defRPr sz="1800"/>
+            </a:pPr>
+            <a:r>
+              <a:rPr sz="1300"/>
+              <a:t>    • Her hesap için farklı şifre</a:t>
+            </a:r>
+          </a:p>
+          <a:p>
+            <a:pPr lvl="1">
+              <a:lnSpc>
+                <a:spcPct val="85000"/>
+              </a:lnSpc>
+              <a:spcBef>
+                <a:spcPts val="200"/>
+              </a:spcBef>
+              <a:spcAft>
+                <a:spcPts val="200"/>
+              </a:spcAft>
+              <a:defRPr sz="1800"/>
+            </a:pPr>
+            <a:r>
+              <a:rPr sz="1300"/>
+              <a:t>    • Bir şifre çalınırsa diğerleri güvende</a:t>
+            </a:r>
+          </a:p>
+          <a:p>
+            <a:pPr>
+              <a:lnSpc>
+                <a:spcPct val="90000"/>
+              </a:lnSpc>
+              <a:spcAft>
+                <a:spcPts val="300"/>
+              </a:spcAft>
+              <a:defRPr sz="2000"/>
+            </a:pPr>
+          </a:p>
+          <a:p>
+            <a:pPr>
+              <a:lnSpc>
+                <a:spcPct val="85000"/>
+              </a:lnSpc>
+              <a:spcBef>
+                <a:spcPts val="200"/>
+              </a:spcBef>
+              <a:spcAft>
+                <a:spcPts val="200"/>
+              </a:spcAft>
+              <a:defRPr sz="2000"/>
+            </a:pPr>
+            <a:r>
+              <a:rPr sz="1300"/>
+              <a:t>📝 Şifreyi Kaydet:</a:t>
+            </a:r>
+          </a:p>
+          <a:p>
+            <a:pPr lvl="1">
+              <a:lnSpc>
+                <a:spcPct val="85000"/>
+              </a:lnSpc>
+              <a:spcBef>
+                <a:spcPts val="200"/>
+              </a:spcBef>
+              <a:spcAft>
+                <a:spcPts val="200"/>
+              </a:spcAft>
+              <a:defRPr sz="1800"/>
+            </a:pPr>
+            <a:r>
+              <a:rPr sz="1300"/>
+              <a:t>    • Unutacaksan güvenli yere yaz</a:t>
+            </a:r>
+          </a:p>
+          <a:p>
+            <a:pPr lvl="1">
+              <a:lnSpc>
+                <a:spcPct val="85000"/>
+              </a:lnSpc>
+              <a:spcBef>
+                <a:spcPts val="200"/>
+              </a:spcBef>
+              <a:spcAft>
+                <a:spcPts val="200"/>
+              </a:spcAft>
+              <a:defRPr sz="1800"/>
+            </a:pPr>
+            <a:r>
+              <a:rPr sz="1300"/>
+              <a:t>    • Ebeveynin bilsin</a:t>
+            </a:r>
+          </a:p>
+          <a:p>
+            <a:pPr>
+              <a:lnSpc>
+                <a:spcPct val="90000"/>
+              </a:lnSpc>
+              <a:spcAft>
+                <a:spcPts val="300"/>
+              </a:spcAft>
+              <a:defRPr sz="2000"/>
+            </a:pPr>
+          </a:p>
+          <a:p>
+            <a:pPr>
+              <a:lnSpc>
+                <a:spcPct val="85000"/>
+              </a:lnSpc>
+              <a:spcBef>
+                <a:spcPts val="200"/>
+              </a:spcBef>
+              <a:spcAft>
+                <a:spcPts val="200"/>
+              </a:spcAft>
+              <a:defRPr sz="2000"/>
+            </a:pPr>
+            <a:r>
+              <a:rPr sz="1300"/>
+              <a:t>🔄 Düzenli Değiştir:</a:t>
+            </a:r>
+          </a:p>
+          <a:p>
+            <a:pPr lvl="1">
+              <a:lnSpc>
+                <a:spcPct val="85000"/>
+              </a:lnSpc>
+              <a:spcBef>
+                <a:spcPts val="200"/>
+              </a:spcBef>
+              <a:spcAft>
+                <a:spcPts val="200"/>
+              </a:spcAft>
+              <a:defRPr sz="1800"/>
+            </a:pPr>
+            <a:r>
+              <a:rPr sz="1300"/>
+              <a:t>    • 3-6 ayda bir değiştir</a:t>
+            </a:r>
+          </a:p>
+          <a:p>
+            <a:pPr>
+              <a:lnSpc>
+                <a:spcPct val="90000"/>
+              </a:lnSpc>
+              <a:spcAft>
+                <a:spcPts val="300"/>
+              </a:spcAft>
+              <a:defRPr sz="2000"/>
+            </a:pPr>
+          </a:p>
+          <a:p>
+            <a:pPr>
+              <a:lnSpc>
+                <a:spcPct val="85000"/>
+              </a:lnSpc>
+              <a:spcBef>
+                <a:spcPts val="200"/>
+              </a:spcBef>
+              <a:spcAft>
+                <a:spcPts val="200"/>
+              </a:spcAft>
+              <a:defRPr sz="2000"/>
+            </a:pPr>
+            <a:r>
+              <a:rPr sz="1300"/>
+              <a:t>⚠️ Şüphe Duyarsan:</a:t>
+            </a:r>
+          </a:p>
+          <a:p>
+            <a:pPr lvl="1">
+              <a:lnSpc>
+                <a:spcPct val="85000"/>
+              </a:lnSpc>
+              <a:spcBef>
+                <a:spcPts val="200"/>
+              </a:spcBef>
+              <a:spcAft>
+                <a:spcPts val="200"/>
+              </a:spcAft>
+              <a:defRPr sz="1800"/>
+            </a:pPr>
+            <a:r>
+              <a:rPr sz="1300"/>
+              <a:t>    • Hemen değiştir</a:t>
+            </a:r>
+          </a:p>
+          <a:p>
+            <a:pPr lvl="1">
+              <a:lnSpc>
+                <a:spcPct val="85000"/>
+              </a:lnSpc>
+              <a:spcBef>
+                <a:spcPts val="200"/>
+              </a:spcBef>
+              <a:spcAft>
+                <a:spcPts val="200"/>
+              </a:spcAft>
+              <a:defRPr sz="1800"/>
+            </a:pPr>
+            <a:r>
+              <a:rPr sz="1300"/>
+              <a:t>    • Hesabını kontrol et</a:t>
+            </a:r>
+          </a:p>
+          <a:p>
+            <a:pPr>
+              <a:lnSpc>
+                <a:spcPct val="90000"/>
+              </a:lnSpc>
+              <a:spcAft>
+                <a:spcPts val="300"/>
+              </a:spcAft>
+              <a:defRPr sz="2000"/>
+            </a:pPr>
+          </a:p>
+          <a:p>
+            <a:pPr>
+              <a:lnSpc>
+                <a:spcPct val="85000"/>
+              </a:lnSpc>
+              <a:spcBef>
+                <a:spcPts val="200"/>
+              </a:spcBef>
+              <a:spcAft>
+                <a:spcPts val="200"/>
+              </a:spcAft>
               <a:defRPr sz="2000" b="1"/>
             </a:pPr>
             <a:r>
               <a:rPr sz="1300"/>
-              <a:t>✅ Şifre Güvenliği Kuralları:</a:t>
-            </a:r>
-          </a:p>
-          <a:p>
-            <a:pPr>
-              <a:lnSpc>
-                <a:spcPct val="90000"/>
-              </a:lnSpc>
-              <a:spcAft>
-                <a:spcPts val="300"/>
-              </a:spcAft>
-              <a:defRPr sz="2000"/>
-            </a:pPr>
-          </a:p>
-          <a:p>
-            <a:pPr>
-              <a:lnSpc>
-                <a:spcPct val="90000"/>
-              </a:lnSpc>
-              <a:spcAft>
-                <a:spcPts val="300"/>
-              </a:spcAft>
-              <a:defRPr sz="2000"/>
-            </a:pPr>
-            <a:r>
-              <a:rPr sz="1300"/>
-              <a:t>❌ ASLA Paylaşma:</a:t>
-            </a:r>
-          </a:p>
-          <a:p>
-            <a:pPr lvl="1">
-              <a:lnSpc>
-                <a:spcPct val="90000"/>
-              </a:lnSpc>
-              <a:spcAft>
-                <a:spcPts val="300"/>
-              </a:spcAft>
-              <a:defRPr sz="1800"/>
-            </a:pPr>
-            <a:r>
-              <a:rPr sz="1300"/>
-              <a:t>    • Arkadaşınla bile paylaşma</a:t>
-            </a:r>
-          </a:p>
-          <a:p>
-            <a:pPr lvl="1">
-              <a:lnSpc>
-                <a:spcPct val="90000"/>
-              </a:lnSpc>
-              <a:spcAft>
-                <a:spcPts val="300"/>
-              </a:spcAft>
-              <a:defRPr sz="1800"/>
-            </a:pPr>
-            <a:r>
-              <a:rPr sz="1300"/>
-              <a:t>    • Öğretmen asla şifreni sormaz</a:t>
-            </a:r>
-          </a:p>
-          <a:p>
-            <a:pPr lvl="1">
-              <a:lnSpc>
-                <a:spcPct val="90000"/>
-              </a:lnSpc>
-              <a:spcAft>
-                <a:spcPts val="300"/>
-              </a:spcAft>
-              <a:defRPr sz="1800"/>
-            </a:pPr>
-            <a:r>
-              <a:rPr sz="1300"/>
-              <a:t>    • Telefonda/mesajda şifre gönderme</a:t>
-            </a:r>
-          </a:p>
-          <a:p>
-            <a:pPr>
-              <a:lnSpc>
-                <a:spcPct val="90000"/>
-              </a:lnSpc>
-              <a:spcAft>
-                <a:spcPts val="300"/>
-              </a:spcAft>
-              <a:defRPr sz="2000"/>
-            </a:pPr>
-          </a:p>
-          <a:p>
-            <a:pPr>
-              <a:lnSpc>
-                <a:spcPct val="90000"/>
-              </a:lnSpc>
-              <a:spcAft>
-                <a:spcPts val="300"/>
-              </a:spcAft>
-              <a:defRPr sz="2000"/>
-            </a:pPr>
-            <a:r>
-              <a:rPr sz="1300"/>
-              <a:t>🔄 Farklı Şifreler Kullan:</a:t>
-            </a:r>
-          </a:p>
-          <a:p>
-            <a:pPr lvl="1">
-              <a:lnSpc>
-                <a:spcPct val="90000"/>
-              </a:lnSpc>
-              <a:spcAft>
-                <a:spcPts val="300"/>
-              </a:spcAft>
-              <a:defRPr sz="1800"/>
-            </a:pPr>
-            <a:r>
-              <a:rPr sz="1300"/>
-              <a:t>    • Her hesap için farklı şifre</a:t>
-            </a:r>
-          </a:p>
-          <a:p>
-            <a:pPr lvl="1">
-              <a:lnSpc>
-                <a:spcPct val="90000"/>
-              </a:lnSpc>
-              <a:spcAft>
-                <a:spcPts val="300"/>
-              </a:spcAft>
-              <a:defRPr sz="1800"/>
-            </a:pPr>
-            <a:r>
-              <a:rPr sz="1300"/>
-              <a:t>    • Bir şifre çalınırsa diğerleri güvende</a:t>
-            </a:r>
-          </a:p>
-          <a:p>
-            <a:pPr>
-              <a:lnSpc>
-                <a:spcPct val="90000"/>
-              </a:lnSpc>
-              <a:spcAft>
-                <a:spcPts val="300"/>
-              </a:spcAft>
-              <a:defRPr sz="2000"/>
-            </a:pPr>
-          </a:p>
-          <a:p>
-            <a:pPr>
-              <a:lnSpc>
-                <a:spcPct val="90000"/>
-              </a:lnSpc>
-              <a:spcAft>
-                <a:spcPts val="300"/>
-              </a:spcAft>
-              <a:defRPr sz="2000"/>
-            </a:pPr>
-            <a:r>
-              <a:rPr sz="1300"/>
-              <a:t>📝 Şifreyi Kaydet:</a:t>
-            </a:r>
-          </a:p>
-          <a:p>
-            <a:pPr lvl="1">
-              <a:lnSpc>
-                <a:spcPct val="90000"/>
-              </a:lnSpc>
-              <a:spcAft>
-                <a:spcPts val="300"/>
-              </a:spcAft>
-              <a:defRPr sz="1800"/>
-            </a:pPr>
-            <a:r>
-              <a:rPr sz="1300"/>
-              <a:t>    • Unutacaksan güvenli yere yaz</a:t>
-            </a:r>
-          </a:p>
-          <a:p>
-            <a:pPr lvl="1">
-              <a:lnSpc>
-                <a:spcPct val="90000"/>
-              </a:lnSpc>
-              <a:spcAft>
-                <a:spcPts val="300"/>
-              </a:spcAft>
-              <a:defRPr sz="1800"/>
-            </a:pPr>
-            <a:r>
-              <a:rPr sz="1300"/>
-              <a:t>    • Ebeveynin bilsin</a:t>
-            </a:r>
-          </a:p>
-          <a:p>
-            <a:pPr>
-              <a:lnSpc>
-                <a:spcPct val="90000"/>
-              </a:lnSpc>
-              <a:spcAft>
-                <a:spcPts val="300"/>
-              </a:spcAft>
-              <a:defRPr sz="2000"/>
-            </a:pPr>
-          </a:p>
-          <a:p>
-            <a:pPr>
-              <a:lnSpc>
-                <a:spcPct val="90000"/>
-              </a:lnSpc>
-              <a:spcAft>
-                <a:spcPts val="300"/>
-              </a:spcAft>
-              <a:defRPr sz="2000"/>
-            </a:pPr>
-            <a:r>
-              <a:rPr sz="1300"/>
-              <a:t>🔄 Düzenli Değiştir:</a:t>
-            </a:r>
-          </a:p>
-          <a:p>
-            <a:pPr lvl="1">
-              <a:lnSpc>
-                <a:spcPct val="90000"/>
-              </a:lnSpc>
-              <a:spcAft>
-                <a:spcPts val="300"/>
-              </a:spcAft>
-              <a:defRPr sz="1800"/>
-            </a:pPr>
-            <a:r>
-              <a:rPr sz="1300"/>
-              <a:t>    • 3-6 ayda bir değiştir</a:t>
-            </a:r>
-          </a:p>
-          <a:p>
-            <a:pPr>
-              <a:lnSpc>
-                <a:spcPct val="90000"/>
-              </a:lnSpc>
-              <a:spcAft>
-                <a:spcPts val="300"/>
-              </a:spcAft>
-              <a:defRPr sz="2000"/>
-            </a:pPr>
-          </a:p>
-          <a:p>
-            <a:pPr>
-              <a:lnSpc>
-                <a:spcPct val="90000"/>
-              </a:lnSpc>
-              <a:spcAft>
-                <a:spcPts val="300"/>
-              </a:spcAft>
-              <a:defRPr sz="2000"/>
-            </a:pPr>
-            <a:r>
-              <a:rPr sz="1300"/>
-              <a:t>⚠️ Şüphe Duyarsan:</a:t>
-            </a:r>
-          </a:p>
-          <a:p>
-            <a:pPr lvl="1">
-              <a:lnSpc>
-                <a:spcPct val="90000"/>
-              </a:lnSpc>
-              <a:spcAft>
-                <a:spcPts val="300"/>
-              </a:spcAft>
-              <a:defRPr sz="1800"/>
-            </a:pPr>
-            <a:r>
-              <a:rPr sz="1300"/>
-              <a:t>    • Hemen değiştir</a:t>
-            </a:r>
-          </a:p>
-          <a:p>
-            <a:pPr lvl="1">
-              <a:lnSpc>
-                <a:spcPct val="90000"/>
-              </a:lnSpc>
-              <a:spcAft>
-                <a:spcPts val="300"/>
-              </a:spcAft>
-              <a:defRPr sz="1800"/>
-            </a:pPr>
-            <a:r>
-              <a:rPr sz="1300"/>
-              <a:t>    • Hesabını kontrol et</a:t>
-            </a:r>
-          </a:p>
-          <a:p>
-            <a:pPr>
-              <a:lnSpc>
-                <a:spcPct val="90000"/>
-              </a:lnSpc>
-              <a:spcAft>
-                <a:spcPts val="300"/>
-              </a:spcAft>
-              <a:defRPr sz="2000"/>
-            </a:pPr>
-          </a:p>
-          <a:p>
-            <a:pPr>
-              <a:lnSpc>
-                <a:spcPct val="90000"/>
-              </a:lnSpc>
-              <a:spcAft>
-                <a:spcPts val="300"/>
-              </a:spcAft>
-              <a:defRPr sz="2000" b="1"/>
-            </a:pPr>
-            <a:r>
-              <a:rPr sz="1300"/>
               <a:t>💡 Şifre = Ev anahtarın</a:t>
             </a:r>
           </a:p>
           <a:p>
             <a:pPr>
               <a:lnSpc>
-                <a:spcPct val="90000"/>
-              </a:lnSpc>
-              <a:spcAft>
-                <a:spcPts val="300"/>
+                <a:spcPct val="85000"/>
+              </a:lnSpc>
+              <a:spcBef>
+                <a:spcPts val="200"/>
+              </a:spcBef>
+              <a:spcAft>
+                <a:spcPts val="200"/>
               </a:spcAft>
               <a:defRPr sz="2000"/>
             </a:pPr>
@@ -11032,10 +11855,19 @@
         </p:nvSpPr>
         <p:spPr/>
         <p:txBody>
-          <a:bodyPr wrap="square"/>
+          <a:bodyPr wrap="square" tIns="25400" bIns="25400" lIns="63500" rIns="63500"/>
           <a:lstStyle/>
           <a:p>
             <a:pPr>
+              <a:lnSpc>
+                <a:spcPct val="85000"/>
+              </a:lnSpc>
+              <a:spcBef>
+                <a:spcPts val="200"/>
+              </a:spcBef>
+              <a:spcAft>
+                <a:spcPts val="200"/>
+              </a:spcAft>
               <a:defRPr sz="4000" b="1">
                 <a:solidFill>
                   <a:srgbClr val="667EEA"/>
@@ -11043,6 +11875,7 @@
               </a:defRPr>
             </a:pPr>
             <a:r>
+              <a:rPr/>
               <a:t>🎣 Phishing (Oltalama) Saldırıları</a:t>
             </a:r>
           </a:p>
@@ -11082,7 +11915,7 @@
           <a:noFill/>
         </p:spPr>
         <p:txBody>
-          <a:bodyPr wrap="square">
+          <a:bodyPr wrap="square" tIns="25400" bIns="25400" lIns="63500" rIns="63500">
             <a:spAutoFit/>
           </a:bodyPr>
           <a:lstStyle/>
@@ -11099,10 +11932,13 @@
           <a:p>
             <a:pPr>
               <a:lnSpc>
-                <a:spcPct val="90000"/>
-              </a:lnSpc>
-              <a:spcAft>
-                <a:spcPts val="300"/>
+                <a:spcPct val="85000"/>
+              </a:lnSpc>
+              <a:spcBef>
+                <a:spcPts val="200"/>
+              </a:spcBef>
+              <a:spcAft>
+                <a:spcPts val="200"/>
               </a:spcAft>
               <a:defRPr sz="2000"/>
             </a:pPr>
@@ -11114,10 +11950,13 @@
           <a:p>
             <a:pPr>
               <a:lnSpc>
-                <a:spcPct val="90000"/>
-              </a:lnSpc>
-              <a:spcAft>
-                <a:spcPts val="300"/>
+                <a:spcPct val="85000"/>
+              </a:lnSpc>
+              <a:spcBef>
+                <a:spcPts val="200"/>
+              </a:spcBef>
+              <a:spcAft>
+                <a:spcPts val="200"/>
               </a:spcAft>
               <a:defRPr sz="2000"/>
             </a:pPr>
@@ -11140,10 +11979,13 @@
           <a:p>
             <a:pPr>
               <a:lnSpc>
-                <a:spcPct val="90000"/>
-              </a:lnSpc>
-              <a:spcAft>
-                <a:spcPts val="300"/>
+                <a:spcPct val="85000"/>
+              </a:lnSpc>
+              <a:spcBef>
+                <a:spcPts val="200"/>
+              </a:spcBef>
+              <a:spcAft>
+                <a:spcPts val="200"/>
               </a:spcAft>
               <a:defRPr sz="2000" b="1"/>
             </a:pPr>
@@ -11166,10 +12008,13 @@
           <a:p>
             <a:pPr>
               <a:lnSpc>
-                <a:spcPct val="90000"/>
-              </a:lnSpc>
-              <a:spcAft>
-                <a:spcPts val="300"/>
+                <a:spcPct val="85000"/>
+              </a:lnSpc>
+              <a:spcBef>
+                <a:spcPts val="200"/>
+              </a:spcBef>
+              <a:spcAft>
+                <a:spcPts val="200"/>
               </a:spcAft>
               <a:defRPr sz="2000"/>
             </a:pPr>
@@ -11181,10 +12026,13 @@
           <a:p>
             <a:pPr lvl="1">
               <a:lnSpc>
-                <a:spcPct val="90000"/>
-              </a:lnSpc>
-              <a:spcAft>
-                <a:spcPts val="300"/>
+                <a:spcPct val="85000"/>
+              </a:lnSpc>
+              <a:spcBef>
+                <a:spcPts val="200"/>
+              </a:spcBef>
+              <a:spcAft>
+                <a:spcPts val="200"/>
               </a:spcAft>
               <a:defRPr sz="1800"/>
             </a:pPr>
@@ -11196,10 +12044,13 @@
           <a:p>
             <a:pPr lvl="1">
               <a:lnSpc>
-                <a:spcPct val="90000"/>
-              </a:lnSpc>
-              <a:spcAft>
-                <a:spcPts val="300"/>
+                <a:spcPct val="85000"/>
+              </a:lnSpc>
+              <a:spcBef>
+                <a:spcPts val="200"/>
+              </a:spcBef>
+              <a:spcAft>
+                <a:spcPts val="200"/>
               </a:spcAft>
               <a:defRPr sz="1800"/>
             </a:pPr>
@@ -11222,10 +12073,13 @@
           <a:p>
             <a:pPr>
               <a:lnSpc>
-                <a:spcPct val="90000"/>
-              </a:lnSpc>
-              <a:spcAft>
-                <a:spcPts val="300"/>
+                <a:spcPct val="85000"/>
+              </a:lnSpc>
+              <a:spcBef>
+                <a:spcPts val="200"/>
+              </a:spcBef>
+              <a:spcAft>
+                <a:spcPts val="200"/>
               </a:spcAft>
               <a:defRPr sz="2000"/>
             </a:pPr>
@@ -11237,10 +12091,13 @@
           <a:p>
             <a:pPr lvl="1">
               <a:lnSpc>
-                <a:spcPct val="90000"/>
-              </a:lnSpc>
-              <a:spcAft>
-                <a:spcPts val="300"/>
+                <a:spcPct val="85000"/>
+              </a:lnSpc>
+              <a:spcBef>
+                <a:spcPts val="200"/>
+              </a:spcBef>
+              <a:spcAft>
+                <a:spcPts val="200"/>
               </a:spcAft>
               <a:defRPr sz="1800"/>
             </a:pPr>
@@ -11263,10 +12120,13 @@
           <a:p>
             <a:pPr>
               <a:lnSpc>
-                <a:spcPct val="90000"/>
-              </a:lnSpc>
-              <a:spcAft>
-                <a:spcPts val="300"/>
+                <a:spcPct val="85000"/>
+              </a:lnSpc>
+              <a:spcBef>
+                <a:spcPts val="200"/>
+              </a:spcBef>
+              <a:spcAft>
+                <a:spcPts val="200"/>
               </a:spcAft>
               <a:defRPr sz="2000"/>
             </a:pPr>
@@ -11278,10 +12138,13 @@
           <a:p>
             <a:pPr lvl="1">
               <a:lnSpc>
-                <a:spcPct val="90000"/>
-              </a:lnSpc>
-              <a:spcAft>
-                <a:spcPts val="300"/>
+                <a:spcPct val="85000"/>
+              </a:lnSpc>
+              <a:spcBef>
+                <a:spcPts val="200"/>
+              </a:spcBef>
+              <a:spcAft>
+                <a:spcPts val="200"/>
               </a:spcAft>
               <a:defRPr sz="1800"/>
             </a:pPr>
@@ -11293,10 +12156,13 @@
           <a:p>
             <a:pPr lvl="1">
               <a:lnSpc>
-                <a:spcPct val="90000"/>
-              </a:lnSpc>
-              <a:spcAft>
-                <a:spcPts val="300"/>
+                <a:spcPct val="85000"/>
+              </a:lnSpc>
+              <a:spcBef>
+                <a:spcPts val="200"/>
+              </a:spcBef>
+              <a:spcAft>
+                <a:spcPts val="200"/>
               </a:spcAft>
               <a:defRPr sz="1800"/>
             </a:pPr>
@@ -11319,10 +12185,13 @@
           <a:p>
             <a:pPr>
               <a:lnSpc>
-                <a:spcPct val="90000"/>
-              </a:lnSpc>
-              <a:spcAft>
-                <a:spcPts val="300"/>
+                <a:spcPct val="85000"/>
+              </a:lnSpc>
+              <a:spcBef>
+                <a:spcPts val="200"/>
+              </a:spcBef>
+              <a:spcAft>
+                <a:spcPts val="200"/>
               </a:spcAft>
               <a:defRPr sz="2000" b="1"/>
             </a:pPr>
@@ -11334,10 +12203,13 @@
           <a:p>
             <a:pPr lvl="1">
               <a:lnSpc>
-                <a:spcPct val="90000"/>
-              </a:lnSpc>
-              <a:spcAft>
-                <a:spcPts val="300"/>
+                <a:spcPct val="85000"/>
+              </a:lnSpc>
+              <a:spcBef>
+                <a:spcPts val="200"/>
+              </a:spcBef>
+              <a:spcAft>
+                <a:spcPts val="200"/>
               </a:spcAft>
               <a:defRPr sz="1800"/>
             </a:pPr>
@@ -11349,10 +12221,13 @@
           <a:p>
             <a:pPr lvl="1">
               <a:lnSpc>
-                <a:spcPct val="90000"/>
-              </a:lnSpc>
-              <a:spcAft>
-                <a:spcPts val="300"/>
+                <a:spcPct val="85000"/>
+              </a:lnSpc>
+              <a:spcBef>
+                <a:spcPts val="200"/>
+              </a:spcBef>
+              <a:spcAft>
+                <a:spcPts val="200"/>
               </a:spcAft>
               <a:defRPr sz="1800"/>
             </a:pPr>
@@ -11364,10 +12239,13 @@
           <a:p>
             <a:pPr lvl="1">
               <a:lnSpc>
-                <a:spcPct val="90000"/>
-              </a:lnSpc>
-              <a:spcAft>
-                <a:spcPts val="300"/>
+                <a:spcPct val="85000"/>
+              </a:lnSpc>
+              <a:spcBef>
+                <a:spcPts val="200"/>
+              </a:spcBef>
+              <a:spcAft>
+                <a:spcPts val="200"/>
               </a:spcAft>
               <a:defRPr sz="1800"/>
             </a:pPr>
@@ -11379,10 +12257,13 @@
           <a:p>
             <a:pPr lvl="1">
               <a:lnSpc>
-                <a:spcPct val="90000"/>
-              </a:lnSpc>
-              <a:spcAft>
-                <a:spcPts val="300"/>
+                <a:spcPct val="85000"/>
+              </a:lnSpc>
+              <a:spcBef>
+                <a:spcPts val="200"/>
+              </a:spcBef>
+              <a:spcAft>
+                <a:spcPts val="200"/>
               </a:spcAft>
               <a:defRPr sz="1800"/>
             </a:pPr>
@@ -11394,10 +12275,13 @@
           <a:p>
             <a:pPr lvl="1">
               <a:lnSpc>
-                <a:spcPct val="90000"/>
-              </a:lnSpc>
-              <a:spcAft>
-                <a:spcPts val="300"/>
+                <a:spcPct val="85000"/>
+              </a:lnSpc>
+              <a:spcBef>
+                <a:spcPts val="200"/>
+              </a:spcBef>
+              <a:spcAft>
+                <a:spcPts val="200"/>
               </a:spcAft>
               <a:defRPr sz="1800"/>
             </a:pPr>
@@ -11420,10 +12304,13 @@
           <a:p>
             <a:pPr>
               <a:lnSpc>
-                <a:spcPct val="90000"/>
-              </a:lnSpc>
-              <a:spcAft>
-                <a:spcPts val="300"/>
+                <a:spcPct val="85000"/>
+              </a:lnSpc>
+              <a:spcBef>
+                <a:spcPts val="200"/>
+              </a:spcBef>
+              <a:spcAft>
+                <a:spcPts val="200"/>
               </a:spcAft>
               <a:defRPr sz="2000" b="1"/>
             </a:pPr>
@@ -11435,10 +12322,13 @@
           <a:p>
             <a:pPr lvl="1">
               <a:lnSpc>
-                <a:spcPct val="90000"/>
-              </a:lnSpc>
-              <a:spcAft>
-                <a:spcPts val="300"/>
+                <a:spcPct val="85000"/>
+              </a:lnSpc>
+              <a:spcBef>
+                <a:spcPts val="200"/>
+              </a:spcBef>
+              <a:spcAft>
+                <a:spcPts val="200"/>
               </a:spcAft>
               <a:defRPr sz="1800"/>
             </a:pPr>
@@ -11450,10 +12340,13 @@
           <a:p>
             <a:pPr lvl="1">
               <a:lnSpc>
-                <a:spcPct val="90000"/>
-              </a:lnSpc>
-              <a:spcAft>
-                <a:spcPts val="300"/>
+                <a:spcPct val="85000"/>
+              </a:lnSpc>
+              <a:spcBef>
+                <a:spcPts val="200"/>
+              </a:spcBef>
+              <a:spcAft>
+                <a:spcPts val="200"/>
               </a:spcAft>
               <a:defRPr sz="1800"/>
             </a:pPr>
@@ -11465,10 +12358,13 @@
           <a:p>
             <a:pPr lvl="1">
               <a:lnSpc>
-                <a:spcPct val="90000"/>
-              </a:lnSpc>
-              <a:spcAft>
-                <a:spcPts val="300"/>
+                <a:spcPct val="85000"/>
+              </a:lnSpc>
+              <a:spcBef>
+                <a:spcPts val="200"/>
+              </a:spcBef>
+              <a:spcAft>
+                <a:spcPts val="200"/>
               </a:spcAft>
               <a:defRPr sz="1800"/>
             </a:pPr>
@@ -11509,10 +12405,19 @@
         </p:nvSpPr>
         <p:spPr/>
         <p:txBody>
-          <a:bodyPr wrap="square"/>
+          <a:bodyPr wrap="square" tIns="25400" bIns="25400" lIns="63500" rIns="63500"/>
           <a:lstStyle/>
           <a:p>
             <a:pPr>
+              <a:lnSpc>
+                <a:spcPct val="85000"/>
+              </a:lnSpc>
+              <a:spcBef>
+                <a:spcPts val="200"/>
+              </a:spcBef>
+              <a:spcAft>
+                <a:spcPts val="200"/>
+              </a:spcAft>
               <a:defRPr sz="4000" b="1">
                 <a:solidFill>
                   <a:srgbClr val="667EEA"/>
@@ -11520,6 +12425,7 @@
               </a:defRPr>
             </a:pPr>
             <a:r>
+              <a:rPr/>
               <a:t>🦠 Zararlı Yazılımlar</a:t>
             </a:r>
           </a:p>
@@ -11559,7 +12465,7 @@
           <a:noFill/>
         </p:spPr>
         <p:txBody>
-          <a:bodyPr wrap="square">
+          <a:bodyPr wrap="square" tIns="25400" bIns="25400" lIns="63500" rIns="63500">
             <a:spAutoFit/>
           </a:bodyPr>
           <a:lstStyle/>
@@ -11576,6 +12482,24 @@
           <a:p>
             <a:pPr>
               <a:lnSpc>
+                <a:spcPct val="85000"/>
+              </a:lnSpc>
+              <a:spcBef>
+                <a:spcPts val="200"/>
+              </a:spcBef>
+              <a:spcAft>
+                <a:spcPts val="200"/>
+              </a:spcAft>
+              <a:defRPr sz="2000"/>
+            </a:pPr>
+            <a:r>
+              <a:rPr sz="1300"/>
+              <a:t>Zararlı yazılım = Bilgisayara/telefona zarar veren programlar</a:t>
+            </a:r>
+          </a:p>
+          <a:p>
+            <a:pPr>
+              <a:lnSpc>
                 <a:spcPct val="90000"/>
               </a:lnSpc>
               <a:spcAft>
@@ -11583,9 +12507,23 @@
               </a:spcAft>
               <a:defRPr sz="2000"/>
             </a:pPr>
-            <a:r>
-              <a:rPr sz="1300"/>
-              <a:t>Zararlı yazılım = Bilgisayara/telefona zarar veren programlar</a:t>
+          </a:p>
+          <a:p>
+            <a:pPr>
+              <a:lnSpc>
+                <a:spcPct val="85000"/>
+              </a:lnSpc>
+              <a:spcBef>
+                <a:spcPts val="200"/>
+              </a:spcBef>
+              <a:spcAft>
+                <a:spcPts val="200"/>
+              </a:spcAft>
+              <a:defRPr sz="2000" b="1"/>
+            </a:pPr>
+            <a:r>
+              <a:rPr sz="1300"/>
+              <a:t>✅ Zararlı Yazılım Türleri:</a:t>
             </a:r>
           </a:p>
           <a:p>
@@ -11602,16 +12540,369 @@
           <a:p>
             <a:pPr>
               <a:lnSpc>
+                <a:spcPct val="85000"/>
+              </a:lnSpc>
+              <a:spcBef>
+                <a:spcPts val="200"/>
+              </a:spcBef>
+              <a:spcAft>
+                <a:spcPts val="200"/>
+              </a:spcAft>
+              <a:defRPr sz="2000"/>
+            </a:pPr>
+            <a:r>
+              <a:rPr sz="1300"/>
+              <a:t>🦠 Virüs:</a:t>
+            </a:r>
+          </a:p>
+          <a:p>
+            <a:pPr lvl="1">
+              <a:lnSpc>
+                <a:spcPct val="85000"/>
+              </a:lnSpc>
+              <a:spcBef>
+                <a:spcPts val="200"/>
+              </a:spcBef>
+              <a:spcAft>
+                <a:spcPts val="200"/>
+              </a:spcAft>
+              <a:defRPr sz="1800"/>
+            </a:pPr>
+            <a:r>
+              <a:rPr sz="1300"/>
+              <a:t>    • Kendini kopyalar</a:t>
+            </a:r>
+          </a:p>
+          <a:p>
+            <a:pPr lvl="1">
+              <a:lnSpc>
+                <a:spcPct val="85000"/>
+              </a:lnSpc>
+              <a:spcBef>
+                <a:spcPts val="200"/>
+              </a:spcBef>
+              <a:spcAft>
+                <a:spcPts val="200"/>
+              </a:spcAft>
+              <a:defRPr sz="1800"/>
+            </a:pPr>
+            <a:r>
+              <a:rPr sz="1300"/>
+              <a:t>    • Dosyalara bulaşır</a:t>
+            </a:r>
+          </a:p>
+          <a:p>
+            <a:pPr lvl="1">
+              <a:lnSpc>
+                <a:spcPct val="85000"/>
+              </a:lnSpc>
+              <a:spcBef>
+                <a:spcPts val="200"/>
+              </a:spcBef>
+              <a:spcAft>
+                <a:spcPts val="200"/>
+              </a:spcAft>
+              <a:defRPr sz="1800"/>
+            </a:pPr>
+            <a:r>
+              <a:rPr sz="1300"/>
+              <a:t>    • Sistem yavaşlar</a:t>
+            </a:r>
+          </a:p>
+          <a:p>
+            <a:pPr>
+              <a:lnSpc>
                 <a:spcPct val="90000"/>
               </a:lnSpc>
               <a:spcAft>
                 <a:spcPts val="300"/>
               </a:spcAft>
+              <a:defRPr sz="2000"/>
+            </a:pPr>
+          </a:p>
+          <a:p>
+            <a:pPr>
+              <a:lnSpc>
+                <a:spcPct val="85000"/>
+              </a:lnSpc>
+              <a:spcBef>
+                <a:spcPts val="200"/>
+              </a:spcBef>
+              <a:spcAft>
+                <a:spcPts val="200"/>
+              </a:spcAft>
+              <a:defRPr sz="2000"/>
+            </a:pPr>
+            <a:r>
+              <a:rPr sz="1300"/>
+              <a:t>🐴 Truva Atı (Trojan):</a:t>
+            </a:r>
+          </a:p>
+          <a:p>
+            <a:pPr lvl="1">
+              <a:lnSpc>
+                <a:spcPct val="85000"/>
+              </a:lnSpc>
+              <a:spcBef>
+                <a:spcPts val="200"/>
+              </a:spcBef>
+              <a:spcAft>
+                <a:spcPts val="200"/>
+              </a:spcAft>
+              <a:defRPr sz="1800"/>
+            </a:pPr>
+            <a:r>
+              <a:rPr sz="1300"/>
+              <a:t>    • Masum görünür (oyun, program)</a:t>
+            </a:r>
+          </a:p>
+          <a:p>
+            <a:pPr lvl="1">
+              <a:lnSpc>
+                <a:spcPct val="85000"/>
+              </a:lnSpc>
+              <a:spcBef>
+                <a:spcPts val="200"/>
+              </a:spcBef>
+              <a:spcAft>
+                <a:spcPts val="200"/>
+              </a:spcAft>
+              <a:defRPr sz="1800"/>
+            </a:pPr>
+            <a:r>
+              <a:rPr sz="1300"/>
+              <a:t>    • Aslında zararlı</a:t>
+            </a:r>
+          </a:p>
+          <a:p>
+            <a:pPr>
+              <a:lnSpc>
+                <a:spcPct val="90000"/>
+              </a:lnSpc>
+              <a:spcAft>
+                <a:spcPts val="300"/>
+              </a:spcAft>
+              <a:defRPr sz="2000"/>
+            </a:pPr>
+          </a:p>
+          <a:p>
+            <a:pPr>
+              <a:lnSpc>
+                <a:spcPct val="85000"/>
+              </a:lnSpc>
+              <a:spcBef>
+                <a:spcPts val="200"/>
+              </a:spcBef>
+              <a:spcAft>
+                <a:spcPts val="200"/>
+              </a:spcAft>
+              <a:defRPr sz="2000"/>
+            </a:pPr>
+            <a:r>
+              <a:rPr sz="1300"/>
+              <a:t>🔒 Fidye Yazılımı (Ransomware):</a:t>
+            </a:r>
+          </a:p>
+          <a:p>
+            <a:pPr lvl="1">
+              <a:lnSpc>
+                <a:spcPct val="85000"/>
+              </a:lnSpc>
+              <a:spcBef>
+                <a:spcPts val="200"/>
+              </a:spcBef>
+              <a:spcAft>
+                <a:spcPts val="200"/>
+              </a:spcAft>
+              <a:defRPr sz="1800"/>
+            </a:pPr>
+            <a:r>
+              <a:rPr sz="1300"/>
+              <a:t>    • Dosyalarını kilitler</a:t>
+            </a:r>
+          </a:p>
+          <a:p>
+            <a:pPr lvl="1">
+              <a:lnSpc>
+                <a:spcPct val="85000"/>
+              </a:lnSpc>
+              <a:spcBef>
+                <a:spcPts val="200"/>
+              </a:spcBef>
+              <a:spcAft>
+                <a:spcPts val="200"/>
+              </a:spcAft>
+              <a:defRPr sz="1800"/>
+            </a:pPr>
+            <a:r>
+              <a:rPr sz="1300"/>
+              <a:t>    • Para ister</a:t>
+            </a:r>
+          </a:p>
+          <a:p>
+            <a:pPr>
+              <a:lnSpc>
+                <a:spcPct val="90000"/>
+              </a:lnSpc>
+              <a:spcAft>
+                <a:spcPts val="300"/>
+              </a:spcAft>
+              <a:defRPr sz="2000"/>
+            </a:pPr>
+          </a:p>
+          <a:p>
+            <a:pPr>
+              <a:lnSpc>
+                <a:spcPct val="85000"/>
+              </a:lnSpc>
+              <a:spcBef>
+                <a:spcPts val="200"/>
+              </a:spcBef>
+              <a:spcAft>
+                <a:spcPts val="200"/>
+              </a:spcAft>
+              <a:defRPr sz="2000"/>
+            </a:pPr>
+            <a:r>
+              <a:rPr sz="1300"/>
+              <a:t>🕵️ Casus Yazılım (Spyware):</a:t>
+            </a:r>
+          </a:p>
+          <a:p>
+            <a:pPr lvl="1">
+              <a:lnSpc>
+                <a:spcPct val="85000"/>
+              </a:lnSpc>
+              <a:spcBef>
+                <a:spcPts val="200"/>
+              </a:spcBef>
+              <a:spcAft>
+                <a:spcPts val="200"/>
+              </a:spcAft>
+              <a:defRPr sz="1800"/>
+            </a:pPr>
+            <a:r>
+              <a:rPr sz="1300"/>
+              <a:t>    • Yaptıklarını izler</a:t>
+            </a:r>
+          </a:p>
+          <a:p>
+            <a:pPr lvl="1">
+              <a:lnSpc>
+                <a:spcPct val="85000"/>
+              </a:lnSpc>
+              <a:spcBef>
+                <a:spcPts val="200"/>
+              </a:spcBef>
+              <a:spcAft>
+                <a:spcPts val="200"/>
+              </a:spcAft>
+              <a:defRPr sz="1800"/>
+            </a:pPr>
+            <a:r>
+              <a:rPr sz="1300"/>
+              <a:t>    • Bilgi çalar</a:t>
+            </a:r>
+          </a:p>
+          <a:p>
+            <a:pPr>
+              <a:lnSpc>
+                <a:spcPct val="90000"/>
+              </a:lnSpc>
+              <a:spcAft>
+                <a:spcPts val="300"/>
+              </a:spcAft>
+              <a:defRPr sz="2000"/>
+            </a:pPr>
+          </a:p>
+          <a:p>
+            <a:pPr>
+              <a:lnSpc>
+                <a:spcPct val="85000"/>
+              </a:lnSpc>
+              <a:spcBef>
+                <a:spcPts val="200"/>
+              </a:spcBef>
+              <a:spcAft>
+                <a:spcPts val="200"/>
+              </a:spcAft>
               <a:defRPr sz="2000" b="1"/>
             </a:pPr>
             <a:r>
               <a:rPr sz="1300"/>
-              <a:t>✅ Zararlı Yazılım Türleri:</a:t>
+              <a:t>📌 Bulaşma Yolları:</a:t>
+            </a:r>
+          </a:p>
+          <a:p>
+            <a:pPr lvl="1">
+              <a:lnSpc>
+                <a:spcPct val="85000"/>
+              </a:lnSpc>
+              <a:spcBef>
+                <a:spcPts val="200"/>
+              </a:spcBef>
+              <a:spcAft>
+                <a:spcPts val="200"/>
+              </a:spcAft>
+              <a:defRPr sz="1800"/>
+            </a:pPr>
+            <a:r>
+              <a:rPr sz="1300"/>
+              <a:t>    • Bilinmeyen sitelerdeki indirmeler</a:t>
+            </a:r>
+          </a:p>
+          <a:p>
+            <a:pPr lvl="1">
+              <a:lnSpc>
+                <a:spcPct val="85000"/>
+              </a:lnSpc>
+              <a:spcBef>
+                <a:spcPts val="200"/>
+              </a:spcBef>
+              <a:spcAft>
+                <a:spcPts val="200"/>
+              </a:spcAft>
+              <a:defRPr sz="1800"/>
+            </a:pPr>
+            <a:r>
+              <a:rPr sz="1300"/>
+              <a:t>    • E-posta ekleri</a:t>
+            </a:r>
+          </a:p>
+          <a:p>
+            <a:pPr lvl="1">
+              <a:lnSpc>
+                <a:spcPct val="85000"/>
+              </a:lnSpc>
+              <a:spcBef>
+                <a:spcPts val="200"/>
+              </a:spcBef>
+              <a:spcAft>
+                <a:spcPts val="200"/>
+              </a:spcAft>
+              <a:defRPr sz="1800"/>
+            </a:pPr>
+            <a:r>
+              <a:rPr sz="1300"/>
+              <a:t>    • Korsan programlar</a:t>
+            </a:r>
+          </a:p>
+          <a:p>
+            <a:pPr lvl="1">
+              <a:lnSpc>
+                <a:spcPct val="85000"/>
+              </a:lnSpc>
+              <a:spcBef>
+                <a:spcPts val="200"/>
+              </a:spcBef>
+              <a:spcAft>
+                <a:spcPts val="200"/>
+              </a:spcAft>
+              <a:defRPr sz="1800"/>
+            </a:pPr>
+            <a:r>
+              <a:rPr sz="1300"/>
+              <a:t>    • USB bellekler</a:t>
             </a:r>
           </a:p>
           <a:p>
@@ -11628,335 +12919,13 @@
           <a:p>
             <a:pPr>
               <a:lnSpc>
-                <a:spcPct val="90000"/>
-              </a:lnSpc>
-              <a:spcAft>
-                <a:spcPts val="300"/>
-              </a:spcAft>
-              <a:defRPr sz="2000"/>
-            </a:pPr>
-            <a:r>
-              <a:rPr sz="1300"/>
-              <a:t>🦠 Virüs:</a:t>
-            </a:r>
-          </a:p>
-          <a:p>
-            <a:pPr lvl="1">
-              <a:lnSpc>
-                <a:spcPct val="90000"/>
-              </a:lnSpc>
-              <a:spcAft>
-                <a:spcPts val="300"/>
-              </a:spcAft>
-              <a:defRPr sz="1800"/>
-            </a:pPr>
-            <a:r>
-              <a:rPr sz="1300"/>
-              <a:t>    • Kendini kopyalar</a:t>
-            </a:r>
-          </a:p>
-          <a:p>
-            <a:pPr lvl="1">
-              <a:lnSpc>
-                <a:spcPct val="90000"/>
-              </a:lnSpc>
-              <a:spcAft>
-                <a:spcPts val="300"/>
-              </a:spcAft>
-              <a:defRPr sz="1800"/>
-            </a:pPr>
-            <a:r>
-              <a:rPr sz="1300"/>
-              <a:t>    • Dosyalara bulaşır</a:t>
-            </a:r>
-          </a:p>
-          <a:p>
-            <a:pPr lvl="1">
-              <a:lnSpc>
-                <a:spcPct val="90000"/>
-              </a:lnSpc>
-              <a:spcAft>
-                <a:spcPts val="300"/>
-              </a:spcAft>
-              <a:defRPr sz="1800"/>
-            </a:pPr>
-            <a:r>
-              <a:rPr sz="1300"/>
-              <a:t>    • Sistem yavaşlar</a:t>
-            </a:r>
-          </a:p>
-          <a:p>
-            <a:pPr>
-              <a:lnSpc>
-                <a:spcPct val="90000"/>
-              </a:lnSpc>
-              <a:spcAft>
-                <a:spcPts val="300"/>
-              </a:spcAft>
-              <a:defRPr sz="2000"/>
-            </a:pPr>
-          </a:p>
-          <a:p>
-            <a:pPr>
-              <a:lnSpc>
-                <a:spcPct val="90000"/>
-              </a:lnSpc>
-              <a:spcAft>
-                <a:spcPts val="300"/>
-              </a:spcAft>
-              <a:defRPr sz="2000"/>
-            </a:pPr>
-            <a:r>
-              <a:rPr sz="1300"/>
-              <a:t>🐴 Truva Atı (Trojan):</a:t>
-            </a:r>
-          </a:p>
-          <a:p>
-            <a:pPr lvl="1">
-              <a:lnSpc>
-                <a:spcPct val="90000"/>
-              </a:lnSpc>
-              <a:spcAft>
-                <a:spcPts val="300"/>
-              </a:spcAft>
-              <a:defRPr sz="1800"/>
-            </a:pPr>
-            <a:r>
-              <a:rPr sz="1300"/>
-              <a:t>    • Masum görünür (oyun, program)</a:t>
-            </a:r>
-          </a:p>
-          <a:p>
-            <a:pPr lvl="1">
-              <a:lnSpc>
-                <a:spcPct val="90000"/>
-              </a:lnSpc>
-              <a:spcAft>
-                <a:spcPts val="300"/>
-              </a:spcAft>
-              <a:defRPr sz="1800"/>
-            </a:pPr>
-            <a:r>
-              <a:rPr sz="1300"/>
-              <a:t>    • Aslında zararlı</a:t>
-            </a:r>
-          </a:p>
-          <a:p>
-            <a:pPr>
-              <a:lnSpc>
-                <a:spcPct val="90000"/>
-              </a:lnSpc>
-              <a:spcAft>
-                <a:spcPts val="300"/>
-              </a:spcAft>
-              <a:defRPr sz="2000"/>
-            </a:pPr>
-          </a:p>
-          <a:p>
-            <a:pPr>
-              <a:lnSpc>
-                <a:spcPct val="90000"/>
-              </a:lnSpc>
-              <a:spcAft>
-                <a:spcPts val="300"/>
-              </a:spcAft>
-              <a:defRPr sz="2000"/>
-            </a:pPr>
-            <a:r>
-              <a:rPr sz="1300"/>
-              <a:t>🔒 Fidye Yazılımı (Ransomware):</a:t>
-            </a:r>
-          </a:p>
-          <a:p>
-            <a:pPr lvl="1">
-              <a:lnSpc>
-                <a:spcPct val="90000"/>
-              </a:lnSpc>
-              <a:spcAft>
-                <a:spcPts val="300"/>
-              </a:spcAft>
-              <a:defRPr sz="1800"/>
-            </a:pPr>
-            <a:r>
-              <a:rPr sz="1300"/>
-              <a:t>    • Dosyalarını kilitler</a:t>
-            </a:r>
-          </a:p>
-          <a:p>
-            <a:pPr lvl="1">
-              <a:lnSpc>
-                <a:spcPct val="90000"/>
-              </a:lnSpc>
-              <a:spcAft>
-                <a:spcPts val="300"/>
-              </a:spcAft>
-              <a:defRPr sz="1800"/>
-            </a:pPr>
-            <a:r>
-              <a:rPr sz="1300"/>
-              <a:t>    • Para ister</a:t>
-            </a:r>
-          </a:p>
-          <a:p>
-            <a:pPr>
-              <a:lnSpc>
-                <a:spcPct val="90000"/>
-              </a:lnSpc>
-              <a:spcAft>
-                <a:spcPts val="300"/>
-              </a:spcAft>
-              <a:defRPr sz="2000"/>
-            </a:pPr>
-          </a:p>
-          <a:p>
-            <a:pPr>
-              <a:lnSpc>
-                <a:spcPct val="90000"/>
-              </a:lnSpc>
-              <a:spcAft>
-                <a:spcPts val="300"/>
-              </a:spcAft>
-              <a:defRPr sz="2000"/>
-            </a:pPr>
-            <a:r>
-              <a:rPr sz="1300"/>
-              <a:t>🕵️ Casus Yazılım (Spyware):</a:t>
-            </a:r>
-          </a:p>
-          <a:p>
-            <a:pPr lvl="1">
-              <a:lnSpc>
-                <a:spcPct val="90000"/>
-              </a:lnSpc>
-              <a:spcAft>
-                <a:spcPts val="300"/>
-              </a:spcAft>
-              <a:defRPr sz="1800"/>
-            </a:pPr>
-            <a:r>
-              <a:rPr sz="1300"/>
-              <a:t>    • Yaptıklarını izler</a:t>
-            </a:r>
-          </a:p>
-          <a:p>
-            <a:pPr lvl="1">
-              <a:lnSpc>
-                <a:spcPct val="90000"/>
-              </a:lnSpc>
-              <a:spcAft>
-                <a:spcPts val="300"/>
-              </a:spcAft>
-              <a:defRPr sz="1800"/>
-            </a:pPr>
-            <a:r>
-              <a:rPr sz="1300"/>
-              <a:t>    • Bilgi çalar</a:t>
-            </a:r>
-          </a:p>
-          <a:p>
-            <a:pPr>
-              <a:lnSpc>
-                <a:spcPct val="90000"/>
-              </a:lnSpc>
-              <a:spcAft>
-                <a:spcPts val="300"/>
-              </a:spcAft>
-              <a:defRPr sz="2000"/>
-            </a:pPr>
-          </a:p>
-          <a:p>
-            <a:pPr>
-              <a:lnSpc>
-                <a:spcPct val="90000"/>
-              </a:lnSpc>
-              <a:spcAft>
-                <a:spcPts val="300"/>
-              </a:spcAft>
-              <a:defRPr sz="2000" b="1"/>
-            </a:pPr>
-            <a:r>
-              <a:rPr sz="1300"/>
-              <a:t>📌 Bulaşma Yolları:</a:t>
-            </a:r>
-          </a:p>
-          <a:p>
-            <a:pPr lvl="1">
-              <a:lnSpc>
-                <a:spcPct val="90000"/>
-              </a:lnSpc>
-              <a:spcAft>
-                <a:spcPts val="300"/>
-              </a:spcAft>
-              <a:defRPr sz="1800"/>
-            </a:pPr>
-            <a:r>
-              <a:rPr sz="1300"/>
-              <a:t>    • Bilinmeyen sitelerdeki indirmeler</a:t>
-            </a:r>
-          </a:p>
-          <a:p>
-            <a:pPr lvl="1">
-              <a:lnSpc>
-                <a:spcPct val="90000"/>
-              </a:lnSpc>
-              <a:spcAft>
-                <a:spcPts val="300"/>
-              </a:spcAft>
-              <a:defRPr sz="1800"/>
-            </a:pPr>
-            <a:r>
-              <a:rPr sz="1300"/>
-              <a:t>    • E-posta ekleri</a:t>
-            </a:r>
-          </a:p>
-          <a:p>
-            <a:pPr lvl="1">
-              <a:lnSpc>
-                <a:spcPct val="90000"/>
-              </a:lnSpc>
-              <a:spcAft>
-                <a:spcPts val="300"/>
-              </a:spcAft>
-              <a:defRPr sz="1800"/>
-            </a:pPr>
-            <a:r>
-              <a:rPr sz="1300"/>
-              <a:t>    • Korsan programlar</a:t>
-            </a:r>
-          </a:p>
-          <a:p>
-            <a:pPr lvl="1">
-              <a:lnSpc>
-                <a:spcPct val="90000"/>
-              </a:lnSpc>
-              <a:spcAft>
-                <a:spcPts val="300"/>
-              </a:spcAft>
-              <a:defRPr sz="1800"/>
-            </a:pPr>
-            <a:r>
-              <a:rPr sz="1300"/>
-              <a:t>    • USB bellekler</a:t>
-            </a:r>
-          </a:p>
-          <a:p>
-            <a:pPr>
-              <a:lnSpc>
-                <a:spcPct val="90000"/>
-              </a:lnSpc>
-              <a:spcAft>
-                <a:spcPts val="300"/>
-              </a:spcAft>
-              <a:defRPr sz="2000"/>
-            </a:pPr>
-          </a:p>
-          <a:p>
-            <a:pPr>
-              <a:lnSpc>
-                <a:spcPct val="90000"/>
-              </a:lnSpc>
-              <a:spcAft>
-                <a:spcPts val="300"/>
+                <a:spcPct val="85000"/>
+              </a:lnSpc>
+              <a:spcBef>
+                <a:spcPts val="200"/>
+              </a:spcBef>
+              <a:spcAft>
+                <a:spcPts val="200"/>
               </a:spcAft>
               <a:defRPr sz="2000" b="1"/>
             </a:pPr>
